--- a/02-Planning-and-Control/Proposal/Proposal-Presentation/Version-History/First Draft Powerpoint.pptx
+++ b/02-Planning-and-Control/Proposal/Proposal-Presentation/Version-History/First Draft Powerpoint.pptx
@@ -5,26 +5,20 @@
     <p:sldMasterId id="2147483875" r:id="rId1"/>
   </p:sldMasterIdLst>
   <p:notesMasterIdLst>
-    <p:notesMasterId r:id="rId19"/>
+    <p:notesMasterId r:id="rId13"/>
   </p:notesMasterIdLst>
   <p:sldIdLst>
     <p:sldId id="256" r:id="rId2"/>
-    <p:sldId id="274" r:id="rId3"/>
-    <p:sldId id="257" r:id="rId4"/>
+    <p:sldId id="257" r:id="rId3"/>
+    <p:sldId id="259" r:id="rId4"/>
     <p:sldId id="260" r:id="rId5"/>
     <p:sldId id="261" r:id="rId6"/>
     <p:sldId id="262" r:id="rId7"/>
-    <p:sldId id="265" r:id="rId8"/>
-    <p:sldId id="263" r:id="rId9"/>
-    <p:sldId id="264" r:id="rId10"/>
-    <p:sldId id="276" r:id="rId11"/>
-    <p:sldId id="277" r:id="rId12"/>
-    <p:sldId id="268" r:id="rId13"/>
-    <p:sldId id="269" r:id="rId14"/>
-    <p:sldId id="272" r:id="rId15"/>
-    <p:sldId id="275" r:id="rId16"/>
-    <p:sldId id="273" r:id="rId17"/>
-    <p:sldId id="267" r:id="rId18"/>
+    <p:sldId id="263" r:id="rId8"/>
+    <p:sldId id="264" r:id="rId9"/>
+    <p:sldId id="265" r:id="rId10"/>
+    <p:sldId id="266" r:id="rId11"/>
+    <p:sldId id="267" r:id="rId12"/>
   </p:sldIdLst>
   <p:sldSz cx="12192000" cy="6858000"/>
   <p:notesSz cx="6858000" cy="9144000"/>
@@ -134,30 +128,17 @@
 <file path=ppt/revisionInfo.xml><?xml version="1.0" encoding="utf-8"?>
 <p1510:revInfo xmlns:a="http://schemas.openxmlformats.org/drawingml/2006/main" xmlns:r="http://schemas.openxmlformats.org/officeDocument/2006/relationships" xmlns:p1510="http://schemas.microsoft.com/office/powerpoint/2015/10/main">
   <p1510:revLst>
-    <p1510:client id="{308C7EEF-AA3B-1257-8A80-7842BC6C4BC9}" v="7" dt="2025-04-07T01:34:08.471"/>
-    <p1510:client id="{D22408A7-21C2-40C7-884F-CCACF5F2EE8C}" v="54" dt="2025-04-07T02:00:42.247"/>
+    <p1510:client id="{4737E037-BC0D-D536-1410-E11E50852722}" v="4" dt="2025-04-02T04:41:47.778"/>
+    <p1510:client id="{5B733FFD-7503-43D4-AFCC-F2A13FAC2705}" v="4" dt="2025-04-02T07:31:49.627"/>
+    <p1510:client id="{907CB1F7-F43B-A126-E16A-A63A81F62E52}" v="1" dt="2025-04-02T06:55:46.290"/>
+    <p1510:client id="{D22408A7-21C2-40C7-884F-CCACF5F2EE8C}" v="6" dt="2025-04-02T00:11:53.755"/>
+    <p1510:client id="{E157D3FC-CA6D-867F-94B4-A3D6DE9C3E7A}" v="73" dt="2025-04-02T04:40:51.252"/>
   </p1510:revLst>
 </p1510:revInfo>
 </file>
 
 <file path=ppt/changesInfos/changesInfo1.xml><?xml version="1.0" encoding="utf-8"?>
 <pc:chgInfo xmlns:a="http://schemas.openxmlformats.org/drawingml/2006/main" xmlns:r="http://schemas.openxmlformats.org/officeDocument/2006/relationships" xmlns:ac="http://schemas.microsoft.com/office/drawing/2013/main/command" xmlns:pc="http://schemas.microsoft.com/office/powerpoint/2013/main/command">
-  <pc:docChgLst>
-    <pc:chgData name="Charmi Patel" userId="S::fhv9735@autuni.ac.nz::580716cd-6efc-4414-809d-9b046d980771" providerId="AD" clId="Web-{285B77FB-0C16-9A9B-2DC4-F598DDE0A3A8}"/>
-    <pc:docChg chg="modSld">
-      <pc:chgData name="Charmi Patel" userId="S::fhv9735@autuni.ac.nz::580716cd-6efc-4414-809d-9b046d980771" providerId="AD" clId="Web-{285B77FB-0C16-9A9B-2DC4-F598DDE0A3A8}" dt="2025-04-02T07:57:02.899" v="268" actId="20577"/>
-      <pc:docMkLst>
-        <pc:docMk/>
-      </pc:docMkLst>
-      <pc:sldChg chg="modSp">
-        <pc:chgData name="Charmi Patel" userId="S::fhv9735@autuni.ac.nz::580716cd-6efc-4414-809d-9b046d980771" providerId="AD" clId="Web-{285B77FB-0C16-9A9B-2DC4-F598DDE0A3A8}" dt="2025-04-02T07:57:02.899" v="268" actId="20577"/>
-        <pc:sldMkLst>
-          <pc:docMk/>
-          <pc:sldMk cId="767305761" sldId="268"/>
-        </pc:sldMkLst>
-      </pc:sldChg>
-    </pc:docChg>
-  </pc:docChgLst>
   <pc:docChgLst>
     <pc:chgData name="Charmi Patel" userId="S::fhv9735@autuni.ac.nz::580716cd-6efc-4414-809d-9b046d980771" providerId="AD" clId="Web-{E157D3FC-CA6D-867F-94B4-A3D6DE9C3E7A}"/>
     <pc:docChg chg="modSld sldOrd">
@@ -193,6 +174,14 @@
           <pc:docMk/>
           <pc:sldMk cId="3550247993" sldId="259"/>
         </pc:sldMkLst>
+        <pc:spChg chg="mod">
+          <ac:chgData name="Charmi Patel" userId="S::fhv9735@autuni.ac.nz::580716cd-6efc-4414-809d-9b046d980771" providerId="AD" clId="Web-{E157D3FC-CA6D-867F-94B4-A3D6DE9C3E7A}" dt="2025-04-02T04:33:02.388" v="24" actId="20577"/>
+          <ac:spMkLst>
+            <pc:docMk/>
+            <pc:sldMk cId="3550247993" sldId="259"/>
+            <ac:spMk id="3" creationId="{7B9CD419-57B3-8910-F052-479BCFDD3C18}"/>
+          </ac:spMkLst>
+        </pc:spChg>
       </pc:sldChg>
       <pc:sldChg chg="modSp">
         <pc:chgData name="Charmi Patel" userId="S::fhv9735@autuni.ac.nz::580716cd-6efc-4414-809d-9b046d980771" providerId="AD" clId="Web-{E157D3FC-CA6D-867F-94B4-A3D6DE9C3E7A}" dt="2025-04-02T04:32:40.403" v="18" actId="20577"/>
@@ -230,6 +219,14 @@
           <pc:docMk/>
           <pc:sldMk cId="215071416" sldId="263"/>
         </pc:sldMkLst>
+        <pc:spChg chg="mod">
+          <ac:chgData name="Charmi Patel" userId="S::fhv9735@autuni.ac.nz::580716cd-6efc-4414-809d-9b046d980771" providerId="AD" clId="Web-{E157D3FC-CA6D-867F-94B4-A3D6DE9C3E7A}" dt="2025-04-02T04:34:05.670" v="55" actId="20577"/>
+          <ac:spMkLst>
+            <pc:docMk/>
+            <pc:sldMk cId="215071416" sldId="263"/>
+            <ac:spMk id="3" creationId="{BDDC5EBB-1EC3-86AE-0986-5F2B823A2381}"/>
+          </ac:spMkLst>
+        </pc:spChg>
       </pc:sldChg>
       <pc:sldChg chg="modSp">
         <pc:chgData name="Charmi Patel" userId="S::fhv9735@autuni.ac.nz::580716cd-6efc-4414-809d-9b046d980771" providerId="AD" clId="Web-{E157D3FC-CA6D-867F-94B4-A3D6DE9C3E7A}" dt="2025-04-02T04:34:23.904" v="61" actId="20577"/>
@@ -252,6 +249,14 @@
           <pc:docMk/>
           <pc:sldMk cId="2117413443" sldId="265"/>
         </pc:sldMkLst>
+        <pc:spChg chg="mod">
+          <ac:chgData name="Charmi Patel" userId="S::fhv9735@autuni.ac.nz::580716cd-6efc-4414-809d-9b046d980771" providerId="AD" clId="Web-{E157D3FC-CA6D-867F-94B4-A3D6DE9C3E7A}" dt="2025-04-02T04:39:24.813" v="75" actId="20577"/>
+          <ac:spMkLst>
+            <pc:docMk/>
+            <pc:sldMk cId="2117413443" sldId="265"/>
+            <ac:spMk id="3" creationId="{18FB8679-FCDA-7DBB-4992-932CFFAB141C}"/>
+          </ac:spMkLst>
+        </pc:spChg>
       </pc:sldChg>
       <pc:sldChg chg="modSp">
         <pc:chgData name="Charmi Patel" userId="S::fhv9735@autuni.ac.nz::580716cd-6efc-4414-809d-9b046d980771" providerId="AD" clId="Web-{E157D3FC-CA6D-867F-94B4-A3D6DE9C3E7A}" dt="2025-04-02T04:39:42.517" v="77" actId="20577"/>
@@ -259,22 +264,14 @@
           <pc:docMk/>
           <pc:sldMk cId="132504903" sldId="266"/>
         </pc:sldMkLst>
-      </pc:sldChg>
-    </pc:docChg>
-  </pc:docChgLst>
-  <pc:docChgLst>
-    <pc:chgData name="Charmi Patel" userId="S::fhv9735@autuni.ac.nz::580716cd-6efc-4414-809d-9b046d980771" providerId="AD" clId="Web-{907CB1F7-F43B-A126-E16A-A63A81F62E52}"/>
-    <pc:docChg chg="delSld">
-      <pc:chgData name="Charmi Patel" userId="S::fhv9735@autuni.ac.nz::580716cd-6efc-4414-809d-9b046d980771" providerId="AD" clId="Web-{907CB1F7-F43B-A126-E16A-A63A81F62E52}" dt="2025-04-02T06:55:46.290" v="0"/>
-      <pc:docMkLst>
-        <pc:docMk/>
-      </pc:docMkLst>
-      <pc:sldChg chg="del">
-        <pc:chgData name="Charmi Patel" userId="S::fhv9735@autuni.ac.nz::580716cd-6efc-4414-809d-9b046d980771" providerId="AD" clId="Web-{907CB1F7-F43B-A126-E16A-A63A81F62E52}" dt="2025-04-02T06:55:46.290" v="0"/>
-        <pc:sldMkLst>
-          <pc:docMk/>
-          <pc:sldMk cId="1172909354" sldId="258"/>
-        </pc:sldMkLst>
+        <pc:spChg chg="mod">
+          <ac:chgData name="Charmi Patel" userId="S::fhv9735@autuni.ac.nz::580716cd-6efc-4414-809d-9b046d980771" providerId="AD" clId="Web-{E157D3FC-CA6D-867F-94B4-A3D6DE9C3E7A}" dt="2025-04-02T04:39:42.517" v="77" actId="20577"/>
+          <ac:spMkLst>
+            <pc:docMk/>
+            <pc:sldMk cId="132504903" sldId="266"/>
+            <ac:spMk id="3" creationId="{B33BA710-C055-235C-3EFD-1049C1E70CF3}"/>
+          </ac:spMkLst>
+        </pc:spChg>
       </pc:sldChg>
     </pc:docChg>
   </pc:docChgLst>
@@ -303,48 +300,9 @@
     </pc:docChg>
   </pc:docChgLst>
   <pc:docChgLst>
-    <pc:chgData name="Larissa Goh" userId="S::xhm5236@autuni.ac.nz::047381de-f87e-4b32-95fa-b10d7f8e2dd3" providerId="AD" clId="Web-{E9109AFD-FFC2-527C-C4E0-DE9D0CF7BD29}"/>
-    <pc:docChg chg="modSld">
-      <pc:chgData name="Larissa Goh" userId="S::xhm5236@autuni.ac.nz::047381de-f87e-4b32-95fa-b10d7f8e2dd3" providerId="AD" clId="Web-{E9109AFD-FFC2-527C-C4E0-DE9D0CF7BD29}" dt="2025-04-02T08:43:36.050" v="771" actId="14100"/>
-      <pc:docMkLst>
-        <pc:docMk/>
-      </pc:docMkLst>
-      <pc:sldChg chg="addSp delSp modSp">
-        <pc:chgData name="Larissa Goh" userId="S::xhm5236@autuni.ac.nz::047381de-f87e-4b32-95fa-b10d7f8e2dd3" providerId="AD" clId="Web-{E9109AFD-FFC2-527C-C4E0-DE9D0CF7BD29}" dt="2025-04-02T08:43:36.050" v="771" actId="14100"/>
-        <pc:sldMkLst>
-          <pc:docMk/>
-          <pc:sldMk cId="4156481656" sldId="264"/>
-        </pc:sldMkLst>
-        <pc:spChg chg="mod">
-          <ac:chgData name="Larissa Goh" userId="S::xhm5236@autuni.ac.nz::047381de-f87e-4b32-95fa-b10d7f8e2dd3" providerId="AD" clId="Web-{E9109AFD-FFC2-527C-C4E0-DE9D0CF7BD29}" dt="2025-04-02T08:04:36.370" v="9" actId="20577"/>
-          <ac:spMkLst>
-            <pc:docMk/>
-            <pc:sldMk cId="4156481656" sldId="264"/>
-            <ac:spMk id="2" creationId="{445F1625-CE67-0C18-A3C5-C42F3A84332C}"/>
-          </ac:spMkLst>
-        </pc:spChg>
-        <pc:spChg chg="mod">
-          <ac:chgData name="Larissa Goh" userId="S::xhm5236@autuni.ac.nz::047381de-f87e-4b32-95fa-b10d7f8e2dd3" providerId="AD" clId="Web-{E9109AFD-FFC2-527C-C4E0-DE9D0CF7BD29}" dt="2025-04-02T08:43:36.050" v="771" actId="14100"/>
-          <ac:spMkLst>
-            <pc:docMk/>
-            <pc:sldMk cId="4156481656" sldId="264"/>
-            <ac:spMk id="3" creationId="{AEDD0EFF-4E46-9C78-6E2A-B5A756AD3F61}"/>
-          </ac:spMkLst>
-        </pc:spChg>
-      </pc:sldChg>
-      <pc:sldChg chg="modSp">
-        <pc:chgData name="Larissa Goh" userId="S::xhm5236@autuni.ac.nz::047381de-f87e-4b32-95fa-b10d7f8e2dd3" providerId="AD" clId="Web-{E9109AFD-FFC2-527C-C4E0-DE9D0CF7BD29}" dt="2025-04-02T08:04:51.105" v="15" actId="20577"/>
-        <pc:sldMkLst>
-          <pc:docMk/>
-          <pc:sldMk cId="2117413443" sldId="265"/>
-        </pc:sldMkLst>
-      </pc:sldChg>
-    </pc:docChg>
-  </pc:docChgLst>
-  <pc:docChgLst>
     <pc:chgData name="Kylie Afable" userId="ddacc756-344a-4f82-a099-06c374999204" providerId="ADAL" clId="{76BE9B13-4954-44CE-8385-DDB7860BD176}"/>
-    <pc:docChg chg="undo custSel addSld delSld modSld sldOrd">
-      <pc:chgData name="Kylie Afable" userId="ddacc756-344a-4f82-a099-06c374999204" providerId="ADAL" clId="{76BE9B13-4954-44CE-8385-DDB7860BD176}" dt="2025-04-03T03:41:39.826" v="3442"/>
+    <pc:docChg chg="undo custSel addSld modSld">
+      <pc:chgData name="Kylie Afable" userId="ddacc756-344a-4f82-a099-06c374999204" providerId="ADAL" clId="{76BE9B13-4954-44CE-8385-DDB7860BD176}" dt="2025-03-31T04:31:31.552" v="524" actId="20577"/>
       <pc:docMkLst>
         <pc:docMk/>
       </pc:docMkLst>
@@ -378,6 +336,102 @@
             <ac:spMk id="4" creationId="{A5CB1634-FC97-8EAF-A3B7-18710DBD71F1}"/>
           </ac:spMkLst>
         </pc:spChg>
+        <pc:spChg chg="add del">
+          <ac:chgData name="Kylie Afable" userId="ddacc756-344a-4f82-a099-06c374999204" providerId="ADAL" clId="{76BE9B13-4954-44CE-8385-DDB7860BD176}" dt="2025-03-31T04:04:47.626" v="24" actId="26606"/>
+          <ac:spMkLst>
+            <pc:docMk/>
+            <pc:sldMk cId="1312115059" sldId="256"/>
+            <ac:spMk id="5" creationId="{4D6A640B-6684-4338-9199-6EE758735581}"/>
+          </ac:spMkLst>
+        </pc:spChg>
+        <pc:spChg chg="add del">
+          <ac:chgData name="Kylie Afable" userId="ddacc756-344a-4f82-a099-06c374999204" providerId="ADAL" clId="{76BE9B13-4954-44CE-8385-DDB7860BD176}" dt="2025-03-31T04:04:42.017" v="22"/>
+          <ac:spMkLst>
+            <pc:docMk/>
+            <pc:sldMk cId="1312115059" sldId="256"/>
+            <ac:spMk id="8" creationId="{D22D1B95-2B54-43E9-85D9-B489F6C5DD0F}"/>
+          </ac:spMkLst>
+        </pc:spChg>
+        <pc:spChg chg="add del">
+          <ac:chgData name="Kylie Afable" userId="ddacc756-344a-4f82-a099-06c374999204" providerId="ADAL" clId="{76BE9B13-4954-44CE-8385-DDB7860BD176}" dt="2025-03-31T04:04:42.017" v="22"/>
+          <ac:spMkLst>
+            <pc:docMk/>
+            <pc:sldMk cId="1312115059" sldId="256"/>
+            <ac:spMk id="10" creationId="{7D0F3F6D-A49D-4406-8D61-1C4F8D792F04}"/>
+          </ac:spMkLst>
+        </pc:spChg>
+        <pc:spChg chg="add del">
+          <ac:chgData name="Kylie Afable" userId="ddacc756-344a-4f82-a099-06c374999204" providerId="ADAL" clId="{76BE9B13-4954-44CE-8385-DDB7860BD176}" dt="2025-03-31T04:04:42.017" v="22"/>
+          <ac:spMkLst>
+            <pc:docMk/>
+            <pc:sldMk cId="1312115059" sldId="256"/>
+            <ac:spMk id="12" creationId="{D953A318-DA8D-4405-9536-D889E45C5E3E}"/>
+          </ac:spMkLst>
+        </pc:spChg>
+        <pc:spChg chg="add del">
+          <ac:chgData name="Kylie Afable" userId="ddacc756-344a-4f82-a099-06c374999204" providerId="ADAL" clId="{76BE9B13-4954-44CE-8385-DDB7860BD176}" dt="2025-03-31T04:04:42.017" v="22"/>
+          <ac:spMkLst>
+            <pc:docMk/>
+            <pc:sldMk cId="1312115059" sldId="256"/>
+            <ac:spMk id="14" creationId="{9E382A3D-2F90-475C-8DF2-F666FEA3425B}"/>
+          </ac:spMkLst>
+        </pc:spChg>
+        <pc:spChg chg="add del">
+          <ac:chgData name="Kylie Afable" userId="ddacc756-344a-4f82-a099-06c374999204" providerId="ADAL" clId="{76BE9B13-4954-44CE-8385-DDB7860BD176}" dt="2025-03-31T04:10:56.229" v="144"/>
+          <ac:spMkLst>
+            <pc:docMk/>
+            <pc:sldMk cId="1312115059" sldId="256"/>
+            <ac:spMk id="51" creationId="{E978A47D-4F17-40FE-AB70-7AF78A9575EB}"/>
+          </ac:spMkLst>
+        </pc:spChg>
+        <pc:spChg chg="add del">
+          <ac:chgData name="Kylie Afable" userId="ddacc756-344a-4f82-a099-06c374999204" providerId="ADAL" clId="{76BE9B13-4954-44CE-8385-DDB7860BD176}" dt="2025-03-31T04:04:47.626" v="24" actId="26606"/>
+          <ac:spMkLst>
+            <pc:docMk/>
+            <pc:sldMk cId="1312115059" sldId="256"/>
+            <ac:spMk id="66" creationId="{FF5E4228-419E-44B9-B090-94A9540E5B3F}"/>
+          </ac:spMkLst>
+        </pc:spChg>
+        <pc:spChg chg="add del">
+          <ac:chgData name="Kylie Afable" userId="ddacc756-344a-4f82-a099-06c374999204" providerId="ADAL" clId="{76BE9B13-4954-44CE-8385-DDB7860BD176}" dt="2025-03-31T04:04:48.489" v="26" actId="26606"/>
+          <ac:spMkLst>
+            <pc:docMk/>
+            <pc:sldMk cId="1312115059" sldId="256"/>
+            <ac:spMk id="68" creationId="{7A070EAD-1DCD-4F3D-BA84-799B891A0E19}"/>
+          </ac:spMkLst>
+        </pc:spChg>
+        <pc:spChg chg="add del">
+          <ac:chgData name="Kylie Afable" userId="ddacc756-344a-4f82-a099-06c374999204" providerId="ADAL" clId="{76BE9B13-4954-44CE-8385-DDB7860BD176}" dt="2025-03-31T04:04:51.670" v="28" actId="26606"/>
+          <ac:spMkLst>
+            <pc:docMk/>
+            <pc:sldMk cId="1312115059" sldId="256"/>
+            <ac:spMk id="73" creationId="{B7D4B16D-600A-41A1-8B1B-3727C56C0C9B}"/>
+          </ac:spMkLst>
+        </pc:spChg>
+        <pc:spChg chg="add del">
+          <ac:chgData name="Kylie Afable" userId="ddacc756-344a-4f82-a099-06c374999204" providerId="ADAL" clId="{76BE9B13-4954-44CE-8385-DDB7860BD176}" dt="2025-03-31T04:04:55.442" v="30" actId="26606"/>
+          <ac:spMkLst>
+            <pc:docMk/>
+            <pc:sldMk cId="1312115059" sldId="256"/>
+            <ac:spMk id="80" creationId="{61C6D790-69F0-40CA-813A-84D724D1C6D2}"/>
+          </ac:spMkLst>
+        </pc:spChg>
+        <pc:spChg chg="add del">
+          <ac:chgData name="Kylie Afable" userId="ddacc756-344a-4f82-a099-06c374999204" providerId="ADAL" clId="{76BE9B13-4954-44CE-8385-DDB7860BD176}" dt="2025-03-31T04:04:55.442" v="30" actId="26606"/>
+          <ac:spMkLst>
+            <pc:docMk/>
+            <pc:sldMk cId="1312115059" sldId="256"/>
+            <ac:spMk id="81" creationId="{F5A78137-DBB7-4A93-98AC-5606814E2DC5}"/>
+          </ac:spMkLst>
+        </pc:spChg>
+        <pc:spChg chg="add del">
+          <ac:chgData name="Kylie Afable" userId="ddacc756-344a-4f82-a099-06c374999204" providerId="ADAL" clId="{76BE9B13-4954-44CE-8385-DDB7860BD176}" dt="2025-03-31T04:10:36.994" v="141"/>
+          <ac:spMkLst>
+            <pc:docMk/>
+            <pc:sldMk cId="1312115059" sldId="256"/>
+            <ac:spMk id="85" creationId="{4B24F6DB-F114-44A7-BB56-D401884E4E7F}"/>
+          </ac:spMkLst>
+        </pc:spChg>
         <pc:spChg chg="add">
           <ac:chgData name="Kylie Afable" userId="ddacc756-344a-4f82-a099-06c374999204" providerId="ADAL" clId="{76BE9B13-4954-44CE-8385-DDB7860BD176}" dt="2025-03-31T04:11:10.467" v="149" actId="26606"/>
           <ac:spMkLst>
@@ -394,12 +448,76 @@
             <ac:spMk id="149" creationId="{45037266-BD90-38D2-6E3B-CA1259909F1B}"/>
           </ac:spMkLst>
         </pc:spChg>
+        <pc:grpChg chg="add del">
+          <ac:chgData name="Kylie Afable" userId="ddacc756-344a-4f82-a099-06c374999204" providerId="ADAL" clId="{76BE9B13-4954-44CE-8385-DDB7860BD176}" dt="2025-03-31T04:04:47.626" v="24" actId="26606"/>
+          <ac:grpSpMkLst>
+            <pc:docMk/>
+            <pc:sldMk cId="1312115059" sldId="256"/>
+            <ac:grpSpMk id="6" creationId="{5BAB052D-92E4-4715-895B-E423230754C2}"/>
+          </ac:grpSpMkLst>
+        </pc:grpChg>
         <pc:grpChg chg="add">
           <ac:chgData name="Kylie Afable" userId="ddacc756-344a-4f82-a099-06c374999204" providerId="ADAL" clId="{76BE9B13-4954-44CE-8385-DDB7860BD176}" dt="2025-03-31T04:11:10.467" v="149" actId="26606"/>
           <ac:grpSpMkLst>
             <pc:docMk/>
             <pc:sldMk cId="1312115059" sldId="256"/>
             <ac:grpSpMk id="11" creationId="{9BE10567-6165-46A7-867D-4690A16B46D6}"/>
+          </ac:grpSpMkLst>
+        </pc:grpChg>
+        <pc:grpChg chg="add del">
+          <ac:chgData name="Kylie Afable" userId="ddacc756-344a-4f82-a099-06c374999204" providerId="ADAL" clId="{76BE9B13-4954-44CE-8385-DDB7860BD176}" dt="2025-03-31T04:10:56.229" v="144"/>
+          <ac:grpSpMkLst>
+            <pc:docMk/>
+            <pc:sldMk cId="1312115059" sldId="256"/>
+            <ac:grpSpMk id="50" creationId="{3BAEF7DA-43C4-4736-B5A3-B48E6125AB2D}"/>
+          </ac:grpSpMkLst>
+        </pc:grpChg>
+        <pc:grpChg chg="add del">
+          <ac:chgData name="Kylie Afable" userId="ddacc756-344a-4f82-a099-06c374999204" providerId="ADAL" clId="{76BE9B13-4954-44CE-8385-DDB7860BD176}" dt="2025-03-31T04:10:56.229" v="144"/>
+          <ac:grpSpMkLst>
+            <pc:docMk/>
+            <pc:sldMk cId="1312115059" sldId="256"/>
+            <ac:grpSpMk id="53" creationId="{85BE3A7E-6A3F-401E-A025-BBB8FDB8DD30}"/>
+          </ac:grpSpMkLst>
+        </pc:grpChg>
+        <pc:grpChg chg="add del">
+          <ac:chgData name="Kylie Afable" userId="ddacc756-344a-4f82-a099-06c374999204" providerId="ADAL" clId="{76BE9B13-4954-44CE-8385-DDB7860BD176}" dt="2025-03-31T04:04:48.489" v="26" actId="26606"/>
+          <ac:grpSpMkLst>
+            <pc:docMk/>
+            <pc:sldMk cId="1312115059" sldId="256"/>
+            <ac:grpSpMk id="69" creationId="{DE471E13-6104-4637-8A8F-B545529B1D11}"/>
+          </ac:grpSpMkLst>
+        </pc:grpChg>
+        <pc:grpChg chg="add del">
+          <ac:chgData name="Kylie Afable" userId="ddacc756-344a-4f82-a099-06c374999204" providerId="ADAL" clId="{76BE9B13-4954-44CE-8385-DDB7860BD176}" dt="2025-03-31T04:04:51.670" v="28" actId="26606"/>
+          <ac:grpSpMkLst>
+            <pc:docMk/>
+            <pc:sldMk cId="1312115059" sldId="256"/>
+            <ac:grpSpMk id="74" creationId="{DE7C35E0-BD19-4AFC-81BF-7A7507E9C94D}"/>
+          </ac:grpSpMkLst>
+        </pc:grpChg>
+        <pc:grpChg chg="add del">
+          <ac:chgData name="Kylie Afable" userId="ddacc756-344a-4f82-a099-06c374999204" providerId="ADAL" clId="{76BE9B13-4954-44CE-8385-DDB7860BD176}" dt="2025-03-31T04:10:36.994" v="141"/>
+          <ac:grpSpMkLst>
+            <pc:docMk/>
+            <pc:sldMk cId="1312115059" sldId="256"/>
+            <ac:grpSpMk id="83" creationId="{9BE10567-6165-46A7-867D-4690A16B46D6}"/>
+          </ac:grpSpMkLst>
+        </pc:grpChg>
+        <pc:grpChg chg="add del">
+          <ac:chgData name="Kylie Afable" userId="ddacc756-344a-4f82-a099-06c374999204" providerId="ADAL" clId="{76BE9B13-4954-44CE-8385-DDB7860BD176}" dt="2025-03-31T04:10:56.229" v="144"/>
+          <ac:grpSpMkLst>
+            <pc:docMk/>
+            <pc:sldMk cId="1312115059" sldId="256"/>
+            <ac:grpSpMk id="84" creationId="{F4E035BE-9FF4-43D3-BC25-CF582D7FF85E}"/>
+          </ac:grpSpMkLst>
+        </pc:grpChg>
+        <pc:grpChg chg="add del">
+          <ac:chgData name="Kylie Afable" userId="ddacc756-344a-4f82-a099-06c374999204" providerId="ADAL" clId="{76BE9B13-4954-44CE-8385-DDB7860BD176}" dt="2025-03-31T04:10:36.994" v="141"/>
+          <ac:grpSpMkLst>
+            <pc:docMk/>
+            <pc:sldMk cId="1312115059" sldId="256"/>
+            <ac:grpSpMk id="86" creationId="{4DB50ECD-225E-4F81-AF7B-706DD05F3BA8}"/>
           </ac:grpSpMkLst>
         </pc:grpChg>
         <pc:grpChg chg="add">
@@ -410,6 +528,38 @@
             <ac:grpSpMk id="128" creationId="{4DB50ECD-225E-4F81-AF7B-706DD05F3BA8}"/>
           </ac:grpSpMkLst>
         </pc:grpChg>
+        <pc:picChg chg="add del">
+          <ac:chgData name="Kylie Afable" userId="ddacc756-344a-4f82-a099-06c374999204" providerId="ADAL" clId="{76BE9B13-4954-44CE-8385-DDB7860BD176}" dt="2025-03-31T04:10:56.229" v="144"/>
+          <ac:picMkLst>
+            <pc:docMk/>
+            <pc:sldMk cId="1312115059" sldId="256"/>
+            <ac:picMk id="7" creationId="{9FBB3149-8289-4060-BB01-ED3047C53146}"/>
+          </ac:picMkLst>
+        </pc:picChg>
+        <pc:picChg chg="add del">
+          <ac:chgData name="Kylie Afable" userId="ddacc756-344a-4f82-a099-06c374999204" providerId="ADAL" clId="{76BE9B13-4954-44CE-8385-DDB7860BD176}" dt="2025-03-31T04:04:51.670" v="28" actId="26606"/>
+          <ac:picMkLst>
+            <pc:docMk/>
+            <pc:sldMk cId="1312115059" sldId="256"/>
+            <ac:picMk id="77" creationId="{51039561-92F9-40EE-900B-6AA0F58042A4}"/>
+          </ac:picMkLst>
+        </pc:picChg>
+        <pc:cxnChg chg="add del">
+          <ac:chgData name="Kylie Afable" userId="ddacc756-344a-4f82-a099-06c374999204" providerId="ADAL" clId="{76BE9B13-4954-44CE-8385-DDB7860BD176}" dt="2025-03-31T04:04:51.670" v="28" actId="26606"/>
+          <ac:cxnSpMkLst>
+            <pc:docMk/>
+            <pc:sldMk cId="1312115059" sldId="256"/>
+            <ac:cxnSpMk id="78" creationId="{D902DA06-324A-48CE-8C20-94535480A632}"/>
+          </ac:cxnSpMkLst>
+        </pc:cxnChg>
+        <pc:cxnChg chg="add del">
+          <ac:chgData name="Kylie Afable" userId="ddacc756-344a-4f82-a099-06c374999204" providerId="ADAL" clId="{76BE9B13-4954-44CE-8385-DDB7860BD176}" dt="2025-03-31T04:10:56.229" v="144"/>
+          <ac:cxnSpMkLst>
+            <pc:docMk/>
+            <pc:sldMk cId="1312115059" sldId="256"/>
+            <ac:cxnSpMk id="82" creationId="{085ECEC0-FF5D-4348-92C7-1EA7C61E770C}"/>
+          </ac:cxnSpMkLst>
+        </pc:cxnChg>
       </pc:sldChg>
       <pc:sldChg chg="addSp delSp modSp new mod setBg delDesignElem">
         <pc:chgData name="Kylie Afable" userId="ddacc756-344a-4f82-a099-06c374999204" providerId="ADAL" clId="{76BE9B13-4954-44CE-8385-DDB7860BD176}" dt="2025-03-31T04:11:07.150" v="148"/>
@@ -433,6 +583,54 @@
             <ac:spMk id="3" creationId="{5F3B77BC-19D1-27CB-9630-CC5EE5A4C382}"/>
           </ac:spMkLst>
         </pc:spChg>
+        <pc:spChg chg="add del">
+          <ac:chgData name="Kylie Afable" userId="ddacc756-344a-4f82-a099-06c374999204" providerId="ADAL" clId="{76BE9B13-4954-44CE-8385-DDB7860BD176}" dt="2025-03-31T04:10:36.994" v="141"/>
+          <ac:spMkLst>
+            <pc:docMk/>
+            <pc:sldMk cId="2028713515" sldId="257"/>
+            <ac:spMk id="5" creationId="{B61375F2-60B1-44ED-B60A-019C4BD5A62A}"/>
+          </ac:spMkLst>
+        </pc:spChg>
+        <pc:spChg chg="add del">
+          <ac:chgData name="Kylie Afable" userId="ddacc756-344a-4f82-a099-06c374999204" providerId="ADAL" clId="{76BE9B13-4954-44CE-8385-DDB7860BD176}" dt="2025-03-31T04:08:36.483" v="112" actId="26606"/>
+          <ac:spMkLst>
+            <pc:docMk/>
+            <pc:sldMk cId="2028713515" sldId="257"/>
+            <ac:spMk id="8" creationId="{B61375F2-60B1-44ED-B60A-019C4BD5A62A}"/>
+          </ac:spMkLst>
+        </pc:spChg>
+        <pc:grpChg chg="add del">
+          <ac:chgData name="Kylie Afable" userId="ddacc756-344a-4f82-a099-06c374999204" providerId="ADAL" clId="{76BE9B13-4954-44CE-8385-DDB7860BD176}" dt="2025-03-31T04:10:36.994" v="141"/>
+          <ac:grpSpMkLst>
+            <pc:docMk/>
+            <pc:sldMk cId="2028713515" sldId="257"/>
+            <ac:grpSpMk id="6" creationId="{4ADB9295-9645-4BF2-ADFD-75800B7FAD06}"/>
+          </ac:grpSpMkLst>
+        </pc:grpChg>
+        <pc:grpChg chg="add del">
+          <ac:chgData name="Kylie Afable" userId="ddacc756-344a-4f82-a099-06c374999204" providerId="ADAL" clId="{76BE9B13-4954-44CE-8385-DDB7860BD176}" dt="2025-03-31T04:08:36.483" v="112" actId="26606"/>
+          <ac:grpSpMkLst>
+            <pc:docMk/>
+            <pc:sldMk cId="2028713515" sldId="257"/>
+            <ac:grpSpMk id="10" creationId="{4ADB9295-9645-4BF2-ADFD-75800B7FAD06}"/>
+          </ac:grpSpMkLst>
+        </pc:grpChg>
+        <pc:grpChg chg="add del">
+          <ac:chgData name="Kylie Afable" userId="ddacc756-344a-4f82-a099-06c374999204" providerId="ADAL" clId="{76BE9B13-4954-44CE-8385-DDB7860BD176}" dt="2025-03-31T04:08:36.483" v="112" actId="26606"/>
+          <ac:grpSpMkLst>
+            <pc:docMk/>
+            <pc:sldMk cId="2028713515" sldId="257"/>
+            <ac:grpSpMk id="39" creationId="{B485B3F6-654D-4842-A2DE-677D12FED460}"/>
+          </ac:grpSpMkLst>
+        </pc:grpChg>
+        <pc:grpChg chg="add del">
+          <ac:chgData name="Kylie Afable" userId="ddacc756-344a-4f82-a099-06c374999204" providerId="ADAL" clId="{76BE9B13-4954-44CE-8385-DDB7860BD176}" dt="2025-03-31T04:10:36.994" v="141"/>
+          <ac:grpSpMkLst>
+            <pc:docMk/>
+            <pc:sldMk cId="2028713515" sldId="257"/>
+            <ac:grpSpMk id="74" creationId="{B485B3F6-654D-4842-A2DE-677D12FED460}"/>
+          </ac:grpSpMkLst>
+        </pc:grpChg>
       </pc:sldChg>
       <pc:sldChg chg="modSp new mod">
         <pc:chgData name="Kylie Afable" userId="ddacc756-344a-4f82-a099-06c374999204" providerId="ADAL" clId="{76BE9B13-4954-44CE-8385-DDB7860BD176}" dt="2025-03-31T04:23:21.040" v="275" actId="20577"/>
@@ -440,6 +638,22 @@
           <pc:docMk/>
           <pc:sldMk cId="1172909354" sldId="258"/>
         </pc:sldMkLst>
+        <pc:spChg chg="mod">
+          <ac:chgData name="Kylie Afable" userId="ddacc756-344a-4f82-a099-06c374999204" providerId="ADAL" clId="{76BE9B13-4954-44CE-8385-DDB7860BD176}" dt="2025-03-31T04:23:21.040" v="275" actId="20577"/>
+          <ac:spMkLst>
+            <pc:docMk/>
+            <pc:sldMk cId="1172909354" sldId="258"/>
+            <ac:spMk id="2" creationId="{F710391E-39E5-823A-A1DA-61E7ED2504CA}"/>
+          </ac:spMkLst>
+        </pc:spChg>
+        <pc:spChg chg="mod">
+          <ac:chgData name="Kylie Afable" userId="ddacc756-344a-4f82-a099-06c374999204" providerId="ADAL" clId="{76BE9B13-4954-44CE-8385-DDB7860BD176}" dt="2025-03-31T04:11:07.150" v="148"/>
+          <ac:spMkLst>
+            <pc:docMk/>
+            <pc:sldMk cId="1172909354" sldId="258"/>
+            <ac:spMk id="3" creationId="{D682FF18-9365-36B8-EDB4-C577A7CE2330}"/>
+          </ac:spMkLst>
+        </pc:spChg>
       </pc:sldChg>
       <pc:sldChg chg="modSp new mod">
         <pc:chgData name="Kylie Afable" userId="ddacc756-344a-4f82-a099-06c374999204" providerId="ADAL" clId="{76BE9B13-4954-44CE-8385-DDB7860BD176}" dt="2025-03-31T04:23:27.349" v="284" actId="20577"/>
@@ -447,6 +661,22 @@
           <pc:docMk/>
           <pc:sldMk cId="3550247993" sldId="259"/>
         </pc:sldMkLst>
+        <pc:spChg chg="mod">
+          <ac:chgData name="Kylie Afable" userId="ddacc756-344a-4f82-a099-06c374999204" providerId="ADAL" clId="{76BE9B13-4954-44CE-8385-DDB7860BD176}" dt="2025-03-31T04:23:27.349" v="284" actId="20577"/>
+          <ac:spMkLst>
+            <pc:docMk/>
+            <pc:sldMk cId="3550247993" sldId="259"/>
+            <ac:spMk id="2" creationId="{F8B1D107-F27E-0F7A-5126-A1F2785CDEFB}"/>
+          </ac:spMkLst>
+        </pc:spChg>
+        <pc:spChg chg="mod">
+          <ac:chgData name="Kylie Afable" userId="ddacc756-344a-4f82-a099-06c374999204" providerId="ADAL" clId="{76BE9B13-4954-44CE-8385-DDB7860BD176}" dt="2025-03-31T04:11:07.150" v="148"/>
+          <ac:spMkLst>
+            <pc:docMk/>
+            <pc:sldMk cId="3550247993" sldId="259"/>
+            <ac:spMk id="3" creationId="{7B9CD419-57B3-8910-F052-479BCFDD3C18}"/>
+          </ac:spMkLst>
+        </pc:spChg>
       </pc:sldChg>
       <pc:sldChg chg="addSp delSp modSp new mod setBg delDesignElem">
         <pc:chgData name="Kylie Afable" userId="ddacc756-344a-4f82-a099-06c374999204" providerId="ADAL" clId="{76BE9B13-4954-44CE-8385-DDB7860BD176}" dt="2025-03-31T04:23:39.313" v="308" actId="20577"/>
@@ -470,6 +700,30 @@
             <ac:spMk id="3" creationId="{EACEA6C9-D584-9940-CD4C-37274BB2C149}"/>
           </ac:spMkLst>
         </pc:spChg>
+        <pc:spChg chg="add del">
+          <ac:chgData name="Kylie Afable" userId="ddacc756-344a-4f82-a099-06c374999204" providerId="ADAL" clId="{76BE9B13-4954-44CE-8385-DDB7860BD176}" dt="2025-03-31T04:10:36.994" v="141"/>
+          <ac:spMkLst>
+            <pc:docMk/>
+            <pc:sldMk cId="2580490598" sldId="260"/>
+            <ac:spMk id="8" creationId="{B61375F2-60B1-44ED-B60A-019C4BD5A62A}"/>
+          </ac:spMkLst>
+        </pc:spChg>
+        <pc:grpChg chg="add del">
+          <ac:chgData name="Kylie Afable" userId="ddacc756-344a-4f82-a099-06c374999204" providerId="ADAL" clId="{76BE9B13-4954-44CE-8385-DDB7860BD176}" dt="2025-03-31T04:10:36.994" v="141"/>
+          <ac:grpSpMkLst>
+            <pc:docMk/>
+            <pc:sldMk cId="2580490598" sldId="260"/>
+            <ac:grpSpMk id="10" creationId="{4ADB9295-9645-4BF2-ADFD-75800B7FAD06}"/>
+          </ac:grpSpMkLst>
+        </pc:grpChg>
+        <pc:grpChg chg="add del">
+          <ac:chgData name="Kylie Afable" userId="ddacc756-344a-4f82-a099-06c374999204" providerId="ADAL" clId="{76BE9B13-4954-44CE-8385-DDB7860BD176}" dt="2025-03-31T04:10:36.994" v="141"/>
+          <ac:grpSpMkLst>
+            <pc:docMk/>
+            <pc:sldMk cId="2580490598" sldId="260"/>
+            <ac:grpSpMk id="39" creationId="{B485B3F6-654D-4842-A2DE-677D12FED460}"/>
+          </ac:grpSpMkLst>
+        </pc:grpChg>
       </pc:sldChg>
       <pc:sldChg chg="modSp new mod">
         <pc:chgData name="Kylie Afable" userId="ddacc756-344a-4f82-a099-06c374999204" providerId="ADAL" clId="{76BE9B13-4954-44CE-8385-DDB7860BD176}" dt="2025-03-31T04:23:51.941" v="332" actId="20577"/>
@@ -516,9 +770,33 @@
             <ac:spMk id="3" creationId="{29312F50-E719-E906-B00D-C213C7F420D7}"/>
           </ac:spMkLst>
         </pc:spChg>
+        <pc:spChg chg="add del">
+          <ac:chgData name="Kylie Afable" userId="ddacc756-344a-4f82-a099-06c374999204" providerId="ADAL" clId="{76BE9B13-4954-44CE-8385-DDB7860BD176}" dt="2025-03-31T04:10:36.994" v="141"/>
+          <ac:spMkLst>
+            <pc:docMk/>
+            <pc:sldMk cId="3549023980" sldId="262"/>
+            <ac:spMk id="8" creationId="{B61375F2-60B1-44ED-B60A-019C4BD5A62A}"/>
+          </ac:spMkLst>
+        </pc:spChg>
+        <pc:grpChg chg="add del">
+          <ac:chgData name="Kylie Afable" userId="ddacc756-344a-4f82-a099-06c374999204" providerId="ADAL" clId="{76BE9B13-4954-44CE-8385-DDB7860BD176}" dt="2025-03-31T04:10:36.994" v="141"/>
+          <ac:grpSpMkLst>
+            <pc:docMk/>
+            <pc:sldMk cId="3549023980" sldId="262"/>
+            <ac:grpSpMk id="10" creationId="{4ADB9295-9645-4BF2-ADFD-75800B7FAD06}"/>
+          </ac:grpSpMkLst>
+        </pc:grpChg>
+        <pc:grpChg chg="add del">
+          <ac:chgData name="Kylie Afable" userId="ddacc756-344a-4f82-a099-06c374999204" providerId="ADAL" clId="{76BE9B13-4954-44CE-8385-DDB7860BD176}" dt="2025-03-31T04:10:36.994" v="141"/>
+          <ac:grpSpMkLst>
+            <pc:docMk/>
+            <pc:sldMk cId="3549023980" sldId="262"/>
+            <ac:grpSpMk id="39" creationId="{B485B3F6-654D-4842-A2DE-677D12FED460}"/>
+          </ac:grpSpMkLst>
+        </pc:grpChg>
       </pc:sldChg>
-      <pc:sldChg chg="addSp delSp modSp new mod">
-        <pc:chgData name="Kylie Afable" userId="ddacc756-344a-4f82-a099-06c374999204" providerId="ADAL" clId="{76BE9B13-4954-44CE-8385-DDB7860BD176}" dt="2025-04-02T08:46:34.852" v="1785" actId="478"/>
+      <pc:sldChg chg="modSp new mod">
+        <pc:chgData name="Kylie Afable" userId="ddacc756-344a-4f82-a099-06c374999204" providerId="ADAL" clId="{76BE9B13-4954-44CE-8385-DDB7860BD176}" dt="2025-03-31T04:26:29.513" v="421" actId="20577"/>
         <pc:sldMkLst>
           <pc:docMk/>
           <pc:sldMk cId="215071416" sldId="263"/>
@@ -529,6 +807,14 @@
             <pc:docMk/>
             <pc:sldMk cId="215071416" sldId="263"/>
             <ac:spMk id="2" creationId="{141D2F1D-0F46-9055-FD69-94BDF98800B0}"/>
+          </ac:spMkLst>
+        </pc:spChg>
+        <pc:spChg chg="mod">
+          <ac:chgData name="Kylie Afable" userId="ddacc756-344a-4f82-a099-06c374999204" providerId="ADAL" clId="{76BE9B13-4954-44CE-8385-DDB7860BD176}" dt="2025-03-31T04:11:07.150" v="148"/>
+          <ac:spMkLst>
+            <pc:docMk/>
+            <pc:sldMk cId="215071416" sldId="263"/>
+            <ac:spMk id="3" creationId="{BDDC5EBB-1EC3-86AE-0986-5F2B823A2381}"/>
           </ac:spMkLst>
         </pc:spChg>
       </pc:sldChg>
@@ -554,23 +840,103 @@
             <ac:spMk id="3" creationId="{AEDD0EFF-4E46-9C78-6E2A-B5A756AD3F61}"/>
           </ac:spMkLst>
         </pc:spChg>
+        <pc:spChg chg="add del">
+          <ac:chgData name="Kylie Afable" userId="ddacc756-344a-4f82-a099-06c374999204" providerId="ADAL" clId="{76BE9B13-4954-44CE-8385-DDB7860BD176}" dt="2025-03-31T04:10:36.994" v="141"/>
+          <ac:spMkLst>
+            <pc:docMk/>
+            <pc:sldMk cId="4156481656" sldId="264"/>
+            <ac:spMk id="8" creationId="{B61375F2-60B1-44ED-B60A-019C4BD5A62A}"/>
+          </ac:spMkLst>
+        </pc:spChg>
+        <pc:grpChg chg="add del">
+          <ac:chgData name="Kylie Afable" userId="ddacc756-344a-4f82-a099-06c374999204" providerId="ADAL" clId="{76BE9B13-4954-44CE-8385-DDB7860BD176}" dt="2025-03-31T04:10:36.994" v="141"/>
+          <ac:grpSpMkLst>
+            <pc:docMk/>
+            <pc:sldMk cId="4156481656" sldId="264"/>
+            <ac:grpSpMk id="10" creationId="{4ADB9295-9645-4BF2-ADFD-75800B7FAD06}"/>
+          </ac:grpSpMkLst>
+        </pc:grpChg>
+        <pc:grpChg chg="add del">
+          <ac:chgData name="Kylie Afable" userId="ddacc756-344a-4f82-a099-06c374999204" providerId="ADAL" clId="{76BE9B13-4954-44CE-8385-DDB7860BD176}" dt="2025-03-31T04:10:36.994" v="141"/>
+          <ac:grpSpMkLst>
+            <pc:docMk/>
+            <pc:sldMk cId="4156481656" sldId="264"/>
+            <ac:grpSpMk id="39" creationId="{B485B3F6-654D-4842-A2DE-677D12FED460}"/>
+          </ac:grpSpMkLst>
+        </pc:grpChg>
       </pc:sldChg>
-      <pc:sldChg chg="addSp delSp modSp new mod">
-        <pc:chgData name="Kylie Afable" userId="ddacc756-344a-4f82-a099-06c374999204" providerId="ADAL" clId="{76BE9B13-4954-44CE-8385-DDB7860BD176}" dt="2025-04-02T07:47:02.806" v="560" actId="1076"/>
+      <pc:sldChg chg="modSp new mod">
+        <pc:chgData name="Kylie Afable" userId="ddacc756-344a-4f82-a099-06c374999204" providerId="ADAL" clId="{76BE9B13-4954-44CE-8385-DDB7860BD176}" dt="2025-03-31T04:28:11.724" v="478" actId="20577"/>
         <pc:sldMkLst>
           <pc:docMk/>
           <pc:sldMk cId="2117413443" sldId="265"/>
         </pc:sldMkLst>
+        <pc:spChg chg="mod">
+          <ac:chgData name="Kylie Afable" userId="ddacc756-344a-4f82-a099-06c374999204" providerId="ADAL" clId="{76BE9B13-4954-44CE-8385-DDB7860BD176}" dt="2025-03-31T04:28:11.724" v="478" actId="20577"/>
+          <ac:spMkLst>
+            <pc:docMk/>
+            <pc:sldMk cId="2117413443" sldId="265"/>
+            <ac:spMk id="2" creationId="{6C5915AA-9674-2E81-79D0-0705C29E9ACB}"/>
+          </ac:spMkLst>
+        </pc:spChg>
+        <pc:spChg chg="mod">
+          <ac:chgData name="Kylie Afable" userId="ddacc756-344a-4f82-a099-06c374999204" providerId="ADAL" clId="{76BE9B13-4954-44CE-8385-DDB7860BD176}" dt="2025-03-31T04:11:07.150" v="148"/>
+          <ac:spMkLst>
+            <pc:docMk/>
+            <pc:sldMk cId="2117413443" sldId="265"/>
+            <ac:spMk id="3" creationId="{18FB8679-FCDA-7DBB-4992-932CFFAB141C}"/>
+          </ac:spMkLst>
+        </pc:spChg>
       </pc:sldChg>
-      <pc:sldChg chg="addSp delSp modSp new del mod setBg delDesignElem">
-        <pc:chgData name="Kylie Afable" userId="ddacc756-344a-4f82-a099-06c374999204" providerId="ADAL" clId="{76BE9B13-4954-44CE-8385-DDB7860BD176}" dt="2025-04-02T07:44:58.203" v="539" actId="2696"/>
+      <pc:sldChg chg="addSp delSp modSp new mod setBg delDesignElem">
+        <pc:chgData name="Kylie Afable" userId="ddacc756-344a-4f82-a099-06c374999204" providerId="ADAL" clId="{76BE9B13-4954-44CE-8385-DDB7860BD176}" dt="2025-03-31T04:28:53.733" v="514" actId="20577"/>
         <pc:sldMkLst>
           <pc:docMk/>
           <pc:sldMk cId="132504903" sldId="266"/>
         </pc:sldMkLst>
+        <pc:spChg chg="mod">
+          <ac:chgData name="Kylie Afable" userId="ddacc756-344a-4f82-a099-06c374999204" providerId="ADAL" clId="{76BE9B13-4954-44CE-8385-DDB7860BD176}" dt="2025-03-31T04:28:53.733" v="514" actId="20577"/>
+          <ac:spMkLst>
+            <pc:docMk/>
+            <pc:sldMk cId="132504903" sldId="266"/>
+            <ac:spMk id="2" creationId="{F4B3FCE7-C2FD-C943-C120-D47B5F2D41DE}"/>
+          </ac:spMkLst>
+        </pc:spChg>
+        <pc:spChg chg="mod">
+          <ac:chgData name="Kylie Afable" userId="ddacc756-344a-4f82-a099-06c374999204" providerId="ADAL" clId="{76BE9B13-4954-44CE-8385-DDB7860BD176}" dt="2025-03-31T04:11:07.150" v="148"/>
+          <ac:spMkLst>
+            <pc:docMk/>
+            <pc:sldMk cId="132504903" sldId="266"/>
+            <ac:spMk id="3" creationId="{B33BA710-C055-235C-3EFD-1049C1E70CF3}"/>
+          </ac:spMkLst>
+        </pc:spChg>
+        <pc:spChg chg="add del">
+          <ac:chgData name="Kylie Afable" userId="ddacc756-344a-4f82-a099-06c374999204" providerId="ADAL" clId="{76BE9B13-4954-44CE-8385-DDB7860BD176}" dt="2025-03-31T04:10:36.994" v="141"/>
+          <ac:spMkLst>
+            <pc:docMk/>
+            <pc:sldMk cId="132504903" sldId="266"/>
+            <ac:spMk id="8" creationId="{B61375F2-60B1-44ED-B60A-019C4BD5A62A}"/>
+          </ac:spMkLst>
+        </pc:spChg>
+        <pc:grpChg chg="add del">
+          <ac:chgData name="Kylie Afable" userId="ddacc756-344a-4f82-a099-06c374999204" providerId="ADAL" clId="{76BE9B13-4954-44CE-8385-DDB7860BD176}" dt="2025-03-31T04:10:36.994" v="141"/>
+          <ac:grpSpMkLst>
+            <pc:docMk/>
+            <pc:sldMk cId="132504903" sldId="266"/>
+            <ac:grpSpMk id="10" creationId="{4ADB9295-9645-4BF2-ADFD-75800B7FAD06}"/>
+          </ac:grpSpMkLst>
+        </pc:grpChg>
+        <pc:grpChg chg="add del">
+          <ac:chgData name="Kylie Afable" userId="ddacc756-344a-4f82-a099-06c374999204" providerId="ADAL" clId="{76BE9B13-4954-44CE-8385-DDB7860BD176}" dt="2025-03-31T04:10:36.994" v="141"/>
+          <ac:grpSpMkLst>
+            <pc:docMk/>
+            <pc:sldMk cId="132504903" sldId="266"/>
+            <ac:grpSpMk id="39" creationId="{B485B3F6-654D-4842-A2DE-677D12FED460}"/>
+          </ac:grpSpMkLst>
+        </pc:grpChg>
       </pc:sldChg>
-      <pc:sldChg chg="modSp new mod ord">
-        <pc:chgData name="Kylie Afable" userId="ddacc756-344a-4f82-a099-06c374999204" providerId="ADAL" clId="{76BE9B13-4954-44CE-8385-DDB7860BD176}" dt="2025-04-02T07:45:02.338" v="543"/>
+      <pc:sldChg chg="modSp new mod">
+        <pc:chgData name="Kylie Afable" userId="ddacc756-344a-4f82-a099-06c374999204" providerId="ADAL" clId="{76BE9B13-4954-44CE-8385-DDB7860BD176}" dt="2025-03-31T04:31:31.552" v="524" actId="20577"/>
         <pc:sldMkLst>
           <pc:docMk/>
           <pc:sldMk cId="1996559424" sldId="267"/>
@@ -583,146 +949,32 @@
             <ac:spMk id="2" creationId="{69F2E5E3-C2F0-F8C6-AE8E-165BDB409945}"/>
           </ac:spMkLst>
         </pc:spChg>
-      </pc:sldChg>
-      <pc:sldChg chg="modSp new mod">
-        <pc:chgData name="Kylie Afable" userId="ddacc756-344a-4f82-a099-06c374999204" providerId="ADAL" clId="{76BE9B13-4954-44CE-8385-DDB7860BD176}" dt="2025-04-02T07:47:43.086" v="575" actId="20577"/>
-        <pc:sldMkLst>
-          <pc:docMk/>
-          <pc:sldMk cId="767305761" sldId="268"/>
-        </pc:sldMkLst>
         <pc:spChg chg="mod">
-          <ac:chgData name="Kylie Afable" userId="ddacc756-344a-4f82-a099-06c374999204" providerId="ADAL" clId="{76BE9B13-4954-44CE-8385-DDB7860BD176}" dt="2025-04-02T07:47:43.086" v="575" actId="20577"/>
+          <ac:chgData name="Kylie Afable" userId="ddacc756-344a-4f82-a099-06c374999204" providerId="ADAL" clId="{76BE9B13-4954-44CE-8385-DDB7860BD176}" dt="2025-03-31T04:11:07.150" v="148"/>
           <ac:spMkLst>
             <pc:docMk/>
-            <pc:sldMk cId="767305761" sldId="268"/>
-            <ac:spMk id="2" creationId="{C3DCF774-7CFE-7B9E-F09F-C8867AC413F6}"/>
-          </ac:spMkLst>
-        </pc:spChg>
-      </pc:sldChg>
-      <pc:sldChg chg="addSp delSp modSp new mod ord">
-        <pc:chgData name="Kylie Afable" userId="ddacc756-344a-4f82-a099-06c374999204" providerId="ADAL" clId="{76BE9B13-4954-44CE-8385-DDB7860BD176}" dt="2025-04-02T08:47:31.565" v="1787" actId="1076"/>
-        <pc:sldMkLst>
-          <pc:docMk/>
-          <pc:sldMk cId="788977922" sldId="269"/>
-        </pc:sldMkLst>
-        <pc:spChg chg="mod">
-          <ac:chgData name="Kylie Afable" userId="ddacc756-344a-4f82-a099-06c374999204" providerId="ADAL" clId="{76BE9B13-4954-44CE-8385-DDB7860BD176}" dt="2025-04-02T08:47:29.721" v="1786" actId="1076"/>
-          <ac:spMkLst>
-            <pc:docMk/>
-            <pc:sldMk cId="788977922" sldId="269"/>
-            <ac:spMk id="5" creationId="{81FA36E1-C362-8768-1525-A587A5E0B0D2}"/>
-          </ac:spMkLst>
-        </pc:spChg>
-        <pc:graphicFrameChg chg="mod modGraphic">
-          <ac:chgData name="Kylie Afable" userId="ddacc756-344a-4f82-a099-06c374999204" providerId="ADAL" clId="{76BE9B13-4954-44CE-8385-DDB7860BD176}" dt="2025-04-02T08:47:31.565" v="1787" actId="1076"/>
-          <ac:graphicFrameMkLst>
-            <pc:docMk/>
-            <pc:sldMk cId="788977922" sldId="269"/>
-            <ac:graphicFrameMk id="4" creationId="{11072660-C17A-82BF-E70E-0E7E9A41A07F}"/>
-          </ac:graphicFrameMkLst>
-        </pc:graphicFrameChg>
-      </pc:sldChg>
-      <pc:sldChg chg="new del">
-        <pc:chgData name="Kylie Afable" userId="ddacc756-344a-4f82-a099-06c374999204" providerId="ADAL" clId="{76BE9B13-4954-44CE-8385-DDB7860BD176}" dt="2025-04-02T07:49:01.293" v="621" actId="2696"/>
-        <pc:sldMkLst>
-          <pc:docMk/>
-          <pc:sldMk cId="461425214" sldId="270"/>
-        </pc:sldMkLst>
-      </pc:sldChg>
-      <pc:sldChg chg="new del">
-        <pc:chgData name="Kylie Afable" userId="ddacc756-344a-4f82-a099-06c374999204" providerId="ADAL" clId="{76BE9B13-4954-44CE-8385-DDB7860BD176}" dt="2025-04-02T07:49:05.039" v="622" actId="2696"/>
-        <pc:sldMkLst>
-          <pc:docMk/>
-          <pc:sldMk cId="879357090" sldId="271"/>
-        </pc:sldMkLst>
-      </pc:sldChg>
-      <pc:sldChg chg="addSp delSp modSp new mod setBg">
-        <pc:chgData name="Kylie Afable" userId="ddacc756-344a-4f82-a099-06c374999204" providerId="ADAL" clId="{76BE9B13-4954-44CE-8385-DDB7860BD176}" dt="2025-04-02T09:31:25.425" v="3440" actId="115"/>
-        <pc:sldMkLst>
-          <pc:docMk/>
-          <pc:sldMk cId="2891166803" sldId="272"/>
-        </pc:sldMkLst>
-        <pc:spChg chg="mod">
-          <ac:chgData name="Kylie Afable" userId="ddacc756-344a-4f82-a099-06c374999204" providerId="ADAL" clId="{76BE9B13-4954-44CE-8385-DDB7860BD176}" dt="2025-04-02T09:21:40.148" v="2776" actId="26606"/>
-          <ac:spMkLst>
-            <pc:docMk/>
-            <pc:sldMk cId="2891166803" sldId="272"/>
-            <ac:spMk id="2" creationId="{C9420D42-EDC0-9553-897F-B99808AA5F70}"/>
-          </ac:spMkLst>
-        </pc:spChg>
-        <pc:spChg chg="add mod">
-          <ac:chgData name="Kylie Afable" userId="ddacc756-344a-4f82-a099-06c374999204" providerId="ADAL" clId="{76BE9B13-4954-44CE-8385-DDB7860BD176}" dt="2025-04-02T09:31:25.425" v="3440" actId="115"/>
-          <ac:spMkLst>
-            <pc:docMk/>
-            <pc:sldMk cId="2891166803" sldId="272"/>
-            <ac:spMk id="6" creationId="{B06B55FE-D05D-1E29-C2FF-A590F04B7CAC}"/>
-          </ac:spMkLst>
-        </pc:spChg>
-        <pc:spChg chg="add mod">
-          <ac:chgData name="Kylie Afable" userId="ddacc756-344a-4f82-a099-06c374999204" providerId="ADAL" clId="{76BE9B13-4954-44CE-8385-DDB7860BD176}" dt="2025-04-02T09:22:08.371" v="2815" actId="1076"/>
-          <ac:spMkLst>
-            <pc:docMk/>
-            <pc:sldMk cId="2891166803" sldId="272"/>
-            <ac:spMk id="11" creationId="{0223274E-944C-507D-D01A-E299BF25C5C0}"/>
-          </ac:spMkLst>
-        </pc:spChg>
-        <pc:picChg chg="add mod ord">
-          <ac:chgData name="Kylie Afable" userId="ddacc756-344a-4f82-a099-06c374999204" providerId="ADAL" clId="{76BE9B13-4954-44CE-8385-DDB7860BD176}" dt="2025-04-02T09:21:40.148" v="2776" actId="26606"/>
-          <ac:picMkLst>
-            <pc:docMk/>
-            <pc:sldMk cId="2891166803" sldId="272"/>
-            <ac:picMk id="10" creationId="{8548E211-0B5E-6052-9018-3B50EACE3EDB}"/>
-          </ac:picMkLst>
-        </pc:picChg>
-      </pc:sldChg>
-      <pc:sldChg chg="modSp new mod">
-        <pc:chgData name="Kylie Afable" userId="ddacc756-344a-4f82-a099-06c374999204" providerId="ADAL" clId="{76BE9B13-4954-44CE-8385-DDB7860BD176}" dt="2025-04-03T03:41:39.826" v="3442"/>
-        <pc:sldMkLst>
-          <pc:docMk/>
-          <pc:sldMk cId="3381972177" sldId="275"/>
-        </pc:sldMkLst>
-        <pc:spChg chg="mod">
-          <ac:chgData name="Kylie Afable" userId="ddacc756-344a-4f82-a099-06c374999204" providerId="ADAL" clId="{76BE9B13-4954-44CE-8385-DDB7860BD176}" dt="2025-04-03T03:41:39.826" v="3442"/>
-          <ac:spMkLst>
-            <pc:docMk/>
-            <pc:sldMk cId="3381972177" sldId="275"/>
-            <ac:spMk id="3" creationId="{C669E754-B154-F1A9-C115-E479C1F55B58}"/>
+            <pc:sldMk cId="1996559424" sldId="267"/>
+            <ac:spMk id="3" creationId="{D1E8B8C7-A810-B352-D981-9691E3BBCDAB}"/>
           </ac:spMkLst>
         </pc:spChg>
       </pc:sldChg>
     </pc:docChg>
   </pc:docChgLst>
   <pc:docChgLst>
-    <pc:chgData name="Kylie Afable" userId="ddacc756-344a-4f82-a099-06c374999204" providerId="ADAL" clId="{477E878B-3570-40A6-9348-62984BD1D141}"/>
-    <pc:docChg chg="modSld sldOrd">
-      <pc:chgData name="Kylie Afable" userId="ddacc756-344a-4f82-a099-06c374999204" providerId="ADAL" clId="{477E878B-3570-40A6-9348-62984BD1D141}" dt="2025-04-02T23:02:09.668" v="1"/>
-      <pc:docMkLst>
-        <pc:docMk/>
-      </pc:docMkLst>
-      <pc:sldChg chg="ord">
-        <pc:chgData name="Kylie Afable" userId="ddacc756-344a-4f82-a099-06c374999204" providerId="ADAL" clId="{477E878B-3570-40A6-9348-62984BD1D141}" dt="2025-04-02T23:02:09.668" v="1"/>
-        <pc:sldMkLst>
-          <pc:docMk/>
-          <pc:sldMk cId="3550247993" sldId="259"/>
-        </pc:sldMkLst>
-      </pc:sldChg>
-    </pc:docChg>
-  </pc:docChgLst>
-  <pc:docChgLst>
     <pc:chgData name="Nathan Quai Hoi" userId="7f6a9d7e-9f9d-48c5-9ed4-7cb551ec731d" providerId="ADAL" clId="{5B733FFD-7503-43D4-AFCC-F2A13FAC2705}"/>
-    <pc:docChg chg="undo custSel modSld">
-      <pc:chgData name="Nathan Quai Hoi" userId="7f6a9d7e-9f9d-48c5-9ed4-7cb551ec731d" providerId="ADAL" clId="{5B733FFD-7503-43D4-AFCC-F2A13FAC2705}" dt="2025-04-02T09:33:11.852" v="612" actId="20577"/>
+    <pc:docChg chg="modSld">
+      <pc:chgData name="Nathan Quai Hoi" userId="7f6a9d7e-9f9d-48c5-9ed4-7cb551ec731d" providerId="ADAL" clId="{5B733FFD-7503-43D4-AFCC-F2A13FAC2705}" dt="2025-04-02T07:31:49.627" v="3" actId="20577"/>
       <pc:docMkLst>
         <pc:docMk/>
       </pc:docMkLst>
       <pc:sldChg chg="modSp mod">
-        <pc:chgData name="Nathan Quai Hoi" userId="7f6a9d7e-9f9d-48c5-9ed4-7cb551ec731d" providerId="ADAL" clId="{5B733FFD-7503-43D4-AFCC-F2A13FAC2705}" dt="2025-04-02T07:43:13.146" v="598" actId="20577"/>
+        <pc:chgData name="Nathan Quai Hoi" userId="7f6a9d7e-9f9d-48c5-9ed4-7cb551ec731d" providerId="ADAL" clId="{5B733FFD-7503-43D4-AFCC-F2A13FAC2705}" dt="2025-04-02T07:21:49.372" v="0" actId="20577"/>
         <pc:sldMkLst>
           <pc:docMk/>
           <pc:sldMk cId="2028713515" sldId="257"/>
         </pc:sldMkLst>
         <pc:spChg chg="mod">
-          <ac:chgData name="Nathan Quai Hoi" userId="7f6a9d7e-9f9d-48c5-9ed4-7cb551ec731d" providerId="ADAL" clId="{5B733FFD-7503-43D4-AFCC-F2A13FAC2705}" dt="2025-04-02T07:43:13.146" v="598" actId="20577"/>
+          <ac:chgData name="Nathan Quai Hoi" userId="7f6a9d7e-9f9d-48c5-9ed4-7cb551ec731d" providerId="ADAL" clId="{5B733FFD-7503-43D4-AFCC-F2A13FAC2705}" dt="2025-04-02T07:21:49.372" v="0" actId="20577"/>
           <ac:spMkLst>
             <pc:docMk/>
             <pc:sldMk cId="2028713515" sldId="257"/>
@@ -731,158 +983,45 @@
         </pc:spChg>
       </pc:sldChg>
       <pc:sldChg chg="modSp mod">
-        <pc:chgData name="Nathan Quai Hoi" userId="7f6a9d7e-9f9d-48c5-9ed4-7cb551ec731d" providerId="ADAL" clId="{5B733FFD-7503-43D4-AFCC-F2A13FAC2705}" dt="2025-04-02T07:43:32.044" v="607" actId="20577"/>
+        <pc:chgData name="Nathan Quai Hoi" userId="7f6a9d7e-9f9d-48c5-9ed4-7cb551ec731d" providerId="ADAL" clId="{5B733FFD-7503-43D4-AFCC-F2A13FAC2705}" dt="2025-04-02T07:31:49.627" v="3" actId="20577"/>
         <pc:sldMkLst>
           <pc:docMk/>
           <pc:sldMk cId="3550247993" sldId="259"/>
         </pc:sldMkLst>
-      </pc:sldChg>
-      <pc:sldChg chg="modSp mod">
-        <pc:chgData name="Nathan Quai Hoi" userId="7f6a9d7e-9f9d-48c5-9ed4-7cb551ec731d" providerId="ADAL" clId="{5B733FFD-7503-43D4-AFCC-F2A13FAC2705}" dt="2025-04-02T09:33:11.852" v="612" actId="20577"/>
-        <pc:sldMkLst>
-          <pc:docMk/>
-          <pc:sldMk cId="3549023980" sldId="262"/>
-        </pc:sldMkLst>
         <pc:spChg chg="mod">
-          <ac:chgData name="Nathan Quai Hoi" userId="7f6a9d7e-9f9d-48c5-9ed4-7cb551ec731d" providerId="ADAL" clId="{5B733FFD-7503-43D4-AFCC-F2A13FAC2705}" dt="2025-04-02T09:33:11.852" v="612" actId="20577"/>
+          <ac:chgData name="Nathan Quai Hoi" userId="7f6a9d7e-9f9d-48c5-9ed4-7cb551ec731d" providerId="ADAL" clId="{5B733FFD-7503-43D4-AFCC-F2A13FAC2705}" dt="2025-04-02T07:31:49.627" v="3" actId="20577"/>
           <ac:spMkLst>
             <pc:docMk/>
-            <pc:sldMk cId="3549023980" sldId="262"/>
-            <ac:spMk id="3" creationId="{29312F50-E719-E906-B00D-C213C7F420D7}"/>
-          </ac:spMkLst>
-        </pc:spChg>
-      </pc:sldChg>
-      <pc:sldChg chg="modSp mod">
-        <pc:chgData name="Nathan Quai Hoi" userId="7f6a9d7e-9f9d-48c5-9ed4-7cb551ec731d" providerId="ADAL" clId="{5B733FFD-7503-43D4-AFCC-F2A13FAC2705}" dt="2025-04-02T07:41:04.420" v="588" actId="15"/>
-        <pc:sldMkLst>
-          <pc:docMk/>
-          <pc:sldMk cId="4156481656" sldId="264"/>
-        </pc:sldMkLst>
-        <pc:spChg chg="mod">
-          <ac:chgData name="Nathan Quai Hoi" userId="7f6a9d7e-9f9d-48c5-9ed4-7cb551ec731d" providerId="ADAL" clId="{5B733FFD-7503-43D4-AFCC-F2A13FAC2705}" dt="2025-04-02T07:41:04.420" v="588" actId="15"/>
-          <ac:spMkLst>
-            <pc:docMk/>
-            <pc:sldMk cId="4156481656" sldId="264"/>
-            <ac:spMk id="3" creationId="{AEDD0EFF-4E46-9C78-6E2A-B5A756AD3F61}"/>
-          </ac:spMkLst>
-        </pc:spChg>
-      </pc:sldChg>
-      <pc:sldChg chg="modSp mod">
-        <pc:chgData name="Nathan Quai Hoi" userId="7f6a9d7e-9f9d-48c5-9ed4-7cb551ec731d" providerId="ADAL" clId="{5B733FFD-7503-43D4-AFCC-F2A13FAC2705}" dt="2025-04-02T07:41:09.745" v="589" actId="15"/>
-        <pc:sldMkLst>
-          <pc:docMk/>
-          <pc:sldMk cId="2117413443" sldId="265"/>
-        </pc:sldMkLst>
-      </pc:sldChg>
-    </pc:docChg>
-  </pc:docChgLst>
-  <pc:docChgLst>
-    <pc:chgData name="Larissa Goh" userId="047381de-f87e-4b32-95fa-b10d7f8e2dd3" providerId="ADAL" clId="{C7C5EA2B-3491-2C41-872D-79F0CAD712EA}"/>
-    <pc:docChg chg="undo custSel modSld">
-      <pc:chgData name="Larissa Goh" userId="047381de-f87e-4b32-95fa-b10d7f8e2dd3" providerId="ADAL" clId="{C7C5EA2B-3491-2C41-872D-79F0CAD712EA}" dt="2025-04-03T00:31:51.901" v="373" actId="20577"/>
-      <pc:docMkLst>
-        <pc:docMk/>
-      </pc:docMkLst>
-      <pc:sldChg chg="addSp modSp mod">
-        <pc:chgData name="Larissa Goh" userId="047381de-f87e-4b32-95fa-b10d7f8e2dd3" providerId="ADAL" clId="{C7C5EA2B-3491-2C41-872D-79F0CAD712EA}" dt="2025-04-03T00:31:51.901" v="373" actId="20577"/>
-        <pc:sldMkLst>
-          <pc:docMk/>
-          <pc:sldMk cId="4156481656" sldId="264"/>
-        </pc:sldMkLst>
-        <pc:spChg chg="mod">
-          <ac:chgData name="Larissa Goh" userId="047381de-f87e-4b32-95fa-b10d7f8e2dd3" providerId="ADAL" clId="{C7C5EA2B-3491-2C41-872D-79F0CAD712EA}" dt="2025-04-03T00:31:51.901" v="373" actId="20577"/>
-          <ac:spMkLst>
-            <pc:docMk/>
-            <pc:sldMk cId="4156481656" sldId="264"/>
-            <ac:spMk id="3" creationId="{AEDD0EFF-4E46-9C78-6E2A-B5A756AD3F61}"/>
-          </ac:spMkLst>
-        </pc:spChg>
-        <pc:spChg chg="add mod">
-          <ac:chgData name="Larissa Goh" userId="047381de-f87e-4b32-95fa-b10d7f8e2dd3" providerId="ADAL" clId="{C7C5EA2B-3491-2C41-872D-79F0CAD712EA}" dt="2025-04-02T08:56:40.920" v="316" actId="255"/>
-          <ac:spMkLst>
-            <pc:docMk/>
-            <pc:sldMk cId="4156481656" sldId="264"/>
-            <ac:spMk id="7" creationId="{068AE963-8B99-1221-DDB0-2ADA1FDC6A36}"/>
-          </ac:spMkLst>
-        </pc:spChg>
-      </pc:sldChg>
-      <pc:sldChg chg="modSp mod">
-        <pc:chgData name="Larissa Goh" userId="047381de-f87e-4b32-95fa-b10d7f8e2dd3" providerId="ADAL" clId="{C7C5EA2B-3491-2C41-872D-79F0CAD712EA}" dt="2025-04-02T23:56:46.264" v="317" actId="20577"/>
-        <pc:sldMkLst>
-          <pc:docMk/>
-          <pc:sldMk cId="2891166803" sldId="272"/>
-        </pc:sldMkLst>
-        <pc:spChg chg="mod">
-          <ac:chgData name="Larissa Goh" userId="047381de-f87e-4b32-95fa-b10d7f8e2dd3" providerId="ADAL" clId="{C7C5EA2B-3491-2C41-872D-79F0CAD712EA}" dt="2025-04-02T23:56:46.264" v="317" actId="20577"/>
-          <ac:spMkLst>
-            <pc:docMk/>
-            <pc:sldMk cId="2891166803" sldId="272"/>
-            <ac:spMk id="6" creationId="{B06B55FE-D05D-1E29-C2FF-A590F04B7CAC}"/>
+            <pc:sldMk cId="3550247993" sldId="259"/>
+            <ac:spMk id="3" creationId="{7B9CD419-57B3-8910-F052-479BCFDD3C18}"/>
           </ac:spMkLst>
         </pc:spChg>
       </pc:sldChg>
     </pc:docChg>
   </pc:docChgLst>
   <pc:docChgLst>
-    <pc:chgData name="Win Phyo" userId="5778c2b5-85a0-4e7e-8d5b-07d92181d479" providerId="ADAL" clId="{D22408A7-21C2-40C7-884F-CCACF5F2EE8C}"/>
-    <pc:docChg chg="undo custSel addSld delSld modSld sldOrd">
-      <pc:chgData name="Win Phyo" userId="5778c2b5-85a0-4e7e-8d5b-07d92181d479" providerId="ADAL" clId="{D22408A7-21C2-40C7-884F-CCACF5F2EE8C}" dt="2025-04-07T02:00:42.247" v="1390" actId="13926"/>
+    <pc:chgData name="Charmi Patel" userId="S::fhv9735@autuni.ac.nz::580716cd-6efc-4414-809d-9b046d980771" providerId="AD" clId="Web-{907CB1F7-F43B-A126-E16A-A63A81F62E52}"/>
+    <pc:docChg chg="delSld">
+      <pc:chgData name="Charmi Patel" userId="S::fhv9735@autuni.ac.nz::580716cd-6efc-4414-809d-9b046d980771" providerId="AD" clId="Web-{907CB1F7-F43B-A126-E16A-A63A81F62E52}" dt="2025-04-02T06:55:46.290" v="0"/>
       <pc:docMkLst>
         <pc:docMk/>
       </pc:docMkLst>
-      <pc:sldChg chg="addSp modSp mod">
-        <pc:chgData name="Win Phyo" userId="5778c2b5-85a0-4e7e-8d5b-07d92181d479" providerId="ADAL" clId="{D22408A7-21C2-40C7-884F-CCACF5F2EE8C}" dt="2025-04-03T03:36:52.348" v="1336" actId="1076"/>
+      <pc:sldChg chg="del">
+        <pc:chgData name="Charmi Patel" userId="S::fhv9735@autuni.ac.nz::580716cd-6efc-4414-809d-9b046d980771" providerId="AD" clId="Web-{907CB1F7-F43B-A126-E16A-A63A81F62E52}" dt="2025-04-02T06:55:46.290" v="0"/>
         <pc:sldMkLst>
           <pc:docMk/>
-          <pc:sldMk cId="1312115059" sldId="256"/>
-        </pc:sldMkLst>
-        <pc:spChg chg="mod">
-          <ac:chgData name="Win Phyo" userId="5778c2b5-85a0-4e7e-8d5b-07d92181d479" providerId="ADAL" clId="{D22408A7-21C2-40C7-884F-CCACF5F2EE8C}" dt="2025-04-03T03:36:14.732" v="1302" actId="27636"/>
-          <ac:spMkLst>
-            <pc:docMk/>
-            <pc:sldMk cId="1312115059" sldId="256"/>
-            <ac:spMk id="3" creationId="{8BBE5EAA-25F7-6FFE-DFFC-0F1610D14EE6}"/>
-          </ac:spMkLst>
-        </pc:spChg>
-        <pc:spChg chg="add mod">
-          <ac:chgData name="Win Phyo" userId="5778c2b5-85a0-4e7e-8d5b-07d92181d479" providerId="ADAL" clId="{D22408A7-21C2-40C7-884F-CCACF5F2EE8C}" dt="2025-04-03T03:36:52.348" v="1336" actId="1076"/>
-          <ac:spMkLst>
-            <pc:docMk/>
-            <pc:sldMk cId="1312115059" sldId="256"/>
-            <ac:spMk id="5" creationId="{10303C85-248F-3F8A-1C9B-3E43775B242D}"/>
-          </ac:spMkLst>
-        </pc:spChg>
-      </pc:sldChg>
-      <pc:sldChg chg="addSp modSp mod">
-        <pc:chgData name="Win Phyo" userId="5778c2b5-85a0-4e7e-8d5b-07d92181d479" providerId="ADAL" clId="{D22408A7-21C2-40C7-884F-CCACF5F2EE8C}" dt="2025-04-03T03:35:52.155" v="1299" actId="20577"/>
-        <pc:sldMkLst>
-          <pc:docMk/>
-          <pc:sldMk cId="2028713515" sldId="257"/>
-        </pc:sldMkLst>
-        <pc:spChg chg="mod">
-          <ac:chgData name="Win Phyo" userId="5778c2b5-85a0-4e7e-8d5b-07d92181d479" providerId="ADAL" clId="{D22408A7-21C2-40C7-884F-CCACF5F2EE8C}" dt="2025-04-03T03:35:37.859" v="1239" actId="20577"/>
-          <ac:spMkLst>
-            <pc:docMk/>
-            <pc:sldMk cId="2028713515" sldId="257"/>
-            <ac:spMk id="2" creationId="{CEC5995D-441A-CFD2-F44A-C1F865DE2E32}"/>
-          </ac:spMkLst>
-        </pc:spChg>
-        <pc:spChg chg="add mod">
-          <ac:chgData name="Win Phyo" userId="5778c2b5-85a0-4e7e-8d5b-07d92181d479" providerId="ADAL" clId="{D22408A7-21C2-40C7-884F-CCACF5F2EE8C}" dt="2025-04-03T03:35:52.155" v="1299" actId="20577"/>
-          <ac:spMkLst>
-            <pc:docMk/>
-            <pc:sldMk cId="2028713515" sldId="257"/>
-            <ac:spMk id="4" creationId="{78811BD0-EB18-A43F-E5D0-36CC90331F2D}"/>
-          </ac:spMkLst>
-        </pc:spChg>
-      </pc:sldChg>
-      <pc:sldChg chg="del">
-        <pc:chgData name="Win Phyo" userId="5778c2b5-85a0-4e7e-8d5b-07d92181d479" providerId="ADAL" clId="{D22408A7-21C2-40C7-884F-CCACF5F2EE8C}" dt="2025-04-03T03:35:35.094" v="1238" actId="2696"/>
-        <pc:sldMkLst>
-          <pc:docMk/>
-          <pc:sldMk cId="3550247993" sldId="259"/>
+          <pc:sldMk cId="1172909354" sldId="258"/>
         </pc:sldMkLst>
       </pc:sldChg>
+    </pc:docChg>
+  </pc:docChgLst>
+  <pc:docChgLst>
+    <pc:chgData name="Win Phyo" userId="5778c2b5-85a0-4e7e-8d5b-07d92181d479" providerId="ADAL" clId="{D22408A7-21C2-40C7-884F-CCACF5F2EE8C}"/>
+    <pc:docChg chg="modSld sldOrd">
+      <pc:chgData name="Win Phyo" userId="5778c2b5-85a0-4e7e-8d5b-07d92181d479" providerId="ADAL" clId="{D22408A7-21C2-40C7-884F-CCACF5F2EE8C}" dt="2025-04-02T00:11:53.755" v="6" actId="20577"/>
+      <pc:docMkLst>
+        <pc:docMk/>
+      </pc:docMkLst>
       <pc:sldChg chg="modSp mod">
         <pc:chgData name="Win Phyo" userId="5778c2b5-85a0-4e7e-8d5b-07d92181d479" providerId="ADAL" clId="{D22408A7-21C2-40C7-884F-CCACF5F2EE8C}" dt="2025-04-02T00:11:53.755" v="6" actId="20577"/>
         <pc:sldMkLst>
@@ -898,429 +1037,11 @@
           </ac:spMkLst>
         </pc:spChg>
       </pc:sldChg>
-      <pc:sldChg chg="modSp mod">
-        <pc:chgData name="Win Phyo" userId="5778c2b5-85a0-4e7e-8d5b-07d92181d479" providerId="ADAL" clId="{D22408A7-21C2-40C7-884F-CCACF5F2EE8C}" dt="2025-04-02T23:47:30.581" v="1200" actId="20577"/>
-        <pc:sldMkLst>
-          <pc:docMk/>
-          <pc:sldMk cId="3549023980" sldId="262"/>
-        </pc:sldMkLst>
-        <pc:spChg chg="mod">
-          <ac:chgData name="Win Phyo" userId="5778c2b5-85a0-4e7e-8d5b-07d92181d479" providerId="ADAL" clId="{D22408A7-21C2-40C7-884F-CCACF5F2EE8C}" dt="2025-04-02T23:47:30.581" v="1200" actId="20577"/>
-          <ac:spMkLst>
-            <pc:docMk/>
-            <pc:sldMk cId="3549023980" sldId="262"/>
-            <ac:spMk id="3" creationId="{29312F50-E719-E906-B00D-C213C7F420D7}"/>
-          </ac:spMkLst>
-        </pc:spChg>
-      </pc:sldChg>
-      <pc:sldChg chg="addSp modSp mod ord">
-        <pc:chgData name="Win Phyo" userId="5778c2b5-85a0-4e7e-8d5b-07d92181d479" providerId="ADAL" clId="{D22408A7-21C2-40C7-884F-CCACF5F2EE8C}" dt="2025-04-01T20:20:27.405" v="887"/>
+      <pc:sldChg chg="ord">
+        <pc:chgData name="Win Phyo" userId="5778c2b5-85a0-4e7e-8d5b-07d92181d479" providerId="ADAL" clId="{D22408A7-21C2-40C7-884F-CCACF5F2EE8C}" dt="2025-03-31T04:29:38.313" v="1"/>
         <pc:sldMkLst>
           <pc:docMk/>
           <pc:sldMk cId="215071416" sldId="263"/>
-        </pc:sldMkLst>
-        <pc:graphicFrameChg chg="add mod modGraphic">
-          <ac:chgData name="Win Phyo" userId="5778c2b5-85a0-4e7e-8d5b-07d92181d479" providerId="ADAL" clId="{D22408A7-21C2-40C7-884F-CCACF5F2EE8C}" dt="2025-04-01T19:47:50.193" v="255" actId="1076"/>
-          <ac:graphicFrameMkLst>
-            <pc:docMk/>
-            <pc:sldMk cId="215071416" sldId="263"/>
-            <ac:graphicFrameMk id="7" creationId="{56B97867-9F0B-A4AC-E86A-EFC9CAE828EB}"/>
-          </ac:graphicFrameMkLst>
-        </pc:graphicFrameChg>
-        <pc:picChg chg="add mod">
-          <ac:chgData name="Win Phyo" userId="5778c2b5-85a0-4e7e-8d5b-07d92181d479" providerId="ADAL" clId="{D22408A7-21C2-40C7-884F-CCACF5F2EE8C}" dt="2025-04-01T20:17:45.966" v="837" actId="1076"/>
-          <ac:picMkLst>
-            <pc:docMk/>
-            <pc:sldMk cId="215071416" sldId="263"/>
-            <ac:picMk id="4" creationId="{BCB557D1-3562-9A69-E63A-78AC13BE6439}"/>
-          </ac:picMkLst>
-        </pc:picChg>
-      </pc:sldChg>
-      <pc:sldChg chg="modSp mod">
-        <pc:chgData name="Win Phyo" userId="5778c2b5-85a0-4e7e-8d5b-07d92181d479" providerId="ADAL" clId="{D22408A7-21C2-40C7-884F-CCACF5F2EE8C}" dt="2025-04-07T01:58:00.828" v="1337" actId="1076"/>
-        <pc:sldMkLst>
-          <pc:docMk/>
-          <pc:sldMk cId="4156481656" sldId="264"/>
-        </pc:sldMkLst>
-        <pc:spChg chg="mod">
-          <ac:chgData name="Win Phyo" userId="5778c2b5-85a0-4e7e-8d5b-07d92181d479" providerId="ADAL" clId="{D22408A7-21C2-40C7-884F-CCACF5F2EE8C}" dt="2025-04-01T19:24:17.156" v="9" actId="14100"/>
-          <ac:spMkLst>
-            <pc:docMk/>
-            <pc:sldMk cId="4156481656" sldId="264"/>
-            <ac:spMk id="3" creationId="{AEDD0EFF-4E46-9C78-6E2A-B5A756AD3F61}"/>
-          </ac:spMkLst>
-        </pc:spChg>
-        <pc:spChg chg="mod">
-          <ac:chgData name="Win Phyo" userId="5778c2b5-85a0-4e7e-8d5b-07d92181d479" providerId="ADAL" clId="{D22408A7-21C2-40C7-884F-CCACF5F2EE8C}" dt="2025-04-07T01:58:00.828" v="1337" actId="1076"/>
-          <ac:spMkLst>
-            <pc:docMk/>
-            <pc:sldMk cId="4156481656" sldId="264"/>
-            <ac:spMk id="7" creationId="{068AE963-8B99-1221-DDB0-2ADA1FDC6A36}"/>
-          </ac:spMkLst>
-        </pc:spChg>
-      </pc:sldChg>
-      <pc:sldChg chg="addSp delSp modSp mod ord">
-        <pc:chgData name="Win Phyo" userId="5778c2b5-85a0-4e7e-8d5b-07d92181d479" providerId="ADAL" clId="{D22408A7-21C2-40C7-884F-CCACF5F2EE8C}" dt="2025-04-02T23:54:54.692" v="1209" actId="113"/>
-        <pc:sldMkLst>
-          <pc:docMk/>
-          <pc:sldMk cId="2117413443" sldId="265"/>
-        </pc:sldMkLst>
-        <pc:spChg chg="add mod">
-          <ac:chgData name="Win Phyo" userId="5778c2b5-85a0-4e7e-8d5b-07d92181d479" providerId="ADAL" clId="{D22408A7-21C2-40C7-884F-CCACF5F2EE8C}" dt="2025-04-01T20:03:01.238" v="594" actId="20577"/>
-          <ac:spMkLst>
-            <pc:docMk/>
-            <pc:sldMk cId="2117413443" sldId="265"/>
-            <ac:spMk id="5" creationId="{188B4F74-7768-BCB8-A131-5BD8526BF440}"/>
-          </ac:spMkLst>
-        </pc:spChg>
-        <pc:spChg chg="add mod">
-          <ac:chgData name="Win Phyo" userId="5778c2b5-85a0-4e7e-8d5b-07d92181d479" providerId="ADAL" clId="{D22408A7-21C2-40C7-884F-CCACF5F2EE8C}" dt="2025-04-01T20:16:20.246" v="816" actId="1076"/>
-          <ac:spMkLst>
-            <pc:docMk/>
-            <pc:sldMk cId="2117413443" sldId="265"/>
-            <ac:spMk id="13" creationId="{17A7AB81-0A3F-BFC3-054A-4CB5CCF1FAD1}"/>
-          </ac:spMkLst>
-        </pc:spChg>
-        <pc:spChg chg="add mod">
-          <ac:chgData name="Win Phyo" userId="5778c2b5-85a0-4e7e-8d5b-07d92181d479" providerId="ADAL" clId="{D22408A7-21C2-40C7-884F-CCACF5F2EE8C}" dt="2025-04-01T20:16:20.246" v="816" actId="1076"/>
-          <ac:spMkLst>
-            <pc:docMk/>
-            <pc:sldMk cId="2117413443" sldId="265"/>
-            <ac:spMk id="14" creationId="{7A2E6401-9220-39F9-A375-C20084F7A1DE}"/>
-          </ac:spMkLst>
-        </pc:spChg>
-        <pc:spChg chg="add mod">
-          <ac:chgData name="Win Phyo" userId="5778c2b5-85a0-4e7e-8d5b-07d92181d479" providerId="ADAL" clId="{D22408A7-21C2-40C7-884F-CCACF5F2EE8C}" dt="2025-04-01T20:16:20.246" v="816" actId="1076"/>
-          <ac:spMkLst>
-            <pc:docMk/>
-            <pc:sldMk cId="2117413443" sldId="265"/>
-            <ac:spMk id="15" creationId="{F75D2EA6-E0BB-A28A-ACB7-9BF24493B328}"/>
-          </ac:spMkLst>
-        </pc:spChg>
-        <pc:spChg chg="add mod">
-          <ac:chgData name="Win Phyo" userId="5778c2b5-85a0-4e7e-8d5b-07d92181d479" providerId="ADAL" clId="{D22408A7-21C2-40C7-884F-CCACF5F2EE8C}" dt="2025-04-01T20:19:24.504" v="881" actId="20577"/>
-          <ac:spMkLst>
-            <pc:docMk/>
-            <pc:sldMk cId="2117413443" sldId="265"/>
-            <ac:spMk id="18" creationId="{782E7F51-2844-24A3-A663-0B246758671C}"/>
-          </ac:spMkLst>
-        </pc:spChg>
-        <pc:graphicFrameChg chg="add mod modGraphic">
-          <ac:chgData name="Win Phyo" userId="5778c2b5-85a0-4e7e-8d5b-07d92181d479" providerId="ADAL" clId="{D22408A7-21C2-40C7-884F-CCACF5F2EE8C}" dt="2025-04-02T23:54:54.692" v="1209" actId="113"/>
-          <ac:graphicFrameMkLst>
-            <pc:docMk/>
-            <pc:sldMk cId="2117413443" sldId="265"/>
-            <ac:graphicFrameMk id="17" creationId="{8180FDFD-5AF0-62D1-F68D-4828E5C08518}"/>
-          </ac:graphicFrameMkLst>
-        </pc:graphicFrameChg>
-        <pc:picChg chg="add mod">
-          <ac:chgData name="Win Phyo" userId="5778c2b5-85a0-4e7e-8d5b-07d92181d479" providerId="ADAL" clId="{D22408A7-21C2-40C7-884F-CCACF5F2EE8C}" dt="2025-04-01T20:16:25.633" v="819" actId="1076"/>
-          <ac:picMkLst>
-            <pc:docMk/>
-            <pc:sldMk cId="2117413443" sldId="265"/>
-            <ac:picMk id="12" creationId="{916D1096-05F5-9ABE-2912-CBA7F892FEE6}"/>
-          </ac:picMkLst>
-        </pc:picChg>
-      </pc:sldChg>
-      <pc:sldChg chg="addSp delSp modSp mod setBg">
-        <pc:chgData name="Win Phyo" userId="5778c2b5-85a0-4e7e-8d5b-07d92181d479" providerId="ADAL" clId="{D22408A7-21C2-40C7-884F-CCACF5F2EE8C}" dt="2025-04-01T19:26:46.606" v="38" actId="1076"/>
-        <pc:sldMkLst>
-          <pc:docMk/>
-          <pc:sldMk cId="767305761" sldId="268"/>
-        </pc:sldMkLst>
-        <pc:spChg chg="mod">
-          <ac:chgData name="Win Phyo" userId="5778c2b5-85a0-4e7e-8d5b-07d92181d479" providerId="ADAL" clId="{D22408A7-21C2-40C7-884F-CCACF5F2EE8C}" dt="2025-04-01T19:26:43.153" v="37" actId="1076"/>
-          <ac:spMkLst>
-            <pc:docMk/>
-            <pc:sldMk cId="767305761" sldId="268"/>
-            <ac:spMk id="2" creationId="{C3DCF774-7CFE-7B9E-F09F-C8867AC413F6}"/>
-          </ac:spMkLst>
-        </pc:spChg>
-        <pc:graphicFrameChg chg="add mod modGraphic">
-          <ac:chgData name="Win Phyo" userId="5778c2b5-85a0-4e7e-8d5b-07d92181d479" providerId="ADAL" clId="{D22408A7-21C2-40C7-884F-CCACF5F2EE8C}" dt="2025-04-01T19:26:46.606" v="38" actId="1076"/>
-          <ac:graphicFrameMkLst>
-            <pc:docMk/>
-            <pc:sldMk cId="767305761" sldId="268"/>
-            <ac:graphicFrameMk id="7" creationId="{9137E0EB-8822-ADCF-55A6-2AC330D021B9}"/>
-          </ac:graphicFrameMkLst>
-        </pc:graphicFrameChg>
-      </pc:sldChg>
-      <pc:sldChg chg="addSp delSp modSp mod">
-        <pc:chgData name="Win Phyo" userId="5778c2b5-85a0-4e7e-8d5b-07d92181d479" providerId="ADAL" clId="{D22408A7-21C2-40C7-884F-CCACF5F2EE8C}" dt="2025-04-01T19:35:03.125" v="182" actId="1076"/>
-        <pc:sldMkLst>
-          <pc:docMk/>
-          <pc:sldMk cId="788977922" sldId="269"/>
-        </pc:sldMkLst>
-        <pc:spChg chg="add mod">
-          <ac:chgData name="Win Phyo" userId="5778c2b5-85a0-4e7e-8d5b-07d92181d479" providerId="ADAL" clId="{D22408A7-21C2-40C7-884F-CCACF5F2EE8C}" dt="2025-04-01T19:34:53.673" v="178" actId="20577"/>
-          <ac:spMkLst>
-            <pc:docMk/>
-            <pc:sldMk cId="788977922" sldId="269"/>
-            <ac:spMk id="5" creationId="{81FA36E1-C362-8768-1525-A587A5E0B0D2}"/>
-          </ac:spMkLst>
-        </pc:spChg>
-        <pc:graphicFrameChg chg="add mod modGraphic">
-          <ac:chgData name="Win Phyo" userId="5778c2b5-85a0-4e7e-8d5b-07d92181d479" providerId="ADAL" clId="{D22408A7-21C2-40C7-884F-CCACF5F2EE8C}" dt="2025-04-01T19:35:03.125" v="182" actId="1076"/>
-          <ac:graphicFrameMkLst>
-            <pc:docMk/>
-            <pc:sldMk cId="788977922" sldId="269"/>
-            <ac:graphicFrameMk id="4" creationId="{11072660-C17A-82BF-E70E-0E7E9A41A07F}"/>
-          </ac:graphicFrameMkLst>
-        </pc:graphicFrameChg>
-      </pc:sldChg>
-      <pc:sldChg chg="addSp delSp modSp mod">
-        <pc:chgData name="Win Phyo" userId="5778c2b5-85a0-4e7e-8d5b-07d92181d479" providerId="ADAL" clId="{D22408A7-21C2-40C7-884F-CCACF5F2EE8C}" dt="2025-04-01T20:09:28.540" v="600" actId="478"/>
-        <pc:sldMkLst>
-          <pc:docMk/>
-          <pc:sldMk cId="2891166803" sldId="272"/>
-        </pc:sldMkLst>
-      </pc:sldChg>
-      <pc:sldChg chg="modSp new del mod">
-        <pc:chgData name="Win Phyo" userId="5778c2b5-85a0-4e7e-8d5b-07d92181d479" providerId="ADAL" clId="{D22408A7-21C2-40C7-884F-CCACF5F2EE8C}" dt="2025-04-01T20:01:40.446" v="574" actId="47"/>
-        <pc:sldMkLst>
-          <pc:docMk/>
-          <pc:sldMk cId="369626815" sldId="273"/>
-        </pc:sldMkLst>
-      </pc:sldChg>
-      <pc:sldChg chg="addSp delSp modSp new del mod">
-        <pc:chgData name="Win Phyo" userId="5778c2b5-85a0-4e7e-8d5b-07d92181d479" providerId="ADAL" clId="{D22408A7-21C2-40C7-884F-CCACF5F2EE8C}" dt="2025-04-01T20:32:29.652" v="888" actId="47"/>
-        <pc:sldMkLst>
-          <pc:docMk/>
-          <pc:sldMk cId="593590214" sldId="273"/>
-        </pc:sldMkLst>
-      </pc:sldChg>
-      <pc:sldChg chg="delSp modSp new mod">
-        <pc:chgData name="Win Phyo" userId="5778c2b5-85a0-4e7e-8d5b-07d92181d479" providerId="ADAL" clId="{D22408A7-21C2-40C7-884F-CCACF5F2EE8C}" dt="2025-04-02T23:56:53.079" v="1236" actId="478"/>
-        <pc:sldMkLst>
-          <pc:docMk/>
-          <pc:sldMk cId="3645613890" sldId="273"/>
-        </pc:sldMkLst>
-        <pc:spChg chg="mod">
-          <ac:chgData name="Win Phyo" userId="5778c2b5-85a0-4e7e-8d5b-07d92181d479" providerId="ADAL" clId="{D22408A7-21C2-40C7-884F-CCACF5F2EE8C}" dt="2025-04-02T23:56:49.190" v="1235" actId="20577"/>
-          <ac:spMkLst>
-            <pc:docMk/>
-            <pc:sldMk cId="3645613890" sldId="273"/>
-            <ac:spMk id="2" creationId="{28B16872-F13E-6E07-F23F-ABD836D54A8F}"/>
-          </ac:spMkLst>
-        </pc:spChg>
-      </pc:sldChg>
-      <pc:sldChg chg="new">
-        <pc:chgData name="Win Phyo" userId="5778c2b5-85a0-4e7e-8d5b-07d92181d479" providerId="ADAL" clId="{D22408A7-21C2-40C7-884F-CCACF5F2EE8C}" dt="2025-04-03T03:35:32.670" v="1237" actId="680"/>
-        <pc:sldMkLst>
-          <pc:docMk/>
-          <pc:sldMk cId="3539396043" sldId="274"/>
-        </pc:sldMkLst>
-      </pc:sldChg>
-      <pc:sldChg chg="modSp mod">
-        <pc:chgData name="Win Phyo" userId="5778c2b5-85a0-4e7e-8d5b-07d92181d479" providerId="ADAL" clId="{D22408A7-21C2-40C7-884F-CCACF5F2EE8C}" dt="2025-04-07T02:00:42.247" v="1390" actId="13926"/>
-        <pc:sldMkLst>
-          <pc:docMk/>
-          <pc:sldMk cId="3381972177" sldId="275"/>
-        </pc:sldMkLst>
-        <pc:spChg chg="mod">
-          <ac:chgData name="Win Phyo" userId="5778c2b5-85a0-4e7e-8d5b-07d92181d479" providerId="ADAL" clId="{D22408A7-21C2-40C7-884F-CCACF5F2EE8C}" dt="2025-04-07T02:00:42.247" v="1390" actId="13926"/>
-          <ac:spMkLst>
-            <pc:docMk/>
-            <pc:sldMk cId="3381972177" sldId="275"/>
-            <ac:spMk id="3" creationId="{C669E754-B154-F1A9-C115-E479C1F55B58}"/>
-          </ac:spMkLst>
-        </pc:spChg>
-      </pc:sldChg>
-    </pc:docChg>
-  </pc:docChgLst>
-  <pc:docChgLst>
-    <pc:chgData name="Thomas Hugh Robinson" userId="ba43011d-005d-435c-943e-000ddbddd6d2" providerId="ADAL" clId="{67A63CD0-A5EE-45CC-A742-884076144B30}"/>
-    <pc:docChg chg="undo custSel modSld">
-      <pc:chgData name="Thomas Hugh Robinson" userId="ba43011d-005d-435c-943e-000ddbddd6d2" providerId="ADAL" clId="{67A63CD0-A5EE-45CC-A742-884076144B30}" dt="2025-04-02T16:05:52.736" v="137" actId="20577"/>
-      <pc:docMkLst>
-        <pc:docMk/>
-      </pc:docMkLst>
-      <pc:sldChg chg="modSp mod">
-        <pc:chgData name="Thomas Hugh Robinson" userId="ba43011d-005d-435c-943e-000ddbddd6d2" providerId="ADAL" clId="{67A63CD0-A5EE-45CC-A742-884076144B30}" dt="2025-04-02T09:58:57.909" v="21" actId="20577"/>
-        <pc:sldMkLst>
-          <pc:docMk/>
-          <pc:sldMk cId="4155465151" sldId="261"/>
-        </pc:sldMkLst>
-        <pc:spChg chg="mod">
-          <ac:chgData name="Thomas Hugh Robinson" userId="ba43011d-005d-435c-943e-000ddbddd6d2" providerId="ADAL" clId="{67A63CD0-A5EE-45CC-A742-884076144B30}" dt="2025-04-02T09:58:57.909" v="21" actId="20577"/>
-          <ac:spMkLst>
-            <pc:docMk/>
-            <pc:sldMk cId="4155465151" sldId="261"/>
-            <ac:spMk id="3" creationId="{B17FCFA5-C686-A664-C225-57537FBFDC18}"/>
-          </ac:spMkLst>
-        </pc:spChg>
-      </pc:sldChg>
-      <pc:sldChg chg="addSp delSp modSp mod modClrScheme chgLayout">
-        <pc:chgData name="Thomas Hugh Robinson" userId="ba43011d-005d-435c-943e-000ddbddd6d2" providerId="ADAL" clId="{67A63CD0-A5EE-45CC-A742-884076144B30}" dt="2025-04-02T16:05:52.736" v="137" actId="20577"/>
-        <pc:sldMkLst>
-          <pc:docMk/>
-          <pc:sldMk cId="1996559424" sldId="267"/>
-        </pc:sldMkLst>
-        <pc:spChg chg="mod ord">
-          <ac:chgData name="Thomas Hugh Robinson" userId="ba43011d-005d-435c-943e-000ddbddd6d2" providerId="ADAL" clId="{67A63CD0-A5EE-45CC-A742-884076144B30}" dt="2025-04-02T16:05:52.736" v="137" actId="20577"/>
-          <ac:spMkLst>
-            <pc:docMk/>
-            <pc:sldMk cId="1996559424" sldId="267"/>
-            <ac:spMk id="2" creationId="{69F2E5E3-C2F0-F8C6-AE8E-165BDB409945}"/>
-          </ac:spMkLst>
-        </pc:spChg>
-        <pc:spChg chg="add mod ord">
-          <ac:chgData name="Thomas Hugh Robinson" userId="ba43011d-005d-435c-943e-000ddbddd6d2" providerId="ADAL" clId="{67A63CD0-A5EE-45CC-A742-884076144B30}" dt="2025-04-02T16:04:52.057" v="117" actId="20577"/>
-          <ac:spMkLst>
-            <pc:docMk/>
-            <pc:sldMk cId="1996559424" sldId="267"/>
-            <ac:spMk id="6" creationId="{63029A99-0ECD-C71B-3659-C09FED921BAE}"/>
-          </ac:spMkLst>
-        </pc:spChg>
-        <pc:spChg chg="add mod ord">
-          <ac:chgData name="Thomas Hugh Robinson" userId="ba43011d-005d-435c-943e-000ddbddd6d2" providerId="ADAL" clId="{67A63CD0-A5EE-45CC-A742-884076144B30}" dt="2025-04-02T16:05:35.167" v="125" actId="1076"/>
-          <ac:spMkLst>
-            <pc:docMk/>
-            <pc:sldMk cId="1996559424" sldId="267"/>
-            <ac:spMk id="7" creationId="{163C8634-2321-0222-CDFC-56C91B3BFF67}"/>
-          </ac:spMkLst>
-        </pc:spChg>
-      </pc:sldChg>
-    </pc:docChg>
-  </pc:docChgLst>
-  <pc:docChgLst>
-    <pc:chgData name="Charmi Patel" userId="S::fhv9735@autuni.ac.nz::580716cd-6efc-4414-809d-9b046d980771" providerId="AD" clId="Web-{308C7EEF-AA3B-1257-8A80-7842BC6C4BC9}"/>
-    <pc:docChg chg="modSld">
-      <pc:chgData name="Charmi Patel" userId="S::fhv9735@autuni.ac.nz::580716cd-6efc-4414-809d-9b046d980771" providerId="AD" clId="Web-{308C7EEF-AA3B-1257-8A80-7842BC6C4BC9}" dt="2025-04-07T01:34:08.237" v="5" actId="20577"/>
-      <pc:docMkLst>
-        <pc:docMk/>
-      </pc:docMkLst>
-      <pc:sldChg chg="modSp">
-        <pc:chgData name="Charmi Patel" userId="S::fhv9735@autuni.ac.nz::580716cd-6efc-4414-809d-9b046d980771" providerId="AD" clId="Web-{308C7EEF-AA3B-1257-8A80-7842BC6C4BC9}" dt="2025-04-07T01:34:08.237" v="5" actId="20577"/>
-        <pc:sldMkLst>
-          <pc:docMk/>
-          <pc:sldMk cId="3381972177" sldId="275"/>
-        </pc:sldMkLst>
-        <pc:spChg chg="mod">
-          <ac:chgData name="Charmi Patel" userId="S::fhv9735@autuni.ac.nz::580716cd-6efc-4414-809d-9b046d980771" providerId="AD" clId="Web-{308C7EEF-AA3B-1257-8A80-7842BC6C4BC9}" dt="2025-04-07T01:34:08.237" v="5" actId="20577"/>
-          <ac:spMkLst>
-            <pc:docMk/>
-            <pc:sldMk cId="3381972177" sldId="275"/>
-            <ac:spMk id="2" creationId="{8A9AAE14-4D82-F483-ADC0-49FF54C6DB53}"/>
-          </ac:spMkLst>
-        </pc:spChg>
-      </pc:sldChg>
-    </pc:docChg>
-  </pc:docChgLst>
-  <pc:docChgLst>
-    <pc:chgData name="Larissa Goh" userId="047381de-f87e-4b32-95fa-b10d7f8e2dd3" providerId="ADAL" clId="{CC17CF08-6918-45BE-A2A8-C03C55B19E4E}"/>
-    <pc:docChg chg="undo custSel addSld modSld">
-      <pc:chgData name="Larissa Goh" userId="047381de-f87e-4b32-95fa-b10d7f8e2dd3" providerId="ADAL" clId="{CC17CF08-6918-45BE-A2A8-C03C55B19E4E}" dt="2025-04-06T01:25:25.764" v="273" actId="20577"/>
-      <pc:docMkLst>
-        <pc:docMk/>
-      </pc:docMkLst>
-      <pc:sldChg chg="addSp modSp mod">
-        <pc:chgData name="Larissa Goh" userId="047381de-f87e-4b32-95fa-b10d7f8e2dd3" providerId="ADAL" clId="{CC17CF08-6918-45BE-A2A8-C03C55B19E4E}" dt="2025-04-06T01:25:25.764" v="273" actId="20577"/>
-        <pc:sldMkLst>
-          <pc:docMk/>
-          <pc:sldMk cId="4156481656" sldId="264"/>
-        </pc:sldMkLst>
-        <pc:spChg chg="mod">
-          <ac:chgData name="Larissa Goh" userId="047381de-f87e-4b32-95fa-b10d7f8e2dd3" providerId="ADAL" clId="{CC17CF08-6918-45BE-A2A8-C03C55B19E4E}" dt="2025-04-06T01:06:28.265" v="2" actId="20577"/>
-          <ac:spMkLst>
-            <pc:docMk/>
-            <pc:sldMk cId="4156481656" sldId="264"/>
-            <ac:spMk id="2" creationId="{445F1625-CE67-0C18-A3C5-C42F3A84332C}"/>
-          </ac:spMkLst>
-        </pc:spChg>
-        <pc:spChg chg="mod">
-          <ac:chgData name="Larissa Goh" userId="047381de-f87e-4b32-95fa-b10d7f8e2dd3" providerId="ADAL" clId="{CC17CF08-6918-45BE-A2A8-C03C55B19E4E}" dt="2025-04-06T01:25:25.764" v="273" actId="20577"/>
-          <ac:spMkLst>
-            <pc:docMk/>
-            <pc:sldMk cId="4156481656" sldId="264"/>
-            <ac:spMk id="3" creationId="{AEDD0EFF-4E46-9C78-6E2A-B5A756AD3F61}"/>
-          </ac:spMkLst>
-        </pc:spChg>
-        <pc:spChg chg="add">
-          <ac:chgData name="Larissa Goh" userId="047381de-f87e-4b32-95fa-b10d7f8e2dd3" providerId="ADAL" clId="{CC17CF08-6918-45BE-A2A8-C03C55B19E4E}" dt="2025-04-06T01:12:20.718" v="234"/>
-          <ac:spMkLst>
-            <pc:docMk/>
-            <pc:sldMk cId="4156481656" sldId="264"/>
-            <ac:spMk id="4" creationId="{34BCEAB7-9559-D0C8-4EE0-A2E53E851675}"/>
-          </ac:spMkLst>
-        </pc:spChg>
-        <pc:spChg chg="mod">
-          <ac:chgData name="Larissa Goh" userId="047381de-f87e-4b32-95fa-b10d7f8e2dd3" providerId="ADAL" clId="{CC17CF08-6918-45BE-A2A8-C03C55B19E4E}" dt="2025-04-06T01:14:08.439" v="271" actId="255"/>
-          <ac:spMkLst>
-            <pc:docMk/>
-            <pc:sldMk cId="4156481656" sldId="264"/>
-            <ac:spMk id="7" creationId="{068AE963-8B99-1221-DDB0-2ADA1FDC6A36}"/>
-          </ac:spMkLst>
-        </pc:spChg>
-      </pc:sldChg>
-      <pc:sldChg chg="modSp new mod">
-        <pc:chgData name="Larissa Goh" userId="047381de-f87e-4b32-95fa-b10d7f8e2dd3" providerId="ADAL" clId="{CC17CF08-6918-45BE-A2A8-C03C55B19E4E}" dt="2025-04-06T01:08:03.323" v="79"/>
-        <pc:sldMkLst>
-          <pc:docMk/>
-          <pc:sldMk cId="4270490875" sldId="276"/>
-        </pc:sldMkLst>
-        <pc:spChg chg="mod">
-          <ac:chgData name="Larissa Goh" userId="047381de-f87e-4b32-95fa-b10d7f8e2dd3" providerId="ADAL" clId="{CC17CF08-6918-45BE-A2A8-C03C55B19E4E}" dt="2025-04-06T01:06:30.647" v="8" actId="20577"/>
-          <ac:spMkLst>
-            <pc:docMk/>
-            <pc:sldMk cId="4270490875" sldId="276"/>
-            <ac:spMk id="2" creationId="{F90F0BD9-0CEC-0244-AF4A-17C5B7CAD55A}"/>
-          </ac:spMkLst>
-        </pc:spChg>
-        <pc:spChg chg="mod">
-          <ac:chgData name="Larissa Goh" userId="047381de-f87e-4b32-95fa-b10d7f8e2dd3" providerId="ADAL" clId="{CC17CF08-6918-45BE-A2A8-C03C55B19E4E}" dt="2025-04-06T01:08:03.323" v="79"/>
-          <ac:spMkLst>
-            <pc:docMk/>
-            <pc:sldMk cId="4270490875" sldId="276"/>
-            <ac:spMk id="3" creationId="{FF8AE92C-F39A-1DA4-77B5-E8B20A5422C6}"/>
-          </ac:spMkLst>
-        </pc:spChg>
-      </pc:sldChg>
-      <pc:sldChg chg="addSp delSp modSp new mod">
-        <pc:chgData name="Larissa Goh" userId="047381de-f87e-4b32-95fa-b10d7f8e2dd3" providerId="ADAL" clId="{CC17CF08-6918-45BE-A2A8-C03C55B19E4E}" dt="2025-04-06T01:09:56.804" v="120" actId="1076"/>
-        <pc:sldMkLst>
-          <pc:docMk/>
-          <pc:sldMk cId="3380970113" sldId="277"/>
-        </pc:sldMkLst>
-        <pc:spChg chg="mod">
-          <ac:chgData name="Larissa Goh" userId="047381de-f87e-4b32-95fa-b10d7f8e2dd3" providerId="ADAL" clId="{CC17CF08-6918-45BE-A2A8-C03C55B19E4E}" dt="2025-04-06T01:09:36.158" v="116" actId="20577"/>
-          <ac:spMkLst>
-            <pc:docMk/>
-            <pc:sldMk cId="3380970113" sldId="277"/>
-            <ac:spMk id="2" creationId="{71922BBF-3B98-4E52-1318-39B57ADF369C}"/>
-          </ac:spMkLst>
-        </pc:spChg>
-        <pc:spChg chg="del">
-          <ac:chgData name="Larissa Goh" userId="047381de-f87e-4b32-95fa-b10d7f8e2dd3" providerId="ADAL" clId="{CC17CF08-6918-45BE-A2A8-C03C55B19E4E}" dt="2025-04-06T01:09:47.676" v="117"/>
-          <ac:spMkLst>
-            <pc:docMk/>
-            <pc:sldMk cId="3380970113" sldId="277"/>
-            <ac:spMk id="3" creationId="{6297B37A-3B8D-EB76-702C-1847692499B2}"/>
-          </ac:spMkLst>
-        </pc:spChg>
-        <pc:picChg chg="add mod">
-          <ac:chgData name="Larissa Goh" userId="047381de-f87e-4b32-95fa-b10d7f8e2dd3" providerId="ADAL" clId="{CC17CF08-6918-45BE-A2A8-C03C55B19E4E}" dt="2025-04-06T01:09:56.804" v="120" actId="1076"/>
-          <ac:picMkLst>
-            <pc:docMk/>
-            <pc:sldMk cId="3380970113" sldId="277"/>
-            <ac:picMk id="4" creationId="{BB02D37C-52A7-DCDC-5DD0-175FF4254066}"/>
-          </ac:picMkLst>
-        </pc:picChg>
-      </pc:sldChg>
-    </pc:docChg>
-  </pc:docChgLst>
-  <pc:docChgLst>
-    <pc:chgData name="Charmi Patel" userId="S::fhv9735@autuni.ac.nz::580716cd-6efc-4414-809d-9b046d980771" providerId="AD" clId="Web-{75811BB0-2B51-F606-A087-8486B25D756E}"/>
-    <pc:docChg chg="modSld">
-      <pc:chgData name="Charmi Patel" userId="S::fhv9735@autuni.ac.nz::580716cd-6efc-4414-809d-9b046d980771" providerId="AD" clId="Web-{75811BB0-2B51-F606-A087-8486B25D756E}" dt="2025-04-02T08:56:21.853" v="11"/>
-      <pc:docMkLst>
-        <pc:docMk/>
-      </pc:docMkLst>
-      <pc:sldChg chg="addSp delSp modSp">
-        <pc:chgData name="Charmi Patel" userId="S::fhv9735@autuni.ac.nz::580716cd-6efc-4414-809d-9b046d980771" providerId="AD" clId="Web-{75811BB0-2B51-F606-A087-8486B25D756E}" dt="2025-04-02T08:56:21.853" v="11"/>
-        <pc:sldMkLst>
-          <pc:docMk/>
-          <pc:sldMk cId="2117413443" sldId="265"/>
         </pc:sldMkLst>
       </pc:sldChg>
     </pc:docChg>
@@ -1410,7 +1131,7 @@
           <a:p>
             <a:fld id="{11B6E925-58DC-4730-9C91-C676BC645102}" type="datetimeFigureOut">
               <a:rPr lang="en-AU" smtClean="0"/>
-              <a:t>6/04/2025</a:t>
+              <a:t>2/04/2025</a:t>
             </a:fld>
             <a:endParaRPr lang="en-AU"/>
           </a:p>
@@ -1831,7 +1552,7 @@
           <a:p>
             <a:fld id="{442373F6-F2DD-4546-B469-66EE76306866}" type="slidenum">
               <a:rPr lang="en-AU" smtClean="0"/>
-              <a:t>3</a:t>
+              <a:t>2</a:t>
             </a:fld>
             <a:endParaRPr lang="en-AU"/>
           </a:p>
@@ -1841,90 +1562,6 @@
     <p:extLst>
       <p:ext uri="{BB962C8B-B14F-4D97-AF65-F5344CB8AC3E}">
         <p14:creationId xmlns:p14="http://schemas.microsoft.com/office/powerpoint/2010/main" val="1107268395"/>
-      </p:ext>
-    </p:extLst>
-  </p:cSld>
-  <p:clrMapOvr>
-    <a:masterClrMapping/>
-  </p:clrMapOvr>
-</p:notes>
-</file>
-
-<file path=ppt/notesSlides/notesSlide3.xml><?xml version="1.0" encoding="utf-8"?>
-<p:notes xmlns:a="http://schemas.openxmlformats.org/drawingml/2006/main" xmlns:r="http://schemas.openxmlformats.org/officeDocument/2006/relationships" xmlns:p="http://schemas.openxmlformats.org/presentationml/2006/main">
-  <p:cSld>
-    <p:spTree>
-      <p:nvGrpSpPr>
-        <p:cNvPr id="1" name=""/>
-        <p:cNvGrpSpPr/>
-        <p:nvPr/>
-      </p:nvGrpSpPr>
-      <p:grpSpPr>
-        <a:xfrm>
-          <a:off x="0" y="0"/>
-          <a:ext cx="0" cy="0"/>
-          <a:chOff x="0" y="0"/>
-          <a:chExt cx="0" cy="0"/>
-        </a:xfrm>
-      </p:grpSpPr>
-      <p:sp>
-        <p:nvSpPr>
-          <p:cNvPr id="2" name="Slide Image Placeholder 1"/>
-          <p:cNvSpPr>
-            <a:spLocks noGrp="1" noRot="1" noChangeAspect="1"/>
-          </p:cNvSpPr>
-          <p:nvPr>
-            <p:ph type="sldImg"/>
-          </p:nvPr>
-        </p:nvSpPr>
-        <p:spPr/>
-      </p:sp>
-      <p:sp>
-        <p:nvSpPr>
-          <p:cNvPr id="3" name="Notes Placeholder 2"/>
-          <p:cNvSpPr>
-            <a:spLocks noGrp="1"/>
-          </p:cNvSpPr>
-          <p:nvPr>
-            <p:ph type="body" idx="1"/>
-          </p:nvPr>
-        </p:nvSpPr>
-        <p:spPr/>
-        <p:txBody>
-          <a:bodyPr/>
-          <a:lstStyle/>
-          <a:p>
-            <a:endParaRPr lang="en-NZ"/>
-          </a:p>
-        </p:txBody>
-      </p:sp>
-      <p:sp>
-        <p:nvSpPr>
-          <p:cNvPr id="4" name="Slide Number Placeholder 3"/>
-          <p:cNvSpPr>
-            <a:spLocks noGrp="1"/>
-          </p:cNvSpPr>
-          <p:nvPr>
-            <p:ph type="sldNum" sz="quarter" idx="5"/>
-          </p:nvPr>
-        </p:nvSpPr>
-        <p:spPr/>
-        <p:txBody>
-          <a:bodyPr/>
-          <a:lstStyle/>
-          <a:p>
-            <a:fld id="{442373F6-F2DD-4546-B469-66EE76306866}" type="slidenum">
-              <a:rPr lang="en-AU" smtClean="0"/>
-              <a:t>9</a:t>
-            </a:fld>
-            <a:endParaRPr lang="en-AU"/>
-          </a:p>
-        </p:txBody>
-      </p:sp>
-    </p:spTree>
-    <p:extLst>
-      <p:ext uri="{BB962C8B-B14F-4D97-AF65-F5344CB8AC3E}">
-        <p14:creationId xmlns:p14="http://schemas.microsoft.com/office/powerpoint/2010/main" val="3267816334"/>
       </p:ext>
     </p:extLst>
   </p:cSld>
@@ -6214,7 +5851,7 @@
           <a:p>
             <a:fld id="{E73D105E-91AF-494C-8695-77D8E33C5B88}" type="datetimeFigureOut">
               <a:rPr lang="en-NZ" smtClean="0"/>
-              <a:t>6/04/2025</a:t>
+              <a:t>2/04/2025</a:t>
             </a:fld>
             <a:endParaRPr lang="en-NZ"/>
           </a:p>
@@ -6479,7 +6116,7 @@
           <a:p>
             <a:fld id="{E73D105E-91AF-494C-8695-77D8E33C5B88}" type="datetimeFigureOut">
               <a:rPr lang="en-NZ" smtClean="0"/>
-              <a:t>6/04/2025</a:t>
+              <a:t>2/04/2025</a:t>
             </a:fld>
             <a:endParaRPr lang="en-NZ"/>
           </a:p>
@@ -6674,7 +6311,7 @@
           <a:p>
             <a:fld id="{E73D105E-91AF-494C-8695-77D8E33C5B88}" type="datetimeFigureOut">
               <a:rPr lang="en-NZ" smtClean="0"/>
-              <a:t>6/04/2025</a:t>
+              <a:t>2/04/2025</a:t>
             </a:fld>
             <a:endParaRPr lang="en-NZ"/>
           </a:p>
@@ -6936,7 +6573,7 @@
           <a:p>
             <a:fld id="{E73D105E-91AF-494C-8695-77D8E33C5B88}" type="datetimeFigureOut">
               <a:rPr lang="en-NZ" smtClean="0"/>
-              <a:t>6/04/2025</a:t>
+              <a:t>2/04/2025</a:t>
             </a:fld>
             <a:endParaRPr lang="en-NZ"/>
           </a:p>
@@ -7369,7 +7006,7 @@
           <a:p>
             <a:fld id="{E73D105E-91AF-494C-8695-77D8E33C5B88}" type="datetimeFigureOut">
               <a:rPr lang="en-NZ" smtClean="0"/>
-              <a:t>6/04/2025</a:t>
+              <a:t>2/04/2025</a:t>
             </a:fld>
             <a:endParaRPr lang="en-NZ"/>
           </a:p>
@@ -7914,7 +7551,7 @@
           <a:p>
             <a:fld id="{E73D105E-91AF-494C-8695-77D8E33C5B88}" type="datetimeFigureOut">
               <a:rPr lang="en-NZ" smtClean="0"/>
-              <a:t>6/04/2025</a:t>
+              <a:t>2/04/2025</a:t>
             </a:fld>
             <a:endParaRPr lang="en-NZ"/>
           </a:p>
@@ -8630,7 +8267,7 @@
           <a:p>
             <a:fld id="{E73D105E-91AF-494C-8695-77D8E33C5B88}" type="datetimeFigureOut">
               <a:rPr lang="en-NZ" smtClean="0"/>
-              <a:t>6/04/2025</a:t>
+              <a:t>2/04/2025</a:t>
             </a:fld>
             <a:endParaRPr lang="en-NZ"/>
           </a:p>
@@ -8798,7 +8435,7 @@
           <a:p>
             <a:fld id="{E73D105E-91AF-494C-8695-77D8E33C5B88}" type="datetimeFigureOut">
               <a:rPr lang="en-NZ" smtClean="0"/>
-              <a:t>6/04/2025</a:t>
+              <a:t>2/04/2025</a:t>
             </a:fld>
             <a:endParaRPr lang="en-NZ"/>
           </a:p>
@@ -8976,7 +8613,7 @@
           <a:p>
             <a:fld id="{E73D105E-91AF-494C-8695-77D8E33C5B88}" type="datetimeFigureOut">
               <a:rPr lang="en-NZ" smtClean="0"/>
-              <a:t>6/04/2025</a:t>
+              <a:t>2/04/2025</a:t>
             </a:fld>
             <a:endParaRPr lang="en-NZ"/>
           </a:p>
@@ -9144,7 +8781,7 @@
           <a:p>
             <a:fld id="{E73D105E-91AF-494C-8695-77D8E33C5B88}" type="datetimeFigureOut">
               <a:rPr lang="en-NZ" smtClean="0"/>
-              <a:t>6/04/2025</a:t>
+              <a:t>2/04/2025</a:t>
             </a:fld>
             <a:endParaRPr lang="en-NZ"/>
           </a:p>
@@ -9393,7 +9030,7 @@
           <a:p>
             <a:fld id="{E73D105E-91AF-494C-8695-77D8E33C5B88}" type="datetimeFigureOut">
               <a:rPr lang="en-NZ" smtClean="0"/>
-              <a:t>6/04/2025</a:t>
+              <a:t>2/04/2025</a:t>
             </a:fld>
             <a:endParaRPr lang="en-NZ"/>
           </a:p>
@@ -9622,7 +9259,7 @@
           <a:p>
             <a:fld id="{E73D105E-91AF-494C-8695-77D8E33C5B88}" type="datetimeFigureOut">
               <a:rPr lang="en-NZ" smtClean="0"/>
-              <a:t>6/04/2025</a:t>
+              <a:t>2/04/2025</a:t>
             </a:fld>
             <a:endParaRPr lang="en-NZ"/>
           </a:p>
@@ -10000,7 +9637,7 @@
           <a:p>
             <a:fld id="{E73D105E-91AF-494C-8695-77D8E33C5B88}" type="datetimeFigureOut">
               <a:rPr lang="en-NZ" smtClean="0"/>
-              <a:t>6/04/2025</a:t>
+              <a:t>2/04/2025</a:t>
             </a:fld>
             <a:endParaRPr lang="en-NZ"/>
           </a:p>
@@ -10117,7 +9754,7 @@
           <a:p>
             <a:fld id="{E73D105E-91AF-494C-8695-77D8E33C5B88}" type="datetimeFigureOut">
               <a:rPr lang="en-NZ" smtClean="0"/>
-              <a:t>6/04/2025</a:t>
+              <a:t>2/04/2025</a:t>
             </a:fld>
             <a:endParaRPr lang="en-NZ"/>
           </a:p>
@@ -10212,7 +9849,7 @@
           <a:p>
             <a:fld id="{E73D105E-91AF-494C-8695-77D8E33C5B88}" type="datetimeFigureOut">
               <a:rPr lang="en-NZ" smtClean="0"/>
-              <a:t>6/04/2025</a:t>
+              <a:t>2/04/2025</a:t>
             </a:fld>
             <a:endParaRPr lang="en-NZ"/>
           </a:p>
@@ -10459,7 +10096,7 @@
           <a:p>
             <a:fld id="{E73D105E-91AF-494C-8695-77D8E33C5B88}" type="datetimeFigureOut">
               <a:rPr lang="en-NZ" smtClean="0"/>
-              <a:t>6/04/2025</a:t>
+              <a:t>2/04/2025</a:t>
             </a:fld>
             <a:endParaRPr lang="en-NZ"/>
           </a:p>
@@ -10737,7 +10374,7 @@
           <a:p>
             <a:fld id="{E73D105E-91AF-494C-8695-77D8E33C5B88}" type="datetimeFigureOut">
               <a:rPr lang="en-NZ" smtClean="0"/>
-              <a:t>6/04/2025</a:t>
+              <a:t>2/04/2025</a:t>
             </a:fld>
             <a:endParaRPr lang="en-NZ"/>
           </a:p>
@@ -13803,7 +13440,7 @@
           <a:p>
             <a:fld id="{E73D105E-91AF-494C-8695-77D8E33C5B88}" type="datetimeFigureOut">
               <a:rPr lang="en-NZ" smtClean="0"/>
-              <a:t>6/04/2025</a:t>
+              <a:t>2/04/2025</a:t>
             </a:fld>
             <a:endParaRPr lang="en-NZ"/>
           </a:p>
@@ -16548,7 +16185,7 @@
         </p:spPr>
         <p:txBody>
           <a:bodyPr vert="horz" lIns="91440" tIns="45720" rIns="91440" bIns="45720" rtlCol="0">
-            <a:normAutofit fontScale="92500" lnSpcReduction="10000"/>
+            <a:normAutofit/>
           </a:bodyPr>
           <a:lstStyle/>
           <a:p>
@@ -16558,7 +16195,7 @@
               </a:lnSpc>
             </a:pPr>
             <a:r>
-              <a:rPr lang="en-US" sz="1800">
+              <a:rPr lang="en-US" sz="1600">
                 <a:solidFill>
                   <a:schemeClr val="bg2"/>
                 </a:solidFill>
@@ -16573,12 +16210,12 @@
               </a:lnSpc>
             </a:pPr>
             <a:r>
-              <a:rPr lang="en-US" sz="1800">
+              <a:rPr lang="en-US" sz="1600">
                 <a:solidFill>
                   <a:schemeClr val="bg2"/>
                 </a:solidFill>
               </a:rPr>
-              <a:t>of Linux Based Operating Systems</a:t>
+              <a:t>of Linux Based Operating Systems in a Physical Environment</a:t>
             </a:r>
           </a:p>
         </p:txBody>
@@ -16661,51 +16298,6 @@
           </a:p>
         </p:txBody>
       </p:sp>
-      <p:sp>
-        <p:nvSpPr>
-          <p:cNvPr id="5" name="TextBox 4">
-            <a:extLst>
-              <a:ext uri="{FF2B5EF4-FFF2-40B4-BE49-F238E27FC236}">
-                <a16:creationId xmlns:a16="http://schemas.microsoft.com/office/drawing/2014/main" id="{10303C85-248F-3F8A-1C9B-3E43775B242D}"/>
-              </a:ext>
-            </a:extLst>
-          </p:cNvPr>
-          <p:cNvSpPr txBox="1"/>
-          <p:nvPr/>
-        </p:nvSpPr>
-        <p:spPr>
-          <a:xfrm>
-            <a:off x="3900621" y="3997322"/>
-            <a:ext cx="4194048" cy="461665"/>
-          </a:xfrm>
-          <a:prstGeom prst="rect">
-            <a:avLst/>
-          </a:prstGeom>
-          <a:noFill/>
-        </p:spPr>
-        <p:txBody>
-          <a:bodyPr wrap="square" rtlCol="0">
-            <a:spAutoFit/>
-          </a:bodyPr>
-          <a:lstStyle/>
-          <a:p>
-            <a:pPr algn="ctr"/>
-            <a:r>
-              <a:rPr lang="en-NZ" sz="2400" b="1">
-                <a:solidFill>
-                  <a:schemeClr val="bg1"/>
-                </a:solidFill>
-              </a:rPr>
-              <a:t>Team Physical Environment</a:t>
-            </a:r>
-            <a:endParaRPr lang="en-AU" sz="2400" b="1">
-              <a:solidFill>
-                <a:schemeClr val="bg1"/>
-              </a:solidFill>
-            </a:endParaRPr>
-          </a:p>
-        </p:txBody>
-      </p:sp>
     </p:spTree>
     <p:extLst>
       <p:ext uri="{BB962C8B-B14F-4D97-AF65-F5344CB8AC3E}">
@@ -16722,1928 +16314,11 @@
 <file path=ppt/slides/slide10.xml><?xml version="1.0" encoding="utf-8"?>
 <p:sld xmlns:a="http://schemas.openxmlformats.org/drawingml/2006/main" xmlns:r="http://schemas.openxmlformats.org/officeDocument/2006/relationships" xmlns:p="http://schemas.openxmlformats.org/presentationml/2006/main">
   <p:cSld>
-    <p:spTree>
-      <p:nvGrpSpPr>
-        <p:cNvPr id="1" name=""/>
-        <p:cNvGrpSpPr/>
-        <p:nvPr/>
-      </p:nvGrpSpPr>
-      <p:grpSpPr>
-        <a:xfrm>
-          <a:off x="0" y="0"/>
-          <a:ext cx="0" cy="0"/>
-          <a:chOff x="0" y="0"/>
-          <a:chExt cx="0" cy="0"/>
-        </a:xfrm>
-      </p:grpSpPr>
-      <p:sp>
-        <p:nvSpPr>
-          <p:cNvPr id="2" name="Title 1">
-            <a:extLst>
-              <a:ext uri="{FF2B5EF4-FFF2-40B4-BE49-F238E27FC236}">
-                <a16:creationId xmlns:a16="http://schemas.microsoft.com/office/drawing/2014/main" id="{F90F0BD9-0CEC-0244-AF4A-17C5B7CAD55A}"/>
-              </a:ext>
-            </a:extLst>
-          </p:cNvPr>
-          <p:cNvSpPr>
-            <a:spLocks noGrp="1"/>
-          </p:cNvSpPr>
-          <p:nvPr>
-            <p:ph type="title"/>
-          </p:nvPr>
-        </p:nvSpPr>
-        <p:spPr/>
-        <p:txBody>
-          <a:bodyPr/>
-          <a:lstStyle/>
-          <a:p>
-            <a:r>
-              <a:rPr lang="en-US"/>
-              <a:t>Issues</a:t>
-            </a:r>
-            <a:endParaRPr lang="en-NZ"/>
-          </a:p>
-        </p:txBody>
-      </p:sp>
-      <p:sp>
-        <p:nvSpPr>
-          <p:cNvPr id="3" name="Content Placeholder 2">
-            <a:extLst>
-              <a:ext uri="{FF2B5EF4-FFF2-40B4-BE49-F238E27FC236}">
-                <a16:creationId xmlns:a16="http://schemas.microsoft.com/office/drawing/2014/main" id="{FF8AE92C-F39A-1DA4-77B5-E8B20A5422C6}"/>
-              </a:ext>
-            </a:extLst>
-          </p:cNvPr>
-          <p:cNvSpPr>
-            <a:spLocks noGrp="1"/>
-          </p:cNvSpPr>
-          <p:nvPr>
-            <p:ph idx="1"/>
-          </p:nvPr>
-        </p:nvSpPr>
-        <p:spPr/>
-        <p:txBody>
-          <a:bodyPr/>
-          <a:lstStyle/>
-          <a:p>
-            <a:r>
-              <a:rPr lang="en-US"/>
-              <a:t>If a risk occurs, it’s moved into the issue register</a:t>
-            </a:r>
-          </a:p>
-          <a:p>
-            <a:r>
-              <a:rPr lang="en-AU" sz="2400">
-                <a:latin typeface="Tw Cen MT"/>
-              </a:rPr>
-              <a:t>Unexpected challenges are added straight into the issue register</a:t>
-            </a:r>
-          </a:p>
-          <a:p>
-            <a:endParaRPr lang="en-NZ"/>
-          </a:p>
-        </p:txBody>
-      </p:sp>
-    </p:spTree>
-    <p:extLst>
-      <p:ext uri="{BB962C8B-B14F-4D97-AF65-F5344CB8AC3E}">
-        <p14:creationId xmlns:p14="http://schemas.microsoft.com/office/powerpoint/2010/main" val="4270490875"/>
-      </p:ext>
-    </p:extLst>
-  </p:cSld>
-  <p:clrMapOvr>
-    <a:masterClrMapping/>
-  </p:clrMapOvr>
-</p:sld>
-</file>
-
-<file path=ppt/slides/slide11.xml><?xml version="1.0" encoding="utf-8"?>
-<p:sld xmlns:a="http://schemas.openxmlformats.org/drawingml/2006/main" xmlns:r="http://schemas.openxmlformats.org/officeDocument/2006/relationships" xmlns:p="http://schemas.openxmlformats.org/presentationml/2006/main">
-  <p:cSld>
-    <p:spTree>
-      <p:nvGrpSpPr>
-        <p:cNvPr id="1" name=""/>
-        <p:cNvGrpSpPr/>
-        <p:nvPr/>
-      </p:nvGrpSpPr>
-      <p:grpSpPr>
-        <a:xfrm>
-          <a:off x="0" y="0"/>
-          <a:ext cx="0" cy="0"/>
-          <a:chOff x="0" y="0"/>
-          <a:chExt cx="0" cy="0"/>
-        </a:xfrm>
-      </p:grpSpPr>
-      <p:sp>
-        <p:nvSpPr>
-          <p:cNvPr id="2" name="Title 1">
-            <a:extLst>
-              <a:ext uri="{FF2B5EF4-FFF2-40B4-BE49-F238E27FC236}">
-                <a16:creationId xmlns:a16="http://schemas.microsoft.com/office/drawing/2014/main" id="{71922BBF-3B98-4E52-1318-39B57ADF369C}"/>
-              </a:ext>
-            </a:extLst>
-          </p:cNvPr>
-          <p:cNvSpPr>
-            <a:spLocks noGrp="1"/>
-          </p:cNvSpPr>
-          <p:nvPr>
-            <p:ph type="title"/>
-          </p:nvPr>
-        </p:nvSpPr>
-        <p:spPr/>
-        <p:txBody>
-          <a:bodyPr/>
-          <a:lstStyle/>
-          <a:p>
-            <a:r>
-              <a:rPr lang="en-US"/>
-              <a:t>Quality assurance plan</a:t>
-            </a:r>
-            <a:endParaRPr lang="en-NZ"/>
-          </a:p>
-        </p:txBody>
-      </p:sp>
-      <p:pic>
-        <p:nvPicPr>
-          <p:cNvPr id="4" name="Content Placeholder 3">
-            <a:extLst>
-              <a:ext uri="{FF2B5EF4-FFF2-40B4-BE49-F238E27FC236}">
-                <a16:creationId xmlns:a16="http://schemas.microsoft.com/office/drawing/2014/main" id="{BB02D37C-52A7-DCDC-5DD0-175FF4254066}"/>
-              </a:ext>
-            </a:extLst>
-          </p:cNvPr>
-          <p:cNvPicPr>
-            <a:picLocks noGrp="1" noChangeAspect="1"/>
-          </p:cNvPicPr>
-          <p:nvPr>
-            <p:ph idx="1"/>
-          </p:nvPr>
-        </p:nvPicPr>
-        <p:blipFill>
-          <a:blip r:embed="rId2">
-            <a:extLst>
-              <a:ext uri="{28A0092B-C50C-407E-A947-70E740481C1C}">
-                <a14:useLocalDpi xmlns:a14="http://schemas.microsoft.com/office/drawing/2010/main" val="0"/>
-              </a:ext>
-            </a:extLst>
-          </a:blip>
-          <a:stretch>
-            <a:fillRect/>
-          </a:stretch>
-        </p:blipFill>
-        <p:spPr>
-          <a:xfrm>
-            <a:off x="4138024" y="1759562"/>
-            <a:ext cx="4245579" cy="4216350"/>
-          </a:xfrm>
-          <a:prstGeom prst="rect">
-            <a:avLst/>
-          </a:prstGeom>
-        </p:spPr>
-      </p:pic>
-    </p:spTree>
-    <p:extLst>
-      <p:ext uri="{BB962C8B-B14F-4D97-AF65-F5344CB8AC3E}">
-        <p14:creationId xmlns:p14="http://schemas.microsoft.com/office/powerpoint/2010/main" val="3380970113"/>
-      </p:ext>
-    </p:extLst>
-  </p:cSld>
-  <p:clrMapOvr>
-    <a:masterClrMapping/>
-  </p:clrMapOvr>
-</p:sld>
-</file>
-
-<file path=ppt/slides/slide12.xml><?xml version="1.0" encoding="utf-8"?>
-<p:sld xmlns:a="http://schemas.openxmlformats.org/drawingml/2006/main" xmlns:r="http://schemas.openxmlformats.org/officeDocument/2006/relationships" xmlns:p="http://schemas.openxmlformats.org/presentationml/2006/main">
-  <p:cSld>
-    <p:spTree>
-      <p:nvGrpSpPr>
-        <p:cNvPr id="1" name=""/>
-        <p:cNvGrpSpPr/>
-        <p:nvPr/>
-      </p:nvGrpSpPr>
-      <p:grpSpPr>
-        <a:xfrm>
-          <a:off x="0" y="0"/>
-          <a:ext cx="0" cy="0"/>
-          <a:chOff x="0" y="0"/>
-          <a:chExt cx="0" cy="0"/>
-        </a:xfrm>
-      </p:grpSpPr>
-      <p:sp>
-        <p:nvSpPr>
-          <p:cNvPr id="2" name="Title 1">
-            <a:extLst>
-              <a:ext uri="{FF2B5EF4-FFF2-40B4-BE49-F238E27FC236}">
-                <a16:creationId xmlns:a16="http://schemas.microsoft.com/office/drawing/2014/main" id="{C3DCF774-7CFE-7B9E-F09F-C8867AC413F6}"/>
-              </a:ext>
-            </a:extLst>
-          </p:cNvPr>
-          <p:cNvSpPr>
-            <a:spLocks noGrp="1"/>
-          </p:cNvSpPr>
-          <p:nvPr>
-            <p:ph type="title"/>
-          </p:nvPr>
-        </p:nvSpPr>
-        <p:spPr/>
-        <p:txBody>
-          <a:bodyPr/>
-          <a:lstStyle/>
-          <a:p>
-            <a:r>
-              <a:rPr lang="en-NZ"/>
-              <a:t>ESTIMATED COSTS</a:t>
-            </a:r>
-            <a:endParaRPr lang="en-AU"/>
-          </a:p>
-        </p:txBody>
-      </p:sp>
-      <p:graphicFrame>
-        <p:nvGraphicFramePr>
-          <p:cNvPr id="7" name="Content Placeholder 6">
-            <a:extLst>
-              <a:ext uri="{FF2B5EF4-FFF2-40B4-BE49-F238E27FC236}">
-                <a16:creationId xmlns:a16="http://schemas.microsoft.com/office/drawing/2014/main" id="{9137E0EB-8822-ADCF-55A6-2AC330D021B9}"/>
-              </a:ext>
-            </a:extLst>
-          </p:cNvPr>
-          <p:cNvGraphicFramePr>
-            <a:graphicFrameLocks noGrp="1"/>
-          </p:cNvGraphicFramePr>
-          <p:nvPr>
-            <p:ph idx="1"/>
-            <p:extLst>
-              <p:ext uri="{D42A27DB-BD31-4B8C-83A1-F6EECF244321}">
-                <p14:modId xmlns:p14="http://schemas.microsoft.com/office/powerpoint/2010/main" val="3432805481"/>
-              </p:ext>
-            </p:extLst>
-          </p:nvPr>
-        </p:nvGraphicFramePr>
-        <p:xfrm>
-          <a:off x="1241997" y="1899032"/>
-          <a:ext cx="7452347" cy="3891777"/>
-        </p:xfrm>
-        <a:graphic>
-          <a:graphicData uri="http://schemas.openxmlformats.org/drawingml/2006/table">
-            <a:tbl>
-              <a:tblPr firstRow="1" firstCol="1" bandRow="1">
-                <a:tableStyleId>{073A0DAA-6AF3-43AB-8588-CEC1D06C72B9}</a:tableStyleId>
-              </a:tblPr>
-              <a:tblGrid>
-                <a:gridCol w="2735437">
-                  <a:extLst>
-                    <a:ext uri="{9D8B030D-6E8A-4147-A177-3AD203B41FA5}">
-                      <a16:colId xmlns:a16="http://schemas.microsoft.com/office/drawing/2014/main" val="231993726"/>
-                    </a:ext>
-                  </a:extLst>
-                </a:gridCol>
-                <a:gridCol w="3184262">
-                  <a:extLst>
-                    <a:ext uri="{9D8B030D-6E8A-4147-A177-3AD203B41FA5}">
-                      <a16:colId xmlns:a16="http://schemas.microsoft.com/office/drawing/2014/main" val="3589331907"/>
-                    </a:ext>
-                  </a:extLst>
-                </a:gridCol>
-                <a:gridCol w="1532648">
-                  <a:extLst>
-                    <a:ext uri="{9D8B030D-6E8A-4147-A177-3AD203B41FA5}">
-                      <a16:colId xmlns:a16="http://schemas.microsoft.com/office/drawing/2014/main" val="1522665636"/>
-                    </a:ext>
-                  </a:extLst>
-                </a:gridCol>
-              </a:tblGrid>
-              <a:tr h="511121">
-                <a:tc>
-                  <a:txBody>
-                    <a:bodyPr/>
-                    <a:lstStyle/>
-                    <a:p>
-                      <a:pPr algn="ctr">
-                        <a:buNone/>
-                      </a:pPr>
-                      <a:r>
-                        <a:rPr lang="en-NZ" sz="2000" kern="100">
-                          <a:effectLst/>
-                        </a:rPr>
-                        <a:t>Cost Category</a:t>
-                      </a:r>
-                      <a:endParaRPr lang="en-NZ" sz="2000" kern="100">
-                        <a:effectLst/>
-                        <a:latin typeface="Aptos" panose="020B0004020202020204" pitchFamily="34" charset="0"/>
-                        <a:ea typeface="Yu Mincho" panose="02020400000000000000" pitchFamily="18" charset="-128"/>
-                        <a:cs typeface="Aptos" panose="020B0004020202020204" pitchFamily="34" charset="0"/>
-                      </a:endParaRPr>
-                    </a:p>
-                  </a:txBody>
-                  <a:tcPr marL="68580" marR="68580" marT="0" marB="0"/>
-                </a:tc>
-                <a:tc>
-                  <a:txBody>
-                    <a:bodyPr/>
-                    <a:lstStyle/>
-                    <a:p>
-                      <a:pPr algn="ctr">
-                        <a:buNone/>
-                      </a:pPr>
-                      <a:r>
-                        <a:rPr lang="en-NZ" sz="2000" kern="100">
-                          <a:effectLst/>
-                        </a:rPr>
-                        <a:t>Description</a:t>
-                      </a:r>
-                      <a:endParaRPr lang="en-NZ" sz="2000" kern="100">
-                        <a:effectLst/>
-                        <a:latin typeface="Aptos" panose="020B0004020202020204" pitchFamily="34" charset="0"/>
-                        <a:ea typeface="Yu Mincho" panose="02020400000000000000" pitchFamily="18" charset="-128"/>
-                        <a:cs typeface="Aptos" panose="020B0004020202020204" pitchFamily="34" charset="0"/>
-                      </a:endParaRPr>
-                    </a:p>
-                  </a:txBody>
-                  <a:tcPr marL="68580" marR="68580" marT="0" marB="0"/>
-                </a:tc>
-                <a:tc>
-                  <a:txBody>
-                    <a:bodyPr/>
-                    <a:lstStyle/>
-                    <a:p>
-                      <a:pPr algn="ctr">
-                        <a:buNone/>
-                      </a:pPr>
-                      <a:r>
-                        <a:rPr lang="en-NZ" sz="2000" kern="100">
-                          <a:effectLst/>
-                        </a:rPr>
-                        <a:t>Total Cost (NZD)</a:t>
-                      </a:r>
-                      <a:endParaRPr lang="en-NZ" sz="2000" kern="100">
-                        <a:effectLst/>
-                        <a:latin typeface="Aptos" panose="020B0004020202020204" pitchFamily="34" charset="0"/>
-                        <a:ea typeface="Yu Mincho" panose="02020400000000000000" pitchFamily="18" charset="-128"/>
-                        <a:cs typeface="Aptos" panose="020B0004020202020204" pitchFamily="34" charset="0"/>
-                      </a:endParaRPr>
-                    </a:p>
-                  </a:txBody>
-                  <a:tcPr marL="68580" marR="68580" marT="0" marB="0"/>
-                </a:tc>
-                <a:extLst>
-                  <a:ext uri="{0D108BD9-81ED-4DB2-BD59-A6C34878D82A}">
-                    <a16:rowId xmlns:a16="http://schemas.microsoft.com/office/drawing/2014/main" val="851953969"/>
-                  </a:ext>
-                </a:extLst>
-              </a:tr>
-              <a:tr h="499213">
-                <a:tc>
-                  <a:txBody>
-                    <a:bodyPr/>
-                    <a:lstStyle/>
-                    <a:p>
-                      <a:pPr>
-                        <a:buNone/>
-                      </a:pPr>
-                      <a:r>
-                        <a:rPr lang="en-NZ" sz="2000" kern="100">
-                          <a:effectLst/>
-                        </a:rPr>
-                        <a:t>Hardware</a:t>
-                      </a:r>
-                      <a:endParaRPr lang="en-NZ" sz="2000" kern="100">
-                        <a:effectLst/>
-                        <a:latin typeface="Aptos" panose="020B0004020202020204" pitchFamily="34" charset="0"/>
-                        <a:ea typeface="Yu Mincho" panose="02020400000000000000" pitchFamily="18" charset="-128"/>
-                        <a:cs typeface="Aptos" panose="020B0004020202020204" pitchFamily="34" charset="0"/>
-                      </a:endParaRPr>
-                    </a:p>
-                  </a:txBody>
-                  <a:tcPr marL="68580" marR="68580" marT="0" marB="0"/>
-                </a:tc>
-                <a:tc>
-                  <a:txBody>
-                    <a:bodyPr/>
-                    <a:lstStyle/>
-                    <a:p>
-                      <a:pPr>
-                        <a:buNone/>
-                      </a:pPr>
-                      <a:r>
-                        <a:rPr lang="en-NZ" sz="2000" kern="100">
-                          <a:effectLst/>
-                        </a:rPr>
-                        <a:t>Computers, Monitors, Laptops, Mouse and Keyboards</a:t>
-                      </a:r>
-                      <a:endParaRPr lang="en-NZ" sz="2000" kern="100">
-                        <a:effectLst/>
-                        <a:latin typeface="Aptos" panose="020B0004020202020204" pitchFamily="34" charset="0"/>
-                        <a:ea typeface="Yu Mincho" panose="02020400000000000000" pitchFamily="18" charset="-128"/>
-                        <a:cs typeface="Aptos" panose="020B0004020202020204" pitchFamily="34" charset="0"/>
-                      </a:endParaRPr>
-                    </a:p>
-                  </a:txBody>
-                  <a:tcPr marL="68580" marR="68580" marT="0" marB="0"/>
-                </a:tc>
-                <a:tc>
-                  <a:txBody>
-                    <a:bodyPr/>
-                    <a:lstStyle/>
-                    <a:p>
-                      <a:pPr algn="r">
-                        <a:buNone/>
-                      </a:pPr>
-                      <a:r>
-                        <a:rPr lang="en-NZ" sz="2000" b="1" kern="100">
-                          <a:effectLst/>
-                        </a:rPr>
-                        <a:t>$16,152.16</a:t>
-                      </a:r>
-                      <a:endParaRPr lang="en-NZ" sz="2000" b="1" kern="100">
-                        <a:effectLst/>
-                        <a:latin typeface="Aptos" panose="020B0004020202020204" pitchFamily="34" charset="0"/>
-                        <a:ea typeface="Yu Mincho" panose="02020400000000000000" pitchFamily="18" charset="-128"/>
-                        <a:cs typeface="Aptos" panose="020B0004020202020204" pitchFamily="34" charset="0"/>
-                      </a:endParaRPr>
-                    </a:p>
-                  </a:txBody>
-                  <a:tcPr marL="68580" marR="68580" marT="0" marB="0"/>
-                </a:tc>
-                <a:extLst>
-                  <a:ext uri="{0D108BD9-81ED-4DB2-BD59-A6C34878D82A}">
-                    <a16:rowId xmlns:a16="http://schemas.microsoft.com/office/drawing/2014/main" val="1128207619"/>
-                  </a:ext>
-                </a:extLst>
-              </a:tr>
-              <a:tr h="439674">
-                <a:tc>
-                  <a:txBody>
-                    <a:bodyPr/>
-                    <a:lstStyle/>
-                    <a:p>
-                      <a:pPr>
-                        <a:buNone/>
-                      </a:pPr>
-                      <a:r>
-                        <a:rPr lang="en-NZ" sz="2000" kern="100">
-                          <a:effectLst/>
-                        </a:rPr>
-                        <a:t>Labour</a:t>
-                      </a:r>
-                      <a:endParaRPr lang="en-NZ" sz="2000" kern="100">
-                        <a:effectLst/>
-                        <a:latin typeface="Aptos" panose="020B0004020202020204" pitchFamily="34" charset="0"/>
-                        <a:ea typeface="Yu Mincho" panose="02020400000000000000" pitchFamily="18" charset="-128"/>
-                        <a:cs typeface="Aptos" panose="020B0004020202020204" pitchFamily="34" charset="0"/>
-                      </a:endParaRPr>
-                    </a:p>
-                  </a:txBody>
-                  <a:tcPr marL="68580" marR="68580" marT="0" marB="0"/>
-                </a:tc>
-                <a:tc>
-                  <a:txBody>
-                    <a:bodyPr/>
-                    <a:lstStyle/>
-                    <a:p>
-                      <a:pPr>
-                        <a:buNone/>
-                      </a:pPr>
-                      <a:r>
-                        <a:rPr lang="en-NZ" sz="2000" kern="100">
-                          <a:effectLst/>
-                        </a:rPr>
-                        <a:t>Mentor, Project Manager, System Architect, and Network Engineer average salary</a:t>
-                      </a:r>
-                      <a:endParaRPr lang="en-NZ" sz="2000" kern="100">
-                        <a:effectLst/>
-                        <a:latin typeface="Aptos" panose="020B0004020202020204" pitchFamily="34" charset="0"/>
-                        <a:ea typeface="Yu Mincho" panose="02020400000000000000" pitchFamily="18" charset="-128"/>
-                        <a:cs typeface="Aptos" panose="020B0004020202020204" pitchFamily="34" charset="0"/>
-                      </a:endParaRPr>
-                    </a:p>
-                  </a:txBody>
-                  <a:tcPr marL="68580" marR="68580" marT="0" marB="0"/>
-                </a:tc>
-                <a:tc>
-                  <a:txBody>
-                    <a:bodyPr/>
-                    <a:lstStyle/>
-                    <a:p>
-                      <a:pPr algn="r">
-                        <a:buNone/>
-                      </a:pPr>
-                      <a:r>
-                        <a:rPr lang="en-NZ" sz="2000" b="1" kern="100">
-                          <a:effectLst/>
-                        </a:rPr>
-                        <a:t>$109,420.80</a:t>
-                      </a:r>
-                      <a:endParaRPr lang="en-NZ" sz="2000" b="1" kern="100">
-                        <a:effectLst/>
-                        <a:latin typeface="Aptos" panose="020B0004020202020204" pitchFamily="34" charset="0"/>
-                        <a:ea typeface="Yu Mincho" panose="02020400000000000000" pitchFamily="18" charset="-128"/>
-                        <a:cs typeface="Aptos" panose="020B0004020202020204" pitchFamily="34" charset="0"/>
-                      </a:endParaRPr>
-                    </a:p>
-                  </a:txBody>
-                  <a:tcPr marL="68580" marR="68580" marT="0" marB="0"/>
-                </a:tc>
-                <a:extLst>
-                  <a:ext uri="{0D108BD9-81ED-4DB2-BD59-A6C34878D82A}">
-                    <a16:rowId xmlns:a16="http://schemas.microsoft.com/office/drawing/2014/main" val="3654844044"/>
-                  </a:ext>
-                </a:extLst>
-              </a:tr>
-              <a:tr h="511121">
-                <a:tc>
-                  <a:txBody>
-                    <a:bodyPr/>
-                    <a:lstStyle/>
-                    <a:p>
-                      <a:pPr>
-                        <a:buNone/>
-                      </a:pPr>
-                      <a:r>
-                        <a:rPr lang="en-NZ" sz="2000" kern="100">
-                          <a:effectLst/>
-                        </a:rPr>
-                        <a:t>Network Equipment</a:t>
-                      </a:r>
-                      <a:endParaRPr lang="en-NZ" sz="2000" kern="100">
-                        <a:effectLst/>
-                        <a:latin typeface="Aptos" panose="020B0004020202020204" pitchFamily="34" charset="0"/>
-                        <a:ea typeface="Yu Mincho" panose="02020400000000000000" pitchFamily="18" charset="-128"/>
-                        <a:cs typeface="Aptos" panose="020B0004020202020204" pitchFamily="34" charset="0"/>
-                      </a:endParaRPr>
-                    </a:p>
-                  </a:txBody>
-                  <a:tcPr marL="68580" marR="68580" marT="0" marB="0"/>
-                </a:tc>
-                <a:tc>
-                  <a:txBody>
-                    <a:bodyPr/>
-                    <a:lstStyle/>
-                    <a:p>
-                      <a:pPr>
-                        <a:buNone/>
-                      </a:pPr>
-                      <a:r>
-                        <a:rPr lang="en-NZ" sz="2000" kern="100">
-                          <a:effectLst/>
-                        </a:rPr>
-                        <a:t>Network Cards, Ethernet Cable</a:t>
-                      </a:r>
-                      <a:endParaRPr lang="en-NZ" sz="2000" kern="100">
-                        <a:effectLst/>
-                        <a:latin typeface="Aptos" panose="020B0004020202020204" pitchFamily="34" charset="0"/>
-                        <a:ea typeface="Yu Mincho" panose="02020400000000000000" pitchFamily="18" charset="-128"/>
-                        <a:cs typeface="Aptos" panose="020B0004020202020204" pitchFamily="34" charset="0"/>
-                      </a:endParaRPr>
-                    </a:p>
-                  </a:txBody>
-                  <a:tcPr marL="68580" marR="68580" marT="0" marB="0"/>
-                </a:tc>
-                <a:tc>
-                  <a:txBody>
-                    <a:bodyPr/>
-                    <a:lstStyle/>
-                    <a:p>
-                      <a:pPr algn="r">
-                        <a:buNone/>
-                      </a:pPr>
-                      <a:r>
-                        <a:rPr lang="en-NZ" sz="2000" b="1" kern="100">
-                          <a:effectLst/>
-                        </a:rPr>
-                        <a:t>$148.35</a:t>
-                      </a:r>
-                      <a:endParaRPr lang="en-NZ" sz="2000" b="1" kern="100">
-                        <a:effectLst/>
-                        <a:latin typeface="Aptos" panose="020B0004020202020204" pitchFamily="34" charset="0"/>
-                        <a:ea typeface="Yu Mincho" panose="02020400000000000000" pitchFamily="18" charset="-128"/>
-                        <a:cs typeface="Aptos" panose="020B0004020202020204" pitchFamily="34" charset="0"/>
-                      </a:endParaRPr>
-                    </a:p>
-                  </a:txBody>
-                  <a:tcPr marL="68580" marR="68580" marT="0" marB="0"/>
-                </a:tc>
-                <a:extLst>
-                  <a:ext uri="{0D108BD9-81ED-4DB2-BD59-A6C34878D82A}">
-                    <a16:rowId xmlns:a16="http://schemas.microsoft.com/office/drawing/2014/main" val="1822745487"/>
-                  </a:ext>
-                </a:extLst>
-              </a:tr>
-              <a:tr h="383035">
-                <a:tc>
-                  <a:txBody>
-                    <a:bodyPr/>
-                    <a:lstStyle/>
-                    <a:p>
-                      <a:pPr>
-                        <a:buNone/>
-                      </a:pPr>
-                      <a:r>
-                        <a:rPr lang="en-NZ" sz="2000" kern="100">
-                          <a:effectLst/>
-                        </a:rPr>
-                        <a:t>Software Tools</a:t>
-                      </a:r>
-                      <a:endParaRPr lang="en-NZ" sz="2000" kern="100">
-                        <a:effectLst/>
-                        <a:latin typeface="Aptos" panose="020B0004020202020204" pitchFamily="34" charset="0"/>
-                        <a:ea typeface="Yu Mincho" panose="02020400000000000000" pitchFamily="18" charset="-128"/>
-                        <a:cs typeface="Aptos" panose="020B0004020202020204" pitchFamily="34" charset="0"/>
-                      </a:endParaRPr>
-                    </a:p>
-                  </a:txBody>
-                  <a:tcPr marL="68580" marR="68580" marT="0" marB="0"/>
-                </a:tc>
-                <a:tc>
-                  <a:txBody>
-                    <a:bodyPr/>
-                    <a:lstStyle/>
-                    <a:p>
-                      <a:pPr>
-                        <a:buNone/>
-                      </a:pPr>
-                      <a:r>
-                        <a:rPr lang="en-NZ" sz="2000" kern="100">
-                          <a:effectLst/>
-                        </a:rPr>
-                        <a:t>IPerf, D-ITG</a:t>
-                      </a:r>
-                      <a:endParaRPr lang="en-NZ" sz="2000" kern="100">
-                        <a:effectLst/>
-                        <a:latin typeface="Aptos" panose="020B0004020202020204" pitchFamily="34" charset="0"/>
-                        <a:ea typeface="Yu Mincho" panose="02020400000000000000" pitchFamily="18" charset="-128"/>
-                        <a:cs typeface="Aptos" panose="020B0004020202020204" pitchFamily="34" charset="0"/>
-                      </a:endParaRPr>
-                    </a:p>
-                  </a:txBody>
-                  <a:tcPr marL="68580" marR="68580" marT="0" marB="0"/>
-                </a:tc>
-                <a:tc>
-                  <a:txBody>
-                    <a:bodyPr/>
-                    <a:lstStyle/>
-                    <a:p>
-                      <a:pPr algn="r">
-                        <a:buNone/>
-                      </a:pPr>
-                      <a:r>
-                        <a:rPr lang="en-NZ" sz="2000" b="1" kern="100">
-                          <a:effectLst/>
-                        </a:rPr>
-                        <a:t>$0</a:t>
-                      </a:r>
-                      <a:endParaRPr lang="en-NZ" sz="2000" b="1" kern="100">
-                        <a:effectLst/>
-                        <a:latin typeface="Aptos" panose="020B0004020202020204" pitchFamily="34" charset="0"/>
-                        <a:ea typeface="Yu Mincho" panose="02020400000000000000" pitchFamily="18" charset="-128"/>
-                        <a:cs typeface="Aptos" panose="020B0004020202020204" pitchFamily="34" charset="0"/>
-                      </a:endParaRPr>
-                    </a:p>
-                  </a:txBody>
-                  <a:tcPr marL="68580" marR="68580" marT="0" marB="0"/>
-                </a:tc>
-                <a:extLst>
-                  <a:ext uri="{0D108BD9-81ED-4DB2-BD59-A6C34878D82A}">
-                    <a16:rowId xmlns:a16="http://schemas.microsoft.com/office/drawing/2014/main" val="246143626"/>
-                  </a:ext>
-                </a:extLst>
-              </a:tr>
-              <a:tr h="460742">
-                <a:tc>
-                  <a:txBody>
-                    <a:bodyPr/>
-                    <a:lstStyle/>
-                    <a:p>
-                      <a:pPr>
-                        <a:buNone/>
-                      </a:pPr>
-                      <a:r>
-                        <a:rPr lang="en-NZ" sz="2000" kern="100">
-                          <a:effectLst/>
-                        </a:rPr>
-                        <a:t>Total Estimated Cost </a:t>
-                      </a:r>
-                      <a:endParaRPr lang="en-NZ" sz="2000" kern="100">
-                        <a:effectLst/>
-                        <a:latin typeface="Aptos" panose="020B0004020202020204" pitchFamily="34" charset="0"/>
-                        <a:ea typeface="Yu Mincho" panose="02020400000000000000" pitchFamily="18" charset="-128"/>
-                        <a:cs typeface="Aptos" panose="020B0004020202020204" pitchFamily="34" charset="0"/>
-                      </a:endParaRPr>
-                    </a:p>
-                  </a:txBody>
-                  <a:tcPr marL="68580" marR="68580" marT="0" marB="0"/>
-                </a:tc>
-                <a:tc>
-                  <a:txBody>
-                    <a:bodyPr/>
-                    <a:lstStyle/>
-                    <a:p>
-                      <a:pPr>
-                        <a:buNone/>
-                      </a:pPr>
-                      <a:r>
-                        <a:rPr lang="en-NZ" sz="2000" kern="100">
-                          <a:effectLst/>
-                        </a:rPr>
-                        <a:t> </a:t>
-                      </a:r>
-                      <a:endParaRPr lang="en-NZ" sz="2000" kern="100">
-                        <a:effectLst/>
-                        <a:latin typeface="Aptos" panose="020B0004020202020204" pitchFamily="34" charset="0"/>
-                        <a:ea typeface="Yu Mincho" panose="02020400000000000000" pitchFamily="18" charset="-128"/>
-                        <a:cs typeface="Aptos" panose="020B0004020202020204" pitchFamily="34" charset="0"/>
-                      </a:endParaRPr>
-                    </a:p>
-                  </a:txBody>
-                  <a:tcPr marL="68580" marR="68580" marT="0" marB="0"/>
-                </a:tc>
-                <a:tc>
-                  <a:txBody>
-                    <a:bodyPr/>
-                    <a:lstStyle/>
-                    <a:p>
-                      <a:pPr algn="r">
-                        <a:buNone/>
-                      </a:pPr>
-                      <a:r>
-                        <a:rPr lang="en-NZ" sz="2000" b="1" kern="100">
-                          <a:effectLst/>
-                        </a:rPr>
-                        <a:t>$125,721.31</a:t>
-                      </a:r>
-                      <a:endParaRPr lang="en-NZ" sz="2000" b="1" kern="100">
-                        <a:effectLst/>
-                        <a:latin typeface="Aptos" panose="020B0004020202020204" pitchFamily="34" charset="0"/>
-                        <a:ea typeface="Yu Mincho" panose="02020400000000000000" pitchFamily="18" charset="-128"/>
-                        <a:cs typeface="Aptos" panose="020B0004020202020204" pitchFamily="34" charset="0"/>
-                      </a:endParaRPr>
-                    </a:p>
-                  </a:txBody>
-                  <a:tcPr marL="68580" marR="68580" marT="0" marB="0"/>
-                </a:tc>
-                <a:extLst>
-                  <a:ext uri="{0D108BD9-81ED-4DB2-BD59-A6C34878D82A}">
-                    <a16:rowId xmlns:a16="http://schemas.microsoft.com/office/drawing/2014/main" val="3652522010"/>
-                  </a:ext>
-                </a:extLst>
-              </a:tr>
-            </a:tbl>
-          </a:graphicData>
-        </a:graphic>
-      </p:graphicFrame>
-    </p:spTree>
-    <p:extLst>
-      <p:ext uri="{BB962C8B-B14F-4D97-AF65-F5344CB8AC3E}">
-        <p14:creationId xmlns:p14="http://schemas.microsoft.com/office/powerpoint/2010/main" val="767305761"/>
-      </p:ext>
-    </p:extLst>
-  </p:cSld>
-  <p:clrMapOvr>
-    <a:masterClrMapping/>
-  </p:clrMapOvr>
-</p:sld>
-</file>
-
-<file path=ppt/slides/slide13.xml><?xml version="1.0" encoding="utf-8"?>
-<p:sld xmlns:a="http://schemas.openxmlformats.org/drawingml/2006/main" xmlns:r="http://schemas.openxmlformats.org/officeDocument/2006/relationships" xmlns:p="http://schemas.openxmlformats.org/presentationml/2006/main">
-  <p:cSld>
-    <p:spTree>
-      <p:nvGrpSpPr>
-        <p:cNvPr id="1" name=""/>
-        <p:cNvGrpSpPr/>
-        <p:nvPr/>
-      </p:nvGrpSpPr>
-      <p:grpSpPr>
-        <a:xfrm>
-          <a:off x="0" y="0"/>
-          <a:ext cx="0" cy="0"/>
-          <a:chOff x="0" y="0"/>
-          <a:chExt cx="0" cy="0"/>
-        </a:xfrm>
-      </p:grpSpPr>
-      <p:graphicFrame>
-        <p:nvGraphicFramePr>
-          <p:cNvPr id="4" name="Table 3">
-            <a:extLst>
-              <a:ext uri="{FF2B5EF4-FFF2-40B4-BE49-F238E27FC236}">
-                <a16:creationId xmlns:a16="http://schemas.microsoft.com/office/drawing/2014/main" id="{11072660-C17A-82BF-E70E-0E7E9A41A07F}"/>
-              </a:ext>
-            </a:extLst>
-          </p:cNvPr>
-          <p:cNvGraphicFramePr>
-            <a:graphicFrameLocks noGrp="1"/>
-          </p:cNvGraphicFramePr>
-          <p:nvPr>
-            <p:extLst>
-              <p:ext uri="{D42A27DB-BD31-4B8C-83A1-F6EECF244321}">
-                <p14:modId xmlns:p14="http://schemas.microsoft.com/office/powerpoint/2010/main" val="1059985797"/>
-              </p:ext>
-            </p:extLst>
-          </p:nvPr>
-        </p:nvGraphicFramePr>
-        <p:xfrm>
-          <a:off x="1234440" y="1481328"/>
-          <a:ext cx="8601913" cy="4714274"/>
-        </p:xfrm>
-        <a:graphic>
-          <a:graphicData uri="http://schemas.openxmlformats.org/drawingml/2006/table">
-            <a:tbl>
-              <a:tblPr firstRow="1" firstCol="1" bandRow="1">
-                <a:tableStyleId>{073A0DAA-6AF3-43AB-8588-CEC1D06C72B9}</a:tableStyleId>
-              </a:tblPr>
-              <a:tblGrid>
-                <a:gridCol w="1021565">
-                  <a:extLst>
-                    <a:ext uri="{9D8B030D-6E8A-4147-A177-3AD203B41FA5}">
-                      <a16:colId xmlns:a16="http://schemas.microsoft.com/office/drawing/2014/main" val="3733717220"/>
-                    </a:ext>
-                  </a:extLst>
-                </a:gridCol>
-                <a:gridCol w="2691617">
-                  <a:extLst>
-                    <a:ext uri="{9D8B030D-6E8A-4147-A177-3AD203B41FA5}">
-                      <a16:colId xmlns:a16="http://schemas.microsoft.com/office/drawing/2014/main" val="2276327076"/>
-                    </a:ext>
-                  </a:extLst>
-                </a:gridCol>
-                <a:gridCol w="1360326">
-                  <a:extLst>
-                    <a:ext uri="{9D8B030D-6E8A-4147-A177-3AD203B41FA5}">
-                      <a16:colId xmlns:a16="http://schemas.microsoft.com/office/drawing/2014/main" val="2330767813"/>
-                    </a:ext>
-                  </a:extLst>
-                </a:gridCol>
-                <a:gridCol w="2073927">
-                  <a:extLst>
-                    <a:ext uri="{9D8B030D-6E8A-4147-A177-3AD203B41FA5}">
-                      <a16:colId xmlns:a16="http://schemas.microsoft.com/office/drawing/2014/main" val="3864228059"/>
-                    </a:ext>
-                  </a:extLst>
-                </a:gridCol>
-                <a:gridCol w="1454478">
-                  <a:extLst>
-                    <a:ext uri="{9D8B030D-6E8A-4147-A177-3AD203B41FA5}">
-                      <a16:colId xmlns:a16="http://schemas.microsoft.com/office/drawing/2014/main" val="2980028621"/>
-                    </a:ext>
-                  </a:extLst>
-                </a:gridCol>
-              </a:tblGrid>
-              <a:tr h="766718">
-                <a:tc>
-                  <a:txBody>
-                    <a:bodyPr/>
-                    <a:lstStyle/>
-                    <a:p>
-                      <a:pPr>
-                        <a:buNone/>
-                      </a:pPr>
-                      <a:r>
-                        <a:rPr lang="en-NZ" sz="1600" kern="100">
-                          <a:effectLst/>
-                        </a:rPr>
-                        <a:t>Role</a:t>
-                      </a:r>
-                      <a:endParaRPr lang="en-NZ" sz="1600" kern="100">
-                        <a:effectLst/>
-                        <a:latin typeface="Aptos" panose="020B0004020202020204" pitchFamily="34" charset="0"/>
-                        <a:ea typeface="Yu Mincho" panose="02020400000000000000" pitchFamily="18" charset="-128"/>
-                        <a:cs typeface="Aptos" panose="020B0004020202020204" pitchFamily="34" charset="0"/>
-                      </a:endParaRPr>
-                    </a:p>
-                  </a:txBody>
-                  <a:tcPr marL="68580" marR="68580" marT="0" marB="0"/>
-                </a:tc>
-                <a:tc>
-                  <a:txBody>
-                    <a:bodyPr/>
-                    <a:lstStyle/>
-                    <a:p>
-                      <a:pPr>
-                        <a:buNone/>
-                      </a:pPr>
-                      <a:r>
-                        <a:rPr lang="en-NZ" sz="1600" kern="100">
-                          <a:effectLst/>
-                        </a:rPr>
-                        <a:t>Cost Breakdown</a:t>
-                      </a:r>
-                      <a:endParaRPr lang="en-NZ" sz="1600" kern="100">
-                        <a:effectLst/>
-                        <a:latin typeface="Aptos" panose="020B0004020202020204" pitchFamily="34" charset="0"/>
-                        <a:ea typeface="Yu Mincho" panose="02020400000000000000" pitchFamily="18" charset="-128"/>
-                        <a:cs typeface="Aptos" panose="020B0004020202020204" pitchFamily="34" charset="0"/>
-                      </a:endParaRPr>
-                    </a:p>
-                  </a:txBody>
-                  <a:tcPr marL="68580" marR="68580" marT="0" marB="0"/>
-                </a:tc>
-                <a:tc>
-                  <a:txBody>
-                    <a:bodyPr/>
-                    <a:lstStyle/>
-                    <a:p>
-                      <a:pPr>
-                        <a:buNone/>
-                      </a:pPr>
-                      <a:r>
-                        <a:rPr lang="en-NZ" sz="1600" kern="100">
-                          <a:effectLst/>
-                        </a:rPr>
-                        <a:t>Average pay per hour (inc. GST)</a:t>
-                      </a:r>
-                      <a:endParaRPr lang="en-NZ" sz="1600" kern="100">
-                        <a:effectLst/>
-                        <a:latin typeface="Aptos" panose="020B0004020202020204" pitchFamily="34" charset="0"/>
-                        <a:ea typeface="Yu Mincho" panose="02020400000000000000" pitchFamily="18" charset="-128"/>
-                        <a:cs typeface="Aptos" panose="020B0004020202020204" pitchFamily="34" charset="0"/>
-                      </a:endParaRPr>
-                    </a:p>
-                  </a:txBody>
-                  <a:tcPr marL="68580" marR="68580" marT="0" marB="0"/>
-                </a:tc>
-                <a:tc>
-                  <a:txBody>
-                    <a:bodyPr/>
-                    <a:lstStyle/>
-                    <a:p>
-                      <a:pPr>
-                        <a:buNone/>
-                      </a:pPr>
-                      <a:r>
-                        <a:rPr lang="en-NZ" sz="1600" kern="100">
-                          <a:effectLst/>
-                        </a:rPr>
-                        <a:t>Total Hours</a:t>
-                      </a:r>
-                      <a:endParaRPr lang="en-NZ" sz="1600" kern="100">
-                        <a:effectLst/>
-                        <a:latin typeface="Aptos" panose="020B0004020202020204" pitchFamily="34" charset="0"/>
-                        <a:ea typeface="Yu Mincho" panose="02020400000000000000" pitchFamily="18" charset="-128"/>
-                        <a:cs typeface="Aptos" panose="020B0004020202020204" pitchFamily="34" charset="0"/>
-                      </a:endParaRPr>
-                    </a:p>
-                  </a:txBody>
-                  <a:tcPr marL="68580" marR="68580" marT="0" marB="0"/>
-                </a:tc>
-                <a:tc>
-                  <a:txBody>
-                    <a:bodyPr/>
-                    <a:lstStyle/>
-                    <a:p>
-                      <a:pPr>
-                        <a:buNone/>
-                      </a:pPr>
-                      <a:r>
-                        <a:rPr lang="en-NZ" sz="1600" kern="100">
-                          <a:effectLst/>
-                        </a:rPr>
-                        <a:t>Total Cost (NZD)</a:t>
-                      </a:r>
-                      <a:endParaRPr lang="en-NZ" sz="1600" kern="100">
-                        <a:effectLst/>
-                        <a:latin typeface="Aptos" panose="020B0004020202020204" pitchFamily="34" charset="0"/>
-                        <a:ea typeface="Yu Mincho" panose="02020400000000000000" pitchFamily="18" charset="-128"/>
-                        <a:cs typeface="Aptos" panose="020B0004020202020204" pitchFamily="34" charset="0"/>
-                      </a:endParaRPr>
-                    </a:p>
-                  </a:txBody>
-                  <a:tcPr marL="68580" marR="68580" marT="0" marB="0"/>
-                </a:tc>
-                <a:extLst>
-                  <a:ext uri="{0D108BD9-81ED-4DB2-BD59-A6C34878D82A}">
-                    <a16:rowId xmlns:a16="http://schemas.microsoft.com/office/drawing/2014/main" val="2282434158"/>
-                  </a:ext>
-                </a:extLst>
-              </a:tr>
-              <a:tr h="714749">
-                <a:tc>
-                  <a:txBody>
-                    <a:bodyPr/>
-                    <a:lstStyle/>
-                    <a:p>
-                      <a:pPr>
-                        <a:buNone/>
-                      </a:pPr>
-                      <a:r>
-                        <a:rPr lang="en-NZ" sz="1600" kern="100">
-                          <a:effectLst/>
-                        </a:rPr>
-                        <a:t>Mentor</a:t>
-                      </a:r>
-                      <a:endParaRPr lang="en-NZ" sz="1600" kern="100">
-                        <a:effectLst/>
-                        <a:latin typeface="Aptos" panose="020B0004020202020204" pitchFamily="34" charset="0"/>
-                        <a:ea typeface="Yu Mincho" panose="02020400000000000000" pitchFamily="18" charset="-128"/>
-                        <a:cs typeface="Aptos" panose="020B0004020202020204" pitchFamily="34" charset="0"/>
-                      </a:endParaRPr>
-                    </a:p>
-                  </a:txBody>
-                  <a:tcPr marL="68580" marR="68580" marT="0" marB="0"/>
-                </a:tc>
-                <a:tc>
-                  <a:txBody>
-                    <a:bodyPr/>
-                    <a:lstStyle/>
-                    <a:p>
-                      <a:pPr>
-                        <a:buNone/>
-                      </a:pPr>
-                      <a:r>
-                        <a:rPr lang="en-NZ" sz="1600" kern="100">
-                          <a:effectLst/>
-                        </a:rPr>
-                        <a:t>Provided by AUT:</a:t>
-                      </a:r>
-                    </a:p>
-                    <a:p>
-                      <a:pPr>
-                        <a:buNone/>
-                      </a:pPr>
-                      <a:r>
-                        <a:rPr lang="en-NZ" sz="1600" kern="100">
-                          <a:effectLst/>
-                        </a:rPr>
-                        <a:t>$142+GST</a:t>
-                      </a:r>
-                      <a:endParaRPr lang="en-NZ" sz="1600" kern="100">
-                        <a:effectLst/>
-                        <a:latin typeface="Aptos" panose="020B0004020202020204" pitchFamily="34" charset="0"/>
-                        <a:ea typeface="Yu Mincho" panose="02020400000000000000" pitchFamily="18" charset="-128"/>
-                        <a:cs typeface="Aptos" panose="020B0004020202020204" pitchFamily="34" charset="0"/>
-                      </a:endParaRPr>
-                    </a:p>
-                  </a:txBody>
-                  <a:tcPr marL="68580" marR="68580" marT="0" marB="0"/>
-                </a:tc>
-                <a:tc>
-                  <a:txBody>
-                    <a:bodyPr/>
-                    <a:lstStyle/>
-                    <a:p>
-                      <a:pPr>
-                        <a:buNone/>
-                      </a:pPr>
-                      <a:r>
-                        <a:rPr lang="en-NZ" sz="1600" kern="100">
-                          <a:effectLst/>
-                        </a:rPr>
-                        <a:t>$163.30</a:t>
-                      </a:r>
-                      <a:endParaRPr lang="en-NZ" sz="1600" kern="100">
-                        <a:effectLst/>
-                        <a:latin typeface="Aptos" panose="020B0004020202020204" pitchFamily="34" charset="0"/>
-                        <a:ea typeface="Yu Mincho" panose="02020400000000000000" pitchFamily="18" charset="-128"/>
-                        <a:cs typeface="Aptos" panose="020B0004020202020204" pitchFamily="34" charset="0"/>
-                      </a:endParaRPr>
-                    </a:p>
-                  </a:txBody>
-                  <a:tcPr marL="68580" marR="68580" marT="0" marB="0"/>
-                </a:tc>
-                <a:tc>
-                  <a:txBody>
-                    <a:bodyPr/>
-                    <a:lstStyle/>
-                    <a:p>
-                      <a:pPr>
-                        <a:buNone/>
-                      </a:pPr>
-                      <a:r>
-                        <a:rPr lang="en-NZ" sz="1600" kern="100">
-                          <a:effectLst/>
-                        </a:rPr>
-                        <a:t>1 hour per week</a:t>
-                      </a:r>
-                    </a:p>
-                    <a:p>
-                      <a:pPr>
-                        <a:buNone/>
-                      </a:pPr>
-                      <a:r>
-                        <a:rPr lang="en-NZ" sz="1600" kern="100">
-                          <a:effectLst/>
-                        </a:rPr>
-                        <a:t>24 weeks (2 sems)</a:t>
-                      </a:r>
-                    </a:p>
-                    <a:p>
-                      <a:pPr>
-                        <a:buNone/>
-                      </a:pPr>
-                      <a:r>
-                        <a:rPr lang="en-NZ" sz="1600" kern="100">
-                          <a:effectLst/>
-                        </a:rPr>
-                        <a:t>1 x 24 = 24 hrs</a:t>
-                      </a:r>
-                      <a:endParaRPr lang="en-NZ" sz="1600" kern="100">
-                        <a:effectLst/>
-                        <a:latin typeface="Aptos" panose="020B0004020202020204" pitchFamily="34" charset="0"/>
-                        <a:ea typeface="Yu Mincho" panose="02020400000000000000" pitchFamily="18" charset="-128"/>
-                        <a:cs typeface="Aptos" panose="020B0004020202020204" pitchFamily="34" charset="0"/>
-                      </a:endParaRPr>
-                    </a:p>
-                  </a:txBody>
-                  <a:tcPr marL="68580" marR="68580" marT="0" marB="0"/>
-                </a:tc>
-                <a:tc>
-                  <a:txBody>
-                    <a:bodyPr/>
-                    <a:lstStyle/>
-                    <a:p>
-                      <a:pPr>
-                        <a:buNone/>
-                      </a:pPr>
-                      <a:r>
-                        <a:rPr lang="en-NZ" sz="1600" b="1" kern="100">
-                          <a:effectLst/>
-                        </a:rPr>
-                        <a:t>163.30 x 24</a:t>
-                      </a:r>
-                    </a:p>
-                    <a:p>
-                      <a:pPr>
-                        <a:buNone/>
-                      </a:pPr>
-                      <a:r>
-                        <a:rPr lang="en-NZ" sz="1600" b="1" kern="100">
-                          <a:effectLst/>
-                        </a:rPr>
-                        <a:t>= $3,919.20</a:t>
-                      </a:r>
-                      <a:endParaRPr lang="en-NZ" sz="1600" b="1" kern="100">
-                        <a:effectLst/>
-                        <a:latin typeface="Aptos" panose="020B0004020202020204" pitchFamily="34" charset="0"/>
-                        <a:ea typeface="Yu Mincho" panose="02020400000000000000" pitchFamily="18" charset="-128"/>
-                        <a:cs typeface="Aptos" panose="020B0004020202020204" pitchFamily="34" charset="0"/>
-                      </a:endParaRPr>
-                    </a:p>
-                  </a:txBody>
-                  <a:tcPr marL="68580" marR="68580" marT="0" marB="0"/>
-                </a:tc>
-                <a:extLst>
-                  <a:ext uri="{0D108BD9-81ED-4DB2-BD59-A6C34878D82A}">
-                    <a16:rowId xmlns:a16="http://schemas.microsoft.com/office/drawing/2014/main" val="2670132672"/>
-                  </a:ext>
-                </a:extLst>
-              </a:tr>
-              <a:tr h="714749">
-                <a:tc>
-                  <a:txBody>
-                    <a:bodyPr/>
-                    <a:lstStyle/>
-                    <a:p>
-                      <a:pPr>
-                        <a:buNone/>
-                      </a:pPr>
-                      <a:r>
-                        <a:rPr lang="en-NZ" sz="1600" kern="100">
-                          <a:effectLst/>
-                        </a:rPr>
-                        <a:t>Project Manager</a:t>
-                      </a:r>
-                      <a:endParaRPr lang="en-NZ" sz="1600" kern="100">
-                        <a:effectLst/>
-                        <a:latin typeface="Aptos" panose="020B0004020202020204" pitchFamily="34" charset="0"/>
-                        <a:ea typeface="Yu Mincho" panose="02020400000000000000" pitchFamily="18" charset="-128"/>
-                        <a:cs typeface="Aptos" panose="020B0004020202020204" pitchFamily="34" charset="0"/>
-                      </a:endParaRPr>
-                    </a:p>
-                  </a:txBody>
-                  <a:tcPr marL="68580" marR="68580" marT="0" marB="0"/>
-                </a:tc>
-                <a:tc>
-                  <a:txBody>
-                    <a:bodyPr/>
-                    <a:lstStyle/>
-                    <a:p>
-                      <a:pPr>
-                        <a:buNone/>
-                      </a:pPr>
-                      <a:r>
-                        <a:rPr lang="en-NZ" sz="1600" kern="100">
-                          <a:effectLst/>
-                        </a:rPr>
-                        <a:t>Average yearly salary: $98,461 (PayScale, 2025) </a:t>
-                      </a:r>
-                      <a:endParaRPr lang="en-NZ" sz="1600" kern="100">
-                        <a:effectLst/>
-                        <a:latin typeface="Aptos" panose="020B0004020202020204" pitchFamily="34" charset="0"/>
-                        <a:ea typeface="Yu Mincho" panose="02020400000000000000" pitchFamily="18" charset="-128"/>
-                        <a:cs typeface="Aptos" panose="020B0004020202020204" pitchFamily="34" charset="0"/>
-                      </a:endParaRPr>
-                    </a:p>
-                  </a:txBody>
-                  <a:tcPr marL="68580" marR="68580" marT="0" marB="0"/>
-                </a:tc>
-                <a:tc>
-                  <a:txBody>
-                    <a:bodyPr/>
-                    <a:lstStyle/>
-                    <a:p>
-                      <a:pPr>
-                        <a:buNone/>
-                      </a:pPr>
-                      <a:r>
-                        <a:rPr lang="en-NZ" sz="1600" kern="100">
-                          <a:effectLst/>
-                        </a:rPr>
-                        <a:t>$47.34	</a:t>
-                      </a:r>
-                      <a:endParaRPr lang="en-NZ" sz="1600" kern="100">
-                        <a:effectLst/>
-                        <a:latin typeface="Aptos" panose="020B0004020202020204" pitchFamily="34" charset="0"/>
-                        <a:ea typeface="Yu Mincho" panose="02020400000000000000" pitchFamily="18" charset="-128"/>
-                        <a:cs typeface="Aptos" panose="020B0004020202020204" pitchFamily="34" charset="0"/>
-                      </a:endParaRPr>
-                    </a:p>
-                  </a:txBody>
-                  <a:tcPr marL="68580" marR="68580" marT="0" marB="0"/>
-                </a:tc>
-                <a:tc>
-                  <a:txBody>
-                    <a:bodyPr/>
-                    <a:lstStyle/>
-                    <a:p>
-                      <a:pPr>
-                        <a:buNone/>
-                      </a:pPr>
-                      <a:r>
-                        <a:rPr lang="en-NZ" sz="1600" kern="100">
-                          <a:effectLst/>
-                        </a:rPr>
-                        <a:t>15 hours per week </a:t>
-                      </a:r>
-                    </a:p>
-                    <a:p>
-                      <a:pPr>
-                        <a:buNone/>
-                      </a:pPr>
-                      <a:r>
-                        <a:rPr lang="en-NZ" sz="1600" kern="100">
-                          <a:effectLst/>
-                        </a:rPr>
-                        <a:t>24 weeks (2 sems) </a:t>
-                      </a:r>
-                    </a:p>
-                    <a:p>
-                      <a:pPr>
-                        <a:buNone/>
-                      </a:pPr>
-                      <a:r>
-                        <a:rPr lang="en-NZ" sz="1600" kern="100">
-                          <a:effectLst/>
-                        </a:rPr>
-                        <a:t>15 x 24 = 360 hrs</a:t>
-                      </a:r>
-                      <a:endParaRPr lang="en-NZ" sz="1600" kern="100">
-                        <a:effectLst/>
-                        <a:latin typeface="Aptos" panose="020B0004020202020204" pitchFamily="34" charset="0"/>
-                        <a:ea typeface="Yu Mincho" panose="02020400000000000000" pitchFamily="18" charset="-128"/>
-                        <a:cs typeface="Aptos" panose="020B0004020202020204" pitchFamily="34" charset="0"/>
-                      </a:endParaRPr>
-                    </a:p>
-                  </a:txBody>
-                  <a:tcPr marL="68580" marR="68580" marT="0" marB="0"/>
-                </a:tc>
-                <a:tc>
-                  <a:txBody>
-                    <a:bodyPr/>
-                    <a:lstStyle/>
-                    <a:p>
-                      <a:pPr>
-                        <a:buNone/>
-                      </a:pPr>
-                      <a:r>
-                        <a:rPr lang="en-NZ" sz="1600" b="1" kern="100">
-                          <a:effectLst/>
-                        </a:rPr>
-                        <a:t>360 x 47.24</a:t>
-                      </a:r>
-                    </a:p>
-                    <a:p>
-                      <a:pPr>
-                        <a:buNone/>
-                      </a:pPr>
-                      <a:r>
-                        <a:rPr lang="en-NZ" sz="1600" b="1" kern="100">
-                          <a:effectLst/>
-                        </a:rPr>
-                        <a:t>= $17,006.40</a:t>
-                      </a:r>
-                      <a:endParaRPr lang="en-NZ" sz="1600" b="1" kern="100">
-                        <a:effectLst/>
-                        <a:latin typeface="Aptos" panose="020B0004020202020204" pitchFamily="34" charset="0"/>
-                        <a:ea typeface="Yu Mincho" panose="02020400000000000000" pitchFamily="18" charset="-128"/>
-                        <a:cs typeface="Aptos" panose="020B0004020202020204" pitchFamily="34" charset="0"/>
-                      </a:endParaRPr>
-                    </a:p>
-                  </a:txBody>
-                  <a:tcPr marL="68580" marR="68580" marT="0" marB="0"/>
-                </a:tc>
-                <a:extLst>
-                  <a:ext uri="{0D108BD9-81ED-4DB2-BD59-A6C34878D82A}">
-                    <a16:rowId xmlns:a16="http://schemas.microsoft.com/office/drawing/2014/main" val="2125832934"/>
-                  </a:ext>
-                </a:extLst>
-              </a:tr>
-              <a:tr h="952998">
-                <a:tc>
-                  <a:txBody>
-                    <a:bodyPr/>
-                    <a:lstStyle/>
-                    <a:p>
-                      <a:pPr>
-                        <a:buNone/>
-                      </a:pPr>
-                      <a:r>
-                        <a:rPr lang="en-NZ" sz="1600" kern="100">
-                          <a:effectLst/>
-                        </a:rPr>
-                        <a:t>Network Engineer</a:t>
-                      </a:r>
-                    </a:p>
-                    <a:p>
-                      <a:pPr>
-                        <a:buNone/>
-                      </a:pPr>
-                      <a:r>
-                        <a:rPr lang="en-NZ" sz="1600" kern="100">
-                          <a:effectLst/>
-                        </a:rPr>
-                        <a:t>(x4)</a:t>
-                      </a:r>
-                      <a:endParaRPr lang="en-NZ" sz="1600" kern="100">
-                        <a:effectLst/>
-                        <a:latin typeface="Aptos" panose="020B0004020202020204" pitchFamily="34" charset="0"/>
-                        <a:ea typeface="Yu Mincho" panose="02020400000000000000" pitchFamily="18" charset="-128"/>
-                        <a:cs typeface="Aptos" panose="020B0004020202020204" pitchFamily="34" charset="0"/>
-                      </a:endParaRPr>
-                    </a:p>
-                  </a:txBody>
-                  <a:tcPr marL="68580" marR="68580" marT="0" marB="0"/>
-                </a:tc>
-                <a:tc>
-                  <a:txBody>
-                    <a:bodyPr/>
-                    <a:lstStyle/>
-                    <a:p>
-                      <a:pPr>
-                        <a:buNone/>
-                      </a:pPr>
-                      <a:r>
-                        <a:rPr lang="en-NZ" sz="1600" kern="100">
-                          <a:effectLst/>
-                        </a:rPr>
-                        <a:t>Average yearly salary: $78,377 (PayScale, 2024)</a:t>
-                      </a:r>
-                      <a:endParaRPr lang="en-NZ" sz="1600" kern="100">
-                        <a:effectLst/>
-                        <a:latin typeface="Aptos" panose="020B0004020202020204" pitchFamily="34" charset="0"/>
-                        <a:ea typeface="Yu Mincho" panose="02020400000000000000" pitchFamily="18" charset="-128"/>
-                        <a:cs typeface="Aptos" panose="020B0004020202020204" pitchFamily="34" charset="0"/>
-                      </a:endParaRPr>
-                    </a:p>
-                  </a:txBody>
-                  <a:tcPr marL="68580" marR="68580" marT="0" marB="0"/>
-                </a:tc>
-                <a:tc>
-                  <a:txBody>
-                    <a:bodyPr/>
-                    <a:lstStyle/>
-                    <a:p>
-                      <a:pPr>
-                        <a:buNone/>
-                      </a:pPr>
-                      <a:r>
-                        <a:rPr lang="en-NZ" sz="1600" kern="100">
-                          <a:effectLst/>
-                        </a:rPr>
-                        <a:t>$37.68</a:t>
-                      </a:r>
-                      <a:endParaRPr lang="en-NZ" sz="1600" kern="100">
-                        <a:effectLst/>
-                        <a:latin typeface="Aptos" panose="020B0004020202020204" pitchFamily="34" charset="0"/>
-                        <a:ea typeface="Yu Mincho" panose="02020400000000000000" pitchFamily="18" charset="-128"/>
-                        <a:cs typeface="Aptos" panose="020B0004020202020204" pitchFamily="34" charset="0"/>
-                      </a:endParaRPr>
-                    </a:p>
-                  </a:txBody>
-                  <a:tcPr marL="68580" marR="68580" marT="0" marB="0"/>
-                </a:tc>
-                <a:tc>
-                  <a:txBody>
-                    <a:bodyPr/>
-                    <a:lstStyle/>
-                    <a:p>
-                      <a:pPr>
-                        <a:buNone/>
-                      </a:pPr>
-                      <a:r>
-                        <a:rPr lang="en-NZ" sz="1600" kern="100">
-                          <a:effectLst/>
-                        </a:rPr>
-                        <a:t>15 hours per week </a:t>
-                      </a:r>
-                    </a:p>
-                    <a:p>
-                      <a:pPr>
-                        <a:buNone/>
-                      </a:pPr>
-                      <a:r>
-                        <a:rPr lang="en-NZ" sz="1600" kern="100">
-                          <a:effectLst/>
-                        </a:rPr>
-                        <a:t>24 weeks (2 sems) </a:t>
-                      </a:r>
-                    </a:p>
-                    <a:p>
-                      <a:pPr>
-                        <a:buNone/>
-                      </a:pPr>
-                      <a:r>
-                        <a:rPr lang="en-NZ" sz="1600" kern="100">
-                          <a:effectLst/>
-                        </a:rPr>
-                        <a:t>15 x 24 = 360 </a:t>
-                      </a:r>
-                    </a:p>
-                    <a:p>
-                      <a:pPr>
-                        <a:buNone/>
-                      </a:pPr>
-                      <a:r>
-                        <a:rPr lang="en-NZ" sz="1600" kern="100">
-                          <a:effectLst/>
-                        </a:rPr>
-                        <a:t>360 x 4 = 1440 hrs</a:t>
-                      </a:r>
-                      <a:endParaRPr lang="en-NZ" sz="1600" kern="100">
-                        <a:effectLst/>
-                        <a:latin typeface="Aptos" panose="020B0004020202020204" pitchFamily="34" charset="0"/>
-                        <a:ea typeface="Yu Mincho" panose="02020400000000000000" pitchFamily="18" charset="-128"/>
-                        <a:cs typeface="Aptos" panose="020B0004020202020204" pitchFamily="34" charset="0"/>
-                      </a:endParaRPr>
-                    </a:p>
-                  </a:txBody>
-                  <a:tcPr marL="68580" marR="68580" marT="0" marB="0"/>
-                </a:tc>
-                <a:tc>
-                  <a:txBody>
-                    <a:bodyPr/>
-                    <a:lstStyle/>
-                    <a:p>
-                      <a:pPr>
-                        <a:spcBef>
-                          <a:spcPts val="1200"/>
-                        </a:spcBef>
-                        <a:spcAft>
-                          <a:spcPts val="1200"/>
-                        </a:spcAft>
-                        <a:buNone/>
-                      </a:pPr>
-                      <a:r>
-                        <a:rPr lang="en-NZ" sz="1600" b="1" kern="100">
-                          <a:effectLst/>
-                        </a:rPr>
-                        <a:t>1440 x 37.68 = $54,259.20</a:t>
-                      </a:r>
-                      <a:endParaRPr lang="en-NZ" sz="1600" b="1" kern="100">
-                        <a:effectLst/>
-                        <a:latin typeface="Aptos" panose="020B0004020202020204" pitchFamily="34" charset="0"/>
-                        <a:ea typeface="Yu Mincho" panose="02020400000000000000" pitchFamily="18" charset="-128"/>
-                        <a:cs typeface="Aptos" panose="020B0004020202020204" pitchFamily="34" charset="0"/>
-                      </a:endParaRPr>
-                    </a:p>
-                  </a:txBody>
-                  <a:tcPr marL="68580" marR="68580" marT="0" marB="0"/>
-                </a:tc>
-                <a:extLst>
-                  <a:ext uri="{0D108BD9-81ED-4DB2-BD59-A6C34878D82A}">
-                    <a16:rowId xmlns:a16="http://schemas.microsoft.com/office/drawing/2014/main" val="3235549093"/>
-                  </a:ext>
-                </a:extLst>
-              </a:tr>
-              <a:tr h="952998">
-                <a:tc>
-                  <a:txBody>
-                    <a:bodyPr/>
-                    <a:lstStyle/>
-                    <a:p>
-                      <a:pPr>
-                        <a:buNone/>
-                      </a:pPr>
-                      <a:r>
-                        <a:rPr lang="en-NZ" sz="1600" kern="100">
-                          <a:effectLst/>
-                        </a:rPr>
-                        <a:t>System Architect</a:t>
-                      </a:r>
-                    </a:p>
-                    <a:p>
-                      <a:pPr>
-                        <a:buNone/>
-                      </a:pPr>
-                      <a:r>
-                        <a:rPr lang="en-NZ" sz="1600" kern="100">
-                          <a:effectLst/>
-                        </a:rPr>
-                        <a:t>(x2)</a:t>
-                      </a:r>
-                      <a:endParaRPr lang="en-NZ" sz="1600" kern="100">
-                        <a:effectLst/>
-                        <a:latin typeface="Aptos" panose="020B0004020202020204" pitchFamily="34" charset="0"/>
-                        <a:ea typeface="Yu Mincho" panose="02020400000000000000" pitchFamily="18" charset="-128"/>
-                        <a:cs typeface="Aptos" panose="020B0004020202020204" pitchFamily="34" charset="0"/>
-                      </a:endParaRPr>
-                    </a:p>
-                  </a:txBody>
-                  <a:tcPr marL="68580" marR="68580" marT="0" marB="0"/>
-                </a:tc>
-                <a:tc>
-                  <a:txBody>
-                    <a:bodyPr/>
-                    <a:lstStyle/>
-                    <a:p>
-                      <a:pPr>
-                        <a:buNone/>
-                      </a:pPr>
-                      <a:r>
-                        <a:rPr lang="en-NZ" sz="1600" kern="100">
-                          <a:effectLst/>
-                        </a:rPr>
-                        <a:t>Average yearly salary: $98,895 (PayScale, 2023)</a:t>
-                      </a:r>
-                      <a:br>
-                        <a:rPr lang="en-NZ" sz="1600" kern="100">
-                          <a:effectLst/>
-                        </a:rPr>
-                      </a:br>
-                      <a:endParaRPr lang="en-NZ" sz="1600" kern="100">
-                        <a:effectLst/>
-                        <a:latin typeface="Aptos" panose="020B0004020202020204" pitchFamily="34" charset="0"/>
-                        <a:ea typeface="Yu Mincho" panose="02020400000000000000" pitchFamily="18" charset="-128"/>
-                        <a:cs typeface="Aptos" panose="020B0004020202020204" pitchFamily="34" charset="0"/>
-                      </a:endParaRPr>
-                    </a:p>
-                  </a:txBody>
-                  <a:tcPr marL="68580" marR="68580" marT="0" marB="0"/>
-                </a:tc>
-                <a:tc>
-                  <a:txBody>
-                    <a:bodyPr/>
-                    <a:lstStyle/>
-                    <a:p>
-                      <a:pPr>
-                        <a:buNone/>
-                      </a:pPr>
-                      <a:r>
-                        <a:rPr lang="en-NZ" sz="1600" kern="100">
-                          <a:effectLst/>
-                        </a:rPr>
-                        <a:t>$47.55</a:t>
-                      </a:r>
-                      <a:endParaRPr lang="en-NZ" sz="1600" kern="100">
-                        <a:effectLst/>
-                        <a:latin typeface="Aptos" panose="020B0004020202020204" pitchFamily="34" charset="0"/>
-                        <a:ea typeface="Yu Mincho" panose="02020400000000000000" pitchFamily="18" charset="-128"/>
-                        <a:cs typeface="Aptos" panose="020B0004020202020204" pitchFamily="34" charset="0"/>
-                      </a:endParaRPr>
-                    </a:p>
-                  </a:txBody>
-                  <a:tcPr marL="68580" marR="68580" marT="0" marB="0"/>
-                </a:tc>
-                <a:tc>
-                  <a:txBody>
-                    <a:bodyPr/>
-                    <a:lstStyle/>
-                    <a:p>
-                      <a:pPr>
-                        <a:buNone/>
-                      </a:pPr>
-                      <a:r>
-                        <a:rPr lang="en-NZ" sz="1600" kern="100">
-                          <a:effectLst/>
-                        </a:rPr>
-                        <a:t>15 hours per week </a:t>
-                      </a:r>
-                    </a:p>
-                    <a:p>
-                      <a:pPr>
-                        <a:buNone/>
-                      </a:pPr>
-                      <a:r>
-                        <a:rPr lang="en-NZ" sz="1600" kern="100">
-                          <a:effectLst/>
-                        </a:rPr>
-                        <a:t>24 weeks (2 sems) </a:t>
-                      </a:r>
-                    </a:p>
-                    <a:p>
-                      <a:pPr>
-                        <a:buNone/>
-                      </a:pPr>
-                      <a:r>
-                        <a:rPr lang="en-NZ" sz="1600" kern="100">
-                          <a:effectLst/>
-                        </a:rPr>
-                        <a:t>15 x 24 = 360 hrs</a:t>
-                      </a:r>
-                    </a:p>
-                    <a:p>
-                      <a:pPr>
-                        <a:buNone/>
-                      </a:pPr>
-                      <a:r>
-                        <a:rPr lang="en-NZ" sz="1600" kern="100">
-                          <a:effectLst/>
-                        </a:rPr>
-                        <a:t>360 x 2 = 720 hrs</a:t>
-                      </a:r>
-                      <a:endParaRPr lang="en-NZ" sz="1600" kern="100">
-                        <a:effectLst/>
-                        <a:latin typeface="Aptos" panose="020B0004020202020204" pitchFamily="34" charset="0"/>
-                        <a:ea typeface="Yu Mincho" panose="02020400000000000000" pitchFamily="18" charset="-128"/>
-                        <a:cs typeface="Aptos" panose="020B0004020202020204" pitchFamily="34" charset="0"/>
-                      </a:endParaRPr>
-                    </a:p>
-                  </a:txBody>
-                  <a:tcPr marL="68580" marR="68580" marT="0" marB="0"/>
-                </a:tc>
-                <a:tc>
-                  <a:txBody>
-                    <a:bodyPr/>
-                    <a:lstStyle/>
-                    <a:p>
-                      <a:pPr>
-                        <a:buNone/>
-                      </a:pPr>
-                      <a:r>
-                        <a:rPr lang="en-NZ" sz="1600" b="1" kern="100">
-                          <a:effectLst/>
-                        </a:rPr>
-                        <a:t>720 x 47.55</a:t>
-                      </a:r>
-                    </a:p>
-                    <a:p>
-                      <a:pPr>
-                        <a:buNone/>
-                      </a:pPr>
-                      <a:r>
-                        <a:rPr lang="en-NZ" sz="1600" b="1" kern="100">
-                          <a:effectLst/>
-                        </a:rPr>
-                        <a:t>= $34,236.00</a:t>
-                      </a:r>
-                      <a:endParaRPr lang="en-NZ" sz="1600" b="1" kern="100">
-                        <a:effectLst/>
-                        <a:latin typeface="Aptos" panose="020B0004020202020204" pitchFamily="34" charset="0"/>
-                        <a:ea typeface="Yu Mincho" panose="02020400000000000000" pitchFamily="18" charset="-128"/>
-                        <a:cs typeface="Aptos" panose="020B0004020202020204" pitchFamily="34" charset="0"/>
-                      </a:endParaRPr>
-                    </a:p>
-                  </a:txBody>
-                  <a:tcPr marL="68580" marR="68580" marT="0" marB="0"/>
-                </a:tc>
-                <a:extLst>
-                  <a:ext uri="{0D108BD9-81ED-4DB2-BD59-A6C34878D82A}">
-                    <a16:rowId xmlns:a16="http://schemas.microsoft.com/office/drawing/2014/main" val="2133935456"/>
-                  </a:ext>
-                </a:extLst>
-              </a:tr>
-              <a:tr h="533796">
-                <a:tc>
-                  <a:txBody>
-                    <a:bodyPr/>
-                    <a:lstStyle/>
-                    <a:p>
-                      <a:pPr algn="l">
-                        <a:buNone/>
-                      </a:pPr>
-                      <a:r>
-                        <a:rPr lang="en-US" sz="1600" kern="100">
-                          <a:effectLst/>
-                          <a:latin typeface="Aptos" panose="020B0004020202020204" pitchFamily="34" charset="0"/>
-                          <a:ea typeface="Yu Mincho" panose="02020400000000000000" pitchFamily="18" charset="-128"/>
-                          <a:cs typeface="Aptos" panose="020B0004020202020204" pitchFamily="34" charset="0"/>
-                        </a:rPr>
-                        <a:t>Total Cost</a:t>
-                      </a:r>
-                      <a:endParaRPr lang="en-NZ" sz="1600" kern="100">
-                        <a:effectLst/>
-                        <a:latin typeface="Aptos" panose="020B0004020202020204" pitchFamily="34" charset="0"/>
-                        <a:ea typeface="Yu Mincho" panose="02020400000000000000" pitchFamily="18" charset="-128"/>
-                        <a:cs typeface="Aptos" panose="020B0004020202020204" pitchFamily="34" charset="0"/>
-                      </a:endParaRPr>
-                    </a:p>
-                  </a:txBody>
-                  <a:tcPr marL="68580" marR="68580" marT="0" marB="0"/>
-                </a:tc>
-                <a:tc>
-                  <a:txBody>
-                    <a:bodyPr/>
-                    <a:lstStyle/>
-                    <a:p>
-                      <a:pPr>
-                        <a:buNone/>
-                      </a:pPr>
-                      <a:endParaRPr lang="en-NZ" sz="1600" kern="100">
-                        <a:effectLst/>
-                        <a:latin typeface="Aptos" panose="020B0004020202020204" pitchFamily="34" charset="0"/>
-                        <a:ea typeface="Yu Mincho" panose="02020400000000000000" pitchFamily="18" charset="-128"/>
-                        <a:cs typeface="Aptos" panose="020B0004020202020204" pitchFamily="34" charset="0"/>
-                      </a:endParaRPr>
-                    </a:p>
-                  </a:txBody>
-                  <a:tcPr marL="68580" marR="68580" marT="0" marB="0"/>
-                </a:tc>
-                <a:tc>
-                  <a:txBody>
-                    <a:bodyPr/>
-                    <a:lstStyle/>
-                    <a:p>
-                      <a:pPr>
-                        <a:buNone/>
-                      </a:pPr>
-                      <a:endParaRPr lang="en-NZ" sz="1600" kern="100">
-                        <a:effectLst/>
-                        <a:latin typeface="Aptos" panose="020B0004020202020204" pitchFamily="34" charset="0"/>
-                        <a:ea typeface="Yu Mincho" panose="02020400000000000000" pitchFamily="18" charset="-128"/>
-                        <a:cs typeface="Aptos" panose="020B0004020202020204" pitchFamily="34" charset="0"/>
-                      </a:endParaRPr>
-                    </a:p>
-                  </a:txBody>
-                  <a:tcPr marL="68580" marR="68580" marT="0" marB="0"/>
-                </a:tc>
-                <a:tc>
-                  <a:txBody>
-                    <a:bodyPr/>
-                    <a:lstStyle/>
-                    <a:p>
-                      <a:pPr>
-                        <a:buNone/>
-                      </a:pPr>
-                      <a:endParaRPr lang="en-NZ" sz="1600" kern="100">
-                        <a:effectLst/>
-                        <a:latin typeface="Aptos" panose="020B0004020202020204" pitchFamily="34" charset="0"/>
-                        <a:ea typeface="Yu Mincho" panose="02020400000000000000" pitchFamily="18" charset="-128"/>
-                        <a:cs typeface="Aptos" panose="020B0004020202020204" pitchFamily="34" charset="0"/>
-                      </a:endParaRPr>
-                    </a:p>
-                  </a:txBody>
-                  <a:tcPr marL="68580" marR="68580" marT="0" marB="0"/>
-                </a:tc>
-                <a:tc>
-                  <a:txBody>
-                    <a:bodyPr/>
-                    <a:lstStyle/>
-                    <a:p>
-                      <a:pPr marL="0" marR="0" lvl="0" indent="0" algn="l" defTabSz="914400" rtl="0" eaLnBrk="1" fontAlgn="auto" latinLnBrk="0" hangingPunct="1">
-                        <a:lnSpc>
-                          <a:spcPct val="100000"/>
-                        </a:lnSpc>
-                        <a:spcBef>
-                          <a:spcPts val="0"/>
-                        </a:spcBef>
-                        <a:spcAft>
-                          <a:spcPts val="0"/>
-                        </a:spcAft>
-                        <a:buClrTx/>
-                        <a:buSzTx/>
-                        <a:buFontTx/>
-                        <a:buNone/>
-                        <a:tabLst/>
-                        <a:defRPr/>
-                      </a:pPr>
-                      <a:r>
-                        <a:rPr lang="en-NZ" sz="1600" b="1" kern="100">
-                          <a:effectLst/>
-                        </a:rPr>
-                        <a:t>$109,420.80</a:t>
-                      </a:r>
-                      <a:endParaRPr lang="en-NZ" sz="1600" b="1" kern="100">
-                        <a:effectLst/>
-                        <a:latin typeface="Aptos" panose="020B0004020202020204" pitchFamily="34" charset="0"/>
-                        <a:ea typeface="Yu Mincho" panose="02020400000000000000" pitchFamily="18" charset="-128"/>
-                        <a:cs typeface="Aptos" panose="020B0004020202020204" pitchFamily="34" charset="0"/>
-                      </a:endParaRPr>
-                    </a:p>
-                    <a:p>
-                      <a:pPr>
-                        <a:buNone/>
-                      </a:pPr>
-                      <a:endParaRPr lang="en-NZ" sz="1600" b="1" kern="100">
-                        <a:effectLst/>
-                        <a:latin typeface="Aptos" panose="020B0004020202020204" pitchFamily="34" charset="0"/>
-                        <a:ea typeface="Yu Mincho" panose="02020400000000000000" pitchFamily="18" charset="-128"/>
-                        <a:cs typeface="Aptos" panose="020B0004020202020204" pitchFamily="34" charset="0"/>
-                      </a:endParaRPr>
-                    </a:p>
-                  </a:txBody>
-                  <a:tcPr marL="68580" marR="68580" marT="0" marB="0"/>
-                </a:tc>
-                <a:extLst>
-                  <a:ext uri="{0D108BD9-81ED-4DB2-BD59-A6C34878D82A}">
-                    <a16:rowId xmlns:a16="http://schemas.microsoft.com/office/drawing/2014/main" val="2714845717"/>
-                  </a:ext>
-                </a:extLst>
-              </a:tr>
-            </a:tbl>
-          </a:graphicData>
-        </a:graphic>
-      </p:graphicFrame>
-      <p:sp>
-        <p:nvSpPr>
-          <p:cNvPr id="5" name="Title 1">
-            <a:extLst>
-              <a:ext uri="{FF2B5EF4-FFF2-40B4-BE49-F238E27FC236}">
-                <a16:creationId xmlns:a16="http://schemas.microsoft.com/office/drawing/2014/main" id="{81FA36E1-C362-8768-1525-A587A5E0B0D2}"/>
-              </a:ext>
-            </a:extLst>
-          </p:cNvPr>
-          <p:cNvSpPr txBox="1">
-            <a:spLocks/>
-          </p:cNvSpPr>
-          <p:nvPr/>
-        </p:nvSpPr>
-        <p:spPr>
-          <a:xfrm>
-            <a:off x="1143001" y="314926"/>
-            <a:ext cx="9905998" cy="1478570"/>
-          </a:xfrm>
-          <a:prstGeom prst="rect">
-            <a:avLst/>
-          </a:prstGeom>
-        </p:spPr>
-        <p:txBody>
-          <a:bodyPr vert="horz" lIns="91440" tIns="45720" rIns="91440" bIns="45720" rtlCol="0" anchor="ctr">
-            <a:normAutofit/>
-          </a:bodyPr>
-          <a:lstStyle>
-            <a:lvl1pPr algn="l" defTabSz="914400" rtl="0" eaLnBrk="1" latinLnBrk="0" hangingPunct="1">
-              <a:lnSpc>
-                <a:spcPct val="90000"/>
-              </a:lnSpc>
-              <a:spcBef>
-                <a:spcPct val="0"/>
-              </a:spcBef>
-              <a:buNone/>
-              <a:defRPr sz="3600" kern="1200" cap="all" baseline="0">
-                <a:solidFill>
-                  <a:schemeClr val="tx1"/>
-                </a:solidFill>
-                <a:latin typeface="+mj-lt"/>
-                <a:ea typeface="+mj-ea"/>
-                <a:cs typeface="+mj-cs"/>
-              </a:defRPr>
-            </a:lvl1pPr>
-          </a:lstStyle>
-          <a:p>
-            <a:r>
-              <a:rPr lang="en-NZ"/>
-              <a:t>Labour Breakdown</a:t>
-            </a:r>
-            <a:endParaRPr lang="en-AU"/>
-          </a:p>
-        </p:txBody>
-      </p:sp>
-    </p:spTree>
-    <p:extLst>
-      <p:ext uri="{BB962C8B-B14F-4D97-AF65-F5344CB8AC3E}">
-        <p14:creationId xmlns:p14="http://schemas.microsoft.com/office/powerpoint/2010/main" val="788977922"/>
-      </p:ext>
-    </p:extLst>
-  </p:cSld>
-  <p:clrMapOvr>
-    <a:masterClrMapping/>
-  </p:clrMapOvr>
-</p:sld>
-</file>
-
-<file path=ppt/slides/slide14.xml><?xml version="1.0" encoding="utf-8"?>
-<p:sld xmlns:a="http://schemas.openxmlformats.org/drawingml/2006/main" xmlns:r="http://schemas.openxmlformats.org/officeDocument/2006/relationships" xmlns:p="http://schemas.openxmlformats.org/presentationml/2006/main">
-  <p:cSld>
     <p:bg>
       <p:bgPr>
-        <a:blipFill>
-          <a:blip r:embed="rId2">
-            <a:duotone>
-              <a:schemeClr val="bg2">
-                <a:shade val="48000"/>
-                <a:hueMod val="106000"/>
-                <a:satMod val="140000"/>
-                <a:lumMod val="42000"/>
-              </a:schemeClr>
-              <a:schemeClr val="bg2">
-                <a:tint val="98000"/>
-                <a:hueMod val="92000"/>
-                <a:satMod val="220000"/>
-                <a:lumMod val="90000"/>
-              </a:schemeClr>
-            </a:duotone>
-          </a:blip>
-          <a:stretch/>
-        </a:blipFill>
+        <a:solidFill>
+          <a:schemeClr val="bg2"/>
+        </a:solidFill>
         <a:effectLst/>
       </p:bgPr>
     </p:bg>
@@ -18666,443 +16341,7 @@
           <p:cNvPr id="2" name="Title 1">
             <a:extLst>
               <a:ext uri="{FF2B5EF4-FFF2-40B4-BE49-F238E27FC236}">
-                <a16:creationId xmlns:a16="http://schemas.microsoft.com/office/drawing/2014/main" id="{C9420D42-EDC0-9553-897F-B99808AA5F70}"/>
-              </a:ext>
-            </a:extLst>
-          </p:cNvPr>
-          <p:cNvSpPr>
-            <a:spLocks noGrp="1"/>
-          </p:cNvSpPr>
-          <p:nvPr>
-            <p:ph type="title"/>
-          </p:nvPr>
-        </p:nvSpPr>
-        <p:spPr>
-          <a:xfrm>
-            <a:off x="1141413" y="618518"/>
-            <a:ext cx="9905998" cy="1478570"/>
-          </a:xfrm>
-        </p:spPr>
-        <p:txBody>
-          <a:bodyPr vert="horz" lIns="91440" tIns="45720" rIns="91440" bIns="45720" rtlCol="0" anchor="ctr">
-            <a:normAutofit/>
-          </a:bodyPr>
-          <a:lstStyle/>
-          <a:p>
-            <a:r>
-              <a:rPr lang="en-US"/>
-              <a:t>Project feasibility </a:t>
-            </a:r>
-          </a:p>
-        </p:txBody>
-      </p:sp>
-      <p:pic>
-        <p:nvPicPr>
-          <p:cNvPr id="10" name="Picture 9" descr="A diagram of a router&#10;&#10;AI-generated content may be incorrect.">
-            <a:extLst>
-              <a:ext uri="{FF2B5EF4-FFF2-40B4-BE49-F238E27FC236}">
-                <a16:creationId xmlns:a16="http://schemas.microsoft.com/office/drawing/2014/main" id="{8548E211-0B5E-6052-9018-3B50EACE3EDB}"/>
-              </a:ext>
-            </a:extLst>
-          </p:cNvPr>
-          <p:cNvPicPr>
-            <a:picLocks noChangeAspect="1"/>
-          </p:cNvPicPr>
-          <p:nvPr/>
-        </p:nvPicPr>
-        <p:blipFill>
-          <a:blip r:embed="rId3">
-            <a:extLst>
-              <a:ext uri="{28A0092B-C50C-407E-A947-70E740481C1C}">
-                <a14:useLocalDpi xmlns:a14="http://schemas.microsoft.com/office/drawing/2010/main" val="0"/>
-              </a:ext>
-            </a:extLst>
-          </a:blip>
-          <a:stretch>
-            <a:fillRect/>
-          </a:stretch>
-        </p:blipFill>
-        <p:spPr bwMode="auto">
-          <a:xfrm>
-            <a:off x="1141411" y="2764080"/>
-            <a:ext cx="4689234" cy="2520463"/>
-          </a:xfrm>
-          <a:prstGeom prst="round2DiagRect">
-            <a:avLst>
-              <a:gd name="adj1" fmla="val 5608"/>
-              <a:gd name="adj2" fmla="val 0"/>
-            </a:avLst>
-          </a:prstGeom>
-          <a:noFill/>
-          <a:ln w="19050" cap="sq">
-            <a:solidFill>
-              <a:schemeClr val="tx2">
-                <a:lumMod val="60000"/>
-                <a:lumOff val="40000"/>
-                <a:alpha val="60000"/>
-              </a:schemeClr>
-            </a:solidFill>
-            <a:miter lim="800000"/>
-          </a:ln>
-          <a:effectLst>
-            <a:outerShdw blurRad="88900" dist="38100" dir="5400000" algn="t" rotWithShape="0">
-              <a:prstClr val="black">
-                <a:alpha val="40000"/>
-              </a:prstClr>
-            </a:outerShdw>
-          </a:effectLst>
-        </p:spPr>
-      </p:pic>
-      <p:sp>
-        <p:nvSpPr>
-          <p:cNvPr id="6" name="TextBox 5">
-            <a:extLst>
-              <a:ext uri="{FF2B5EF4-FFF2-40B4-BE49-F238E27FC236}">
-                <a16:creationId xmlns:a16="http://schemas.microsoft.com/office/drawing/2014/main" id="{B06B55FE-D05D-1E29-C2FF-A590F04B7CAC}"/>
-              </a:ext>
-            </a:extLst>
-          </p:cNvPr>
-          <p:cNvSpPr txBox="1"/>
-          <p:nvPr/>
-        </p:nvSpPr>
-        <p:spPr>
-          <a:xfrm>
-            <a:off x="6361357" y="618518"/>
-            <a:ext cx="5506929" cy="5529943"/>
-          </a:xfrm>
-          <a:prstGeom prst="rect">
-            <a:avLst/>
-          </a:prstGeom>
-        </p:spPr>
-        <p:txBody>
-          <a:bodyPr vert="horz" lIns="91440" tIns="45720" rIns="91440" bIns="45720" rtlCol="0">
-            <a:normAutofit fontScale="92500"/>
-          </a:bodyPr>
-          <a:lstStyle/>
-          <a:p>
-            <a:pPr defTabSz="914400">
-              <a:lnSpc>
-                <a:spcPct val="110000"/>
-              </a:lnSpc>
-              <a:spcAft>
-                <a:spcPts val="600"/>
-              </a:spcAft>
-              <a:buSzPct val="125000"/>
-            </a:pPr>
-            <a:r>
-              <a:rPr lang="en-US" sz="2400" b="1"/>
-              <a:t>Tools and Technology:</a:t>
-            </a:r>
-          </a:p>
-          <a:p>
-            <a:pPr indent="-228600" defTabSz="914400">
-              <a:lnSpc>
-                <a:spcPct val="110000"/>
-              </a:lnSpc>
-              <a:spcAft>
-                <a:spcPts val="600"/>
-              </a:spcAft>
-              <a:buSzPct val="125000"/>
-              <a:buFont typeface="Arial" panose="020B0604020202020204" pitchFamily="34" charset="0"/>
-              <a:buChar char="•"/>
-            </a:pPr>
-            <a:r>
-              <a:rPr lang="en-US" sz="2400" u="sng"/>
-              <a:t>OS</a:t>
-            </a:r>
-            <a:r>
-              <a:rPr lang="en-US" sz="2400"/>
-              <a:t> = Ubuntu, Fedora, Kali Linux</a:t>
-            </a:r>
-          </a:p>
-          <a:p>
-            <a:pPr indent="-228600" defTabSz="914400">
-              <a:lnSpc>
-                <a:spcPct val="110000"/>
-              </a:lnSpc>
-              <a:spcAft>
-                <a:spcPts val="600"/>
-              </a:spcAft>
-              <a:buSzPct val="125000"/>
-              <a:buFont typeface="Arial" panose="020B0604020202020204" pitchFamily="34" charset="0"/>
-              <a:buChar char="•"/>
-            </a:pPr>
-            <a:r>
-              <a:rPr lang="en-US" sz="2400" u="sng"/>
-              <a:t>Network Tools </a:t>
-            </a:r>
-            <a:r>
-              <a:rPr lang="en-US" sz="2400"/>
-              <a:t>= </a:t>
-            </a:r>
-            <a:r>
-              <a:rPr lang="en-US" sz="2400" err="1"/>
-              <a:t>iPerf</a:t>
-            </a:r>
-            <a:r>
-              <a:rPr lang="en-US" sz="2400"/>
-              <a:t> (tests IPv4 and IPv6 using TCP and UDP)</a:t>
-            </a:r>
-          </a:p>
-          <a:p>
-            <a:pPr indent="-228600" defTabSz="914400">
-              <a:lnSpc>
-                <a:spcPct val="110000"/>
-              </a:lnSpc>
-              <a:spcAft>
-                <a:spcPts val="600"/>
-              </a:spcAft>
-              <a:buSzPct val="125000"/>
-              <a:buFont typeface="Arial" panose="020B0604020202020204" pitchFamily="34" charset="0"/>
-              <a:buChar char="•"/>
-            </a:pPr>
-            <a:r>
-              <a:rPr lang="en-US" sz="2400" u="sng"/>
-              <a:t>Packet Sizes</a:t>
-            </a:r>
-            <a:r>
-              <a:rPr lang="en-US" sz="2400"/>
-              <a:t> = 12 variations of packet sizes</a:t>
-            </a:r>
-            <a:endParaRPr lang="sv-SE" sz="2400"/>
-          </a:p>
-          <a:p>
-            <a:pPr marL="57150" defTabSz="914400">
-              <a:lnSpc>
-                <a:spcPct val="110000"/>
-              </a:lnSpc>
-              <a:spcAft>
-                <a:spcPts val="600"/>
-              </a:spcAft>
-              <a:buSzPct val="125000"/>
-            </a:pPr>
-            <a:endParaRPr lang="sv-SE" sz="2400"/>
-          </a:p>
-          <a:p>
-            <a:pPr marL="57150" defTabSz="914400">
-              <a:lnSpc>
-                <a:spcPct val="110000"/>
-              </a:lnSpc>
-              <a:spcAft>
-                <a:spcPts val="600"/>
-              </a:spcAft>
-              <a:buSzPct val="125000"/>
-            </a:pPr>
-            <a:r>
-              <a:rPr lang="sv-SE" sz="2400" b="1"/>
-              <a:t>Required Skills Needed:</a:t>
-            </a:r>
-          </a:p>
-          <a:p>
-            <a:pPr marL="342900" indent="-285750" defTabSz="914400">
-              <a:lnSpc>
-                <a:spcPct val="110000"/>
-              </a:lnSpc>
-              <a:spcAft>
-                <a:spcPts val="600"/>
-              </a:spcAft>
-              <a:buSzPct val="125000"/>
-              <a:buFont typeface="Arial" panose="020B0604020202020204" pitchFamily="34" charset="0"/>
-              <a:buChar char="•"/>
-            </a:pPr>
-            <a:r>
-              <a:rPr lang="sv-SE" sz="2400"/>
-              <a:t>Familiarity with Linux, software routing, and performance testing.</a:t>
-            </a:r>
-          </a:p>
-          <a:p>
-            <a:pPr marL="342900" indent="-285750" defTabSz="914400">
-              <a:lnSpc>
-                <a:spcPct val="110000"/>
-              </a:lnSpc>
-              <a:spcAft>
-                <a:spcPts val="600"/>
-              </a:spcAft>
-              <a:buSzPct val="125000"/>
-              <a:buFont typeface="Arial" panose="020B0604020202020204" pitchFamily="34" charset="0"/>
-              <a:buChar char="•"/>
-            </a:pPr>
-            <a:r>
-              <a:rPr lang="sv-SE" sz="2400"/>
-              <a:t>IPv4 and IPv6 network principles</a:t>
-            </a:r>
-          </a:p>
-          <a:p>
-            <a:pPr marL="342900" indent="-285750" defTabSz="914400">
-              <a:lnSpc>
-                <a:spcPct val="110000"/>
-              </a:lnSpc>
-              <a:spcAft>
-                <a:spcPts val="600"/>
-              </a:spcAft>
-              <a:buSzPct val="125000"/>
-              <a:buFont typeface="Arial" panose="020B0604020202020204" pitchFamily="34" charset="0"/>
-              <a:buChar char="•"/>
-            </a:pPr>
-            <a:r>
-              <a:rPr lang="sv-SE" sz="2400"/>
-              <a:t>Programming and debugging</a:t>
-            </a:r>
-          </a:p>
-          <a:p>
-            <a:pPr marL="342900" indent="-285750" defTabSz="914400">
-              <a:lnSpc>
-                <a:spcPct val="110000"/>
-              </a:lnSpc>
-              <a:spcAft>
-                <a:spcPts val="600"/>
-              </a:spcAft>
-              <a:buSzPct val="125000"/>
-              <a:buFont typeface="Arial" panose="020B0604020202020204" pitchFamily="34" charset="0"/>
-              <a:buChar char="•"/>
-            </a:pPr>
-            <a:r>
-              <a:rPr lang="sv-SE" sz="2400"/>
-              <a:t>Router configuration</a:t>
-            </a:r>
-          </a:p>
-          <a:p>
-            <a:pPr marL="57150" defTabSz="914400">
-              <a:lnSpc>
-                <a:spcPct val="110000"/>
-              </a:lnSpc>
-              <a:spcAft>
-                <a:spcPts val="600"/>
-              </a:spcAft>
-              <a:buSzPct val="125000"/>
-            </a:pPr>
-            <a:endParaRPr lang="en-US"/>
-          </a:p>
-          <a:p>
-            <a:pPr marL="285750" indent="-228600" defTabSz="914400">
-              <a:lnSpc>
-                <a:spcPct val="110000"/>
-              </a:lnSpc>
-              <a:spcAft>
-                <a:spcPts val="600"/>
-              </a:spcAft>
-              <a:buSzPct val="125000"/>
-              <a:buFont typeface="Arial" panose="020B0604020202020204" pitchFamily="34" charset="0"/>
-              <a:buChar char="•"/>
-            </a:pPr>
-            <a:endParaRPr lang="en-US" sz="1300"/>
-          </a:p>
-          <a:p>
-            <a:pPr indent="-228600" defTabSz="914400">
-              <a:lnSpc>
-                <a:spcPct val="110000"/>
-              </a:lnSpc>
-              <a:spcAft>
-                <a:spcPts val="600"/>
-              </a:spcAft>
-              <a:buSzPct val="125000"/>
-              <a:buFont typeface="Arial" panose="020B0604020202020204" pitchFamily="34" charset="0"/>
-              <a:buChar char="•"/>
-            </a:pPr>
-            <a:endParaRPr lang="en-US" sz="1300"/>
-          </a:p>
-          <a:p>
-            <a:pPr indent="-228600" defTabSz="914400">
-              <a:lnSpc>
-                <a:spcPct val="110000"/>
-              </a:lnSpc>
-              <a:spcAft>
-                <a:spcPts val="600"/>
-              </a:spcAft>
-              <a:buSzPct val="125000"/>
-              <a:buFont typeface="Arial" panose="020B0604020202020204" pitchFamily="34" charset="0"/>
-              <a:buChar char="•"/>
-            </a:pPr>
-            <a:endParaRPr lang="en-US" sz="1300"/>
-          </a:p>
-          <a:p>
-            <a:pPr indent="-228600" defTabSz="914400">
-              <a:lnSpc>
-                <a:spcPct val="110000"/>
-              </a:lnSpc>
-              <a:spcAft>
-                <a:spcPts val="600"/>
-              </a:spcAft>
-              <a:buSzPct val="125000"/>
-              <a:buFont typeface="Arial" panose="020B0604020202020204" pitchFamily="34" charset="0"/>
-              <a:buChar char="•"/>
-            </a:pPr>
-            <a:endParaRPr lang="en-US" sz="1300"/>
-          </a:p>
-        </p:txBody>
-      </p:sp>
-      <p:sp>
-        <p:nvSpPr>
-          <p:cNvPr id="11" name="TextBox 10">
-            <a:extLst>
-              <a:ext uri="{FF2B5EF4-FFF2-40B4-BE49-F238E27FC236}">
-                <a16:creationId xmlns:a16="http://schemas.microsoft.com/office/drawing/2014/main" id="{0223274E-944C-507D-D01A-E299BF25C5C0}"/>
-              </a:ext>
-            </a:extLst>
-          </p:cNvPr>
-          <p:cNvSpPr txBox="1"/>
-          <p:nvPr/>
-        </p:nvSpPr>
-        <p:spPr>
-          <a:xfrm>
-            <a:off x="1141411" y="2245918"/>
-            <a:ext cx="3924075" cy="369332"/>
-          </a:xfrm>
-          <a:prstGeom prst="rect">
-            <a:avLst/>
-          </a:prstGeom>
-          <a:noFill/>
-        </p:spPr>
-        <p:txBody>
-          <a:bodyPr wrap="square" rtlCol="0">
-            <a:spAutoFit/>
-          </a:bodyPr>
-          <a:lstStyle/>
-          <a:p>
-            <a:r>
-              <a:rPr lang="en-NZ"/>
-              <a:t>Required Infrastructure:</a:t>
-            </a:r>
-            <a:endParaRPr lang="en-AU"/>
-          </a:p>
-        </p:txBody>
-      </p:sp>
-    </p:spTree>
-    <p:extLst>
-      <p:ext uri="{BB962C8B-B14F-4D97-AF65-F5344CB8AC3E}">
-        <p14:creationId xmlns:p14="http://schemas.microsoft.com/office/powerpoint/2010/main" val="2891166803"/>
-      </p:ext>
-    </p:extLst>
-  </p:cSld>
-  <p:clrMapOvr>
-    <a:masterClrMapping/>
-  </p:clrMapOvr>
-</p:sld>
-</file>
-
-<file path=ppt/slides/slide15.xml><?xml version="1.0" encoding="utf-8"?>
-<p:sld xmlns:a="http://schemas.openxmlformats.org/drawingml/2006/main" xmlns:r="http://schemas.openxmlformats.org/officeDocument/2006/relationships" xmlns:p="http://schemas.openxmlformats.org/presentationml/2006/main">
-  <p:cSld>
-    <p:spTree>
-      <p:nvGrpSpPr>
-        <p:cNvPr id="1" name=""/>
-        <p:cNvGrpSpPr/>
-        <p:nvPr/>
-      </p:nvGrpSpPr>
-      <p:grpSpPr>
-        <a:xfrm>
-          <a:off x="0" y="0"/>
-          <a:ext cx="0" cy="0"/>
-          <a:chOff x="0" y="0"/>
-          <a:chExt cx="0" cy="0"/>
-        </a:xfrm>
-      </p:grpSpPr>
-      <p:sp>
-        <p:nvSpPr>
-          <p:cNvPr id="2" name="Title 1">
-            <a:extLst>
-              <a:ext uri="{FF2B5EF4-FFF2-40B4-BE49-F238E27FC236}">
-                <a16:creationId xmlns:a16="http://schemas.microsoft.com/office/drawing/2014/main" id="{8A9AAE14-4D82-F483-ADC0-49FF54C6DB53}"/>
+                <a16:creationId xmlns:a16="http://schemas.microsoft.com/office/drawing/2014/main" id="{F4B3FCE7-C2FD-C943-C120-D47B5F2D41DE}"/>
               </a:ext>
             </a:extLst>
           </p:cNvPr>
@@ -19115,13 +16354,16 @@
         </p:nvSpPr>
         <p:spPr/>
         <p:txBody>
-          <a:bodyPr/>
+          <a:bodyPr>
+            <a:normAutofit/>
+          </a:bodyPr>
           <a:lstStyle/>
           <a:p>
             <a:r>
-              <a:rPr lang="en-AU" err="1"/>
-              <a:t>UpSKILLING</a:t>
+              <a:rPr lang="en-NZ"/>
+              <a:t>Project plan</a:t>
             </a:r>
+            <a:endParaRPr lang="en-AU"/>
           </a:p>
         </p:txBody>
       </p:sp>
@@ -19130,7 +16372,7 @@
           <p:cNvPr id="3" name="Content Placeholder 2">
             <a:extLst>
               <a:ext uri="{FF2B5EF4-FFF2-40B4-BE49-F238E27FC236}">
-                <a16:creationId xmlns:a16="http://schemas.microsoft.com/office/drawing/2014/main" id="{C669E754-B154-F1A9-C115-E479C1F55B58}"/>
+                <a16:creationId xmlns:a16="http://schemas.microsoft.com/office/drawing/2014/main" id="{B33BA710-C055-235C-3EFD-1049C1E70CF3}"/>
               </a:ext>
             </a:extLst>
           </p:cNvPr>
@@ -19143,123 +16385,104 @@
         </p:nvSpPr>
         <p:spPr/>
         <p:txBody>
-          <a:bodyPr/>
+          <a:bodyPr vert="horz" lIns="91440" tIns="45720" rIns="91440" bIns="45720" rtlCol="0" anchor="t">
+            <a:normAutofit/>
+          </a:bodyPr>
           <a:lstStyle/>
-          <a:p>
-            <a:pPr marL="57150" defTabSz="914400">
-              <a:lnSpc>
-                <a:spcPct val="110000"/>
-              </a:lnSpc>
-              <a:spcAft>
-                <a:spcPts val="600"/>
-              </a:spcAft>
-              <a:buSzPct val="125000"/>
-            </a:pPr>
-            <a:r>
-              <a:rPr lang="sv-SE" sz="2400" b="1"/>
-              <a:t>Required Skills Needed:</a:t>
-            </a:r>
-          </a:p>
-          <a:p>
-            <a:pPr marL="342900" indent="-285750" defTabSz="914400">
-              <a:lnSpc>
-                <a:spcPct val="110000"/>
-              </a:lnSpc>
-              <a:spcAft>
-                <a:spcPts val="600"/>
-              </a:spcAft>
-              <a:buSzPct val="125000"/>
-              <a:buFont typeface="Arial" panose="020B0604020202020204" pitchFamily="34" charset="0"/>
-              <a:buChar char="•"/>
-            </a:pPr>
-            <a:r>
-              <a:rPr lang="sv-SE" sz="2400"/>
-              <a:t>Familiarity with Linux, software routing, and performance testing.</a:t>
-            </a:r>
-          </a:p>
-          <a:p>
-            <a:pPr marL="342900" indent="-285750" defTabSz="914400">
-              <a:lnSpc>
-                <a:spcPct val="110000"/>
-              </a:lnSpc>
-              <a:spcAft>
-                <a:spcPts val="600"/>
-              </a:spcAft>
-              <a:buSzPct val="125000"/>
-              <a:buFont typeface="Arial" panose="020B0604020202020204" pitchFamily="34" charset="0"/>
-              <a:buChar char="•"/>
-            </a:pPr>
-            <a:r>
-              <a:rPr lang="sv-SE" sz="2400"/>
-              <a:t>IPv4 and IPv6 network principles</a:t>
-            </a:r>
-          </a:p>
-          <a:p>
-            <a:pPr marL="342900" indent="-285750" defTabSz="914400">
-              <a:lnSpc>
-                <a:spcPct val="110000"/>
-              </a:lnSpc>
-              <a:spcAft>
-                <a:spcPts val="600"/>
-              </a:spcAft>
-              <a:buSzPct val="125000"/>
-              <a:buFont typeface="Arial" panose="020B0604020202020204" pitchFamily="34" charset="0"/>
-              <a:buChar char="•"/>
-            </a:pPr>
-            <a:r>
-              <a:rPr lang="sv-SE" sz="2400"/>
-              <a:t>Programming and debugging</a:t>
-            </a:r>
-          </a:p>
-          <a:p>
-            <a:pPr marL="342900" indent="-285750" defTabSz="914400">
-              <a:lnSpc>
-                <a:spcPct val="110000"/>
-              </a:lnSpc>
-              <a:spcAft>
-                <a:spcPts val="600"/>
-              </a:spcAft>
-              <a:buSzPct val="125000"/>
-              <a:buFont typeface="Arial" panose="020B0604020202020204" pitchFamily="34" charset="0"/>
-              <a:buChar char="•"/>
-            </a:pPr>
-            <a:r>
-              <a:rPr lang="sv-SE" sz="2400"/>
-              <a:t>Router configuration</a:t>
-            </a:r>
-          </a:p>
           <a:p>
             <a:r>
               <a:rPr lang="en-AU">
-                <a:highlight>
-                  <a:srgbClr val="FF0000"/>
-                </a:highlight>
+                <a:ea typeface="+mn-lt"/>
+                <a:cs typeface="+mn-lt"/>
               </a:rPr>
-              <a:t>Hi Charmi, We are using a different </a:t>
+              <a:t>Project Milestones:</a:t>
             </a:r>
-            <a:r>
-              <a:rPr lang="en-AU" err="1">
-                <a:highlight>
-                  <a:srgbClr val="FF0000"/>
-                </a:highlight>
+            <a:br>
+              <a:rPr lang="en-AU">
+                <a:ea typeface="+mn-lt"/>
+                <a:cs typeface="+mn-lt"/>
               </a:rPr>
-              <a:t>powerpoint</a:t>
-            </a:r>
+            </a:br>
             <a:r>
               <a:rPr lang="en-AU">
-                <a:highlight>
-                  <a:srgbClr val="FF0000"/>
-                </a:highlight>
+                <a:ea typeface="+mn-lt"/>
+                <a:cs typeface="+mn-lt"/>
               </a:rPr>
-              <a:t> Slide</a:t>
+              <a:t>Milestone 1: Project Proposal (04/04/2025)</a:t>
             </a:r>
+            <a:br>
+              <a:rPr lang="en-AU">
+                <a:ea typeface="+mn-lt"/>
+                <a:cs typeface="+mn-lt"/>
+              </a:rPr>
+            </a:br>
+            <a:r>
+              <a:rPr lang="en-AU">
+                <a:ea typeface="+mn-lt"/>
+                <a:cs typeface="+mn-lt"/>
+              </a:rPr>
+              <a:t>Milestone 2: Mid-Term Review (06/06/2025)</a:t>
+            </a:r>
+            <a:br>
+              <a:rPr lang="en-AU">
+                <a:ea typeface="+mn-lt"/>
+                <a:cs typeface="+mn-lt"/>
+              </a:rPr>
+            </a:br>
+            <a:r>
+              <a:rPr lang="en-AU">
+                <a:ea typeface="+mn-lt"/>
+                <a:cs typeface="+mn-lt"/>
+              </a:rPr>
+              <a:t>Milestone 3: Completion of Ubuntu Evaluation -</a:t>
+            </a:r>
+            <a:br>
+              <a:rPr lang="en-AU">
+                <a:ea typeface="+mn-lt"/>
+                <a:cs typeface="+mn-lt"/>
+              </a:rPr>
+            </a:br>
+            <a:r>
+              <a:rPr lang="en-AU">
+                <a:ea typeface="+mn-lt"/>
+                <a:cs typeface="+mn-lt"/>
+              </a:rPr>
+              <a:t>Milestone 4: Complete Fedora Evaluation -</a:t>
+            </a:r>
+            <a:br>
+              <a:rPr lang="en-AU">
+                <a:ea typeface="+mn-lt"/>
+                <a:cs typeface="+mn-lt"/>
+              </a:rPr>
+            </a:br>
+            <a:r>
+              <a:rPr lang="en-AU">
+                <a:ea typeface="+mn-lt"/>
+                <a:cs typeface="+mn-lt"/>
+              </a:rPr>
+              <a:t>Milestone 5: Kali Evaluation Completion - </a:t>
+            </a:r>
+            <a:br>
+              <a:rPr lang="en-AU">
+                <a:ea typeface="+mn-lt"/>
+                <a:cs typeface="+mn-lt"/>
+              </a:rPr>
+            </a:br>
+            <a:r>
+              <a:rPr lang="en-AU">
+                <a:ea typeface="+mn-lt"/>
+                <a:cs typeface="+mn-lt"/>
+              </a:rPr>
+              <a:t>Milestone 6: Final Poster Submission -</a:t>
+            </a:r>
+            <a:endParaRPr lang="en-AU"/>
           </a:p>
         </p:txBody>
       </p:sp>
     </p:spTree>
     <p:extLst>
       <p:ext uri="{BB962C8B-B14F-4D97-AF65-F5344CB8AC3E}">
-        <p14:creationId xmlns:p14="http://schemas.microsoft.com/office/powerpoint/2010/main" val="3381972177"/>
+        <p14:creationId xmlns:p14="http://schemas.microsoft.com/office/powerpoint/2010/main" val="132504903"/>
       </p:ext>
     </p:extLst>
   </p:cSld>
@@ -19269,66 +16492,7 @@
 </p:sld>
 </file>
 
-<file path=ppt/slides/slide16.xml><?xml version="1.0" encoding="utf-8"?>
-<p:sld xmlns:a="http://schemas.openxmlformats.org/drawingml/2006/main" xmlns:r="http://schemas.openxmlformats.org/officeDocument/2006/relationships" xmlns:p="http://schemas.openxmlformats.org/presentationml/2006/main">
-  <p:cSld>
-    <p:spTree>
-      <p:nvGrpSpPr>
-        <p:cNvPr id="1" name=""/>
-        <p:cNvGrpSpPr/>
-        <p:nvPr/>
-      </p:nvGrpSpPr>
-      <p:grpSpPr>
-        <a:xfrm>
-          <a:off x="0" y="0"/>
-          <a:ext cx="0" cy="0"/>
-          <a:chOff x="0" y="0"/>
-          <a:chExt cx="0" cy="0"/>
-        </a:xfrm>
-      </p:grpSpPr>
-      <p:sp>
-        <p:nvSpPr>
-          <p:cNvPr id="2" name="Title 1">
-            <a:extLst>
-              <a:ext uri="{FF2B5EF4-FFF2-40B4-BE49-F238E27FC236}">
-                <a16:creationId xmlns:a16="http://schemas.microsoft.com/office/drawing/2014/main" id="{28B16872-F13E-6E07-F23F-ABD836D54A8F}"/>
-              </a:ext>
-            </a:extLst>
-          </p:cNvPr>
-          <p:cNvSpPr>
-            <a:spLocks noGrp="1"/>
-          </p:cNvSpPr>
-          <p:nvPr>
-            <p:ph type="title"/>
-          </p:nvPr>
-        </p:nvSpPr>
-        <p:spPr/>
-        <p:txBody>
-          <a:bodyPr/>
-          <a:lstStyle/>
-          <a:p>
-            <a:r>
-              <a:rPr lang="en-US"/>
-              <a:t>Questions?</a:t>
-            </a:r>
-            <a:endParaRPr lang="en-NZ"/>
-          </a:p>
-        </p:txBody>
-      </p:sp>
-    </p:spTree>
-    <p:extLst>
-      <p:ext uri="{BB962C8B-B14F-4D97-AF65-F5344CB8AC3E}">
-        <p14:creationId xmlns:p14="http://schemas.microsoft.com/office/powerpoint/2010/main" val="3645613890"/>
-      </p:ext>
-    </p:extLst>
-  </p:cSld>
-  <p:clrMapOvr>
-    <a:masterClrMapping/>
-  </p:clrMapOvr>
-</p:sld>
-</file>
-
-<file path=ppt/slides/slide17.xml><?xml version="1.0" encoding="utf-8"?>
+<file path=ppt/slides/slide11.xml><?xml version="1.0" encoding="utf-8"?>
 <p:sld xmlns:a="http://schemas.openxmlformats.org/drawingml/2006/main" xmlns:r="http://schemas.openxmlformats.org/officeDocument/2006/relationships" xmlns:p="http://schemas.openxmlformats.org/presentationml/2006/main">
   <p:cSld>
     <p:spTree>
@@ -19368,7 +16532,7 @@
           <a:p>
             <a:r>
               <a:rPr lang="en-NZ"/>
-              <a:t>REFERENCES</a:t>
+              <a:t>references</a:t>
             </a:r>
             <a:endParaRPr lang="en-AU"/>
           </a:p>
@@ -19376,1188 +16540,10 @@
       </p:sp>
       <p:sp>
         <p:nvSpPr>
-          <p:cNvPr id="6" name="Rectangle 3">
+          <p:cNvPr id="3" name="Content Placeholder 2">
             <a:extLst>
               <a:ext uri="{FF2B5EF4-FFF2-40B4-BE49-F238E27FC236}">
-                <a16:creationId xmlns:a16="http://schemas.microsoft.com/office/drawing/2014/main" id="{63029A99-0ECD-C71B-3659-C09FED921BAE}"/>
-              </a:ext>
-            </a:extLst>
-          </p:cNvPr>
-          <p:cNvSpPr>
-            <a:spLocks noGrp="1" noChangeArrowheads="1"/>
-          </p:cNvSpPr>
-          <p:nvPr>
-            <p:ph sz="half" idx="1"/>
-          </p:nvPr>
-        </p:nvSpPr>
-        <p:spPr bwMode="auto">
-          <a:xfrm>
-            <a:off x="507362" y="1836616"/>
-            <a:ext cx="5587050" cy="4401205"/>
-          </a:xfrm>
-          <a:prstGeom prst="rect">
-            <a:avLst/>
-          </a:prstGeom>
-          <a:noFill/>
-          <a:ln>
-            <a:noFill/>
-          </a:ln>
-          <a:effectLst/>
-          <a:extLst>
-            <a:ext uri="{909E8E84-426E-40DD-AFC4-6F175D3DCCD1}">
-              <a14:hiddenFill xmlns:a14="http://schemas.microsoft.com/office/drawing/2010/main">
-                <a:solidFill>
-                  <a:schemeClr val="accent1"/>
-                </a:solidFill>
-              </a14:hiddenFill>
-            </a:ext>
-            <a:ext uri="{91240B29-F687-4F45-9708-019B960494DF}">
-              <a14:hiddenLine xmlns:a14="http://schemas.microsoft.com/office/drawing/2010/main" w="9525">
-                <a:solidFill>
-                  <a:schemeClr val="tx1"/>
-                </a:solidFill>
-                <a:miter lim="800000"/>
-                <a:headEnd/>
-                <a:tailEnd/>
-              </a14:hiddenLine>
-            </a:ext>
-            <a:ext uri="{AF507438-7753-43E0-B8FC-AC1667EBCBE1}">
-              <a14:hiddenEffects xmlns:a14="http://schemas.microsoft.com/office/drawing/2010/main">
-                <a:effectLst>
-                  <a:outerShdw dist="35921" dir="2700000" algn="ctr" rotWithShape="0">
-                    <a:schemeClr val="bg2"/>
-                  </a:outerShdw>
-                </a:effectLst>
-              </a14:hiddenEffects>
-            </a:ext>
-          </a:extLst>
-        </p:spPr>
-        <p:txBody>
-          <a:bodyPr vert="horz" wrap="square" lIns="91440" tIns="45720" rIns="91440" bIns="45720" numCol="1" anchor="ctr" anchorCtr="0" compatLnSpc="1">
-            <a:prstTxWarp prst="textNoShape">
-              <a:avLst/>
-            </a:prstTxWarp>
-            <a:spAutoFit/>
-          </a:bodyPr>
-          <a:lstStyle/>
-          <a:p>
-            <a:pPr marL="0" marR="0" lvl="0" indent="0" algn="l" defTabSz="914400" rtl="0" eaLnBrk="0" fontAlgn="base" latinLnBrk="0" hangingPunct="0">
-              <a:lnSpc>
-                <a:spcPct val="100000"/>
-              </a:lnSpc>
-              <a:spcBef>
-                <a:spcPct val="0"/>
-              </a:spcBef>
-              <a:spcAft>
-                <a:spcPct val="0"/>
-              </a:spcAft>
-              <a:buClrTx/>
-              <a:buSzTx/>
-              <a:buFontTx/>
-              <a:buNone/>
-              <a:tabLst/>
-            </a:pPr>
-            <a:r>
-              <a:rPr kumimoji="0" lang="en-NZ" altLang="en-US" sz="1000" b="0" i="0" u="none" strike="noStrike" cap="none" normalizeH="0" baseline="0">
-                <a:ln>
-                  <a:noFill/>
-                </a:ln>
-                <a:solidFill>
-                  <a:schemeClr val="tx1"/>
-                </a:solidFill>
-                <a:effectLst/>
-                <a:latin typeface="Times New Roman" panose="02020603050405020304" pitchFamily="18" charset="0"/>
-                <a:ea typeface="Yu Mincho" panose="02020400000000000000" pitchFamily="18" charset="-128"/>
-                <a:cs typeface="Times New Roman" panose="02020603050405020304" pitchFamily="18" charset="0"/>
-              </a:rPr>
-              <a:t>Atlassian. (n.d.). </a:t>
-            </a:r>
-            <a:r>
-              <a:rPr kumimoji="0" lang="en-NZ" altLang="en-US" sz="1000" b="0" i="1" u="none" strike="noStrike" cap="none" normalizeH="0" baseline="0">
-                <a:ln>
-                  <a:noFill/>
-                </a:ln>
-                <a:solidFill>
-                  <a:schemeClr val="tx1"/>
-                </a:solidFill>
-                <a:effectLst/>
-                <a:latin typeface="Times New Roman" panose="02020603050405020304" pitchFamily="18" charset="0"/>
-                <a:ea typeface="Yu Mincho" panose="02020400000000000000" pitchFamily="18" charset="-128"/>
-                <a:cs typeface="Times New Roman" panose="02020603050405020304" pitchFamily="18" charset="0"/>
-              </a:rPr>
-              <a:t>Waterfall Methodology: A Comprehensive Guide</a:t>
-            </a:r>
-            <a:r>
-              <a:rPr kumimoji="0" lang="en-NZ" altLang="en-US" sz="1000" b="0" i="0" u="none" strike="noStrike" cap="none" normalizeH="0" baseline="0">
-                <a:ln>
-                  <a:noFill/>
-                </a:ln>
-                <a:solidFill>
-                  <a:schemeClr val="tx1"/>
-                </a:solidFill>
-                <a:effectLst/>
-                <a:latin typeface="Times New Roman" panose="02020603050405020304" pitchFamily="18" charset="0"/>
-                <a:ea typeface="Yu Mincho" panose="02020400000000000000" pitchFamily="18" charset="-128"/>
-                <a:cs typeface="Times New Roman" panose="02020603050405020304" pitchFamily="18" charset="0"/>
-              </a:rPr>
-              <a:t>. </a:t>
-            </a:r>
-            <a:r>
-              <a:rPr kumimoji="0" lang="en-NZ" altLang="en-US" sz="1000" b="0" i="0" u="none" strike="noStrike" cap="none" normalizeH="0" baseline="0">
-                <a:ln>
-                  <a:noFill/>
-                </a:ln>
-                <a:solidFill>
-                  <a:schemeClr val="tx1"/>
-                </a:solidFill>
-                <a:effectLst/>
-                <a:latin typeface="Times New Roman" panose="02020603050405020304" pitchFamily="18" charset="0"/>
-                <a:ea typeface="Yu Mincho" panose="02020400000000000000" pitchFamily="18" charset="-128"/>
-                <a:cs typeface="Times New Roman" panose="02020603050405020304" pitchFamily="18" charset="0"/>
-                <a:hlinkClick r:id="rId2"/>
-              </a:rPr>
-              <a:t>https://www.atlassian.com/agile/project-management/waterfall-methodology</a:t>
-            </a:r>
-            <a:r>
-              <a:rPr kumimoji="0" lang="en-NZ" altLang="en-US" sz="1000" b="0" i="0" u="none" strike="noStrike" cap="none" normalizeH="0" baseline="0">
-                <a:ln>
-                  <a:noFill/>
-                </a:ln>
-                <a:solidFill>
-                  <a:schemeClr val="tx1"/>
-                </a:solidFill>
-                <a:effectLst/>
-                <a:latin typeface="Times New Roman" panose="02020603050405020304" pitchFamily="18" charset="0"/>
-                <a:ea typeface="Yu Mincho" panose="02020400000000000000" pitchFamily="18" charset="-128"/>
-                <a:cs typeface="Times New Roman" panose="02020603050405020304" pitchFamily="18" charset="0"/>
-              </a:rPr>
-              <a:t> </a:t>
-            </a:r>
-          </a:p>
-          <a:p>
-            <a:pPr marL="0" marR="0" lvl="0" indent="0" algn="l" defTabSz="914400" rtl="0" eaLnBrk="0" fontAlgn="base" latinLnBrk="0" hangingPunct="0">
-              <a:lnSpc>
-                <a:spcPct val="100000"/>
-              </a:lnSpc>
-              <a:spcBef>
-                <a:spcPct val="0"/>
-              </a:spcBef>
-              <a:spcAft>
-                <a:spcPct val="0"/>
-              </a:spcAft>
-              <a:buClrTx/>
-              <a:buSzTx/>
-              <a:buFontTx/>
-              <a:buNone/>
-              <a:tabLst/>
-            </a:pPr>
-            <a:endParaRPr kumimoji="0" lang="en-NZ" altLang="en-US" sz="1000" b="0" i="0" u="none" strike="noStrike" cap="none" normalizeH="0" baseline="0">
-              <a:ln>
-                <a:noFill/>
-              </a:ln>
-              <a:solidFill>
-                <a:schemeClr val="tx1"/>
-              </a:solidFill>
-              <a:effectLst/>
-              <a:latin typeface="Times New Roman" panose="02020603050405020304" pitchFamily="18" charset="0"/>
-              <a:cs typeface="Times New Roman" panose="02020603050405020304" pitchFamily="18" charset="0"/>
-            </a:endParaRPr>
-          </a:p>
-          <a:p>
-            <a:pPr marL="0" marR="0" lvl="0" indent="0" algn="l" defTabSz="914400" rtl="0" eaLnBrk="0" fontAlgn="base" latinLnBrk="0" hangingPunct="0">
-              <a:lnSpc>
-                <a:spcPct val="100000"/>
-              </a:lnSpc>
-              <a:spcBef>
-                <a:spcPct val="0"/>
-              </a:spcBef>
-              <a:spcAft>
-                <a:spcPct val="0"/>
-              </a:spcAft>
-              <a:buClrTx/>
-              <a:buSzTx/>
-              <a:buFontTx/>
-              <a:buNone/>
-              <a:tabLst/>
-            </a:pPr>
-            <a:r>
-              <a:rPr kumimoji="0" lang="en-NZ" altLang="en-US" sz="1000" b="0" i="0" u="none" strike="noStrike" cap="none" normalizeH="0" baseline="0">
-                <a:ln>
-                  <a:noFill/>
-                </a:ln>
-                <a:solidFill>
-                  <a:schemeClr val="tx1"/>
-                </a:solidFill>
-                <a:effectLst/>
-                <a:latin typeface="Times New Roman" panose="02020603050405020304" pitchFamily="18" charset="0"/>
-                <a:ea typeface="Yu Mincho" panose="02020400000000000000" pitchFamily="18" charset="-128"/>
-                <a:cs typeface="Times New Roman" panose="02020603050405020304" pitchFamily="18" charset="0"/>
-              </a:rPr>
-              <a:t>Chandra, D. G., </a:t>
-            </a:r>
-            <a:r>
-              <a:rPr kumimoji="0" lang="en-NZ" altLang="en-US" sz="1000" b="0" i="0" u="none" strike="noStrike" cap="none" normalizeH="0" baseline="0" err="1">
-                <a:ln>
-                  <a:noFill/>
-                </a:ln>
-                <a:solidFill>
-                  <a:schemeClr val="tx1"/>
-                </a:solidFill>
-                <a:effectLst/>
-                <a:latin typeface="Times New Roman" panose="02020603050405020304" pitchFamily="18" charset="0"/>
-                <a:ea typeface="Yu Mincho" panose="02020400000000000000" pitchFamily="18" charset="-128"/>
-                <a:cs typeface="Times New Roman" panose="02020603050405020304" pitchFamily="18" charset="0"/>
-              </a:rPr>
-              <a:t>Kathing</a:t>
-            </a:r>
-            <a:r>
-              <a:rPr kumimoji="0" lang="en-NZ" altLang="en-US" sz="1000" b="0" i="0" u="none" strike="noStrike" cap="none" normalizeH="0" baseline="0">
-                <a:ln>
-                  <a:noFill/>
-                </a:ln>
-                <a:solidFill>
-                  <a:schemeClr val="tx1"/>
-                </a:solidFill>
-                <a:effectLst/>
-                <a:latin typeface="Times New Roman" panose="02020603050405020304" pitchFamily="18" charset="0"/>
-                <a:ea typeface="Yu Mincho" panose="02020400000000000000" pitchFamily="18" charset="-128"/>
-                <a:cs typeface="Times New Roman" panose="02020603050405020304" pitchFamily="18" charset="0"/>
-              </a:rPr>
-              <a:t>, M., &amp; Kumar, D. P. (2013). A Comparative Study on IPv4 and IPv6. </a:t>
-            </a:r>
-            <a:r>
-              <a:rPr kumimoji="0" lang="en-NZ" altLang="en-US" sz="1000" b="0" i="1" u="none" strike="noStrike" cap="none" normalizeH="0" baseline="0">
-                <a:ln>
-                  <a:noFill/>
-                </a:ln>
-                <a:solidFill>
-                  <a:schemeClr val="tx1"/>
-                </a:solidFill>
-                <a:effectLst/>
-                <a:latin typeface="Times New Roman" panose="02020603050405020304" pitchFamily="18" charset="0"/>
-                <a:ea typeface="Yu Mincho" panose="02020400000000000000" pitchFamily="18" charset="-128"/>
-                <a:cs typeface="Times New Roman" panose="02020603050405020304" pitchFamily="18" charset="0"/>
-              </a:rPr>
-              <a:t>2013 International Conference on Communication Systems and Network Technologies</a:t>
-            </a:r>
-            <a:r>
-              <a:rPr kumimoji="0" lang="en-NZ" altLang="en-US" sz="1000" b="0" i="0" u="none" strike="noStrike" cap="none" normalizeH="0" baseline="0">
-                <a:ln>
-                  <a:noFill/>
-                </a:ln>
-                <a:solidFill>
-                  <a:schemeClr val="tx1"/>
-                </a:solidFill>
-                <a:effectLst/>
-                <a:latin typeface="Times New Roman" panose="02020603050405020304" pitchFamily="18" charset="0"/>
-                <a:ea typeface="Yu Mincho" panose="02020400000000000000" pitchFamily="18" charset="-128"/>
-                <a:cs typeface="Times New Roman" panose="02020603050405020304" pitchFamily="18" charset="0"/>
-              </a:rPr>
-              <a:t>, 286-289. </a:t>
-            </a:r>
-            <a:r>
-              <a:rPr kumimoji="0" lang="en-NZ" altLang="en-US" sz="1000" b="0" i="0" u="none" strike="noStrike" cap="none" normalizeH="0" baseline="0">
-                <a:ln>
-                  <a:noFill/>
-                </a:ln>
-                <a:solidFill>
-                  <a:schemeClr val="tx1"/>
-                </a:solidFill>
-                <a:effectLst/>
-                <a:latin typeface="Times New Roman" panose="02020603050405020304" pitchFamily="18" charset="0"/>
-                <a:ea typeface="Yu Mincho" panose="02020400000000000000" pitchFamily="18" charset="-128"/>
-                <a:cs typeface="Times New Roman" panose="02020603050405020304" pitchFamily="18" charset="0"/>
-                <a:hlinkClick r:id="rId3"/>
-              </a:rPr>
-              <a:t>http://doi.org/10.1109/CSNT.2013.67</a:t>
-            </a:r>
-            <a:endParaRPr kumimoji="0" lang="en-NZ" altLang="en-US" sz="1000" b="0" i="0" u="none" strike="noStrike" cap="none" normalizeH="0" baseline="0">
-              <a:ln>
-                <a:noFill/>
-              </a:ln>
-              <a:solidFill>
-                <a:schemeClr val="tx1"/>
-              </a:solidFill>
-              <a:effectLst/>
-              <a:latin typeface="Times New Roman" panose="02020603050405020304" pitchFamily="18" charset="0"/>
-              <a:ea typeface="Yu Mincho" panose="02020400000000000000" pitchFamily="18" charset="-128"/>
-              <a:cs typeface="Times New Roman" panose="02020603050405020304" pitchFamily="18" charset="0"/>
-            </a:endParaRPr>
-          </a:p>
-          <a:p>
-            <a:pPr marL="0" marR="0" lvl="0" indent="0" algn="l" defTabSz="914400" rtl="0" eaLnBrk="0" fontAlgn="base" latinLnBrk="0" hangingPunct="0">
-              <a:lnSpc>
-                <a:spcPct val="100000"/>
-              </a:lnSpc>
-              <a:spcBef>
-                <a:spcPct val="0"/>
-              </a:spcBef>
-              <a:spcAft>
-                <a:spcPct val="0"/>
-              </a:spcAft>
-              <a:buClrTx/>
-              <a:buSzTx/>
-              <a:buFontTx/>
-              <a:buNone/>
-              <a:tabLst/>
-            </a:pPr>
-            <a:endParaRPr kumimoji="0" lang="en-NZ" altLang="en-US" sz="1000" b="0" i="0" u="none" strike="noStrike" cap="none" normalizeH="0" baseline="0">
-              <a:ln>
-                <a:noFill/>
-              </a:ln>
-              <a:solidFill>
-                <a:schemeClr val="tx1"/>
-              </a:solidFill>
-              <a:effectLst/>
-              <a:latin typeface="Times New Roman" panose="02020603050405020304" pitchFamily="18" charset="0"/>
-              <a:cs typeface="Times New Roman" panose="02020603050405020304" pitchFamily="18" charset="0"/>
-            </a:endParaRPr>
-          </a:p>
-          <a:p>
-            <a:pPr marL="0" marR="0" lvl="0" indent="0" algn="l" defTabSz="914400" rtl="0" eaLnBrk="0" fontAlgn="base" latinLnBrk="0" hangingPunct="0">
-              <a:lnSpc>
-                <a:spcPct val="100000"/>
-              </a:lnSpc>
-              <a:spcBef>
-                <a:spcPct val="0"/>
-              </a:spcBef>
-              <a:spcAft>
-                <a:spcPct val="0"/>
-              </a:spcAft>
-              <a:buClrTx/>
-              <a:buSzTx/>
-              <a:buFontTx/>
-              <a:buNone/>
-              <a:tabLst/>
-            </a:pPr>
-            <a:r>
-              <a:rPr kumimoji="0" lang="en-NZ" altLang="en-US" sz="1000" b="0" i="0" u="none" strike="noStrike" cap="none" normalizeH="0" baseline="0" err="1">
-                <a:ln>
-                  <a:noFill/>
-                </a:ln>
-                <a:solidFill>
-                  <a:schemeClr val="tx1"/>
-                </a:solidFill>
-                <a:effectLst/>
-                <a:latin typeface="Times New Roman" panose="02020603050405020304" pitchFamily="18" charset="0"/>
-                <a:ea typeface="Yu Mincho" panose="02020400000000000000" pitchFamily="18" charset="-128"/>
-                <a:cs typeface="Times New Roman" panose="02020603050405020304" pitchFamily="18" charset="0"/>
-              </a:rPr>
-              <a:t>Gamess</a:t>
-            </a:r>
-            <a:r>
-              <a:rPr kumimoji="0" lang="en-NZ" altLang="en-US" sz="1000" b="0" i="0" u="none" strike="noStrike" cap="none" normalizeH="0" baseline="0">
-                <a:ln>
-                  <a:noFill/>
-                </a:ln>
-                <a:solidFill>
-                  <a:schemeClr val="tx1"/>
-                </a:solidFill>
-                <a:effectLst/>
-                <a:latin typeface="Times New Roman" panose="02020603050405020304" pitchFamily="18" charset="0"/>
-                <a:ea typeface="Yu Mincho" panose="02020400000000000000" pitchFamily="18" charset="-128"/>
-                <a:cs typeface="Times New Roman" panose="02020603050405020304" pitchFamily="18" charset="0"/>
-              </a:rPr>
-              <a:t>, E., &amp; Velásquez, K. (2008). </a:t>
-            </a:r>
-            <a:r>
-              <a:rPr kumimoji="0" lang="en-NZ" altLang="en-US" sz="1000" b="0" i="1" u="none" strike="noStrike" cap="none" normalizeH="0" baseline="0">
-                <a:ln>
-                  <a:noFill/>
-                </a:ln>
-                <a:solidFill>
-                  <a:schemeClr val="tx1"/>
-                </a:solidFill>
-                <a:effectLst/>
-                <a:latin typeface="Times New Roman" panose="02020603050405020304" pitchFamily="18" charset="0"/>
-                <a:ea typeface="Yu Mincho" panose="02020400000000000000" pitchFamily="18" charset="-128"/>
-                <a:cs typeface="Times New Roman" panose="02020603050405020304" pitchFamily="18" charset="0"/>
-              </a:rPr>
-              <a:t>IPv4 and IPv6 Forwarding Performance Evaluation on Different Operating Systems</a:t>
-            </a:r>
-            <a:r>
-              <a:rPr kumimoji="0" lang="en-NZ" altLang="en-US" sz="1000" b="0" i="0" u="none" strike="noStrike" cap="none" normalizeH="0" baseline="0">
-                <a:ln>
-                  <a:noFill/>
-                </a:ln>
-                <a:solidFill>
-                  <a:schemeClr val="tx1"/>
-                </a:solidFill>
-                <a:effectLst/>
-                <a:latin typeface="Times New Roman" panose="02020603050405020304" pitchFamily="18" charset="0"/>
-                <a:ea typeface="Yu Mincho" panose="02020400000000000000" pitchFamily="18" charset="-128"/>
-                <a:cs typeface="Times New Roman" panose="02020603050405020304" pitchFamily="18" charset="0"/>
-              </a:rPr>
-              <a:t>. CLEI.  </a:t>
-            </a:r>
-            <a:r>
-              <a:rPr kumimoji="0" lang="en-NZ" altLang="en-US" sz="1000" b="0" i="0" u="none" strike="noStrike" cap="none" normalizeH="0" baseline="0">
-                <a:ln>
-                  <a:noFill/>
-                </a:ln>
-                <a:solidFill>
-                  <a:schemeClr val="tx1"/>
-                </a:solidFill>
-                <a:effectLst/>
-                <a:latin typeface="Times New Roman" panose="02020603050405020304" pitchFamily="18" charset="0"/>
-                <a:ea typeface="Yu Mincho" panose="02020400000000000000" pitchFamily="18" charset="-128"/>
-                <a:cs typeface="Times New Roman" panose="02020603050405020304" pitchFamily="18" charset="0"/>
-                <a:hlinkClick r:id="rId4"/>
-              </a:rPr>
-              <a:t>https://clei.org/proceedings_data/CLEI2008/Anales/pdf/CLEI/CLEI_2008_118.pdf</a:t>
-            </a:r>
-            <a:endParaRPr kumimoji="0" lang="en-NZ" altLang="en-US" sz="1000" b="0" i="0" u="none" strike="noStrike" cap="none" normalizeH="0" baseline="0">
-              <a:ln>
-                <a:noFill/>
-              </a:ln>
-              <a:solidFill>
-                <a:schemeClr val="tx1"/>
-              </a:solidFill>
-              <a:effectLst/>
-              <a:latin typeface="Times New Roman" panose="02020603050405020304" pitchFamily="18" charset="0"/>
-              <a:ea typeface="Yu Mincho" panose="02020400000000000000" pitchFamily="18" charset="-128"/>
-              <a:cs typeface="Times New Roman" panose="02020603050405020304" pitchFamily="18" charset="0"/>
-            </a:endParaRPr>
-          </a:p>
-          <a:p>
-            <a:pPr marL="0" marR="0" lvl="0" indent="0" algn="l" defTabSz="914400" rtl="0" eaLnBrk="0" fontAlgn="base" latinLnBrk="0" hangingPunct="0">
-              <a:lnSpc>
-                <a:spcPct val="100000"/>
-              </a:lnSpc>
-              <a:spcBef>
-                <a:spcPct val="0"/>
-              </a:spcBef>
-              <a:spcAft>
-                <a:spcPct val="0"/>
-              </a:spcAft>
-              <a:buClrTx/>
-              <a:buSzTx/>
-              <a:buFontTx/>
-              <a:buNone/>
-              <a:tabLst/>
-            </a:pPr>
-            <a:endParaRPr kumimoji="0" lang="en-NZ" altLang="en-US" sz="1000" b="0" i="0" u="none" strike="noStrike" cap="none" normalizeH="0" baseline="0">
-              <a:ln>
-                <a:noFill/>
-              </a:ln>
-              <a:solidFill>
-                <a:schemeClr val="tx1"/>
-              </a:solidFill>
-              <a:effectLst/>
-              <a:latin typeface="Times New Roman" panose="02020603050405020304" pitchFamily="18" charset="0"/>
-              <a:cs typeface="Times New Roman" panose="02020603050405020304" pitchFamily="18" charset="0"/>
-            </a:endParaRPr>
-          </a:p>
-          <a:p>
-            <a:pPr marL="0" marR="0" lvl="0" indent="0" algn="l" defTabSz="914400" rtl="0" eaLnBrk="0" fontAlgn="base" latinLnBrk="0" hangingPunct="0">
-              <a:lnSpc>
-                <a:spcPct val="100000"/>
-              </a:lnSpc>
-              <a:spcBef>
-                <a:spcPct val="0"/>
-              </a:spcBef>
-              <a:spcAft>
-                <a:spcPct val="0"/>
-              </a:spcAft>
-              <a:buClrTx/>
-              <a:buSzTx/>
-              <a:buFontTx/>
-              <a:buNone/>
-              <a:tabLst/>
-            </a:pPr>
-            <a:r>
-              <a:rPr kumimoji="0" lang="en-NZ" altLang="en-US" sz="1000" b="0" i="0" u="none" strike="noStrike" cap="none" normalizeH="0" baseline="0" err="1">
-                <a:ln>
-                  <a:noFill/>
-                </a:ln>
-                <a:solidFill>
-                  <a:schemeClr val="tx1"/>
-                </a:solidFill>
-                <a:effectLst/>
-                <a:latin typeface="Times New Roman" panose="02020603050405020304" pitchFamily="18" charset="0"/>
-                <a:ea typeface="Yu Mincho" panose="02020400000000000000" pitchFamily="18" charset="-128"/>
-                <a:cs typeface="Times New Roman" panose="02020603050405020304" pitchFamily="18" charset="0"/>
-              </a:rPr>
-              <a:t>Katalon</a:t>
-            </a:r>
-            <a:r>
-              <a:rPr kumimoji="0" lang="en-NZ" altLang="en-US" sz="1000" b="0" i="0" u="none" strike="noStrike" cap="none" normalizeH="0" baseline="0">
-                <a:ln>
-                  <a:noFill/>
-                </a:ln>
-                <a:solidFill>
-                  <a:schemeClr val="tx1"/>
-                </a:solidFill>
-                <a:effectLst/>
-                <a:latin typeface="Times New Roman" panose="02020603050405020304" pitchFamily="18" charset="0"/>
-                <a:ea typeface="Yu Mincho" panose="02020400000000000000" pitchFamily="18" charset="-128"/>
-                <a:cs typeface="Times New Roman" panose="02020603050405020304" pitchFamily="18" charset="0"/>
-              </a:rPr>
-              <a:t>. (n.d.). </a:t>
-            </a:r>
-            <a:r>
-              <a:rPr kumimoji="0" lang="en-NZ" altLang="en-US" sz="1000" b="0" i="1" u="none" strike="noStrike" cap="none" normalizeH="0" baseline="0">
-                <a:ln>
-                  <a:noFill/>
-                </a:ln>
-                <a:solidFill>
-                  <a:schemeClr val="tx1"/>
-                </a:solidFill>
-                <a:effectLst/>
-                <a:latin typeface="Times New Roman" panose="02020603050405020304" pitchFamily="18" charset="0"/>
-                <a:ea typeface="Yu Mincho" panose="02020400000000000000" pitchFamily="18" charset="-128"/>
-                <a:cs typeface="Times New Roman" panose="02020603050405020304" pitchFamily="18" charset="0"/>
-              </a:rPr>
-              <a:t>Software Testing Life Cycle: A Definitive Guide.</a:t>
-            </a:r>
-            <a:r>
-              <a:rPr kumimoji="0" lang="en-NZ" altLang="en-US" sz="1000" b="0" i="0" u="none" strike="noStrike" cap="none" normalizeH="0" baseline="0">
-                <a:ln>
-                  <a:noFill/>
-                </a:ln>
-                <a:solidFill>
-                  <a:schemeClr val="tx1"/>
-                </a:solidFill>
-                <a:effectLst/>
-                <a:latin typeface="Times New Roman" panose="02020603050405020304" pitchFamily="18" charset="0"/>
-                <a:ea typeface="Yu Mincho" panose="02020400000000000000" pitchFamily="18" charset="-128"/>
-                <a:cs typeface="Times New Roman" panose="02020603050405020304" pitchFamily="18" charset="0"/>
-              </a:rPr>
-              <a:t> </a:t>
-            </a:r>
-            <a:r>
-              <a:rPr kumimoji="0" lang="en-NZ" altLang="en-US" sz="1000" b="0" i="0" u="none" strike="noStrike" cap="none" normalizeH="0" baseline="0" err="1">
-                <a:ln>
-                  <a:noFill/>
-                </a:ln>
-                <a:solidFill>
-                  <a:schemeClr val="tx1"/>
-                </a:solidFill>
-                <a:effectLst/>
-                <a:latin typeface="Times New Roman" panose="02020603050405020304" pitchFamily="18" charset="0"/>
-                <a:ea typeface="Yu Mincho" panose="02020400000000000000" pitchFamily="18" charset="-128"/>
-                <a:cs typeface="Times New Roman" panose="02020603050405020304" pitchFamily="18" charset="0"/>
-              </a:rPr>
-              <a:t>Katalon</a:t>
-            </a:r>
-            <a:r>
-              <a:rPr kumimoji="0" lang="en-NZ" altLang="en-US" sz="1000" b="0" i="0" u="none" strike="noStrike" cap="none" normalizeH="0" baseline="0">
-                <a:ln>
-                  <a:noFill/>
-                </a:ln>
-                <a:solidFill>
-                  <a:schemeClr val="tx1"/>
-                </a:solidFill>
-                <a:effectLst/>
-                <a:latin typeface="Times New Roman" panose="02020603050405020304" pitchFamily="18" charset="0"/>
-                <a:ea typeface="Yu Mincho" panose="02020400000000000000" pitchFamily="18" charset="-128"/>
-                <a:cs typeface="Times New Roman" panose="02020603050405020304" pitchFamily="18" charset="0"/>
-              </a:rPr>
-              <a:t>. </a:t>
-            </a:r>
-            <a:r>
-              <a:rPr kumimoji="0" lang="en-NZ" altLang="en-US" sz="1000" b="0" i="0" u="none" strike="noStrike" cap="none" normalizeH="0" baseline="0">
-                <a:ln>
-                  <a:noFill/>
-                </a:ln>
-                <a:solidFill>
-                  <a:schemeClr val="tx1"/>
-                </a:solidFill>
-                <a:effectLst/>
-                <a:latin typeface="Times New Roman" panose="02020603050405020304" pitchFamily="18" charset="0"/>
-                <a:ea typeface="Yu Mincho" panose="02020400000000000000" pitchFamily="18" charset="-128"/>
-                <a:cs typeface="Times New Roman" panose="02020603050405020304" pitchFamily="18" charset="0"/>
-                <a:hlinkClick r:id="rId5" tooltip="https://katalon.com/resources-center/blog/software-testing-life-cycle"/>
-              </a:rPr>
-              <a:t>https://katalon.com/resources-center/blog/software-testing-life-cycle</a:t>
-            </a:r>
-            <a:endParaRPr kumimoji="0" lang="en-NZ" altLang="en-US" sz="1000" b="0" i="0" u="none" strike="noStrike" cap="none" normalizeH="0" baseline="0">
-              <a:ln>
-                <a:noFill/>
-              </a:ln>
-              <a:solidFill>
-                <a:schemeClr val="tx1"/>
-              </a:solidFill>
-              <a:effectLst/>
-              <a:latin typeface="Times New Roman" panose="02020603050405020304" pitchFamily="18" charset="0"/>
-              <a:ea typeface="Yu Mincho" panose="02020400000000000000" pitchFamily="18" charset="-128"/>
-              <a:cs typeface="Times New Roman" panose="02020603050405020304" pitchFamily="18" charset="0"/>
-            </a:endParaRPr>
-          </a:p>
-          <a:p>
-            <a:pPr marL="0" marR="0" lvl="0" indent="0" algn="l" defTabSz="914400" rtl="0" eaLnBrk="0" fontAlgn="base" latinLnBrk="0" hangingPunct="0">
-              <a:lnSpc>
-                <a:spcPct val="100000"/>
-              </a:lnSpc>
-              <a:spcBef>
-                <a:spcPct val="0"/>
-              </a:spcBef>
-              <a:spcAft>
-                <a:spcPct val="0"/>
-              </a:spcAft>
-              <a:buClrTx/>
-              <a:buSzTx/>
-              <a:buFontTx/>
-              <a:buNone/>
-              <a:tabLst/>
-            </a:pPr>
-            <a:endParaRPr kumimoji="0" lang="en-NZ" altLang="en-US" sz="1000" b="0" i="0" u="none" strike="noStrike" cap="none" normalizeH="0" baseline="0">
-              <a:ln>
-                <a:noFill/>
-              </a:ln>
-              <a:solidFill>
-                <a:schemeClr val="tx1"/>
-              </a:solidFill>
-              <a:effectLst/>
-              <a:latin typeface="Times New Roman" panose="02020603050405020304" pitchFamily="18" charset="0"/>
-              <a:cs typeface="Times New Roman" panose="02020603050405020304" pitchFamily="18" charset="0"/>
-            </a:endParaRPr>
-          </a:p>
-          <a:p>
-            <a:pPr marL="0" marR="0" lvl="0" indent="0" algn="l" defTabSz="914400" rtl="0" eaLnBrk="0" fontAlgn="base" latinLnBrk="0" hangingPunct="0">
-              <a:lnSpc>
-                <a:spcPct val="100000"/>
-              </a:lnSpc>
-              <a:spcBef>
-                <a:spcPct val="0"/>
-              </a:spcBef>
-              <a:spcAft>
-                <a:spcPct val="0"/>
-              </a:spcAft>
-              <a:buClrTx/>
-              <a:buSzTx/>
-              <a:buFontTx/>
-              <a:buNone/>
-              <a:tabLst/>
-            </a:pPr>
-            <a:r>
-              <a:rPr kumimoji="0" lang="en-NZ" altLang="en-US" sz="1000" b="0" i="0" u="none" strike="noStrike" cap="none" normalizeH="0" baseline="0" err="1">
-                <a:ln>
-                  <a:noFill/>
-                </a:ln>
-                <a:solidFill>
-                  <a:schemeClr val="tx1"/>
-                </a:solidFill>
-                <a:effectLst/>
-                <a:latin typeface="Times New Roman" panose="02020603050405020304" pitchFamily="18" charset="0"/>
-                <a:ea typeface="Yu Mincho" panose="02020400000000000000" pitchFamily="18" charset="-128"/>
-                <a:cs typeface="Times New Roman" panose="02020603050405020304" pitchFamily="18" charset="0"/>
-              </a:rPr>
-              <a:t>Laoyan</a:t>
-            </a:r>
-            <a:r>
-              <a:rPr kumimoji="0" lang="en-NZ" altLang="en-US" sz="1000" b="0" i="0" u="none" strike="noStrike" cap="none" normalizeH="0" baseline="0">
-                <a:ln>
-                  <a:noFill/>
-                </a:ln>
-                <a:solidFill>
-                  <a:schemeClr val="tx1"/>
-                </a:solidFill>
-                <a:effectLst/>
-                <a:latin typeface="Times New Roman" panose="02020603050405020304" pitchFamily="18" charset="0"/>
-                <a:ea typeface="Yu Mincho" panose="02020400000000000000" pitchFamily="18" charset="-128"/>
-                <a:cs typeface="Times New Roman" panose="02020603050405020304" pitchFamily="18" charset="0"/>
-              </a:rPr>
-              <a:t>, S. (2025, February 20). </a:t>
-            </a:r>
-            <a:r>
-              <a:rPr kumimoji="0" lang="en-NZ" altLang="en-US" sz="1000" b="0" i="1" u="none" strike="noStrike" cap="none" normalizeH="0" baseline="0">
-                <a:ln>
-                  <a:noFill/>
-                </a:ln>
-                <a:solidFill>
-                  <a:schemeClr val="tx1"/>
-                </a:solidFill>
-                <a:effectLst/>
-                <a:latin typeface="Times New Roman" panose="02020603050405020304" pitchFamily="18" charset="0"/>
-                <a:ea typeface="Yu Mincho" panose="02020400000000000000" pitchFamily="18" charset="-128"/>
-                <a:cs typeface="Times New Roman" panose="02020603050405020304" pitchFamily="18" charset="0"/>
-              </a:rPr>
-              <a:t>What is agile methodology? (A beginner’s guide)</a:t>
-            </a:r>
-            <a:r>
-              <a:rPr kumimoji="0" lang="en-NZ" altLang="en-US" sz="1000" b="0" i="0" u="none" strike="noStrike" cap="none" normalizeH="0" baseline="0">
-                <a:ln>
-                  <a:noFill/>
-                </a:ln>
-                <a:solidFill>
-                  <a:schemeClr val="tx1"/>
-                </a:solidFill>
-                <a:effectLst/>
-                <a:latin typeface="Times New Roman" panose="02020603050405020304" pitchFamily="18" charset="0"/>
-                <a:ea typeface="Yu Mincho" panose="02020400000000000000" pitchFamily="18" charset="-128"/>
-                <a:cs typeface="Times New Roman" panose="02020603050405020304" pitchFamily="18" charset="0"/>
-              </a:rPr>
-              <a:t>. Asana. </a:t>
-            </a:r>
-            <a:r>
-              <a:rPr kumimoji="0" lang="en-NZ" altLang="en-US" sz="1000" b="0" i="0" u="none" strike="noStrike" cap="none" normalizeH="0" baseline="0">
-                <a:ln>
-                  <a:noFill/>
-                </a:ln>
-                <a:solidFill>
-                  <a:schemeClr val="tx1"/>
-                </a:solidFill>
-                <a:effectLst/>
-                <a:latin typeface="Times New Roman" panose="02020603050405020304" pitchFamily="18" charset="0"/>
-                <a:ea typeface="Yu Mincho" panose="02020400000000000000" pitchFamily="18" charset="-128"/>
-                <a:cs typeface="Times New Roman" panose="02020603050405020304" pitchFamily="18" charset="0"/>
-                <a:hlinkClick r:id="rId6"/>
-              </a:rPr>
-              <a:t>https://asana.com/resources/agile-methodology</a:t>
-            </a:r>
-            <a:r>
-              <a:rPr kumimoji="0" lang="en-NZ" altLang="en-US" sz="1000" b="0" i="0" u="none" strike="noStrike" cap="none" normalizeH="0" baseline="0">
-                <a:ln>
-                  <a:noFill/>
-                </a:ln>
-                <a:solidFill>
-                  <a:schemeClr val="tx1"/>
-                </a:solidFill>
-                <a:effectLst/>
-                <a:latin typeface="Times New Roman" panose="02020603050405020304" pitchFamily="18" charset="0"/>
-                <a:ea typeface="Yu Mincho" panose="02020400000000000000" pitchFamily="18" charset="-128"/>
-                <a:cs typeface="Times New Roman" panose="02020603050405020304" pitchFamily="18" charset="0"/>
-              </a:rPr>
-              <a:t> </a:t>
-            </a:r>
-          </a:p>
-          <a:p>
-            <a:pPr marL="0" marR="0" lvl="0" indent="0" algn="l" defTabSz="914400" rtl="0" eaLnBrk="0" fontAlgn="base" latinLnBrk="0" hangingPunct="0">
-              <a:lnSpc>
-                <a:spcPct val="100000"/>
-              </a:lnSpc>
-              <a:spcBef>
-                <a:spcPct val="0"/>
-              </a:spcBef>
-              <a:spcAft>
-                <a:spcPct val="0"/>
-              </a:spcAft>
-              <a:buClrTx/>
-              <a:buSzTx/>
-              <a:buFontTx/>
-              <a:buNone/>
-              <a:tabLst/>
-            </a:pPr>
-            <a:endParaRPr kumimoji="0" lang="en-NZ" altLang="en-US" sz="1000" b="0" i="0" u="none" strike="noStrike" cap="none" normalizeH="0" baseline="0">
-              <a:ln>
-                <a:noFill/>
-              </a:ln>
-              <a:solidFill>
-                <a:schemeClr val="tx1"/>
-              </a:solidFill>
-              <a:effectLst/>
-              <a:latin typeface="Times New Roman" panose="02020603050405020304" pitchFamily="18" charset="0"/>
-              <a:cs typeface="Times New Roman" panose="02020603050405020304" pitchFamily="18" charset="0"/>
-            </a:endParaRPr>
-          </a:p>
-          <a:p>
-            <a:pPr marL="0" marR="0" lvl="0" indent="0" algn="l" defTabSz="914400" rtl="0" eaLnBrk="0" fontAlgn="base" latinLnBrk="0" hangingPunct="0">
-              <a:lnSpc>
-                <a:spcPct val="100000"/>
-              </a:lnSpc>
-              <a:spcBef>
-                <a:spcPct val="0"/>
-              </a:spcBef>
-              <a:spcAft>
-                <a:spcPct val="0"/>
-              </a:spcAft>
-              <a:buClrTx/>
-              <a:buSzTx/>
-              <a:buFontTx/>
-              <a:buNone/>
-              <a:tabLst/>
-            </a:pPr>
-            <a:r>
-              <a:rPr kumimoji="0" lang="en-NZ" altLang="en-US" sz="1000" b="0" i="0" u="none" strike="noStrike" cap="none" normalizeH="0" baseline="0">
-                <a:ln>
-                  <a:noFill/>
-                </a:ln>
-                <a:solidFill>
-                  <a:schemeClr val="tx1"/>
-                </a:solidFill>
-                <a:effectLst/>
-                <a:latin typeface="Times New Roman" panose="02020603050405020304" pitchFamily="18" charset="0"/>
-                <a:ea typeface="Yu Mincho" panose="02020400000000000000" pitchFamily="18" charset="-128"/>
-                <a:cs typeface="Times New Roman" panose="02020603050405020304" pitchFamily="18" charset="0"/>
-              </a:rPr>
-              <a:t>Narayan, S., Sodhi, S. S., Lutui, P. R., &amp; Vijayakumar, K. J. (2010). Network performance evaluation of routers in IPv4/IPv6 environment. </a:t>
-            </a:r>
-            <a:r>
-              <a:rPr kumimoji="0" lang="en-NZ" altLang="en-US" sz="1000" b="0" i="1" u="none" strike="noStrike" cap="none" normalizeH="0" baseline="0">
-                <a:ln>
-                  <a:noFill/>
-                </a:ln>
-                <a:solidFill>
-                  <a:schemeClr val="tx1"/>
-                </a:solidFill>
-                <a:effectLst/>
-                <a:latin typeface="Times New Roman" panose="02020603050405020304" pitchFamily="18" charset="0"/>
-                <a:ea typeface="Yu Mincho" panose="02020400000000000000" pitchFamily="18" charset="-128"/>
-                <a:cs typeface="Times New Roman" panose="02020603050405020304" pitchFamily="18" charset="0"/>
-              </a:rPr>
-              <a:t>2010 IEEE International Conference on Wireless Communications, Networking and Information Security</a:t>
-            </a:r>
-            <a:r>
-              <a:rPr kumimoji="0" lang="en-NZ" altLang="en-US" sz="1000" b="0" i="0" u="none" strike="noStrike" cap="none" normalizeH="0" baseline="0">
-                <a:ln>
-                  <a:noFill/>
-                </a:ln>
-                <a:solidFill>
-                  <a:schemeClr val="tx1"/>
-                </a:solidFill>
-                <a:effectLst/>
-                <a:latin typeface="Times New Roman" panose="02020603050405020304" pitchFamily="18" charset="0"/>
-                <a:ea typeface="Yu Mincho" panose="02020400000000000000" pitchFamily="18" charset="-128"/>
-                <a:cs typeface="Times New Roman" panose="02020603050405020304" pitchFamily="18" charset="0"/>
-              </a:rPr>
-              <a:t>, </a:t>
-            </a:r>
-            <a:r>
-              <a:rPr kumimoji="0" lang="en-NZ" altLang="en-US" sz="1000" b="0" i="1" u="none" strike="noStrike" cap="none" normalizeH="0" baseline="0">
-                <a:ln>
-                  <a:noFill/>
-                </a:ln>
-                <a:solidFill>
-                  <a:schemeClr val="tx1"/>
-                </a:solidFill>
-                <a:effectLst/>
-                <a:latin typeface="Times New Roman" panose="02020603050405020304" pitchFamily="18" charset="0"/>
-                <a:ea typeface="Yu Mincho" panose="02020400000000000000" pitchFamily="18" charset="-128"/>
-                <a:cs typeface="Times New Roman" panose="02020603050405020304" pitchFamily="18" charset="0"/>
-              </a:rPr>
-              <a:t>2</a:t>
-            </a:r>
-            <a:r>
-              <a:rPr kumimoji="0" lang="en-NZ" altLang="en-US" sz="1000" b="0" i="0" u="none" strike="noStrike" cap="none" normalizeH="0" baseline="0">
-                <a:ln>
-                  <a:noFill/>
-                </a:ln>
-                <a:solidFill>
-                  <a:schemeClr val="tx1"/>
-                </a:solidFill>
-                <a:effectLst/>
-                <a:latin typeface="Times New Roman" panose="02020603050405020304" pitchFamily="18" charset="0"/>
-                <a:ea typeface="Yu Mincho" panose="02020400000000000000" pitchFamily="18" charset="-128"/>
-                <a:cs typeface="Times New Roman" panose="02020603050405020304" pitchFamily="18" charset="0"/>
-              </a:rPr>
-              <a:t>, 707–710.  </a:t>
-            </a:r>
-            <a:r>
-              <a:rPr kumimoji="0" lang="en-NZ" altLang="en-US" sz="1000" b="0" i="0" u="none" strike="noStrike" cap="none" normalizeH="0" baseline="0">
-                <a:ln>
-                  <a:noFill/>
-                </a:ln>
-                <a:solidFill>
-                  <a:schemeClr val="tx1"/>
-                </a:solidFill>
-                <a:effectLst/>
-                <a:latin typeface="Times New Roman" panose="02020603050405020304" pitchFamily="18" charset="0"/>
-                <a:ea typeface="Yu Mincho" panose="02020400000000000000" pitchFamily="18" charset="-128"/>
-                <a:cs typeface="Times New Roman" panose="02020603050405020304" pitchFamily="18" charset="0"/>
-                <a:hlinkClick r:id="rId7"/>
-              </a:rPr>
-              <a:t>https://doi.org/10.1109/WCINS.2010.5541871</a:t>
-            </a:r>
-            <a:r>
-              <a:rPr kumimoji="0" lang="en-NZ" altLang="en-US" sz="1000" b="0" i="0" u="none" strike="noStrike" cap="none" normalizeH="0" baseline="0">
-                <a:ln>
-                  <a:noFill/>
-                </a:ln>
-                <a:solidFill>
-                  <a:schemeClr val="tx1"/>
-                </a:solidFill>
-                <a:effectLst/>
-                <a:latin typeface="Times New Roman" panose="02020603050405020304" pitchFamily="18" charset="0"/>
-                <a:ea typeface="Yu Mincho" panose="02020400000000000000" pitchFamily="18" charset="-128"/>
-                <a:cs typeface="Times New Roman" panose="02020603050405020304" pitchFamily="18" charset="0"/>
-              </a:rPr>
-              <a:t> </a:t>
-            </a:r>
-          </a:p>
-          <a:p>
-            <a:pPr marL="0" marR="0" lvl="0" indent="0" algn="l" defTabSz="914400" rtl="0" eaLnBrk="0" fontAlgn="base" latinLnBrk="0" hangingPunct="0">
-              <a:lnSpc>
-                <a:spcPct val="100000"/>
-              </a:lnSpc>
-              <a:spcBef>
-                <a:spcPct val="0"/>
-              </a:spcBef>
-              <a:spcAft>
-                <a:spcPct val="0"/>
-              </a:spcAft>
-              <a:buClrTx/>
-              <a:buSzTx/>
-              <a:buFontTx/>
-              <a:buNone/>
-              <a:tabLst/>
-            </a:pPr>
-            <a:endParaRPr kumimoji="0" lang="en-NZ" altLang="en-US" sz="1000" b="0" i="0" u="none" strike="noStrike" cap="none" normalizeH="0" baseline="0">
-              <a:ln>
-                <a:noFill/>
-              </a:ln>
-              <a:solidFill>
-                <a:schemeClr val="tx1"/>
-              </a:solidFill>
-              <a:effectLst/>
-              <a:latin typeface="Times New Roman" panose="02020603050405020304" pitchFamily="18" charset="0"/>
-              <a:cs typeface="Times New Roman" panose="02020603050405020304" pitchFamily="18" charset="0"/>
-            </a:endParaRPr>
-          </a:p>
-          <a:p>
-            <a:pPr marL="0" marR="0" lvl="0" indent="0" algn="l" defTabSz="914400" rtl="0" eaLnBrk="0" fontAlgn="base" latinLnBrk="0" hangingPunct="0">
-              <a:lnSpc>
-                <a:spcPct val="100000"/>
-              </a:lnSpc>
-              <a:spcBef>
-                <a:spcPct val="0"/>
-              </a:spcBef>
-              <a:spcAft>
-                <a:spcPct val="0"/>
-              </a:spcAft>
-              <a:buClrTx/>
-              <a:buSzTx/>
-              <a:buFontTx/>
-              <a:buNone/>
-              <a:tabLst/>
-            </a:pPr>
-            <a:r>
-              <a:rPr kumimoji="0" lang="en-NZ" altLang="en-US" sz="1000" b="0" i="0" u="none" strike="noStrike" cap="none" normalizeH="0" baseline="0">
-                <a:ln>
-                  <a:noFill/>
-                </a:ln>
-                <a:solidFill>
-                  <a:schemeClr val="tx1"/>
-                </a:solidFill>
-                <a:effectLst/>
-                <a:latin typeface="Times New Roman" panose="02020603050405020304" pitchFamily="18" charset="0"/>
-                <a:ea typeface="Yu Mincho" panose="02020400000000000000" pitchFamily="18" charset="-128"/>
-                <a:cs typeface="Times New Roman" panose="02020603050405020304" pitchFamily="18" charset="0"/>
-              </a:rPr>
-              <a:t>PayScale. (2024, May 21). </a:t>
-            </a:r>
-            <a:r>
-              <a:rPr kumimoji="0" lang="en-NZ" altLang="en-US" sz="1000" b="0" i="1" u="none" strike="noStrike" cap="none" normalizeH="0" baseline="0">
-                <a:ln>
-                  <a:noFill/>
-                </a:ln>
-                <a:solidFill>
-                  <a:schemeClr val="tx1"/>
-                </a:solidFill>
-                <a:effectLst/>
-                <a:latin typeface="Times New Roman" panose="02020603050405020304" pitchFamily="18" charset="0"/>
-                <a:ea typeface="Yu Mincho" panose="02020400000000000000" pitchFamily="18" charset="-128"/>
-                <a:cs typeface="Times New Roman" panose="02020603050405020304" pitchFamily="18" charset="0"/>
-              </a:rPr>
-              <a:t>Average Network Engineer Salary in New Zealand</a:t>
-            </a:r>
-            <a:r>
-              <a:rPr kumimoji="0" lang="en-NZ" altLang="en-US" sz="1000" b="0" i="0" u="none" strike="noStrike" cap="none" normalizeH="0" baseline="0">
-                <a:ln>
-                  <a:noFill/>
-                </a:ln>
-                <a:solidFill>
-                  <a:schemeClr val="tx1"/>
-                </a:solidFill>
-                <a:effectLst/>
-                <a:latin typeface="Times New Roman" panose="02020603050405020304" pitchFamily="18" charset="0"/>
-                <a:ea typeface="Yu Mincho" panose="02020400000000000000" pitchFamily="18" charset="-128"/>
-                <a:cs typeface="Times New Roman" panose="02020603050405020304" pitchFamily="18" charset="0"/>
-              </a:rPr>
-              <a:t>. </a:t>
-            </a:r>
-            <a:r>
-              <a:rPr kumimoji="0" lang="en-NZ" altLang="en-US" sz="1000" b="0" i="0" u="none" strike="noStrike" cap="none" normalizeH="0" baseline="0">
-                <a:ln>
-                  <a:noFill/>
-                </a:ln>
-                <a:solidFill>
-                  <a:schemeClr val="tx1"/>
-                </a:solidFill>
-                <a:effectLst/>
-                <a:latin typeface="Times New Roman" panose="02020603050405020304" pitchFamily="18" charset="0"/>
-                <a:ea typeface="Yu Mincho" panose="02020400000000000000" pitchFamily="18" charset="-128"/>
-                <a:cs typeface="Times New Roman" panose="02020603050405020304" pitchFamily="18" charset="0"/>
-                <a:hlinkClick r:id="rId8"/>
-              </a:rPr>
-              <a:t>https://www.pa</a:t>
-            </a:r>
-            <a:r>
-              <a:rPr kumimoji="0" lang="en-NZ" altLang="en-US" sz="1000" b="0" i="0" u="none" strike="noStrike" cap="none" normalizeH="0" baseline="0" bmk="_Hlt194199607">
-                <a:ln>
-                  <a:noFill/>
-                </a:ln>
-                <a:solidFill>
-                  <a:schemeClr val="tx1"/>
-                </a:solidFill>
-                <a:effectLst/>
-                <a:latin typeface="Times New Roman" panose="02020603050405020304" pitchFamily="18" charset="0"/>
-                <a:ea typeface="Yu Mincho" panose="02020400000000000000" pitchFamily="18" charset="-128"/>
-                <a:cs typeface="Times New Roman" panose="02020603050405020304" pitchFamily="18" charset="0"/>
-                <a:hlinkClick r:id="rId8"/>
-              </a:rPr>
-              <a:t>y</a:t>
-            </a:r>
-            <a:r>
-              <a:rPr kumimoji="0" lang="en-NZ" altLang="en-US" sz="1000" b="0" i="0" u="none" strike="noStrike" cap="none" normalizeH="0" baseline="0">
-                <a:ln>
-                  <a:noFill/>
-                </a:ln>
-                <a:solidFill>
-                  <a:schemeClr val="tx1"/>
-                </a:solidFill>
-                <a:effectLst/>
-                <a:latin typeface="Times New Roman" panose="02020603050405020304" pitchFamily="18" charset="0"/>
-                <a:ea typeface="Yu Mincho" panose="02020400000000000000" pitchFamily="18" charset="-128"/>
-                <a:cs typeface="Times New Roman" panose="02020603050405020304" pitchFamily="18" charset="0"/>
-                <a:hlinkClick r:id="rId8"/>
-              </a:rPr>
-              <a:t>scale.com/research/NZ/Job=Network_Engineer/Salary</a:t>
-            </a:r>
-            <a:endParaRPr kumimoji="0" lang="en-NZ" altLang="en-US" sz="1000" b="0" i="0" u="none" strike="noStrike" cap="none" normalizeH="0" baseline="0">
-              <a:ln>
-                <a:noFill/>
-              </a:ln>
-              <a:solidFill>
-                <a:schemeClr val="tx1"/>
-              </a:solidFill>
-              <a:effectLst/>
-              <a:latin typeface="Times New Roman" panose="02020603050405020304" pitchFamily="18" charset="0"/>
-              <a:ea typeface="Yu Mincho" panose="02020400000000000000" pitchFamily="18" charset="-128"/>
-              <a:cs typeface="Times New Roman" panose="02020603050405020304" pitchFamily="18" charset="0"/>
-            </a:endParaRPr>
-          </a:p>
-          <a:p>
-            <a:pPr marL="0" marR="0" lvl="0" indent="0" algn="l" defTabSz="914400" rtl="0" eaLnBrk="0" fontAlgn="base" latinLnBrk="0" hangingPunct="0">
-              <a:lnSpc>
-                <a:spcPct val="100000"/>
-              </a:lnSpc>
-              <a:spcBef>
-                <a:spcPct val="0"/>
-              </a:spcBef>
-              <a:spcAft>
-                <a:spcPct val="0"/>
-              </a:spcAft>
-              <a:buClrTx/>
-              <a:buSzTx/>
-              <a:buFontTx/>
-              <a:buNone/>
-              <a:tabLst/>
-            </a:pPr>
-            <a:endParaRPr kumimoji="0" lang="en-NZ" altLang="en-US" sz="1000" b="0" i="0" u="none" strike="noStrike" cap="none" normalizeH="0" baseline="0">
-              <a:ln>
-                <a:noFill/>
-              </a:ln>
-              <a:solidFill>
-                <a:schemeClr val="tx1"/>
-              </a:solidFill>
-              <a:effectLst/>
-              <a:latin typeface="Times New Roman" panose="02020603050405020304" pitchFamily="18" charset="0"/>
-              <a:cs typeface="Times New Roman" panose="02020603050405020304" pitchFamily="18" charset="0"/>
-            </a:endParaRPr>
-          </a:p>
-          <a:p>
-            <a:pPr marL="0" marR="0" lvl="0" indent="0" algn="l" defTabSz="914400" rtl="0" eaLnBrk="0" fontAlgn="base" latinLnBrk="0" hangingPunct="0">
-              <a:lnSpc>
-                <a:spcPct val="100000"/>
-              </a:lnSpc>
-              <a:spcBef>
-                <a:spcPct val="0"/>
-              </a:spcBef>
-              <a:spcAft>
-                <a:spcPct val="0"/>
-              </a:spcAft>
-              <a:buClrTx/>
-              <a:buSzTx/>
-              <a:buFontTx/>
-              <a:buNone/>
-              <a:tabLst/>
-            </a:pPr>
-            <a:r>
-              <a:rPr kumimoji="0" lang="en-NZ" altLang="en-US" sz="1000" b="0" i="0" u="none" strike="noStrike" cap="none" normalizeH="0" baseline="0">
-                <a:ln>
-                  <a:noFill/>
-                </a:ln>
-                <a:solidFill>
-                  <a:schemeClr val="tx1"/>
-                </a:solidFill>
-                <a:effectLst/>
-                <a:latin typeface="Times New Roman" panose="02020603050405020304" pitchFamily="18" charset="0"/>
-                <a:ea typeface="Yu Mincho" panose="02020400000000000000" pitchFamily="18" charset="-128"/>
-                <a:cs typeface="Times New Roman" panose="02020603050405020304" pitchFamily="18" charset="0"/>
-              </a:rPr>
-              <a:t>PayScale. (2025, January 05). </a:t>
-            </a:r>
-            <a:r>
-              <a:rPr kumimoji="0" lang="en-NZ" altLang="en-US" sz="1000" b="0" i="1" u="none" strike="noStrike" cap="none" normalizeH="0" baseline="0">
-                <a:ln>
-                  <a:noFill/>
-                </a:ln>
-                <a:solidFill>
-                  <a:schemeClr val="tx1"/>
-                </a:solidFill>
-                <a:effectLst/>
-                <a:latin typeface="Times New Roman" panose="02020603050405020304" pitchFamily="18" charset="0"/>
-                <a:ea typeface="Yu Mincho" panose="02020400000000000000" pitchFamily="18" charset="-128"/>
-                <a:cs typeface="Times New Roman" panose="02020603050405020304" pitchFamily="18" charset="0"/>
-              </a:rPr>
-              <a:t>Average Project Manager, Information Technology (IT) with Project Management Skills Salary in New Zealand</a:t>
-            </a:r>
-            <a:r>
-              <a:rPr kumimoji="0" lang="en-NZ" altLang="en-US" sz="1000" b="0" i="0" u="none" strike="noStrike" cap="none" normalizeH="0" baseline="0">
-                <a:ln>
-                  <a:noFill/>
-                </a:ln>
-                <a:solidFill>
-                  <a:schemeClr val="tx1"/>
-                </a:solidFill>
-                <a:effectLst/>
-                <a:latin typeface="Times New Roman" panose="02020603050405020304" pitchFamily="18" charset="0"/>
-                <a:ea typeface="Yu Mincho" panose="02020400000000000000" pitchFamily="18" charset="-128"/>
-                <a:cs typeface="Times New Roman" panose="02020603050405020304" pitchFamily="18" charset="0"/>
-              </a:rPr>
-              <a:t>. </a:t>
-            </a:r>
-            <a:r>
-              <a:rPr kumimoji="0" lang="en-NZ" altLang="en-US" sz="1000" b="0" i="0" u="none" strike="noStrike" cap="none" normalizeH="0" baseline="0">
-                <a:ln>
-                  <a:noFill/>
-                </a:ln>
-                <a:solidFill>
-                  <a:schemeClr val="tx1"/>
-                </a:solidFill>
-                <a:effectLst/>
-                <a:latin typeface="Times New Roman" panose="02020603050405020304" pitchFamily="18" charset="0"/>
-                <a:ea typeface="Yu Mincho" panose="02020400000000000000" pitchFamily="18" charset="-128"/>
-                <a:cs typeface="Times New Roman" panose="02020603050405020304" pitchFamily="18" charset="0"/>
-                <a:hlinkClick r:id="rId9"/>
-              </a:rPr>
-              <a:t>https://www.payscale.com/research/NZ/Job=Project_Manager%2C_Information_Technology_(IT)/Salary/ac095581/Project-Management</a:t>
-            </a:r>
-            <a:r>
-              <a:rPr kumimoji="0" lang="en-NZ" altLang="en-US" sz="1000" b="0" i="0" u="none" strike="noStrike" cap="none" normalizeH="0" baseline="0">
-                <a:ln>
-                  <a:noFill/>
-                </a:ln>
-                <a:solidFill>
-                  <a:schemeClr val="tx1"/>
-                </a:solidFill>
-                <a:effectLst/>
-                <a:latin typeface="Times New Roman" panose="02020603050405020304" pitchFamily="18" charset="0"/>
-                <a:ea typeface="Yu Mincho" panose="02020400000000000000" pitchFamily="18" charset="-128"/>
-                <a:cs typeface="Times New Roman" panose="02020603050405020304" pitchFamily="18" charset="0"/>
-              </a:rPr>
-              <a:t> </a:t>
-            </a:r>
-          </a:p>
-        </p:txBody>
-      </p:sp>
-      <p:sp>
-        <p:nvSpPr>
-          <p:cNvPr id="7" name="Content Placeholder 6">
-            <a:extLst>
-              <a:ext uri="{FF2B5EF4-FFF2-40B4-BE49-F238E27FC236}">
-                <a16:creationId xmlns:a16="http://schemas.microsoft.com/office/drawing/2014/main" id="{163C8634-2321-0222-CDFC-56C91B3BFF67}"/>
+                <a16:creationId xmlns:a16="http://schemas.microsoft.com/office/drawing/2014/main" id="{D1E8B8C7-A810-B352-D981-9691E3BBCDAB}"/>
               </a:ext>
             </a:extLst>
           </p:cNvPr>
@@ -20565,1197 +16551,15 @@
             <a:spLocks noGrp="1"/>
           </p:cNvSpPr>
           <p:nvPr>
-            <p:ph sz="half" idx="2"/>
+            <p:ph idx="1"/>
           </p:nvPr>
         </p:nvSpPr>
-        <p:spPr>
-          <a:xfrm>
-            <a:off x="6172200" y="971993"/>
-            <a:ext cx="4875211" cy="3541714"/>
-          </a:xfrm>
-        </p:spPr>
+        <p:spPr/>
         <p:txBody>
-          <a:bodyPr>
-            <a:noAutofit/>
-          </a:bodyPr>
+          <a:bodyPr/>
           <a:lstStyle/>
           <a:p>
-            <a:pPr marL="0" indent="0" eaLnBrk="0" fontAlgn="base" hangingPunct="0">
-              <a:lnSpc>
-                <a:spcPct val="100000"/>
-              </a:lnSpc>
-              <a:spcBef>
-                <a:spcPct val="0"/>
-              </a:spcBef>
-              <a:spcAft>
-                <a:spcPct val="0"/>
-              </a:spcAft>
-              <a:buSzTx/>
-              <a:buNone/>
-            </a:pPr>
-            <a:r>
-              <a:rPr kumimoji="0" lang="en-NZ" altLang="en-US" sz="1000" b="0" i="0" u="none" strike="noStrike" cap="none" normalizeH="0" baseline="0">
-                <a:ln>
-                  <a:noFill/>
-                </a:ln>
-                <a:solidFill>
-                  <a:schemeClr val="tx1"/>
-                </a:solidFill>
-                <a:effectLst/>
-                <a:latin typeface="Times New Roman" panose="02020603050405020304" pitchFamily="18" charset="0"/>
-                <a:ea typeface="Yu Mincho" panose="02020400000000000000" pitchFamily="18" charset="-128"/>
-                <a:cs typeface="Times New Roman" panose="02020603050405020304" pitchFamily="18" charset="0"/>
-              </a:rPr>
-              <a:t>PayScale. (2023, October 19). </a:t>
-            </a:r>
-            <a:r>
-              <a:rPr kumimoji="0" lang="en-NZ" altLang="en-US" sz="1000" b="0" i="1" u="none" strike="noStrike" cap="none" normalizeH="0" baseline="0">
-                <a:ln>
-                  <a:noFill/>
-                </a:ln>
-                <a:solidFill>
-                  <a:schemeClr val="tx1"/>
-                </a:solidFill>
-                <a:effectLst/>
-                <a:latin typeface="Times New Roman" panose="02020603050405020304" pitchFamily="18" charset="0"/>
-                <a:ea typeface="Yu Mincho" panose="02020400000000000000" pitchFamily="18" charset="-128"/>
-                <a:cs typeface="Times New Roman" panose="02020603050405020304" pitchFamily="18" charset="0"/>
-              </a:rPr>
-              <a:t>Average Systems Architect Salary in New Zealand</a:t>
-            </a:r>
-            <a:r>
-              <a:rPr kumimoji="0" lang="en-NZ" altLang="en-US" sz="1000" b="0" i="0" u="none" strike="noStrike" cap="none" normalizeH="0" baseline="0">
-                <a:ln>
-                  <a:noFill/>
-                </a:ln>
-                <a:solidFill>
-                  <a:schemeClr val="tx1"/>
-                </a:solidFill>
-                <a:effectLst/>
-                <a:latin typeface="Times New Roman" panose="02020603050405020304" pitchFamily="18" charset="0"/>
-                <a:ea typeface="Yu Mincho" panose="02020400000000000000" pitchFamily="18" charset="-128"/>
-                <a:cs typeface="Times New Roman" panose="02020603050405020304" pitchFamily="18" charset="0"/>
-              </a:rPr>
-              <a:t>. </a:t>
-            </a:r>
-            <a:r>
-              <a:rPr kumimoji="0" lang="en-NZ" altLang="en-US" sz="1000" b="0" i="0" u="none" strike="noStrike" cap="none" normalizeH="0" baseline="0">
-                <a:ln>
-                  <a:noFill/>
-                </a:ln>
-                <a:solidFill>
-                  <a:schemeClr val="tx1"/>
-                </a:solidFill>
-                <a:effectLst/>
-                <a:latin typeface="Times New Roman" panose="02020603050405020304" pitchFamily="18" charset="0"/>
-                <a:ea typeface="Yu Mincho" panose="02020400000000000000" pitchFamily="18" charset="-128"/>
-                <a:cs typeface="Times New Roman" panose="02020603050405020304" pitchFamily="18" charset="0"/>
-                <a:hlinkClick r:id="rId10"/>
-              </a:rPr>
-              <a:t>https://www.payscale.com/research/NZ/Job=Systems_Architect/Salary</a:t>
-            </a:r>
-            <a:endParaRPr kumimoji="0" lang="en-NZ" altLang="en-US" sz="1000" b="0" i="0" u="none" strike="noStrike" cap="none" normalizeH="0" baseline="0">
-              <a:ln>
-                <a:noFill/>
-              </a:ln>
-              <a:solidFill>
-                <a:schemeClr val="tx1"/>
-              </a:solidFill>
-              <a:effectLst/>
-              <a:latin typeface="Times New Roman" panose="02020603050405020304" pitchFamily="18" charset="0"/>
-              <a:ea typeface="Yu Mincho" panose="02020400000000000000" pitchFamily="18" charset="-128"/>
-              <a:cs typeface="Times New Roman" panose="02020603050405020304" pitchFamily="18" charset="0"/>
-            </a:endParaRPr>
-          </a:p>
-          <a:p>
-            <a:pPr marL="0" marR="0" lvl="0" indent="0" algn="l" defTabSz="914400" rtl="0" eaLnBrk="0" fontAlgn="base" latinLnBrk="0" hangingPunct="0">
-              <a:lnSpc>
-                <a:spcPct val="100000"/>
-              </a:lnSpc>
-              <a:spcBef>
-                <a:spcPct val="0"/>
-              </a:spcBef>
-              <a:spcAft>
-                <a:spcPct val="0"/>
-              </a:spcAft>
-              <a:buClrTx/>
-              <a:buSzTx/>
-              <a:buFontTx/>
-              <a:buNone/>
-              <a:tabLst/>
-            </a:pPr>
-            <a:endParaRPr lang="en-NZ" altLang="en-US" sz="1000">
-              <a:latin typeface="Times New Roman" panose="02020603050405020304" pitchFamily="18" charset="0"/>
-              <a:ea typeface="Yu Mincho" panose="02020400000000000000" pitchFamily="18" charset="-128"/>
-              <a:cs typeface="Times New Roman" panose="02020603050405020304" pitchFamily="18" charset="0"/>
-            </a:endParaRPr>
-          </a:p>
-          <a:p>
-            <a:pPr marL="0" marR="0" lvl="0" indent="0" algn="l" defTabSz="914400" rtl="0" eaLnBrk="0" fontAlgn="base" latinLnBrk="0" hangingPunct="0">
-              <a:lnSpc>
-                <a:spcPct val="100000"/>
-              </a:lnSpc>
-              <a:spcBef>
-                <a:spcPct val="0"/>
-              </a:spcBef>
-              <a:spcAft>
-                <a:spcPct val="0"/>
-              </a:spcAft>
-              <a:buClrTx/>
-              <a:buSzTx/>
-              <a:buFontTx/>
-              <a:buNone/>
-              <a:tabLst/>
-            </a:pPr>
-            <a:r>
-              <a:rPr kumimoji="0" lang="en-NZ" altLang="en-US" sz="1000" b="0" i="0" u="none" strike="noStrike" cap="none" normalizeH="0" baseline="0">
-                <a:ln>
-                  <a:noFill/>
-                </a:ln>
-                <a:solidFill>
-                  <a:schemeClr val="tx1"/>
-                </a:solidFill>
-                <a:effectLst/>
-                <a:latin typeface="Times New Roman" panose="02020603050405020304" pitchFamily="18" charset="0"/>
-                <a:ea typeface="Yu Mincho" panose="02020400000000000000" pitchFamily="18" charset="-128"/>
-                <a:cs typeface="Times New Roman" panose="02020603050405020304" pitchFamily="18" charset="0"/>
-              </a:rPr>
-              <a:t>PB Technologies. (n.d.). </a:t>
-            </a:r>
-            <a:r>
-              <a:rPr kumimoji="0" lang="en-NZ" altLang="en-US" sz="1000" b="0" i="1" u="none" strike="noStrike" cap="none" normalizeH="0" baseline="0">
-                <a:ln>
-                  <a:noFill/>
-                </a:ln>
-                <a:solidFill>
-                  <a:schemeClr val="tx1"/>
-                </a:solidFill>
-                <a:effectLst/>
-                <a:latin typeface="Times New Roman" panose="02020603050405020304" pitchFamily="18" charset="0"/>
-                <a:ea typeface="Yu Mincho" panose="02020400000000000000" pitchFamily="18" charset="-128"/>
-                <a:cs typeface="Times New Roman" panose="02020603050405020304" pitchFamily="18" charset="0"/>
-              </a:rPr>
-              <a:t>Supermicro 521R-T Mini Server - 1x Xeon E-2434 4C/8T 3.4GHz, 16GB RAM ... ( SVRSPM34170 )</a:t>
-            </a:r>
-            <a:r>
-              <a:rPr kumimoji="0" lang="en-NZ" altLang="en-US" sz="1000" b="0" i="0" u="none" strike="noStrike" cap="none" normalizeH="0" baseline="0">
-                <a:ln>
-                  <a:noFill/>
-                </a:ln>
-                <a:solidFill>
-                  <a:schemeClr val="tx1"/>
-                </a:solidFill>
-                <a:effectLst/>
-                <a:latin typeface="Times New Roman" panose="02020603050405020304" pitchFamily="18" charset="0"/>
-                <a:ea typeface="Yu Mincho" panose="02020400000000000000" pitchFamily="18" charset="-128"/>
-                <a:cs typeface="Times New Roman" panose="02020603050405020304" pitchFamily="18" charset="0"/>
-              </a:rPr>
-              <a:t>. </a:t>
-            </a:r>
-            <a:r>
-              <a:rPr kumimoji="0" lang="en-NZ" altLang="en-US" sz="1000" b="0" i="0" u="none" strike="noStrike" cap="none" normalizeH="0" baseline="0">
-                <a:ln>
-                  <a:noFill/>
-                </a:ln>
-                <a:solidFill>
-                  <a:schemeClr val="tx1"/>
-                </a:solidFill>
-                <a:effectLst/>
-                <a:latin typeface="Times New Roman" panose="02020603050405020304" pitchFamily="18" charset="0"/>
-                <a:ea typeface="Yu Mincho" panose="02020400000000000000" pitchFamily="18" charset="-128"/>
-                <a:cs typeface="Times New Roman" panose="02020603050405020304" pitchFamily="18" charset="0"/>
-                <a:hlinkClick r:id="rId11"/>
-              </a:rPr>
-              <a:t>https://www.pbtech.co.nz/product/SVRSPM34170/Supermicro-521R-T-Mini-Server---1x-Xeon-E-2434-4C8</a:t>
-            </a:r>
-            <a:r>
-              <a:rPr kumimoji="0" lang="en-NZ" altLang="en-US" sz="1000" b="0" i="0" u="none" strike="noStrike" cap="none" normalizeH="0" baseline="0">
-                <a:ln>
-                  <a:noFill/>
-                </a:ln>
-                <a:solidFill>
-                  <a:schemeClr val="tx1"/>
-                </a:solidFill>
-                <a:effectLst/>
-                <a:latin typeface="Times New Roman" panose="02020603050405020304" pitchFamily="18" charset="0"/>
-                <a:ea typeface="Yu Mincho" panose="02020400000000000000" pitchFamily="18" charset="-128"/>
-                <a:cs typeface="Times New Roman" panose="02020603050405020304" pitchFamily="18" charset="0"/>
-              </a:rPr>
-              <a:t> </a:t>
-            </a:r>
-          </a:p>
-          <a:p>
-            <a:pPr marL="0" marR="0" lvl="0" indent="0" algn="l" defTabSz="914400" rtl="0" eaLnBrk="0" fontAlgn="base" latinLnBrk="0" hangingPunct="0">
-              <a:lnSpc>
-                <a:spcPct val="100000"/>
-              </a:lnSpc>
-              <a:spcBef>
-                <a:spcPct val="0"/>
-              </a:spcBef>
-              <a:spcAft>
-                <a:spcPct val="0"/>
-              </a:spcAft>
-              <a:buClrTx/>
-              <a:buSzTx/>
-              <a:buFontTx/>
-              <a:buNone/>
-              <a:tabLst/>
-            </a:pPr>
-            <a:endParaRPr kumimoji="0" lang="en-NZ" altLang="en-US" sz="1000" b="0" i="0" u="none" strike="noStrike" cap="none" normalizeH="0" baseline="0">
-              <a:ln>
-                <a:noFill/>
-              </a:ln>
-              <a:solidFill>
-                <a:schemeClr val="tx1"/>
-              </a:solidFill>
-              <a:effectLst/>
-            </a:endParaRPr>
-          </a:p>
-          <a:p>
-            <a:pPr marL="0" marR="0" lvl="0" indent="0" algn="l" defTabSz="914400" rtl="0" eaLnBrk="0" fontAlgn="base" latinLnBrk="0" hangingPunct="0">
-              <a:lnSpc>
-                <a:spcPct val="100000"/>
-              </a:lnSpc>
-              <a:spcBef>
-                <a:spcPct val="0"/>
-              </a:spcBef>
-              <a:spcAft>
-                <a:spcPct val="0"/>
-              </a:spcAft>
-              <a:buClrTx/>
-              <a:buSzTx/>
-              <a:buFontTx/>
-              <a:buNone/>
-              <a:tabLst/>
-            </a:pPr>
-            <a:r>
-              <a:rPr kumimoji="0" lang="en-NZ" altLang="en-US" sz="1000" b="0" i="0" u="none" strike="noStrike" cap="none" normalizeH="0" baseline="0">
-                <a:ln>
-                  <a:noFill/>
-                </a:ln>
-                <a:solidFill>
-                  <a:schemeClr val="tx1"/>
-                </a:solidFill>
-                <a:effectLst/>
-                <a:latin typeface="Times New Roman" panose="02020603050405020304" pitchFamily="18" charset="0"/>
-                <a:ea typeface="Yu Mincho" panose="02020400000000000000" pitchFamily="18" charset="-128"/>
-                <a:cs typeface="Times New Roman" panose="02020603050405020304" pitchFamily="18" charset="0"/>
-              </a:rPr>
-              <a:t>PB Technologies. (n.d.). </a:t>
-            </a:r>
-            <a:r>
-              <a:rPr kumimoji="0" lang="en-NZ" altLang="en-US" sz="1000" b="0" i="1" u="none" strike="noStrike" cap="none" normalizeH="0" baseline="0">
-                <a:ln>
-                  <a:noFill/>
-                </a:ln>
-                <a:solidFill>
-                  <a:schemeClr val="tx1"/>
-                </a:solidFill>
-                <a:effectLst/>
-                <a:latin typeface="Times New Roman" panose="02020603050405020304" pitchFamily="18" charset="0"/>
-                <a:ea typeface="Yu Mincho" panose="02020400000000000000" pitchFamily="18" charset="-128"/>
-                <a:cs typeface="Times New Roman" panose="02020603050405020304" pitchFamily="18" charset="0"/>
-              </a:rPr>
-              <a:t>ASUS </a:t>
-            </a:r>
-            <a:r>
-              <a:rPr kumimoji="0" lang="en-NZ" altLang="en-US" sz="1000" b="0" i="1" u="none" strike="noStrike" cap="none" normalizeH="0" baseline="0" err="1">
-                <a:ln>
-                  <a:noFill/>
-                </a:ln>
-                <a:solidFill>
-                  <a:schemeClr val="tx1"/>
-                </a:solidFill>
-                <a:effectLst/>
-                <a:latin typeface="Times New Roman" panose="02020603050405020304" pitchFamily="18" charset="0"/>
-                <a:ea typeface="Yu Mincho" panose="02020400000000000000" pitchFamily="18" charset="-128"/>
-                <a:cs typeface="Times New Roman" panose="02020603050405020304" pitchFamily="18" charset="0"/>
-              </a:rPr>
-              <a:t>Vivobook</a:t>
-            </a:r>
-            <a:r>
-              <a:rPr kumimoji="0" lang="en-NZ" altLang="en-US" sz="1000" b="0" i="1" u="none" strike="noStrike" cap="none" normalizeH="0" baseline="0">
-                <a:ln>
-                  <a:noFill/>
-                </a:ln>
-                <a:solidFill>
-                  <a:schemeClr val="tx1"/>
-                </a:solidFill>
-                <a:effectLst/>
-                <a:latin typeface="Times New Roman" panose="02020603050405020304" pitchFamily="18" charset="0"/>
-                <a:ea typeface="Yu Mincho" panose="02020400000000000000" pitchFamily="18" charset="-128"/>
-                <a:cs typeface="Times New Roman" panose="02020603050405020304" pitchFamily="18" charset="0"/>
-              </a:rPr>
-              <a:t> Go 15 L510KA 15.6" FHD Intel Pentium Silver N6000 - 8GB... ( L510KA-EJ599W )</a:t>
-            </a:r>
-            <a:r>
-              <a:rPr kumimoji="0" lang="en-NZ" altLang="en-US" sz="1000" b="0" i="0" u="none" strike="noStrike" cap="none" normalizeH="0" baseline="0">
-                <a:ln>
-                  <a:noFill/>
-                </a:ln>
-                <a:solidFill>
-                  <a:schemeClr val="tx1"/>
-                </a:solidFill>
-                <a:effectLst/>
-                <a:latin typeface="Times New Roman" panose="02020603050405020304" pitchFamily="18" charset="0"/>
-                <a:ea typeface="Yu Mincho" panose="02020400000000000000" pitchFamily="18" charset="-128"/>
-                <a:cs typeface="Times New Roman" panose="02020603050405020304" pitchFamily="18" charset="0"/>
-              </a:rPr>
-              <a:t>. </a:t>
-            </a:r>
-            <a:r>
-              <a:rPr kumimoji="0" lang="en-NZ" altLang="en-US" sz="1000" b="0" i="0" u="none" strike="noStrike" cap="none" normalizeH="0" baseline="0">
-                <a:ln>
-                  <a:noFill/>
-                </a:ln>
-                <a:solidFill>
-                  <a:schemeClr val="tx1"/>
-                </a:solidFill>
-                <a:effectLst/>
-                <a:latin typeface="Times New Roman" panose="02020603050405020304" pitchFamily="18" charset="0"/>
-                <a:ea typeface="Yu Mincho" panose="02020400000000000000" pitchFamily="18" charset="-128"/>
-                <a:cs typeface="Times New Roman" panose="02020603050405020304" pitchFamily="18" charset="0"/>
-                <a:hlinkClick r:id="rId12"/>
-              </a:rPr>
-              <a:t>https://www.pbtech.co.nz/product/NBKASU510599/ASUS-Vivobook-Go-15-L510KA-156-FHD-Intel-Pentium-S</a:t>
-            </a:r>
-            <a:endParaRPr kumimoji="0" lang="en-NZ" altLang="en-US" sz="1000" b="0" i="0" u="none" strike="noStrike" cap="none" normalizeH="0" baseline="0">
-              <a:ln>
-                <a:noFill/>
-              </a:ln>
-              <a:solidFill>
-                <a:schemeClr val="tx1"/>
-              </a:solidFill>
-              <a:effectLst/>
-              <a:latin typeface="Times New Roman" panose="02020603050405020304" pitchFamily="18" charset="0"/>
-              <a:ea typeface="Yu Mincho" panose="02020400000000000000" pitchFamily="18" charset="-128"/>
-              <a:cs typeface="Times New Roman" panose="02020603050405020304" pitchFamily="18" charset="0"/>
-            </a:endParaRPr>
-          </a:p>
-          <a:p>
-            <a:pPr marL="0" marR="0" lvl="0" indent="0" algn="l" defTabSz="914400" rtl="0" eaLnBrk="0" fontAlgn="base" latinLnBrk="0" hangingPunct="0">
-              <a:lnSpc>
-                <a:spcPct val="100000"/>
-              </a:lnSpc>
-              <a:spcBef>
-                <a:spcPct val="0"/>
-              </a:spcBef>
-              <a:spcAft>
-                <a:spcPct val="0"/>
-              </a:spcAft>
-              <a:buClrTx/>
-              <a:buSzTx/>
-              <a:buFontTx/>
-              <a:buNone/>
-              <a:tabLst/>
-            </a:pPr>
-            <a:endParaRPr kumimoji="0" lang="en-NZ" altLang="en-US" sz="1000" b="0" i="0" u="none" strike="noStrike" cap="none" normalizeH="0" baseline="0">
-              <a:ln>
-                <a:noFill/>
-              </a:ln>
-              <a:solidFill>
-                <a:schemeClr val="tx1"/>
-              </a:solidFill>
-              <a:effectLst/>
-            </a:endParaRPr>
-          </a:p>
-          <a:p>
-            <a:pPr marL="0" marR="0" lvl="0" indent="0" algn="l" defTabSz="914400" rtl="0" eaLnBrk="0" fontAlgn="base" latinLnBrk="0" hangingPunct="0">
-              <a:lnSpc>
-                <a:spcPct val="100000"/>
-              </a:lnSpc>
-              <a:spcBef>
-                <a:spcPct val="0"/>
-              </a:spcBef>
-              <a:spcAft>
-                <a:spcPct val="0"/>
-              </a:spcAft>
-              <a:buClrTx/>
-              <a:buSzTx/>
-              <a:buFontTx/>
-              <a:buNone/>
-              <a:tabLst/>
-            </a:pPr>
-            <a:r>
-              <a:rPr kumimoji="0" lang="en-NZ" altLang="en-US" sz="1000" b="0" i="0" u="none" strike="noStrike" cap="none" normalizeH="0" baseline="0">
-                <a:ln>
-                  <a:noFill/>
-                </a:ln>
-                <a:solidFill>
-                  <a:schemeClr val="tx1"/>
-                </a:solidFill>
-                <a:effectLst/>
-                <a:latin typeface="Times New Roman" panose="02020603050405020304" pitchFamily="18" charset="0"/>
-                <a:ea typeface="Yu Mincho" panose="02020400000000000000" pitchFamily="18" charset="-128"/>
-                <a:cs typeface="Times New Roman" panose="02020603050405020304" pitchFamily="18" charset="0"/>
-              </a:rPr>
-              <a:t>PB Technologies. (n.d.). </a:t>
-            </a:r>
-            <a:r>
-              <a:rPr kumimoji="0" lang="en-NZ" altLang="en-US" sz="1000" b="0" i="1" u="none" strike="noStrike" cap="none" normalizeH="0" baseline="0">
-                <a:ln>
-                  <a:noFill/>
-                </a:ln>
-                <a:solidFill>
-                  <a:schemeClr val="tx1"/>
-                </a:solidFill>
-                <a:effectLst/>
-                <a:latin typeface="Times New Roman" panose="02020603050405020304" pitchFamily="18" charset="0"/>
-                <a:ea typeface="Yu Mincho" panose="02020400000000000000" pitchFamily="18" charset="-128"/>
-                <a:cs typeface="Times New Roman" panose="02020603050405020304" pitchFamily="18" charset="0"/>
-              </a:rPr>
-              <a:t>Philips 243V7QJAB/79 24" FHD Monitor</a:t>
-            </a:r>
-            <a:r>
-              <a:rPr kumimoji="0" lang="en-NZ" altLang="en-US" sz="1000" b="0" i="0" u="none" strike="noStrike" cap="none" normalizeH="0" baseline="0">
-                <a:ln>
-                  <a:noFill/>
-                </a:ln>
-                <a:solidFill>
-                  <a:schemeClr val="tx1"/>
-                </a:solidFill>
-                <a:effectLst/>
-                <a:latin typeface="Times New Roman" panose="02020603050405020304" pitchFamily="18" charset="0"/>
-                <a:ea typeface="Yu Mincho" panose="02020400000000000000" pitchFamily="18" charset="-128"/>
-                <a:cs typeface="Times New Roman" panose="02020603050405020304" pitchFamily="18" charset="0"/>
-              </a:rPr>
-              <a:t>.  </a:t>
-            </a:r>
-            <a:r>
-              <a:rPr kumimoji="0" lang="en-NZ" altLang="en-US" sz="1000" b="0" i="0" u="none" strike="noStrike" cap="none" normalizeH="0" baseline="0">
-                <a:ln>
-                  <a:noFill/>
-                </a:ln>
-                <a:solidFill>
-                  <a:schemeClr val="tx1"/>
-                </a:solidFill>
-                <a:effectLst/>
-                <a:latin typeface="Times New Roman" panose="02020603050405020304" pitchFamily="18" charset="0"/>
-                <a:ea typeface="Yu Mincho" panose="02020400000000000000" pitchFamily="18" charset="-128"/>
-                <a:cs typeface="Times New Roman" panose="02020603050405020304" pitchFamily="18" charset="0"/>
-                <a:hlinkClick r:id="rId13"/>
-              </a:rPr>
-              <a:t>https://www.pbtech.co.nz/product/MONPHS2438/Philips-243V7QJAB79-24-FHD-Monitor-1920x1080---IPS</a:t>
-            </a:r>
-            <a:endParaRPr kumimoji="0" lang="en-NZ" altLang="en-US" sz="1000" b="0" i="0" u="none" strike="noStrike" cap="none" normalizeH="0" baseline="0">
-              <a:ln>
-                <a:noFill/>
-              </a:ln>
-              <a:solidFill>
-                <a:schemeClr val="tx1"/>
-              </a:solidFill>
-              <a:effectLst/>
-            </a:endParaRPr>
-          </a:p>
-          <a:p>
-            <a:pPr marL="0" marR="0" lvl="0" indent="0" algn="l" defTabSz="914400" rtl="0" eaLnBrk="0" fontAlgn="base" latinLnBrk="0" hangingPunct="0">
-              <a:lnSpc>
-                <a:spcPct val="100000"/>
-              </a:lnSpc>
-              <a:spcBef>
-                <a:spcPct val="0"/>
-              </a:spcBef>
-              <a:spcAft>
-                <a:spcPct val="0"/>
-              </a:spcAft>
-              <a:buClrTx/>
-              <a:buSzTx/>
-              <a:buFontTx/>
-              <a:buNone/>
-              <a:tabLst/>
-            </a:pPr>
-            <a:endParaRPr kumimoji="0" lang="en-NZ" altLang="en-US" sz="1000" b="0" i="0" u="none" strike="noStrike" cap="none" normalizeH="0" baseline="0">
-              <a:ln>
-                <a:noFill/>
-              </a:ln>
-              <a:solidFill>
-                <a:schemeClr val="tx1"/>
-              </a:solidFill>
-              <a:effectLst/>
-              <a:latin typeface="Times New Roman" panose="02020603050405020304" pitchFamily="18" charset="0"/>
-              <a:ea typeface="Yu Mincho" panose="02020400000000000000" pitchFamily="18" charset="-128"/>
-              <a:cs typeface="Times New Roman" panose="02020603050405020304" pitchFamily="18" charset="0"/>
-            </a:endParaRPr>
-          </a:p>
-          <a:p>
-            <a:pPr marL="0" marR="0" lvl="0" indent="0" algn="l" defTabSz="914400" rtl="0" eaLnBrk="0" fontAlgn="base" latinLnBrk="0" hangingPunct="0">
-              <a:lnSpc>
-                <a:spcPct val="100000"/>
-              </a:lnSpc>
-              <a:spcBef>
-                <a:spcPct val="0"/>
-              </a:spcBef>
-              <a:spcAft>
-                <a:spcPct val="0"/>
-              </a:spcAft>
-              <a:buClrTx/>
-              <a:buSzTx/>
-              <a:buFontTx/>
-              <a:buNone/>
-              <a:tabLst/>
-            </a:pPr>
-            <a:r>
-              <a:rPr kumimoji="0" lang="en-NZ" altLang="en-US" sz="1000" b="0" i="0" u="none" strike="noStrike" cap="none" normalizeH="0" baseline="0">
-                <a:ln>
-                  <a:noFill/>
-                </a:ln>
-                <a:solidFill>
-                  <a:schemeClr val="tx1"/>
-                </a:solidFill>
-                <a:effectLst/>
-                <a:latin typeface="Times New Roman" panose="02020603050405020304" pitchFamily="18" charset="0"/>
-                <a:ea typeface="Yu Mincho" panose="02020400000000000000" pitchFamily="18" charset="-128"/>
-                <a:cs typeface="Times New Roman" panose="02020603050405020304" pitchFamily="18" charset="0"/>
-              </a:rPr>
-              <a:t>PB Technologies. (n.d.). </a:t>
-            </a:r>
-            <a:r>
-              <a:rPr kumimoji="0" lang="en-NZ" altLang="en-US" sz="1000" b="0" i="1" u="none" strike="noStrike" cap="none" normalizeH="0" baseline="0">
-                <a:ln>
-                  <a:noFill/>
-                </a:ln>
-                <a:solidFill>
-                  <a:schemeClr val="tx1"/>
-                </a:solidFill>
-                <a:effectLst/>
-                <a:latin typeface="Times New Roman" panose="02020603050405020304" pitchFamily="18" charset="0"/>
-                <a:ea typeface="Yu Mincho" panose="02020400000000000000" pitchFamily="18" charset="-128"/>
-                <a:cs typeface="Times New Roman" panose="02020603050405020304" pitchFamily="18" charset="0"/>
-              </a:rPr>
-              <a:t>A4Tech </a:t>
-            </a:r>
-            <a:r>
-              <a:rPr kumimoji="0" lang="en-NZ" altLang="en-US" sz="1000" b="0" i="1" u="none" strike="noStrike" cap="none" normalizeH="0" baseline="0" err="1">
-                <a:ln>
-                  <a:noFill/>
-                </a:ln>
-                <a:solidFill>
-                  <a:schemeClr val="tx1"/>
-                </a:solidFill>
-                <a:effectLst/>
-                <a:latin typeface="Times New Roman" panose="02020603050405020304" pitchFamily="18" charset="0"/>
-                <a:ea typeface="Yu Mincho" panose="02020400000000000000" pitchFamily="18" charset="-128"/>
-                <a:cs typeface="Times New Roman" panose="02020603050405020304" pitchFamily="18" charset="0"/>
-              </a:rPr>
-              <a:t>Fstyler</a:t>
-            </a:r>
-            <a:r>
-              <a:rPr kumimoji="0" lang="en-NZ" altLang="en-US" sz="1000" b="0" i="1" u="none" strike="noStrike" cap="none" normalizeH="0" baseline="0">
-                <a:ln>
-                  <a:noFill/>
-                </a:ln>
-                <a:solidFill>
-                  <a:schemeClr val="tx1"/>
-                </a:solidFill>
-                <a:effectLst/>
-                <a:latin typeface="Times New Roman" panose="02020603050405020304" pitchFamily="18" charset="0"/>
-                <a:ea typeface="Yu Mincho" panose="02020400000000000000" pitchFamily="18" charset="-128"/>
-                <a:cs typeface="Times New Roman" panose="02020603050405020304" pitchFamily="18" charset="0"/>
-              </a:rPr>
-              <a:t> F1010 Multimedia Keyboard &amp; Mouse Combo USB Wired -... ( F1010 )</a:t>
-            </a:r>
-            <a:r>
-              <a:rPr kumimoji="0" lang="en-NZ" altLang="en-US" sz="1000" b="0" i="0" u="none" strike="noStrike" cap="none" normalizeH="0" baseline="0">
-                <a:ln>
-                  <a:noFill/>
-                </a:ln>
-                <a:solidFill>
-                  <a:schemeClr val="tx1"/>
-                </a:solidFill>
-                <a:effectLst/>
-                <a:latin typeface="Times New Roman" panose="02020603050405020304" pitchFamily="18" charset="0"/>
-                <a:ea typeface="Yu Mincho" panose="02020400000000000000" pitchFamily="18" charset="-128"/>
-                <a:cs typeface="Times New Roman" panose="02020603050405020304" pitchFamily="18" charset="0"/>
-              </a:rPr>
-              <a:t>. </a:t>
-            </a:r>
-            <a:r>
-              <a:rPr kumimoji="0" lang="en-NZ" altLang="en-US" sz="1000" b="0" i="0" u="none" strike="noStrike" cap="none" normalizeH="0" baseline="0">
-                <a:ln>
-                  <a:noFill/>
-                </a:ln>
-                <a:solidFill>
-                  <a:schemeClr val="tx1"/>
-                </a:solidFill>
-                <a:effectLst/>
-                <a:latin typeface="Times New Roman" panose="02020603050405020304" pitchFamily="18" charset="0"/>
-                <a:ea typeface="Yu Mincho" panose="02020400000000000000" pitchFamily="18" charset="-128"/>
-                <a:cs typeface="Times New Roman" panose="02020603050405020304" pitchFamily="18" charset="0"/>
-                <a:hlinkClick r:id="rId14"/>
-              </a:rPr>
-              <a:t>https://www.pbtech.co.nz/product/KEYA4T1001/A4Tech-Fstyler-F1010-Multimedia-Keyboard--Mouse-Co</a:t>
-            </a:r>
-            <a:endParaRPr kumimoji="0" lang="en-NZ" altLang="en-US" sz="1000" b="0" i="0" u="none" strike="noStrike" cap="none" normalizeH="0" baseline="0">
-              <a:ln>
-                <a:noFill/>
-              </a:ln>
-              <a:solidFill>
-                <a:schemeClr val="tx1"/>
-              </a:solidFill>
-              <a:effectLst/>
-            </a:endParaRPr>
-          </a:p>
-          <a:p>
-            <a:pPr marL="0" marR="0" lvl="0" indent="0" algn="l" defTabSz="914400" rtl="0" eaLnBrk="0" fontAlgn="base" latinLnBrk="0" hangingPunct="0">
-              <a:lnSpc>
-                <a:spcPct val="100000"/>
-              </a:lnSpc>
-              <a:spcBef>
-                <a:spcPct val="0"/>
-              </a:spcBef>
-              <a:spcAft>
-                <a:spcPct val="0"/>
-              </a:spcAft>
-              <a:buClrTx/>
-              <a:buSzTx/>
-              <a:buFontTx/>
-              <a:buNone/>
-              <a:tabLst/>
-            </a:pPr>
-            <a:endParaRPr kumimoji="0" lang="en-NZ" altLang="en-US" sz="1000" b="0" i="0" u="none" strike="noStrike" cap="none" normalizeH="0" baseline="0">
-              <a:ln>
-                <a:noFill/>
-              </a:ln>
-              <a:solidFill>
-                <a:schemeClr val="tx1"/>
-              </a:solidFill>
-              <a:effectLst/>
-              <a:latin typeface="Times New Roman" panose="02020603050405020304" pitchFamily="18" charset="0"/>
-              <a:ea typeface="Yu Mincho" panose="02020400000000000000" pitchFamily="18" charset="-128"/>
-              <a:cs typeface="Times New Roman" panose="02020603050405020304" pitchFamily="18" charset="0"/>
-            </a:endParaRPr>
-          </a:p>
-          <a:p>
-            <a:pPr marL="0" marR="0" lvl="0" indent="0" algn="l" defTabSz="914400" rtl="0" eaLnBrk="0" fontAlgn="base" latinLnBrk="0" hangingPunct="0">
-              <a:lnSpc>
-                <a:spcPct val="100000"/>
-              </a:lnSpc>
-              <a:spcBef>
-                <a:spcPct val="0"/>
-              </a:spcBef>
-              <a:spcAft>
-                <a:spcPct val="0"/>
-              </a:spcAft>
-              <a:buClrTx/>
-              <a:buSzTx/>
-              <a:buFontTx/>
-              <a:buNone/>
-              <a:tabLst/>
-            </a:pPr>
-            <a:r>
-              <a:rPr kumimoji="0" lang="en-NZ" altLang="en-US" sz="1000" b="0" i="0" u="none" strike="noStrike" cap="none" normalizeH="0" baseline="0">
-                <a:ln>
-                  <a:noFill/>
-                </a:ln>
-                <a:solidFill>
-                  <a:schemeClr val="tx1"/>
-                </a:solidFill>
-                <a:effectLst/>
-                <a:latin typeface="Times New Roman" panose="02020603050405020304" pitchFamily="18" charset="0"/>
-                <a:ea typeface="Yu Mincho" panose="02020400000000000000" pitchFamily="18" charset="-128"/>
-                <a:cs typeface="Times New Roman" panose="02020603050405020304" pitchFamily="18" charset="0"/>
-              </a:rPr>
-              <a:t>PB Technologies. (n.d.). </a:t>
-            </a:r>
-            <a:r>
-              <a:rPr kumimoji="0" lang="en-NZ" altLang="en-US" sz="1000" b="0" i="1" u="none" strike="noStrike" cap="none" normalizeH="0" baseline="0" err="1">
-                <a:ln>
-                  <a:noFill/>
-                </a:ln>
-                <a:solidFill>
-                  <a:schemeClr val="tx1"/>
-                </a:solidFill>
-                <a:effectLst/>
-                <a:latin typeface="Times New Roman" panose="02020603050405020304" pitchFamily="18" charset="0"/>
-                <a:ea typeface="Yu Mincho" panose="02020400000000000000" pitchFamily="18" charset="-128"/>
-                <a:cs typeface="Times New Roman" panose="02020603050405020304" pitchFamily="18" charset="0"/>
-              </a:rPr>
-              <a:t>Cruxtec</a:t>
-            </a:r>
-            <a:r>
-              <a:rPr kumimoji="0" lang="en-NZ" altLang="en-US" sz="1000" b="0" i="1" u="none" strike="noStrike" cap="none" normalizeH="0" baseline="0">
-                <a:ln>
-                  <a:noFill/>
-                </a:ln>
-                <a:solidFill>
-                  <a:schemeClr val="tx1"/>
-                </a:solidFill>
-                <a:effectLst/>
-                <a:latin typeface="Times New Roman" panose="02020603050405020304" pitchFamily="18" charset="0"/>
-                <a:ea typeface="Yu Mincho" panose="02020400000000000000" pitchFamily="18" charset="-128"/>
-                <a:cs typeface="Times New Roman" panose="02020603050405020304" pitchFamily="18" charset="0"/>
-              </a:rPr>
-              <a:t> 0.5m Cat7 Ethernet Cable -  Black </a:t>
-            </a:r>
-            <a:r>
-              <a:rPr kumimoji="0" lang="en-NZ" altLang="en-US" sz="1000" b="0" i="1" u="none" strike="noStrike" cap="none" normalizeH="0" baseline="0" err="1">
-                <a:ln>
-                  <a:noFill/>
-                </a:ln>
-                <a:solidFill>
-                  <a:schemeClr val="tx1"/>
-                </a:solidFill>
-                <a:effectLst/>
-                <a:latin typeface="Times New Roman" panose="02020603050405020304" pitchFamily="18" charset="0"/>
-                <a:ea typeface="Yu Mincho" panose="02020400000000000000" pitchFamily="18" charset="-128"/>
-                <a:cs typeface="Times New Roman" panose="02020603050405020304" pitchFamily="18" charset="0"/>
-              </a:rPr>
-              <a:t>Color</a:t>
-            </a:r>
-            <a:r>
-              <a:rPr kumimoji="0" lang="en-NZ" altLang="en-US" sz="1000" b="0" i="1" u="none" strike="noStrike" cap="none" normalizeH="0" baseline="0">
-                <a:ln>
-                  <a:noFill/>
-                </a:ln>
-                <a:solidFill>
-                  <a:schemeClr val="tx1"/>
-                </a:solidFill>
-                <a:effectLst/>
-                <a:latin typeface="Times New Roman" panose="02020603050405020304" pitchFamily="18" charset="0"/>
-                <a:ea typeface="Yu Mincho" panose="02020400000000000000" pitchFamily="18" charset="-128"/>
-                <a:cs typeface="Times New Roman" panose="02020603050405020304" pitchFamily="18" charset="0"/>
-              </a:rPr>
-              <a:t> --  10Gb / SFTP Triple... ( RS7-005-BK )</a:t>
-            </a:r>
-            <a:r>
-              <a:rPr kumimoji="0" lang="en-NZ" altLang="en-US" sz="1000" b="0" i="0" u="none" strike="noStrike" cap="none" normalizeH="0" baseline="0">
-                <a:ln>
-                  <a:noFill/>
-                </a:ln>
-                <a:solidFill>
-                  <a:schemeClr val="tx1"/>
-                </a:solidFill>
-                <a:effectLst/>
-                <a:latin typeface="Times New Roman" panose="02020603050405020304" pitchFamily="18" charset="0"/>
-                <a:ea typeface="Yu Mincho" panose="02020400000000000000" pitchFamily="18" charset="-128"/>
-                <a:cs typeface="Times New Roman" panose="02020603050405020304" pitchFamily="18" charset="0"/>
-              </a:rPr>
-              <a:t>. </a:t>
-            </a:r>
-            <a:r>
-              <a:rPr kumimoji="0" lang="en-NZ" altLang="en-US" sz="1000" b="0" i="0" u="none" strike="noStrike" cap="none" normalizeH="0" baseline="0">
-                <a:ln>
-                  <a:noFill/>
-                </a:ln>
-                <a:solidFill>
-                  <a:schemeClr val="tx1"/>
-                </a:solidFill>
-                <a:effectLst/>
-                <a:latin typeface="Times New Roman" panose="02020603050405020304" pitchFamily="18" charset="0"/>
-                <a:ea typeface="Yu Mincho" panose="02020400000000000000" pitchFamily="18" charset="-128"/>
-                <a:cs typeface="Times New Roman" panose="02020603050405020304" pitchFamily="18" charset="0"/>
-                <a:hlinkClick r:id="rId15"/>
-              </a:rPr>
-              <a:t>https://www.pbtech.co.nz/product/CABCXT920050/Cruxtec-05m-Cat7-Ethernet-Cable---Black-Color----1</a:t>
-            </a:r>
-            <a:endParaRPr kumimoji="0" lang="en-NZ" altLang="en-US" sz="1000" b="0" i="0" u="none" strike="noStrike" cap="none" normalizeH="0" baseline="0">
-              <a:ln>
-                <a:noFill/>
-              </a:ln>
-              <a:solidFill>
-                <a:schemeClr val="tx1"/>
-              </a:solidFill>
-              <a:effectLst/>
-            </a:endParaRPr>
-          </a:p>
-          <a:p>
-            <a:pPr marL="0" marR="0" lvl="0" indent="0" algn="l" defTabSz="914400" rtl="0" eaLnBrk="0" fontAlgn="base" latinLnBrk="0" hangingPunct="0">
-              <a:lnSpc>
-                <a:spcPct val="100000"/>
-              </a:lnSpc>
-              <a:spcBef>
-                <a:spcPct val="0"/>
-              </a:spcBef>
-              <a:spcAft>
-                <a:spcPct val="0"/>
-              </a:spcAft>
-              <a:buClrTx/>
-              <a:buSzTx/>
-              <a:buFontTx/>
-              <a:buNone/>
-              <a:tabLst/>
-            </a:pPr>
-            <a:endParaRPr kumimoji="0" lang="en-NZ" altLang="en-US" sz="1000" b="0" i="0" u="none" strike="noStrike" cap="none" normalizeH="0" baseline="0">
-              <a:ln>
-                <a:noFill/>
-              </a:ln>
-              <a:solidFill>
-                <a:schemeClr val="tx1"/>
-              </a:solidFill>
-              <a:effectLst/>
-              <a:latin typeface="Times New Roman" panose="02020603050405020304" pitchFamily="18" charset="0"/>
-              <a:ea typeface="Yu Mincho" panose="02020400000000000000" pitchFamily="18" charset="-128"/>
-              <a:cs typeface="Times New Roman" panose="02020603050405020304" pitchFamily="18" charset="0"/>
-            </a:endParaRPr>
-          </a:p>
-          <a:p>
-            <a:pPr marL="0" marR="0" lvl="0" indent="0" algn="l" defTabSz="914400" rtl="0" eaLnBrk="0" fontAlgn="base" latinLnBrk="0" hangingPunct="0">
-              <a:lnSpc>
-                <a:spcPct val="100000"/>
-              </a:lnSpc>
-              <a:spcBef>
-                <a:spcPct val="0"/>
-              </a:spcBef>
-              <a:spcAft>
-                <a:spcPct val="0"/>
-              </a:spcAft>
-              <a:buClrTx/>
-              <a:buSzTx/>
-              <a:buFontTx/>
-              <a:buNone/>
-              <a:tabLst/>
-            </a:pPr>
-            <a:r>
-              <a:rPr kumimoji="0" lang="en-NZ" altLang="en-US" sz="1000" b="0" i="0" u="none" strike="noStrike" cap="none" normalizeH="0" baseline="0">
-                <a:ln>
-                  <a:noFill/>
-                </a:ln>
-                <a:solidFill>
-                  <a:schemeClr val="tx1"/>
-                </a:solidFill>
-                <a:effectLst/>
-                <a:latin typeface="Times New Roman" panose="02020603050405020304" pitchFamily="18" charset="0"/>
-                <a:ea typeface="Yu Mincho" panose="02020400000000000000" pitchFamily="18" charset="-128"/>
-                <a:cs typeface="Times New Roman" panose="02020603050405020304" pitchFamily="18" charset="0"/>
-              </a:rPr>
-              <a:t>PB Technologies. (n.d.). </a:t>
-            </a:r>
-            <a:r>
-              <a:rPr kumimoji="0" lang="en-NZ" altLang="en-US" sz="1000" b="0" i="1" u="none" strike="noStrike" cap="none" normalizeH="0" baseline="0">
-                <a:ln>
-                  <a:noFill/>
-                </a:ln>
-                <a:solidFill>
-                  <a:schemeClr val="tx1"/>
-                </a:solidFill>
-                <a:effectLst/>
-                <a:latin typeface="Times New Roman" panose="02020603050405020304" pitchFamily="18" charset="0"/>
-                <a:ea typeface="Yu Mincho" panose="02020400000000000000" pitchFamily="18" charset="-128"/>
-                <a:cs typeface="Times New Roman" panose="02020603050405020304" pitchFamily="18" charset="0"/>
-              </a:rPr>
-              <a:t>TP-Link TG-3468 32-bit Gigabit PCIe Network Adapter, Realtek RTL8168B... ( TG-3468 )</a:t>
-            </a:r>
-            <a:r>
-              <a:rPr kumimoji="0" lang="en-NZ" altLang="en-US" sz="1000" b="0" i="0" u="none" strike="noStrike" cap="none" normalizeH="0" baseline="0">
-                <a:ln>
-                  <a:noFill/>
-                </a:ln>
-                <a:solidFill>
-                  <a:schemeClr val="tx1"/>
-                </a:solidFill>
-                <a:effectLst/>
-                <a:latin typeface="Times New Roman" panose="02020603050405020304" pitchFamily="18" charset="0"/>
-                <a:ea typeface="Yu Mincho" panose="02020400000000000000" pitchFamily="18" charset="-128"/>
-                <a:cs typeface="Times New Roman" panose="02020603050405020304" pitchFamily="18" charset="0"/>
-              </a:rPr>
-              <a:t>. </a:t>
-            </a:r>
-            <a:r>
-              <a:rPr kumimoji="0" lang="en-NZ" altLang="en-US" sz="1000" b="0" i="0" u="none" strike="noStrike" cap="none" normalizeH="0" baseline="0">
-                <a:ln>
-                  <a:noFill/>
-                </a:ln>
-                <a:solidFill>
-                  <a:schemeClr val="tx1"/>
-                </a:solidFill>
-                <a:effectLst/>
-                <a:latin typeface="Times New Roman" panose="02020603050405020304" pitchFamily="18" charset="0"/>
-                <a:ea typeface="Yu Mincho" panose="02020400000000000000" pitchFamily="18" charset="-128"/>
-                <a:cs typeface="Times New Roman" panose="02020603050405020304" pitchFamily="18" charset="0"/>
-                <a:hlinkClick r:id="rId16"/>
-              </a:rPr>
-              <a:t>https://www.pbtech.co.nz/product/NETTPL3468/TP-Link-TG-3468-32-bit-Gigabit-PCIe-Network-Adapte</a:t>
-            </a:r>
-            <a:endParaRPr kumimoji="0" lang="en-NZ" altLang="en-US" sz="1000" b="0" i="0" u="none" strike="noStrike" cap="none" normalizeH="0" baseline="0">
-              <a:ln>
-                <a:noFill/>
-              </a:ln>
-              <a:solidFill>
-                <a:schemeClr val="tx1"/>
-              </a:solidFill>
-              <a:effectLst/>
-            </a:endParaRPr>
-          </a:p>
-          <a:p>
-            <a:pPr marL="0" marR="0" lvl="0" indent="0" algn="l" defTabSz="914400" rtl="0" eaLnBrk="0" fontAlgn="base" latinLnBrk="0" hangingPunct="0">
-              <a:lnSpc>
-                <a:spcPct val="100000"/>
-              </a:lnSpc>
-              <a:spcBef>
-                <a:spcPct val="0"/>
-              </a:spcBef>
-              <a:spcAft>
-                <a:spcPct val="0"/>
-              </a:spcAft>
-              <a:buClrTx/>
-              <a:buSzTx/>
-              <a:buFontTx/>
-              <a:buNone/>
-              <a:tabLst/>
-            </a:pPr>
-            <a:endParaRPr kumimoji="0" lang="en-NZ" altLang="en-US" sz="1000" b="0" i="0" u="none" strike="noStrike" cap="none" normalizeH="0" baseline="0">
-              <a:ln>
-                <a:noFill/>
-              </a:ln>
-              <a:solidFill>
-                <a:schemeClr val="tx1"/>
-              </a:solidFill>
-              <a:effectLst/>
-              <a:latin typeface="Times New Roman" panose="02020603050405020304" pitchFamily="18" charset="0"/>
-              <a:ea typeface="Yu Mincho" panose="02020400000000000000" pitchFamily="18" charset="-128"/>
-              <a:cs typeface="Times New Roman" panose="02020603050405020304" pitchFamily="18" charset="0"/>
-            </a:endParaRPr>
-          </a:p>
-          <a:p>
-            <a:pPr marL="0" marR="0" lvl="0" indent="0" algn="l" defTabSz="914400" rtl="0" eaLnBrk="0" fontAlgn="base" latinLnBrk="0" hangingPunct="0">
-              <a:lnSpc>
-                <a:spcPct val="100000"/>
-              </a:lnSpc>
-              <a:spcBef>
-                <a:spcPct val="0"/>
-              </a:spcBef>
-              <a:spcAft>
-                <a:spcPct val="0"/>
-              </a:spcAft>
-              <a:buClrTx/>
-              <a:buSzTx/>
-              <a:buFontTx/>
-              <a:buNone/>
-              <a:tabLst/>
-            </a:pPr>
-            <a:r>
-              <a:rPr kumimoji="0" lang="en-NZ" altLang="en-US" sz="1000" b="0" i="0" u="none" strike="noStrike" cap="none" normalizeH="0" baseline="0">
-                <a:ln>
-                  <a:noFill/>
-                </a:ln>
-                <a:solidFill>
-                  <a:schemeClr val="tx1"/>
-                </a:solidFill>
-                <a:effectLst/>
-                <a:latin typeface="Times New Roman" panose="02020603050405020304" pitchFamily="18" charset="0"/>
-                <a:ea typeface="Yu Mincho" panose="02020400000000000000" pitchFamily="18" charset="-128"/>
-                <a:cs typeface="Times New Roman" panose="02020603050405020304" pitchFamily="18" charset="0"/>
-              </a:rPr>
-              <a:t>Quintero, A., Sans, F., &amp; </a:t>
-            </a:r>
-            <a:r>
-              <a:rPr kumimoji="0" lang="en-NZ" altLang="en-US" sz="1000" b="0" i="0" u="none" strike="noStrike" cap="none" normalizeH="0" baseline="0" err="1">
-                <a:ln>
-                  <a:noFill/>
-                </a:ln>
-                <a:solidFill>
-                  <a:schemeClr val="tx1"/>
-                </a:solidFill>
-                <a:effectLst/>
-                <a:latin typeface="Times New Roman" panose="02020603050405020304" pitchFamily="18" charset="0"/>
-                <a:ea typeface="Yu Mincho" panose="02020400000000000000" pitchFamily="18" charset="-128"/>
-                <a:cs typeface="Times New Roman" panose="02020603050405020304" pitchFamily="18" charset="0"/>
-              </a:rPr>
-              <a:t>Gamess</a:t>
-            </a:r>
-            <a:r>
-              <a:rPr kumimoji="0" lang="en-NZ" altLang="en-US" sz="1000" b="0" i="0" u="none" strike="noStrike" cap="none" normalizeH="0" baseline="0">
-                <a:ln>
-                  <a:noFill/>
-                </a:ln>
-                <a:solidFill>
-                  <a:schemeClr val="tx1"/>
-                </a:solidFill>
-                <a:effectLst/>
-                <a:latin typeface="Times New Roman" panose="02020603050405020304" pitchFamily="18" charset="0"/>
-                <a:ea typeface="Yu Mincho" panose="02020400000000000000" pitchFamily="18" charset="-128"/>
-                <a:cs typeface="Times New Roman" panose="02020603050405020304" pitchFamily="18" charset="0"/>
-              </a:rPr>
-              <a:t>, E. (2016). Performance evaluation of IPv4/IPv6 transition mechanisms. </a:t>
-            </a:r>
-            <a:r>
-              <a:rPr kumimoji="0" lang="en-NZ" altLang="en-US" sz="1000" b="0" i="1" u="none" strike="noStrike" cap="none" normalizeH="0" baseline="0">
-                <a:ln>
-                  <a:noFill/>
-                </a:ln>
-                <a:solidFill>
-                  <a:schemeClr val="tx1"/>
-                </a:solidFill>
-                <a:effectLst/>
-                <a:latin typeface="Times New Roman" panose="02020603050405020304" pitchFamily="18" charset="0"/>
-                <a:ea typeface="Yu Mincho" panose="02020400000000000000" pitchFamily="18" charset="-128"/>
-                <a:cs typeface="Times New Roman" panose="02020603050405020304" pitchFamily="18" charset="0"/>
-              </a:rPr>
-              <a:t>International Journal of Computer Network and Information Security</a:t>
-            </a:r>
-            <a:r>
-              <a:rPr kumimoji="0" lang="en-NZ" altLang="en-US" sz="1000" b="0" i="0" u="none" strike="noStrike" cap="none" normalizeH="0" baseline="0">
-                <a:ln>
-                  <a:noFill/>
-                </a:ln>
-                <a:solidFill>
-                  <a:schemeClr val="tx1"/>
-                </a:solidFill>
-                <a:effectLst/>
-                <a:latin typeface="Times New Roman" panose="02020603050405020304" pitchFamily="18" charset="0"/>
-                <a:ea typeface="Yu Mincho" panose="02020400000000000000" pitchFamily="18" charset="-128"/>
-                <a:cs typeface="Times New Roman" panose="02020603050405020304" pitchFamily="18" charset="0"/>
-              </a:rPr>
-              <a:t>, </a:t>
-            </a:r>
-            <a:r>
-              <a:rPr kumimoji="0" lang="en-NZ" altLang="en-US" sz="1000" b="0" i="1" u="none" strike="noStrike" cap="none" normalizeH="0" baseline="0">
-                <a:ln>
-                  <a:noFill/>
-                </a:ln>
-                <a:solidFill>
-                  <a:schemeClr val="tx1"/>
-                </a:solidFill>
-                <a:effectLst/>
-                <a:latin typeface="Times New Roman" panose="02020603050405020304" pitchFamily="18" charset="0"/>
-                <a:ea typeface="Yu Mincho" panose="02020400000000000000" pitchFamily="18" charset="-128"/>
-                <a:cs typeface="Times New Roman" panose="02020603050405020304" pitchFamily="18" charset="0"/>
-              </a:rPr>
-              <a:t>8</a:t>
-            </a:r>
-            <a:r>
-              <a:rPr kumimoji="0" lang="en-NZ" altLang="en-US" sz="1000" b="0" i="0" u="none" strike="noStrike" cap="none" normalizeH="0" baseline="0">
-                <a:ln>
-                  <a:noFill/>
-                </a:ln>
-                <a:solidFill>
-                  <a:schemeClr val="tx1"/>
-                </a:solidFill>
-                <a:effectLst/>
-                <a:latin typeface="Times New Roman" panose="02020603050405020304" pitchFamily="18" charset="0"/>
-                <a:ea typeface="Yu Mincho" panose="02020400000000000000" pitchFamily="18" charset="-128"/>
-                <a:cs typeface="Times New Roman" panose="02020603050405020304" pitchFamily="18" charset="0"/>
-              </a:rPr>
-              <a:t>(2), 1–14. </a:t>
-            </a:r>
-            <a:r>
-              <a:rPr kumimoji="0" lang="en-NZ" altLang="en-US" sz="1000" b="0" i="0" u="none" strike="noStrike" cap="none" normalizeH="0" baseline="0">
-                <a:ln>
-                  <a:noFill/>
-                </a:ln>
-                <a:solidFill>
-                  <a:schemeClr val="tx1"/>
-                </a:solidFill>
-                <a:effectLst/>
-                <a:latin typeface="Times New Roman" panose="02020603050405020304" pitchFamily="18" charset="0"/>
-                <a:ea typeface="Yu Mincho" panose="02020400000000000000" pitchFamily="18" charset="-128"/>
-                <a:cs typeface="Times New Roman" panose="02020603050405020304" pitchFamily="18" charset="0"/>
-                <a:hlinkClick r:id="rId17"/>
-              </a:rPr>
-              <a:t>https://doi.org/10.5815/ijcnis.2016.02.01</a:t>
-            </a:r>
-            <a:r>
-              <a:rPr kumimoji="0" lang="en-NZ" altLang="en-US" sz="1000" b="0" i="0" u="none" strike="noStrike" cap="none" normalizeH="0" baseline="0">
-                <a:ln>
-                  <a:noFill/>
-                </a:ln>
-                <a:solidFill>
-                  <a:schemeClr val="tx1"/>
-                </a:solidFill>
-                <a:effectLst/>
-                <a:latin typeface="Times New Roman" panose="02020603050405020304" pitchFamily="18" charset="0"/>
-                <a:ea typeface="Yu Mincho" panose="02020400000000000000" pitchFamily="18" charset="-128"/>
-                <a:cs typeface="Times New Roman" panose="02020603050405020304" pitchFamily="18" charset="0"/>
-              </a:rPr>
-              <a:t> </a:t>
-            </a:r>
-            <a:endParaRPr kumimoji="0" lang="en-NZ" altLang="en-US" sz="1000" b="0" i="0" u="none" strike="noStrike" cap="none" normalizeH="0" baseline="0">
-              <a:ln>
-                <a:noFill/>
-              </a:ln>
-              <a:solidFill>
-                <a:schemeClr val="tx1"/>
-              </a:solidFill>
-              <a:effectLst/>
-            </a:endParaRPr>
-          </a:p>
-          <a:p>
-            <a:pPr marL="0" marR="0" lvl="0" indent="0" algn="l" defTabSz="914400" rtl="0" eaLnBrk="0" fontAlgn="base" latinLnBrk="0" hangingPunct="0">
-              <a:lnSpc>
-                <a:spcPct val="100000"/>
-              </a:lnSpc>
-              <a:spcBef>
-                <a:spcPct val="0"/>
-              </a:spcBef>
-              <a:spcAft>
-                <a:spcPct val="0"/>
-              </a:spcAft>
-              <a:buClrTx/>
-              <a:buSzTx/>
-              <a:buFontTx/>
-              <a:buNone/>
-              <a:tabLst/>
-            </a:pPr>
-            <a:r>
-              <a:rPr kumimoji="0" lang="en-NZ" altLang="en-US" sz="1000" b="0" i="0" u="none" strike="noStrike" cap="none" normalizeH="0" baseline="0">
-                <a:ln>
-                  <a:noFill/>
-                </a:ln>
-                <a:solidFill>
-                  <a:schemeClr val="tx1"/>
-                </a:solidFill>
-                <a:effectLst/>
-                <a:latin typeface="Times New Roman" panose="02020603050405020304" pitchFamily="18" charset="0"/>
-                <a:ea typeface="Yu Mincho" panose="02020400000000000000" pitchFamily="18" charset="-128"/>
-                <a:cs typeface="Times New Roman" panose="02020603050405020304" pitchFamily="18" charset="0"/>
-              </a:rPr>
-              <a:t>Taffer, M. (2024, December 9). </a:t>
-            </a:r>
-            <a:r>
-              <a:rPr kumimoji="0" lang="en-NZ" altLang="en-US" sz="1000" b="0" i="1" u="none" strike="noStrike" cap="none" normalizeH="0" baseline="0">
-                <a:ln>
-                  <a:noFill/>
-                </a:ln>
-                <a:solidFill>
-                  <a:schemeClr val="tx1"/>
-                </a:solidFill>
-                <a:effectLst/>
-                <a:latin typeface="Times New Roman" panose="02020603050405020304" pitchFamily="18" charset="0"/>
-                <a:ea typeface="Yu Mincho" panose="02020400000000000000" pitchFamily="18" charset="-128"/>
-                <a:cs typeface="Times New Roman" panose="02020603050405020304" pitchFamily="18" charset="0"/>
-              </a:rPr>
-              <a:t>Lean Project Management: Definition, Principles, &amp; Drawbacks</a:t>
-            </a:r>
-            <a:r>
-              <a:rPr kumimoji="0" lang="en-NZ" altLang="en-US" sz="1000" b="0" i="0" u="none" strike="noStrike" cap="none" normalizeH="0" baseline="0">
-                <a:ln>
-                  <a:noFill/>
-                </a:ln>
-                <a:solidFill>
-                  <a:schemeClr val="tx1"/>
-                </a:solidFill>
-                <a:effectLst/>
-                <a:latin typeface="Times New Roman" panose="02020603050405020304" pitchFamily="18" charset="0"/>
-                <a:ea typeface="Yu Mincho" panose="02020400000000000000" pitchFamily="18" charset="-128"/>
-                <a:cs typeface="Times New Roman" panose="02020603050405020304" pitchFamily="18" charset="0"/>
-              </a:rPr>
-              <a:t>. The Digital Project Manager. </a:t>
-            </a:r>
-            <a:r>
-              <a:rPr kumimoji="0" lang="en-NZ" altLang="en-US" sz="1000" b="0" i="0" u="none" strike="noStrike" cap="none" normalizeH="0" baseline="0">
-                <a:ln>
-                  <a:noFill/>
-                </a:ln>
-                <a:solidFill>
-                  <a:schemeClr val="tx1"/>
-                </a:solidFill>
-                <a:effectLst/>
-                <a:latin typeface="Times New Roman" panose="02020603050405020304" pitchFamily="18" charset="0"/>
-                <a:ea typeface="Yu Mincho" panose="02020400000000000000" pitchFamily="18" charset="-128"/>
-                <a:cs typeface="Times New Roman" panose="02020603050405020304" pitchFamily="18" charset="0"/>
-                <a:hlinkClick r:id="rId18"/>
-              </a:rPr>
-              <a:t>https://thedigitalprojectmanager.com/projects/pm-methodology/lean-project-management/</a:t>
-            </a:r>
-            <a:endParaRPr kumimoji="0" lang="en-NZ" altLang="en-US" sz="1000" b="0" i="0" u="none" strike="noStrike" cap="none" normalizeH="0" baseline="0">
-              <a:ln>
-                <a:noFill/>
-              </a:ln>
-              <a:solidFill>
-                <a:schemeClr val="tx1"/>
-              </a:solidFill>
-              <a:effectLst/>
-            </a:endParaRPr>
+            <a:endParaRPr lang="en-AU"/>
           </a:p>
         </p:txBody>
       </p:sp>
@@ -21773,86 +16577,6 @@
 </file>
 
 <file path=ppt/slides/slide2.xml><?xml version="1.0" encoding="utf-8"?>
-<p:sld xmlns:a="http://schemas.openxmlformats.org/drawingml/2006/main" xmlns:r="http://schemas.openxmlformats.org/officeDocument/2006/relationships" xmlns:p="http://schemas.openxmlformats.org/presentationml/2006/main">
-  <p:cSld>
-    <p:spTree>
-      <p:nvGrpSpPr>
-        <p:cNvPr id="1" name=""/>
-        <p:cNvGrpSpPr/>
-        <p:nvPr/>
-      </p:nvGrpSpPr>
-      <p:grpSpPr>
-        <a:xfrm>
-          <a:off x="0" y="0"/>
-          <a:ext cx="0" cy="0"/>
-          <a:chOff x="0" y="0"/>
-          <a:chExt cx="0" cy="0"/>
-        </a:xfrm>
-      </p:grpSpPr>
-      <p:sp>
-        <p:nvSpPr>
-          <p:cNvPr id="2" name="Title 1">
-            <a:extLst>
-              <a:ext uri="{FF2B5EF4-FFF2-40B4-BE49-F238E27FC236}">
-                <a16:creationId xmlns:a16="http://schemas.microsoft.com/office/drawing/2014/main" id="{C2460F86-E896-B32B-7187-514B95BAF715}"/>
-              </a:ext>
-            </a:extLst>
-          </p:cNvPr>
-          <p:cNvSpPr>
-            <a:spLocks noGrp="1"/>
-          </p:cNvSpPr>
-          <p:nvPr>
-            <p:ph type="title"/>
-          </p:nvPr>
-        </p:nvSpPr>
-        <p:spPr/>
-        <p:txBody>
-          <a:bodyPr/>
-          <a:lstStyle/>
-          <a:p>
-            <a:endParaRPr lang="en-NZ"/>
-          </a:p>
-        </p:txBody>
-      </p:sp>
-      <p:sp>
-        <p:nvSpPr>
-          <p:cNvPr id="3" name="Content Placeholder 2">
-            <a:extLst>
-              <a:ext uri="{FF2B5EF4-FFF2-40B4-BE49-F238E27FC236}">
-                <a16:creationId xmlns:a16="http://schemas.microsoft.com/office/drawing/2014/main" id="{CD129A40-40DA-A9BA-B516-2E23359C692D}"/>
-              </a:ext>
-            </a:extLst>
-          </p:cNvPr>
-          <p:cNvSpPr>
-            <a:spLocks noGrp="1"/>
-          </p:cNvSpPr>
-          <p:nvPr>
-            <p:ph idx="1"/>
-          </p:nvPr>
-        </p:nvSpPr>
-        <p:spPr/>
-        <p:txBody>
-          <a:bodyPr/>
-          <a:lstStyle/>
-          <a:p>
-            <a:endParaRPr lang="en-NZ"/>
-          </a:p>
-        </p:txBody>
-      </p:sp>
-    </p:spTree>
-    <p:extLst>
-      <p:ext uri="{BB962C8B-B14F-4D97-AF65-F5344CB8AC3E}">
-        <p14:creationId xmlns:p14="http://schemas.microsoft.com/office/powerpoint/2010/main" val="3539396043"/>
-      </p:ext>
-    </p:extLst>
-  </p:cSld>
-  <p:clrMapOvr>
-    <a:masterClrMapping/>
-  </p:clrMapOvr>
-</p:sld>
-</file>
-
-<file path=ppt/slides/slide3.xml><?xml version="1.0" encoding="utf-8"?>
 <p:sld xmlns:a="http://schemas.openxmlformats.org/drawingml/2006/main" xmlns:r="http://schemas.openxmlformats.org/officeDocument/2006/relationships" xmlns:p="http://schemas.openxmlformats.org/presentationml/2006/main">
   <p:cSld>
     <p:bg>
@@ -21902,7 +16626,7 @@
           <a:p>
             <a:r>
               <a:rPr lang="en-NZ"/>
-              <a:t>Executive summary </a:t>
+              <a:t>Executive summary</a:t>
             </a:r>
             <a:endParaRPr lang="en-AU"/>
           </a:p>
@@ -21946,7 +16670,7 @@
               <a:rPr lang="en-AU" sz="2200">
                 <a:latin typeface="TW Cen MT"/>
               </a:rPr>
-              <a:t>The project will concentrate on IPv4 and IPv6, utilizing both TCP and UDP protocols.</a:t>
+              <a:t>The study will concentrate on IPv4 and IPv6, utilizing both TCP and UDP protocols.</a:t>
             </a:r>
             <a:br>
               <a:rPr lang="en-AU" sz="2200">
@@ -21997,46 +16721,123 @@
           </a:p>
         </p:txBody>
       </p:sp>
+    </p:spTree>
+    <p:extLst>
+      <p:ext uri="{BB962C8B-B14F-4D97-AF65-F5344CB8AC3E}">
+        <p14:creationId xmlns:p14="http://schemas.microsoft.com/office/powerpoint/2010/main" val="2028713515"/>
+      </p:ext>
+    </p:extLst>
+  </p:cSld>
+  <p:clrMapOvr>
+    <a:masterClrMapping/>
+  </p:clrMapOvr>
+</p:sld>
+</file>
+
+<file path=ppt/slides/slide3.xml><?xml version="1.0" encoding="utf-8"?>
+<p:sld xmlns:a="http://schemas.openxmlformats.org/drawingml/2006/main" xmlns:r="http://schemas.openxmlformats.org/officeDocument/2006/relationships" xmlns:p="http://schemas.openxmlformats.org/presentationml/2006/main">
+  <p:cSld>
+    <p:spTree>
+      <p:nvGrpSpPr>
+        <p:cNvPr id="1" name=""/>
+        <p:cNvGrpSpPr/>
+        <p:nvPr/>
+      </p:nvGrpSpPr>
+      <p:grpSpPr>
+        <a:xfrm>
+          <a:off x="0" y="0"/>
+          <a:ext cx="0" cy="0"/>
+          <a:chOff x="0" y="0"/>
+          <a:chExt cx="0" cy="0"/>
+        </a:xfrm>
+      </p:grpSpPr>
       <p:sp>
         <p:nvSpPr>
-          <p:cNvPr id="4" name="TextBox 3">
+          <p:cNvPr id="2" name="Title 1">
             <a:extLst>
               <a:ext uri="{FF2B5EF4-FFF2-40B4-BE49-F238E27FC236}">
-                <a16:creationId xmlns:a16="http://schemas.microsoft.com/office/drawing/2014/main" id="{78811BD0-EB18-A43F-E5D0-36CC90331F2D}"/>
+                <a16:creationId xmlns:a16="http://schemas.microsoft.com/office/drawing/2014/main" id="{F8B1D107-F27E-0F7A-5126-A1F2785CDEFB}"/>
               </a:ext>
             </a:extLst>
           </p:cNvPr>
-          <p:cNvSpPr txBox="1"/>
-          <p:nvPr/>
+          <p:cNvSpPr>
+            <a:spLocks noGrp="1"/>
+          </p:cNvSpPr>
+          <p:nvPr>
+            <p:ph type="title"/>
+          </p:nvPr>
         </p:nvSpPr>
-        <p:spPr>
-          <a:xfrm>
-            <a:off x="4617720" y="6044184"/>
-            <a:ext cx="3714863" cy="369332"/>
-          </a:xfrm>
-          <a:prstGeom prst="rect">
-            <a:avLst/>
-          </a:prstGeom>
-          <a:noFill/>
-        </p:spPr>
+        <p:spPr/>
         <p:txBody>
-          <a:bodyPr wrap="none" rtlCol="0">
-            <a:spAutoFit/>
+          <a:bodyPr/>
+          <a:lstStyle/>
+          <a:p>
+            <a:r>
+              <a:rPr lang="en-NZ"/>
+              <a:t>rationale</a:t>
+            </a:r>
+            <a:endParaRPr lang="en-AU"/>
+          </a:p>
+        </p:txBody>
+      </p:sp>
+      <p:sp>
+        <p:nvSpPr>
+          <p:cNvPr id="3" name="Content Placeholder 2">
+            <a:extLst>
+              <a:ext uri="{FF2B5EF4-FFF2-40B4-BE49-F238E27FC236}">
+                <a16:creationId xmlns:a16="http://schemas.microsoft.com/office/drawing/2014/main" id="{7B9CD419-57B3-8910-F052-479BCFDD3C18}"/>
+              </a:ext>
+            </a:extLst>
+          </p:cNvPr>
+          <p:cNvSpPr>
+            <a:spLocks noGrp="1"/>
+          </p:cNvSpPr>
+          <p:nvPr>
+            <p:ph idx="1"/>
+          </p:nvPr>
+        </p:nvSpPr>
+        <p:spPr/>
+        <p:txBody>
+          <a:bodyPr vert="horz" lIns="91440" tIns="45720" rIns="91440" bIns="45720" rtlCol="0" anchor="t">
+            <a:normAutofit/>
           </a:bodyPr>
           <a:lstStyle/>
           <a:p>
             <a:r>
-              <a:rPr lang="en-US"/>
-              <a:t>Can combine Summary and Rationale*</a:t>
+              <a:rPr lang="en-AU" sz="2200">
+                <a:ea typeface="+mn-lt"/>
+                <a:cs typeface="+mn-lt"/>
+              </a:rPr>
+              <a:t>Purpose: To assess the network performance of IP several Linux-based operating systems, with a focus on Ubuntu, Fedora, and Kali.</a:t>
             </a:r>
-            <a:endParaRPr lang="en-NZ"/>
+            <a:endParaRPr lang="en-AU" sz="2200"/>
+          </a:p>
+          <a:p>
+            <a:r>
+              <a:rPr lang="en-AU" sz="2200">
+                <a:ea typeface="+mn-lt"/>
+                <a:cs typeface="+mn-lt"/>
+              </a:rPr>
+              <a:t>Importance: As open-source operating systems become more popular in the workplace and among individuals, understanding their network performance is critical for organizations to make educated decisions.</a:t>
+            </a:r>
+            <a:endParaRPr lang="en-AU"/>
+          </a:p>
+          <a:p>
+            <a:r>
+              <a:rPr lang="en-AU" sz="2200">
+                <a:ea typeface="+mn-lt"/>
+                <a:cs typeface="+mn-lt"/>
+              </a:rPr>
+              <a:t>Goal: Provide empirical data on how each operating system performs under various network situations, allowing enterprises to optimize their networks.</a:t>
+            </a:r>
+            <a:endParaRPr lang="en-AU"/>
           </a:p>
         </p:txBody>
       </p:sp>
     </p:spTree>
     <p:extLst>
       <p:ext uri="{BB962C8B-B14F-4D97-AF65-F5344CB8AC3E}">
-        <p14:creationId xmlns:p14="http://schemas.microsoft.com/office/powerpoint/2010/main" val="2028713515"/>
+        <p14:creationId xmlns:p14="http://schemas.microsoft.com/office/powerpoint/2010/main" val="3550247993"/>
       </p:ext>
     </p:extLst>
   </p:cSld>
@@ -22255,14 +17056,14 @@
           <a:p>
             <a:r>
               <a:rPr lang="en-AU"/>
-              <a:t>Operating Systems Evaluated: Ubuntu, Fedora, and Kali Linux.</a:t>
+              <a:t>Operating Systems Tested: Ubuntu, Fedora, and Kali Linux.</a:t>
             </a:r>
             <a:br>
               <a:rPr lang="en-AU"/>
             </a:br>
             <a:r>
               <a:rPr lang="en-AU"/>
-              <a:t>Network evaluation includes evaluating IPv4 and IPv6, as well as TCP and UDP protocols.</a:t>
+              <a:t>Network evaluation includes testing of IPv4 and IPv6, as well as TCP and UDP protocols.</a:t>
             </a:r>
           </a:p>
           <a:p>
@@ -22274,7 +17075,15 @@
           <a:p>
             <a:r>
               <a:rPr lang="en-AU"/>
-              <a:t>Tools used for performance evaluation include iPerf and D-ITG.</a:t>
+              <a:t>Tools used for performance evaluation include </a:t>
+            </a:r>
+            <a:r>
+              <a:rPr lang="en-AU" err="1"/>
+              <a:t>iPerf</a:t>
+            </a:r>
+            <a:r>
+              <a:rPr lang="en-AU"/>
+              <a:t> and D-ITG.</a:t>
             </a:r>
           </a:p>
           <a:p>
@@ -22392,7 +17201,7 @@
                 <a:ea typeface="+mn-lt"/>
                 <a:cs typeface="+mn-lt"/>
               </a:rPr>
-              <a:t>Phases 1, 2, and 3 (Waterfall) include initial planning, investigation, and analysis.</a:t>
+              <a:t>Phases 1 and 2 (Waterfall) include initial planning, investigation, and analysis.</a:t>
             </a:r>
             <a:endParaRPr lang="en-AU"/>
           </a:p>
@@ -22402,7 +17211,7 @@
                 <a:ea typeface="+mn-lt"/>
                 <a:cs typeface="+mn-lt"/>
               </a:rPr>
-              <a:t>Phases 4 and 5 (Scrum) include setting up evaluation environment, evaluation execution, and feedback for each Linux distribution (Ubuntu, Fedora, and Kali).</a:t>
+              <a:t>Phases 3 and 4 (Agile) include iterative design, testing, and feedback for each Linux distribution (Ubuntu, Fedora, and Kali).</a:t>
             </a:r>
             <a:endParaRPr lang="en-AU"/>
           </a:p>
@@ -22412,7 +17221,7 @@
                 <a:ea typeface="+mn-lt"/>
                 <a:cs typeface="+mn-lt"/>
               </a:rPr>
-              <a:t>Phase 6 (Waterfall) includes compiling and comparing results of evaluation and documenting closure report.</a:t>
+              <a:t>Phase 5 (Waterfall) includes final evaluation, report generation, and presentation.</a:t>
             </a:r>
             <a:endParaRPr lang="en-AU"/>
           </a:p>
@@ -22442,1121 +17251,6 @@
 </file>
 
 <file path=ppt/slides/slide7.xml><?xml version="1.0" encoding="utf-8"?>
-<p:sld xmlns:a="http://schemas.openxmlformats.org/drawingml/2006/main" xmlns:r="http://schemas.openxmlformats.org/officeDocument/2006/relationships" xmlns:p="http://schemas.openxmlformats.org/presentationml/2006/main">
-  <p:cSld>
-    <p:spTree>
-      <p:nvGrpSpPr>
-        <p:cNvPr id="1" name=""/>
-        <p:cNvGrpSpPr/>
-        <p:nvPr/>
-      </p:nvGrpSpPr>
-      <p:grpSpPr>
-        <a:xfrm>
-          <a:off x="0" y="0"/>
-          <a:ext cx="0" cy="0"/>
-          <a:chOff x="0" y="0"/>
-          <a:chExt cx="0" cy="0"/>
-        </a:xfrm>
-      </p:grpSpPr>
-      <p:sp>
-        <p:nvSpPr>
-          <p:cNvPr id="5" name="Title 1">
-            <a:extLst>
-              <a:ext uri="{FF2B5EF4-FFF2-40B4-BE49-F238E27FC236}">
-                <a16:creationId xmlns:a16="http://schemas.microsoft.com/office/drawing/2014/main" id="{188B4F74-7768-BCB8-A131-5BD8526BF440}"/>
-              </a:ext>
-            </a:extLst>
-          </p:cNvPr>
-          <p:cNvSpPr>
-            <a:spLocks noGrp="1"/>
-          </p:cNvSpPr>
-          <p:nvPr>
-            <p:ph type="title"/>
-          </p:nvPr>
-        </p:nvSpPr>
-        <p:spPr>
-          <a:xfrm>
-            <a:off x="1141413" y="618518"/>
-            <a:ext cx="9905998" cy="1478570"/>
-          </a:xfrm>
-        </p:spPr>
-        <p:txBody>
-          <a:bodyPr/>
-          <a:lstStyle/>
-          <a:p>
-            <a:r>
-              <a:rPr lang="en-NZ"/>
-              <a:t>Project Plan</a:t>
-            </a:r>
-            <a:endParaRPr lang="en-AU"/>
-          </a:p>
-        </p:txBody>
-      </p:sp>
-      <p:pic>
-        <p:nvPicPr>
-          <p:cNvPr id="12" name="Picture 11" descr="A diagram of a network performance&#10;&#10;AI-generated content may be incorrect.">
-            <a:extLst>
-              <a:ext uri="{FF2B5EF4-FFF2-40B4-BE49-F238E27FC236}">
-                <a16:creationId xmlns:a16="http://schemas.microsoft.com/office/drawing/2014/main" id="{916D1096-05F5-9ABE-2912-CBA7F892FEE6}"/>
-              </a:ext>
-            </a:extLst>
-          </p:cNvPr>
-          <p:cNvPicPr>
-            <a:picLocks noChangeAspect="1"/>
-          </p:cNvPicPr>
-          <p:nvPr/>
-        </p:nvPicPr>
-        <p:blipFill>
-          <a:blip r:embed="rId2">
-            <a:extLst>
-              <a:ext uri="{28A0092B-C50C-407E-A947-70E740481C1C}">
-                <a14:useLocalDpi xmlns:a14="http://schemas.microsoft.com/office/drawing/2010/main" val="0"/>
-              </a:ext>
-            </a:extLst>
-          </a:blip>
-          <a:stretch>
-            <a:fillRect/>
-          </a:stretch>
-        </p:blipFill>
-        <p:spPr>
-          <a:xfrm>
-            <a:off x="1902969" y="3429000"/>
-            <a:ext cx="9264975" cy="1850682"/>
-          </a:xfrm>
-          <a:prstGeom prst="rect">
-            <a:avLst/>
-          </a:prstGeom>
-        </p:spPr>
-      </p:pic>
-      <p:sp>
-        <p:nvSpPr>
-          <p:cNvPr id="13" name="TextBox 12">
-            <a:extLst>
-              <a:ext uri="{FF2B5EF4-FFF2-40B4-BE49-F238E27FC236}">
-                <a16:creationId xmlns:a16="http://schemas.microsoft.com/office/drawing/2014/main" id="{17A7AB81-0A3F-BFC3-054A-4CB5CCF1FAD1}"/>
-              </a:ext>
-            </a:extLst>
-          </p:cNvPr>
-          <p:cNvSpPr txBox="1"/>
-          <p:nvPr/>
-        </p:nvSpPr>
-        <p:spPr>
-          <a:xfrm>
-            <a:off x="500390" y="3969795"/>
-            <a:ext cx="1335750" cy="584775"/>
-          </a:xfrm>
-          <a:prstGeom prst="rect">
-            <a:avLst/>
-          </a:prstGeom>
-          <a:noFill/>
-        </p:spPr>
-        <p:txBody>
-          <a:bodyPr wrap="square" rtlCol="0">
-            <a:spAutoFit/>
-          </a:bodyPr>
-          <a:lstStyle/>
-          <a:p>
-            <a:pPr algn="ctr"/>
-            <a:r>
-              <a:rPr lang="en-US" sz="1600"/>
-              <a:t>Start</a:t>
-            </a:r>
-            <a:br>
-              <a:rPr lang="en-US" sz="1600"/>
-            </a:br>
-            <a:r>
-              <a:rPr lang="en-US" sz="1600"/>
-              <a:t>03 Mar 2025</a:t>
-            </a:r>
-            <a:endParaRPr lang="en-NZ" sz="1600"/>
-          </a:p>
-        </p:txBody>
-      </p:sp>
-      <p:sp>
-        <p:nvSpPr>
-          <p:cNvPr id="14" name="TextBox 13">
-            <a:extLst>
-              <a:ext uri="{FF2B5EF4-FFF2-40B4-BE49-F238E27FC236}">
-                <a16:creationId xmlns:a16="http://schemas.microsoft.com/office/drawing/2014/main" id="{7A2E6401-9220-39F9-A375-C20084F7A1DE}"/>
-              </a:ext>
-            </a:extLst>
-          </p:cNvPr>
-          <p:cNvSpPr txBox="1"/>
-          <p:nvPr/>
-        </p:nvSpPr>
-        <p:spPr>
-          <a:xfrm>
-            <a:off x="2159461" y="5297339"/>
-            <a:ext cx="1300096" cy="584775"/>
-          </a:xfrm>
-          <a:prstGeom prst="rect">
-            <a:avLst/>
-          </a:prstGeom>
-          <a:noFill/>
-        </p:spPr>
-        <p:txBody>
-          <a:bodyPr wrap="square" rtlCol="0">
-            <a:spAutoFit/>
-          </a:bodyPr>
-          <a:lstStyle/>
-          <a:p>
-            <a:pPr algn="ctr"/>
-            <a:r>
-              <a:rPr lang="en-US" sz="1600"/>
-              <a:t>Milestone 1</a:t>
-            </a:r>
-            <a:br>
-              <a:rPr lang="en-US" sz="1600"/>
-            </a:br>
-            <a:r>
-              <a:rPr lang="en-US" sz="1600"/>
-              <a:t>04 Apr 2025</a:t>
-            </a:r>
-            <a:endParaRPr lang="en-NZ" sz="1600"/>
-          </a:p>
-        </p:txBody>
-      </p:sp>
-      <p:sp>
-        <p:nvSpPr>
-          <p:cNvPr id="15" name="TextBox 14">
-            <a:extLst>
-              <a:ext uri="{FF2B5EF4-FFF2-40B4-BE49-F238E27FC236}">
-                <a16:creationId xmlns:a16="http://schemas.microsoft.com/office/drawing/2014/main" id="{F75D2EA6-E0BB-A28A-ACB7-9BF24493B328}"/>
-              </a:ext>
-            </a:extLst>
-          </p:cNvPr>
-          <p:cNvSpPr txBox="1"/>
-          <p:nvPr/>
-        </p:nvSpPr>
-        <p:spPr>
-          <a:xfrm>
-            <a:off x="3839088" y="5289859"/>
-            <a:ext cx="1355199" cy="584775"/>
-          </a:xfrm>
-          <a:prstGeom prst="rect">
-            <a:avLst/>
-          </a:prstGeom>
-          <a:noFill/>
-        </p:spPr>
-        <p:txBody>
-          <a:bodyPr wrap="square" rtlCol="0">
-            <a:spAutoFit/>
-          </a:bodyPr>
-          <a:lstStyle/>
-          <a:p>
-            <a:pPr algn="ctr"/>
-            <a:r>
-              <a:rPr lang="en-US" sz="1600"/>
-              <a:t>Milestone 2</a:t>
-            </a:r>
-            <a:br>
-              <a:rPr lang="en-US" sz="1600"/>
-            </a:br>
-            <a:r>
-              <a:rPr lang="en-US" sz="1600"/>
-              <a:t>06 June 2025</a:t>
-            </a:r>
-            <a:endParaRPr lang="en-NZ" sz="1600"/>
-          </a:p>
-        </p:txBody>
-      </p:sp>
-      <p:graphicFrame>
-        <p:nvGraphicFramePr>
-          <p:cNvPr id="17" name="Table 16">
-            <a:extLst>
-              <a:ext uri="{FF2B5EF4-FFF2-40B4-BE49-F238E27FC236}">
-                <a16:creationId xmlns:a16="http://schemas.microsoft.com/office/drawing/2014/main" id="{8180FDFD-5AF0-62D1-F68D-4828E5C08518}"/>
-              </a:ext>
-            </a:extLst>
-          </p:cNvPr>
-          <p:cNvGraphicFramePr>
-            <a:graphicFrameLocks noGrp="1"/>
-          </p:cNvGraphicFramePr>
-          <p:nvPr>
-            <p:extLst>
-              <p:ext uri="{D42A27DB-BD31-4B8C-83A1-F6EECF244321}">
-                <p14:modId xmlns:p14="http://schemas.microsoft.com/office/powerpoint/2010/main" val="2755538004"/>
-              </p:ext>
-            </p:extLst>
-          </p:nvPr>
-        </p:nvGraphicFramePr>
-        <p:xfrm>
-          <a:off x="5194287" y="396631"/>
-          <a:ext cx="6236208" cy="2580592"/>
-        </p:xfrm>
-        <a:graphic>
-          <a:graphicData uri="http://schemas.openxmlformats.org/drawingml/2006/table">
-            <a:tbl>
-              <a:tblPr firstRow="1" firstCol="1" bandRow="1">
-                <a:tableStyleId>{E8034E78-7F5D-4C2E-B375-FC64B27BC917}</a:tableStyleId>
-              </a:tblPr>
-              <a:tblGrid>
-                <a:gridCol w="1271313">
-                  <a:extLst>
-                    <a:ext uri="{9D8B030D-6E8A-4147-A177-3AD203B41FA5}">
-                      <a16:colId xmlns:a16="http://schemas.microsoft.com/office/drawing/2014/main" val="1762830457"/>
-                    </a:ext>
-                  </a:extLst>
-                </a:gridCol>
-                <a:gridCol w="1862699">
-                  <a:extLst>
-                    <a:ext uri="{9D8B030D-6E8A-4147-A177-3AD203B41FA5}">
-                      <a16:colId xmlns:a16="http://schemas.microsoft.com/office/drawing/2014/main" val="1945837732"/>
-                    </a:ext>
-                  </a:extLst>
-                </a:gridCol>
-                <a:gridCol w="3102196">
-                  <a:extLst>
-                    <a:ext uri="{9D8B030D-6E8A-4147-A177-3AD203B41FA5}">
-                      <a16:colId xmlns:a16="http://schemas.microsoft.com/office/drawing/2014/main" val="3738368631"/>
-                    </a:ext>
-                  </a:extLst>
-                </a:gridCol>
-              </a:tblGrid>
-              <a:tr h="35960">
-                <a:tc>
-                  <a:txBody>
-                    <a:bodyPr/>
-                    <a:lstStyle/>
-                    <a:p>
-                      <a:pPr algn="ctr">
-                        <a:buNone/>
-                      </a:pPr>
-                      <a:r>
-                        <a:rPr lang="en-NZ" sz="1600" kern="100">
-                          <a:effectLst/>
-                          <a:latin typeface="Aptos" panose="020B0004020202020204" pitchFamily="34" charset="0"/>
-                        </a:rPr>
-                        <a:t>Date</a:t>
-                      </a:r>
-                      <a:endParaRPr lang="en-NZ" sz="1600" kern="100">
-                        <a:effectLst/>
-                        <a:latin typeface="Aptos" panose="020B0004020202020204" pitchFamily="34" charset="0"/>
-                        <a:ea typeface="Yu Mincho" panose="02020400000000000000" pitchFamily="18" charset="-128"/>
-                        <a:cs typeface="Aptos" panose="020B0004020202020204" pitchFamily="34" charset="0"/>
-                      </a:endParaRPr>
-                    </a:p>
-                  </a:txBody>
-                  <a:tcPr marL="68580" marR="68580" marT="0" marB="0"/>
-                </a:tc>
-                <a:tc>
-                  <a:txBody>
-                    <a:bodyPr/>
-                    <a:lstStyle/>
-                    <a:p>
-                      <a:pPr algn="ctr">
-                        <a:buNone/>
-                      </a:pPr>
-                      <a:r>
-                        <a:rPr lang="en-NZ" sz="1600" kern="100">
-                          <a:effectLst/>
-                          <a:latin typeface="Aptos" panose="020B0004020202020204" pitchFamily="34" charset="0"/>
-                        </a:rPr>
-                        <a:t>Milestone Type</a:t>
-                      </a:r>
-                      <a:endParaRPr lang="en-NZ" sz="1600" kern="100">
-                        <a:effectLst/>
-                        <a:latin typeface="Aptos" panose="020B0004020202020204" pitchFamily="34" charset="0"/>
-                        <a:ea typeface="Yu Mincho" panose="02020400000000000000" pitchFamily="18" charset="-128"/>
-                        <a:cs typeface="Aptos" panose="020B0004020202020204" pitchFamily="34" charset="0"/>
-                      </a:endParaRPr>
-                    </a:p>
-                  </a:txBody>
-                  <a:tcPr marL="68580" marR="68580" marT="0" marB="0"/>
-                </a:tc>
-                <a:tc>
-                  <a:txBody>
-                    <a:bodyPr/>
-                    <a:lstStyle/>
-                    <a:p>
-                      <a:pPr algn="ctr">
-                        <a:buNone/>
-                      </a:pPr>
-                      <a:r>
-                        <a:rPr lang="en-NZ" sz="1600" kern="100">
-                          <a:effectLst/>
-                          <a:latin typeface="Aptos" panose="020B0004020202020204" pitchFamily="34" charset="0"/>
-                        </a:rPr>
-                        <a:t>Milestone</a:t>
-                      </a:r>
-                      <a:endParaRPr lang="en-NZ" sz="1600" kern="100">
-                        <a:effectLst/>
-                        <a:latin typeface="Aptos" panose="020B0004020202020204" pitchFamily="34" charset="0"/>
-                        <a:ea typeface="Yu Mincho" panose="02020400000000000000" pitchFamily="18" charset="-128"/>
-                        <a:cs typeface="Aptos" panose="020B0004020202020204" pitchFamily="34" charset="0"/>
-                      </a:endParaRPr>
-                    </a:p>
-                  </a:txBody>
-                  <a:tcPr marL="68580" marR="68580" marT="0" marB="0"/>
-                </a:tc>
-                <a:extLst>
-                  <a:ext uri="{0D108BD9-81ED-4DB2-BD59-A6C34878D82A}">
-                    <a16:rowId xmlns:a16="http://schemas.microsoft.com/office/drawing/2014/main" val="521543494"/>
-                  </a:ext>
-                </a:extLst>
-              </a:tr>
-              <a:tr h="329770">
-                <a:tc>
-                  <a:txBody>
-                    <a:bodyPr/>
-                    <a:lstStyle/>
-                    <a:p>
-                      <a:pPr algn="ctr">
-                        <a:buNone/>
-                      </a:pPr>
-                      <a:r>
-                        <a:rPr lang="en-NZ" sz="1600" kern="100">
-                          <a:solidFill>
-                            <a:schemeClr val="bg1"/>
-                          </a:solidFill>
-                          <a:effectLst/>
-                          <a:latin typeface="Aptos" panose="020B0004020202020204" pitchFamily="34" charset="0"/>
-                        </a:rPr>
-                        <a:t>04/04/2025</a:t>
-                      </a:r>
-                      <a:endParaRPr lang="en-NZ" sz="1600" kern="100">
-                        <a:solidFill>
-                          <a:schemeClr val="bg1"/>
-                        </a:solidFill>
-                        <a:effectLst/>
-                        <a:latin typeface="Aptos" panose="020B0004020202020204" pitchFamily="34" charset="0"/>
-                        <a:ea typeface="Yu Mincho" panose="02020400000000000000" pitchFamily="18" charset="-128"/>
-                        <a:cs typeface="Aptos" panose="020B0004020202020204" pitchFamily="34" charset="0"/>
-                      </a:endParaRPr>
-                    </a:p>
-                  </a:txBody>
-                  <a:tcPr marL="68580" marR="68580" marT="0" marB="0"/>
-                </a:tc>
-                <a:tc>
-                  <a:txBody>
-                    <a:bodyPr/>
-                    <a:lstStyle/>
-                    <a:p>
-                      <a:pPr algn="ctr">
-                        <a:buNone/>
-                      </a:pPr>
-                      <a:r>
-                        <a:rPr lang="en-NZ" sz="1600" b="1" kern="100">
-                          <a:solidFill>
-                            <a:schemeClr val="bg1"/>
-                          </a:solidFill>
-                          <a:effectLst/>
-                          <a:latin typeface="Aptos" panose="020B0004020202020204" pitchFamily="34" charset="0"/>
-                        </a:rPr>
-                        <a:t>External</a:t>
-                      </a:r>
-                      <a:endParaRPr lang="en-NZ" sz="1600" b="1" kern="100">
-                        <a:solidFill>
-                          <a:schemeClr val="bg1"/>
-                        </a:solidFill>
-                        <a:effectLst/>
-                        <a:latin typeface="Aptos" panose="020B0004020202020204" pitchFamily="34" charset="0"/>
-                        <a:ea typeface="Yu Mincho" panose="02020400000000000000" pitchFamily="18" charset="-128"/>
-                        <a:cs typeface="Aptos" panose="020B0004020202020204" pitchFamily="34" charset="0"/>
-                      </a:endParaRPr>
-                    </a:p>
-                  </a:txBody>
-                  <a:tcPr marL="68580" marR="68580" marT="0" marB="0"/>
-                </a:tc>
-                <a:tc>
-                  <a:txBody>
-                    <a:bodyPr/>
-                    <a:lstStyle/>
-                    <a:p>
-                      <a:pPr>
-                        <a:buNone/>
-                      </a:pPr>
-                      <a:r>
-                        <a:rPr lang="en-NZ" sz="1600" b="1" kern="100">
-                          <a:solidFill>
-                            <a:schemeClr val="bg1"/>
-                          </a:solidFill>
-                          <a:effectLst/>
-                          <a:latin typeface="Aptos" panose="020B0004020202020204" pitchFamily="34" charset="0"/>
-                        </a:rPr>
-                        <a:t>Project Proposal Submission</a:t>
-                      </a:r>
-                      <a:endParaRPr lang="en-NZ" sz="1600" b="1" kern="100">
-                        <a:solidFill>
-                          <a:schemeClr val="bg1"/>
-                        </a:solidFill>
-                        <a:effectLst/>
-                        <a:latin typeface="Aptos" panose="020B0004020202020204" pitchFamily="34" charset="0"/>
-                        <a:ea typeface="Yu Mincho" panose="02020400000000000000" pitchFamily="18" charset="-128"/>
-                        <a:cs typeface="Aptos" panose="020B0004020202020204" pitchFamily="34" charset="0"/>
-                      </a:endParaRPr>
-                    </a:p>
-                  </a:txBody>
-                  <a:tcPr marL="68580" marR="68580" marT="0" marB="0"/>
-                </a:tc>
-                <a:extLst>
-                  <a:ext uri="{0D108BD9-81ED-4DB2-BD59-A6C34878D82A}">
-                    <a16:rowId xmlns:a16="http://schemas.microsoft.com/office/drawing/2014/main" val="4160564538"/>
-                  </a:ext>
-                </a:extLst>
-              </a:tr>
-              <a:tr h="334497">
-                <a:tc>
-                  <a:txBody>
-                    <a:bodyPr/>
-                    <a:lstStyle/>
-                    <a:p>
-                      <a:pPr algn="ctr">
-                        <a:buNone/>
-                      </a:pPr>
-                      <a:r>
-                        <a:rPr lang="en-NZ" sz="1600" kern="100">
-                          <a:solidFill>
-                            <a:schemeClr val="bg1"/>
-                          </a:solidFill>
-                          <a:effectLst/>
-                          <a:latin typeface="Aptos" panose="020B0004020202020204" pitchFamily="34" charset="0"/>
-                        </a:rPr>
-                        <a:t>06/06/2025</a:t>
-                      </a:r>
-                      <a:endParaRPr lang="en-NZ" sz="1600" kern="100">
-                        <a:solidFill>
-                          <a:schemeClr val="bg1"/>
-                        </a:solidFill>
-                        <a:effectLst/>
-                        <a:latin typeface="Aptos" panose="020B0004020202020204" pitchFamily="34" charset="0"/>
-                        <a:ea typeface="Yu Mincho" panose="02020400000000000000" pitchFamily="18" charset="-128"/>
-                        <a:cs typeface="Aptos" panose="020B0004020202020204" pitchFamily="34" charset="0"/>
-                      </a:endParaRPr>
-                    </a:p>
-                  </a:txBody>
-                  <a:tcPr marL="68580" marR="68580" marT="0" marB="0"/>
-                </a:tc>
-                <a:tc>
-                  <a:txBody>
-                    <a:bodyPr/>
-                    <a:lstStyle/>
-                    <a:p>
-                      <a:pPr algn="ctr">
-                        <a:buNone/>
-                      </a:pPr>
-                      <a:r>
-                        <a:rPr lang="en-NZ" sz="1600" b="1" kern="100">
-                          <a:solidFill>
-                            <a:schemeClr val="bg1"/>
-                          </a:solidFill>
-                          <a:effectLst/>
-                          <a:latin typeface="Aptos" panose="020B0004020202020204" pitchFamily="34" charset="0"/>
-                        </a:rPr>
-                        <a:t>External</a:t>
-                      </a:r>
-                      <a:endParaRPr lang="en-NZ" sz="1600" b="1" kern="100">
-                        <a:solidFill>
-                          <a:schemeClr val="bg1"/>
-                        </a:solidFill>
-                        <a:effectLst/>
-                        <a:latin typeface="Aptos" panose="020B0004020202020204" pitchFamily="34" charset="0"/>
-                        <a:ea typeface="Yu Mincho" panose="02020400000000000000" pitchFamily="18" charset="-128"/>
-                        <a:cs typeface="Aptos" panose="020B0004020202020204" pitchFamily="34" charset="0"/>
-                      </a:endParaRPr>
-                    </a:p>
-                  </a:txBody>
-                  <a:tcPr marL="68580" marR="68580" marT="0" marB="0"/>
-                </a:tc>
-                <a:tc>
-                  <a:txBody>
-                    <a:bodyPr/>
-                    <a:lstStyle/>
-                    <a:p>
-                      <a:pPr>
-                        <a:buNone/>
-                      </a:pPr>
-                      <a:r>
-                        <a:rPr lang="en-NZ" sz="1600" b="1" kern="100">
-                          <a:solidFill>
-                            <a:schemeClr val="bg1"/>
-                          </a:solidFill>
-                          <a:effectLst/>
-                          <a:latin typeface="Aptos" panose="020B0004020202020204" pitchFamily="34" charset="0"/>
-                        </a:rPr>
-                        <a:t>Mid-Term Review</a:t>
-                      </a:r>
-                      <a:endParaRPr lang="en-NZ" sz="1600" b="1" kern="100">
-                        <a:solidFill>
-                          <a:schemeClr val="bg1"/>
-                        </a:solidFill>
-                        <a:effectLst/>
-                        <a:latin typeface="Aptos" panose="020B0004020202020204" pitchFamily="34" charset="0"/>
-                        <a:ea typeface="Yu Mincho" panose="02020400000000000000" pitchFamily="18" charset="-128"/>
-                        <a:cs typeface="Aptos" panose="020B0004020202020204" pitchFamily="34" charset="0"/>
-                      </a:endParaRPr>
-                    </a:p>
-                  </a:txBody>
-                  <a:tcPr marL="68580" marR="68580" marT="0" marB="0"/>
-                </a:tc>
-                <a:extLst>
-                  <a:ext uri="{0D108BD9-81ED-4DB2-BD59-A6C34878D82A}">
-                    <a16:rowId xmlns:a16="http://schemas.microsoft.com/office/drawing/2014/main" val="1761541482"/>
-                  </a:ext>
-                </a:extLst>
-              </a:tr>
-              <a:tr h="334497">
-                <a:tc>
-                  <a:txBody>
-                    <a:bodyPr/>
-                    <a:lstStyle/>
-                    <a:p>
-                      <a:pPr algn="ctr">
-                        <a:buNone/>
-                      </a:pPr>
-                      <a:r>
-                        <a:rPr lang="en-NZ" sz="1600" kern="100">
-                          <a:solidFill>
-                            <a:schemeClr val="bg1"/>
-                          </a:solidFill>
-                          <a:effectLst/>
-                          <a:latin typeface="Aptos" panose="020B0004020202020204" pitchFamily="34" charset="0"/>
-                        </a:rPr>
-                        <a:t>17/08/2025</a:t>
-                      </a:r>
-                      <a:endParaRPr lang="en-NZ" sz="1600" kern="100">
-                        <a:solidFill>
-                          <a:schemeClr val="bg1"/>
-                        </a:solidFill>
-                        <a:effectLst/>
-                        <a:latin typeface="Aptos" panose="020B0004020202020204" pitchFamily="34" charset="0"/>
-                        <a:ea typeface="Yu Mincho" panose="02020400000000000000" pitchFamily="18" charset="-128"/>
-                        <a:cs typeface="Aptos" panose="020B0004020202020204" pitchFamily="34" charset="0"/>
-                      </a:endParaRPr>
-                    </a:p>
-                  </a:txBody>
-                  <a:tcPr marL="68580" marR="68580" marT="0" marB="0"/>
-                </a:tc>
-                <a:tc>
-                  <a:txBody>
-                    <a:bodyPr/>
-                    <a:lstStyle/>
-                    <a:p>
-                      <a:pPr algn="ctr">
-                        <a:buNone/>
-                      </a:pPr>
-                      <a:r>
-                        <a:rPr lang="en-NZ" sz="1600" kern="100">
-                          <a:solidFill>
-                            <a:schemeClr val="bg1"/>
-                          </a:solidFill>
-                          <a:effectLst/>
-                          <a:latin typeface="Aptos" panose="020B0004020202020204" pitchFamily="34" charset="0"/>
-                        </a:rPr>
-                        <a:t>Internal</a:t>
-                      </a:r>
-                      <a:endParaRPr lang="en-NZ" sz="1600" kern="100">
-                        <a:solidFill>
-                          <a:schemeClr val="bg1"/>
-                        </a:solidFill>
-                        <a:effectLst/>
-                        <a:latin typeface="Aptos" panose="020B0004020202020204" pitchFamily="34" charset="0"/>
-                        <a:ea typeface="Yu Mincho" panose="02020400000000000000" pitchFamily="18" charset="-128"/>
-                        <a:cs typeface="Aptos" panose="020B0004020202020204" pitchFamily="34" charset="0"/>
-                      </a:endParaRPr>
-                    </a:p>
-                  </a:txBody>
-                  <a:tcPr marL="68580" marR="68580" marT="0" marB="0"/>
-                </a:tc>
-                <a:tc>
-                  <a:txBody>
-                    <a:bodyPr/>
-                    <a:lstStyle/>
-                    <a:p>
-                      <a:pPr>
-                        <a:buNone/>
-                      </a:pPr>
-                      <a:r>
-                        <a:rPr lang="en-NZ" sz="1600" kern="100">
-                          <a:solidFill>
-                            <a:schemeClr val="bg1"/>
-                          </a:solidFill>
-                          <a:effectLst/>
-                          <a:latin typeface="Aptos" panose="020B0004020202020204" pitchFamily="34" charset="0"/>
-                        </a:rPr>
-                        <a:t>Completion of Ubuntu Evaluation</a:t>
-                      </a:r>
-                      <a:endParaRPr lang="en-NZ" sz="1600" kern="100">
-                        <a:solidFill>
-                          <a:schemeClr val="bg1"/>
-                        </a:solidFill>
-                        <a:effectLst/>
-                        <a:latin typeface="Aptos" panose="020B0004020202020204" pitchFamily="34" charset="0"/>
-                        <a:ea typeface="Yu Mincho" panose="02020400000000000000" pitchFamily="18" charset="-128"/>
-                        <a:cs typeface="Aptos" panose="020B0004020202020204" pitchFamily="34" charset="0"/>
-                      </a:endParaRPr>
-                    </a:p>
-                  </a:txBody>
-                  <a:tcPr marL="68580" marR="68580" marT="0" marB="0"/>
-                </a:tc>
-                <a:extLst>
-                  <a:ext uri="{0D108BD9-81ED-4DB2-BD59-A6C34878D82A}">
-                    <a16:rowId xmlns:a16="http://schemas.microsoft.com/office/drawing/2014/main" val="361934574"/>
-                  </a:ext>
-                </a:extLst>
-              </a:tr>
-              <a:tr h="334497">
-                <a:tc>
-                  <a:txBody>
-                    <a:bodyPr/>
-                    <a:lstStyle/>
-                    <a:p>
-                      <a:pPr algn="ctr">
-                        <a:buNone/>
-                      </a:pPr>
-                      <a:r>
-                        <a:rPr lang="en-NZ" sz="1600" kern="100">
-                          <a:solidFill>
-                            <a:schemeClr val="bg1"/>
-                          </a:solidFill>
-                          <a:effectLst/>
-                          <a:latin typeface="Aptos" panose="020B0004020202020204" pitchFamily="34" charset="0"/>
-                        </a:rPr>
-                        <a:t>14/09/2025</a:t>
-                      </a:r>
-                      <a:endParaRPr lang="en-NZ" sz="1600" kern="100">
-                        <a:solidFill>
-                          <a:schemeClr val="bg1"/>
-                        </a:solidFill>
-                        <a:effectLst/>
-                        <a:latin typeface="Aptos" panose="020B0004020202020204" pitchFamily="34" charset="0"/>
-                        <a:ea typeface="Yu Mincho" panose="02020400000000000000" pitchFamily="18" charset="-128"/>
-                        <a:cs typeface="Aptos" panose="020B0004020202020204" pitchFamily="34" charset="0"/>
-                      </a:endParaRPr>
-                    </a:p>
-                  </a:txBody>
-                  <a:tcPr marL="68580" marR="68580" marT="0" marB="0"/>
-                </a:tc>
-                <a:tc>
-                  <a:txBody>
-                    <a:bodyPr/>
-                    <a:lstStyle/>
-                    <a:p>
-                      <a:pPr algn="ctr">
-                        <a:buNone/>
-                      </a:pPr>
-                      <a:r>
-                        <a:rPr lang="en-NZ" sz="1600" kern="100">
-                          <a:solidFill>
-                            <a:schemeClr val="bg1"/>
-                          </a:solidFill>
-                          <a:effectLst/>
-                          <a:latin typeface="Aptos" panose="020B0004020202020204" pitchFamily="34" charset="0"/>
-                        </a:rPr>
-                        <a:t>Internal</a:t>
-                      </a:r>
-                      <a:endParaRPr lang="en-NZ" sz="1600" kern="100">
-                        <a:solidFill>
-                          <a:schemeClr val="bg1"/>
-                        </a:solidFill>
-                        <a:effectLst/>
-                        <a:latin typeface="Aptos" panose="020B0004020202020204" pitchFamily="34" charset="0"/>
-                        <a:ea typeface="Yu Mincho" panose="02020400000000000000" pitchFamily="18" charset="-128"/>
-                        <a:cs typeface="Aptos" panose="020B0004020202020204" pitchFamily="34" charset="0"/>
-                      </a:endParaRPr>
-                    </a:p>
-                  </a:txBody>
-                  <a:tcPr marL="68580" marR="68580" marT="0" marB="0"/>
-                </a:tc>
-                <a:tc>
-                  <a:txBody>
-                    <a:bodyPr/>
-                    <a:lstStyle/>
-                    <a:p>
-                      <a:pPr>
-                        <a:buNone/>
-                      </a:pPr>
-                      <a:r>
-                        <a:rPr lang="en-NZ" sz="1600" kern="100">
-                          <a:solidFill>
-                            <a:schemeClr val="bg1"/>
-                          </a:solidFill>
-                          <a:effectLst/>
-                          <a:latin typeface="Aptos" panose="020B0004020202020204" pitchFamily="34" charset="0"/>
-                        </a:rPr>
-                        <a:t>Completion of Fedora Evaluation</a:t>
-                      </a:r>
-                      <a:endParaRPr lang="en-NZ" sz="1600" kern="100">
-                        <a:solidFill>
-                          <a:schemeClr val="bg1"/>
-                        </a:solidFill>
-                        <a:effectLst/>
-                        <a:latin typeface="Aptos" panose="020B0004020202020204" pitchFamily="34" charset="0"/>
-                        <a:ea typeface="Yu Mincho" panose="02020400000000000000" pitchFamily="18" charset="-128"/>
-                        <a:cs typeface="Aptos" panose="020B0004020202020204" pitchFamily="34" charset="0"/>
-                      </a:endParaRPr>
-                    </a:p>
-                  </a:txBody>
-                  <a:tcPr marL="68580" marR="68580" marT="0" marB="0"/>
-                </a:tc>
-                <a:extLst>
-                  <a:ext uri="{0D108BD9-81ED-4DB2-BD59-A6C34878D82A}">
-                    <a16:rowId xmlns:a16="http://schemas.microsoft.com/office/drawing/2014/main" val="3927085259"/>
-                  </a:ext>
-                </a:extLst>
-              </a:tr>
-              <a:tr h="334497">
-                <a:tc>
-                  <a:txBody>
-                    <a:bodyPr/>
-                    <a:lstStyle/>
-                    <a:p>
-                      <a:pPr algn="ctr">
-                        <a:buNone/>
-                      </a:pPr>
-                      <a:r>
-                        <a:rPr lang="en-NZ" sz="1600" kern="100">
-                          <a:solidFill>
-                            <a:schemeClr val="bg1"/>
-                          </a:solidFill>
-                          <a:effectLst/>
-                          <a:latin typeface="Aptos" panose="020B0004020202020204" pitchFamily="34" charset="0"/>
-                        </a:rPr>
-                        <a:t>12/10/2025</a:t>
-                      </a:r>
-                      <a:endParaRPr lang="en-NZ" sz="1600" kern="100">
-                        <a:solidFill>
-                          <a:schemeClr val="bg1"/>
-                        </a:solidFill>
-                        <a:effectLst/>
-                        <a:latin typeface="Aptos" panose="020B0004020202020204" pitchFamily="34" charset="0"/>
-                        <a:ea typeface="Yu Mincho" panose="02020400000000000000" pitchFamily="18" charset="-128"/>
-                        <a:cs typeface="Aptos" panose="020B0004020202020204" pitchFamily="34" charset="0"/>
-                      </a:endParaRPr>
-                    </a:p>
-                  </a:txBody>
-                  <a:tcPr marL="68580" marR="68580" marT="0" marB="0"/>
-                </a:tc>
-                <a:tc>
-                  <a:txBody>
-                    <a:bodyPr/>
-                    <a:lstStyle/>
-                    <a:p>
-                      <a:pPr algn="ctr">
-                        <a:buNone/>
-                      </a:pPr>
-                      <a:r>
-                        <a:rPr lang="en-NZ" sz="1600" kern="100">
-                          <a:solidFill>
-                            <a:schemeClr val="bg1"/>
-                          </a:solidFill>
-                          <a:effectLst/>
-                          <a:latin typeface="Aptos" panose="020B0004020202020204" pitchFamily="34" charset="0"/>
-                        </a:rPr>
-                        <a:t>Internal</a:t>
-                      </a:r>
-                      <a:endParaRPr lang="en-NZ" sz="1600" kern="100">
-                        <a:solidFill>
-                          <a:schemeClr val="bg1"/>
-                        </a:solidFill>
-                        <a:effectLst/>
-                        <a:latin typeface="Aptos" panose="020B0004020202020204" pitchFamily="34" charset="0"/>
-                        <a:ea typeface="Yu Mincho" panose="02020400000000000000" pitchFamily="18" charset="-128"/>
-                        <a:cs typeface="Aptos" panose="020B0004020202020204" pitchFamily="34" charset="0"/>
-                      </a:endParaRPr>
-                    </a:p>
-                  </a:txBody>
-                  <a:tcPr marL="68580" marR="68580" marT="0" marB="0"/>
-                </a:tc>
-                <a:tc>
-                  <a:txBody>
-                    <a:bodyPr/>
-                    <a:lstStyle/>
-                    <a:p>
-                      <a:pPr>
-                        <a:buNone/>
-                      </a:pPr>
-                      <a:r>
-                        <a:rPr lang="en-NZ" sz="1600" kern="100">
-                          <a:solidFill>
-                            <a:schemeClr val="bg1"/>
-                          </a:solidFill>
-                          <a:effectLst/>
-                          <a:latin typeface="Aptos" panose="020B0004020202020204" pitchFamily="34" charset="0"/>
-                        </a:rPr>
-                        <a:t>Completion of Kali Evaluation</a:t>
-                      </a:r>
-                      <a:endParaRPr lang="en-NZ" sz="1600" kern="100">
-                        <a:solidFill>
-                          <a:schemeClr val="bg1"/>
-                        </a:solidFill>
-                        <a:effectLst/>
-                        <a:latin typeface="Aptos" panose="020B0004020202020204" pitchFamily="34" charset="0"/>
-                        <a:ea typeface="Yu Mincho" panose="02020400000000000000" pitchFamily="18" charset="-128"/>
-                        <a:cs typeface="Aptos" panose="020B0004020202020204" pitchFamily="34" charset="0"/>
-                      </a:endParaRPr>
-                    </a:p>
-                  </a:txBody>
-                  <a:tcPr marL="68580" marR="68580" marT="0" marB="0"/>
-                </a:tc>
-                <a:extLst>
-                  <a:ext uri="{0D108BD9-81ED-4DB2-BD59-A6C34878D82A}">
-                    <a16:rowId xmlns:a16="http://schemas.microsoft.com/office/drawing/2014/main" val="536517699"/>
-                  </a:ext>
-                </a:extLst>
-              </a:tr>
-              <a:tr h="334497">
-                <a:tc>
-                  <a:txBody>
-                    <a:bodyPr/>
-                    <a:lstStyle/>
-                    <a:p>
-                      <a:pPr algn="ctr">
-                        <a:buNone/>
-                      </a:pPr>
-                      <a:r>
-                        <a:rPr lang="en-NZ" sz="1600" kern="100">
-                          <a:solidFill>
-                            <a:schemeClr val="bg1"/>
-                          </a:solidFill>
-                          <a:effectLst/>
-                          <a:latin typeface="Aptos" panose="020B0004020202020204" pitchFamily="34" charset="0"/>
-                        </a:rPr>
-                        <a:t>31/10/2025</a:t>
-                      </a:r>
-                      <a:endParaRPr lang="en-NZ" sz="1600" kern="100">
-                        <a:solidFill>
-                          <a:schemeClr val="bg1"/>
-                        </a:solidFill>
-                        <a:effectLst/>
-                        <a:latin typeface="Aptos" panose="020B0004020202020204" pitchFamily="34" charset="0"/>
-                        <a:ea typeface="Yu Mincho" panose="02020400000000000000" pitchFamily="18" charset="-128"/>
-                        <a:cs typeface="Aptos" panose="020B0004020202020204" pitchFamily="34" charset="0"/>
-                      </a:endParaRPr>
-                    </a:p>
-                  </a:txBody>
-                  <a:tcPr marL="68580" marR="68580" marT="0" marB="0"/>
-                </a:tc>
-                <a:tc>
-                  <a:txBody>
-                    <a:bodyPr/>
-                    <a:lstStyle/>
-                    <a:p>
-                      <a:pPr algn="ctr">
-                        <a:buNone/>
-                      </a:pPr>
-                      <a:r>
-                        <a:rPr lang="en-NZ" sz="1600" b="1" kern="100">
-                          <a:solidFill>
-                            <a:schemeClr val="bg1"/>
-                          </a:solidFill>
-                          <a:effectLst/>
-                          <a:latin typeface="Aptos" panose="020B0004020202020204" pitchFamily="34" charset="0"/>
-                        </a:rPr>
-                        <a:t>External</a:t>
-                      </a:r>
-                      <a:endParaRPr lang="en-NZ" sz="1600" b="1" kern="100">
-                        <a:solidFill>
-                          <a:schemeClr val="bg1"/>
-                        </a:solidFill>
-                        <a:effectLst/>
-                        <a:latin typeface="Aptos" panose="020B0004020202020204" pitchFamily="34" charset="0"/>
-                        <a:ea typeface="Yu Mincho" panose="02020400000000000000" pitchFamily="18" charset="-128"/>
-                        <a:cs typeface="Aptos" panose="020B0004020202020204" pitchFamily="34" charset="0"/>
-                      </a:endParaRPr>
-                    </a:p>
-                  </a:txBody>
-                  <a:tcPr marL="68580" marR="68580" marT="0" marB="0"/>
-                </a:tc>
-                <a:tc>
-                  <a:txBody>
-                    <a:bodyPr/>
-                    <a:lstStyle/>
-                    <a:p>
-                      <a:pPr>
-                        <a:buNone/>
-                      </a:pPr>
-                      <a:r>
-                        <a:rPr lang="en-NZ" sz="1600" b="1" kern="100">
-                          <a:solidFill>
-                            <a:schemeClr val="bg1"/>
-                          </a:solidFill>
-                          <a:effectLst/>
-                          <a:latin typeface="Aptos" panose="020B0004020202020204" pitchFamily="34" charset="0"/>
-                        </a:rPr>
-                        <a:t>Final Poster</a:t>
-                      </a:r>
-                      <a:endParaRPr lang="en-NZ" sz="1600" b="1" kern="100">
-                        <a:solidFill>
-                          <a:schemeClr val="bg1"/>
-                        </a:solidFill>
-                        <a:effectLst/>
-                        <a:latin typeface="Aptos" panose="020B0004020202020204" pitchFamily="34" charset="0"/>
-                        <a:ea typeface="Yu Mincho" panose="02020400000000000000" pitchFamily="18" charset="-128"/>
-                        <a:cs typeface="Aptos" panose="020B0004020202020204" pitchFamily="34" charset="0"/>
-                      </a:endParaRPr>
-                    </a:p>
-                  </a:txBody>
-                  <a:tcPr marL="68580" marR="68580" marT="0" marB="0"/>
-                </a:tc>
-                <a:extLst>
-                  <a:ext uri="{0D108BD9-81ED-4DB2-BD59-A6C34878D82A}">
-                    <a16:rowId xmlns:a16="http://schemas.microsoft.com/office/drawing/2014/main" val="1354317777"/>
-                  </a:ext>
-                </a:extLst>
-              </a:tr>
-              <a:tr h="334497">
-                <a:tc>
-                  <a:txBody>
-                    <a:bodyPr/>
-                    <a:lstStyle/>
-                    <a:p>
-                      <a:pPr algn="ctr">
-                        <a:buNone/>
-                      </a:pPr>
-                      <a:r>
-                        <a:rPr lang="en-NZ" sz="1600" kern="100">
-                          <a:solidFill>
-                            <a:schemeClr val="bg1"/>
-                          </a:solidFill>
-                          <a:effectLst/>
-                          <a:latin typeface="Aptos" panose="020B0004020202020204" pitchFamily="34" charset="0"/>
-                        </a:rPr>
-                        <a:t>31/10/2025</a:t>
-                      </a:r>
-                      <a:endParaRPr lang="en-NZ" sz="1600" kern="100">
-                        <a:solidFill>
-                          <a:schemeClr val="bg1"/>
-                        </a:solidFill>
-                        <a:effectLst/>
-                        <a:latin typeface="Aptos" panose="020B0004020202020204" pitchFamily="34" charset="0"/>
-                        <a:ea typeface="Yu Mincho" panose="02020400000000000000" pitchFamily="18" charset="-128"/>
-                        <a:cs typeface="Aptos" panose="020B0004020202020204" pitchFamily="34" charset="0"/>
-                      </a:endParaRPr>
-                    </a:p>
-                  </a:txBody>
-                  <a:tcPr marL="68580" marR="68580" marT="0" marB="0"/>
-                </a:tc>
-                <a:tc>
-                  <a:txBody>
-                    <a:bodyPr/>
-                    <a:lstStyle/>
-                    <a:p>
-                      <a:pPr algn="ctr">
-                        <a:buNone/>
-                      </a:pPr>
-                      <a:r>
-                        <a:rPr lang="en-NZ" sz="1600" kern="100">
-                          <a:solidFill>
-                            <a:schemeClr val="bg1"/>
-                          </a:solidFill>
-                          <a:effectLst/>
-                          <a:latin typeface="Aptos" panose="020B0004020202020204" pitchFamily="34" charset="0"/>
-                        </a:rPr>
-                        <a:t>Internal</a:t>
-                      </a:r>
-                      <a:endParaRPr lang="en-NZ" sz="1600" kern="100">
-                        <a:solidFill>
-                          <a:schemeClr val="bg1"/>
-                        </a:solidFill>
-                        <a:effectLst/>
-                        <a:latin typeface="Aptos" panose="020B0004020202020204" pitchFamily="34" charset="0"/>
-                        <a:ea typeface="Yu Mincho" panose="02020400000000000000" pitchFamily="18" charset="-128"/>
-                        <a:cs typeface="Aptos" panose="020B0004020202020204" pitchFamily="34" charset="0"/>
-                      </a:endParaRPr>
-                    </a:p>
-                  </a:txBody>
-                  <a:tcPr marL="68580" marR="68580" marT="0" marB="0"/>
-                </a:tc>
-                <a:tc>
-                  <a:txBody>
-                    <a:bodyPr/>
-                    <a:lstStyle/>
-                    <a:p>
-                      <a:pPr>
-                        <a:buNone/>
-                      </a:pPr>
-                      <a:r>
-                        <a:rPr lang="en-NZ" sz="1600" kern="100">
-                          <a:solidFill>
-                            <a:schemeClr val="bg1"/>
-                          </a:solidFill>
-                          <a:effectLst/>
-                          <a:latin typeface="Aptos" panose="020B0004020202020204" pitchFamily="34" charset="0"/>
-                        </a:rPr>
-                        <a:t>Portfolio</a:t>
-                      </a:r>
-                      <a:endParaRPr lang="en-NZ" sz="1600" kern="100">
-                        <a:solidFill>
-                          <a:schemeClr val="bg1"/>
-                        </a:solidFill>
-                        <a:effectLst/>
-                        <a:latin typeface="Aptos" panose="020B0004020202020204" pitchFamily="34" charset="0"/>
-                        <a:ea typeface="Yu Mincho" panose="02020400000000000000" pitchFamily="18" charset="-128"/>
-                        <a:cs typeface="Aptos" panose="020B0004020202020204" pitchFamily="34" charset="0"/>
-                      </a:endParaRPr>
-                    </a:p>
-                  </a:txBody>
-                  <a:tcPr marL="68580" marR="68580" marT="0" marB="0"/>
-                </a:tc>
-                <a:extLst>
-                  <a:ext uri="{0D108BD9-81ED-4DB2-BD59-A6C34878D82A}">
-                    <a16:rowId xmlns:a16="http://schemas.microsoft.com/office/drawing/2014/main" val="3712913038"/>
-                  </a:ext>
-                </a:extLst>
-              </a:tr>
-            </a:tbl>
-          </a:graphicData>
-        </a:graphic>
-      </p:graphicFrame>
-      <p:sp>
-        <p:nvSpPr>
-          <p:cNvPr id="18" name="TextBox 17">
-            <a:extLst>
-              <a:ext uri="{FF2B5EF4-FFF2-40B4-BE49-F238E27FC236}">
-                <a16:creationId xmlns:a16="http://schemas.microsoft.com/office/drawing/2014/main" id="{782E7F51-2844-24A3-A663-0B246758671C}"/>
-              </a:ext>
-            </a:extLst>
-          </p:cNvPr>
-          <p:cNvSpPr txBox="1"/>
-          <p:nvPr/>
-        </p:nvSpPr>
-        <p:spPr>
-          <a:xfrm>
-            <a:off x="10032539" y="5297339"/>
-            <a:ext cx="1355199" cy="584775"/>
-          </a:xfrm>
-          <a:prstGeom prst="rect">
-            <a:avLst/>
-          </a:prstGeom>
-          <a:noFill/>
-        </p:spPr>
-        <p:txBody>
-          <a:bodyPr wrap="square" rtlCol="0">
-            <a:spAutoFit/>
-          </a:bodyPr>
-          <a:lstStyle/>
-          <a:p>
-            <a:pPr algn="ctr"/>
-            <a:r>
-              <a:rPr lang="en-US" sz="1600"/>
-              <a:t>Milestone 3</a:t>
-            </a:r>
-            <a:br>
-              <a:rPr lang="en-US" sz="1600"/>
-            </a:br>
-            <a:r>
-              <a:rPr lang="en-US" sz="1600"/>
-              <a:t>31 Oct 2025</a:t>
-            </a:r>
-            <a:endParaRPr lang="en-NZ" sz="1600"/>
-          </a:p>
-        </p:txBody>
-      </p:sp>
-    </p:spTree>
-    <p:extLst>
-      <p:ext uri="{BB962C8B-B14F-4D97-AF65-F5344CB8AC3E}">
-        <p14:creationId xmlns:p14="http://schemas.microsoft.com/office/powerpoint/2010/main" val="2117413443"/>
-      </p:ext>
-    </p:extLst>
-  </p:cSld>
-  <p:clrMapOvr>
-    <a:masterClrMapping/>
-  </p:clrMapOvr>
-</p:sld>
-</file>
-
-<file path=ppt/slides/slide8.xml><?xml version="1.0" encoding="utf-8"?>
 <p:sld xmlns:a="http://schemas.openxmlformats.org/drawingml/2006/main" xmlns:r="http://schemas.openxmlformats.org/officeDocument/2006/relationships" xmlns:p="http://schemas.openxmlformats.org/presentationml/2006/main">
   <p:cSld>
     <p:spTree>
@@ -23602,725 +17296,114 @@
           </a:p>
         </p:txBody>
       </p:sp>
-      <p:pic>
-        <p:nvPicPr>
-          <p:cNvPr id="4" name="Picture 3" descr="A screenshot of a computer screen&#10;&#10;AI-generated content may be incorrect.">
+      <p:sp>
+        <p:nvSpPr>
+          <p:cNvPr id="3" name="Content Placeholder 2">
             <a:extLst>
               <a:ext uri="{FF2B5EF4-FFF2-40B4-BE49-F238E27FC236}">
-                <a16:creationId xmlns:a16="http://schemas.microsoft.com/office/drawing/2014/main" id="{BCB557D1-3562-9A69-E63A-78AC13BE6439}"/>
+                <a16:creationId xmlns:a16="http://schemas.microsoft.com/office/drawing/2014/main" id="{BDDC5EBB-1EC3-86AE-0986-5F2B823A2381}"/>
               </a:ext>
             </a:extLst>
           </p:cNvPr>
-          <p:cNvPicPr>
-            <a:picLocks noChangeAspect="1"/>
-          </p:cNvPicPr>
-          <p:nvPr/>
-        </p:nvPicPr>
-        <p:blipFill>
-          <a:blip r:embed="rId2"/>
-          <a:stretch>
-            <a:fillRect/>
-          </a:stretch>
-        </p:blipFill>
+          <p:cNvSpPr>
+            <a:spLocks noGrp="1"/>
+          </p:cNvSpPr>
+          <p:nvPr>
+            <p:ph idx="1"/>
+          </p:nvPr>
+        </p:nvSpPr>
         <p:spPr>
           <a:xfrm>
-            <a:off x="5822401" y="2097088"/>
-            <a:ext cx="6132208" cy="3325304"/>
+            <a:off x="1141412" y="2249487"/>
+            <a:ext cx="9905999" cy="4155863"/>
           </a:xfrm>
-          <a:prstGeom prst="rect">
-            <a:avLst/>
-          </a:prstGeom>
         </p:spPr>
-      </p:pic>
-      <p:graphicFrame>
-        <p:nvGraphicFramePr>
-          <p:cNvPr id="7" name="Table 6">
-            <a:extLst>
-              <a:ext uri="{FF2B5EF4-FFF2-40B4-BE49-F238E27FC236}">
-                <a16:creationId xmlns:a16="http://schemas.microsoft.com/office/drawing/2014/main" id="{56B97867-9F0B-A4AC-E86A-EFC9CAE828EB}"/>
-              </a:ext>
-            </a:extLst>
-          </p:cNvPr>
-          <p:cNvGraphicFramePr>
-            <a:graphicFrameLocks noGrp="1"/>
-          </p:cNvGraphicFramePr>
-          <p:nvPr>
-            <p:extLst>
-              <p:ext uri="{D42A27DB-BD31-4B8C-83A1-F6EECF244321}">
-                <p14:modId xmlns:p14="http://schemas.microsoft.com/office/powerpoint/2010/main" val="2645216700"/>
-              </p:ext>
-            </p:extLst>
-          </p:nvPr>
-        </p:nvGraphicFramePr>
-        <p:xfrm>
-          <a:off x="594360" y="2252536"/>
-          <a:ext cx="4846319" cy="2731882"/>
-        </p:xfrm>
-        <a:graphic>
-          <a:graphicData uri="http://schemas.openxmlformats.org/drawingml/2006/table">
-            <a:tbl>
-              <a:tblPr firstRow="1" firstCol="1" bandRow="1">
-                <a:tableStyleId>{073A0DAA-6AF3-43AB-8588-CEC1D06C72B9}</a:tableStyleId>
-              </a:tblPr>
-              <a:tblGrid>
-                <a:gridCol w="1307746">
-                  <a:extLst>
-                    <a:ext uri="{9D8B030D-6E8A-4147-A177-3AD203B41FA5}">
-                      <a16:colId xmlns:a16="http://schemas.microsoft.com/office/drawing/2014/main" val="2652250873"/>
-                    </a:ext>
-                  </a:extLst>
-                </a:gridCol>
-                <a:gridCol w="2046544">
-                  <a:extLst>
-                    <a:ext uri="{9D8B030D-6E8A-4147-A177-3AD203B41FA5}">
-                      <a16:colId xmlns:a16="http://schemas.microsoft.com/office/drawing/2014/main" val="202009071"/>
-                    </a:ext>
-                  </a:extLst>
-                </a:gridCol>
-                <a:gridCol w="1492029">
-                  <a:extLst>
-                    <a:ext uri="{9D8B030D-6E8A-4147-A177-3AD203B41FA5}">
-                      <a16:colId xmlns:a16="http://schemas.microsoft.com/office/drawing/2014/main" val="2772649093"/>
-                    </a:ext>
-                  </a:extLst>
-                </a:gridCol>
-              </a:tblGrid>
-              <a:tr h="340441">
-                <a:tc>
-                  <a:txBody>
-                    <a:bodyPr/>
-                    <a:lstStyle/>
-                    <a:p>
-                      <a:pPr algn="ctr">
-                        <a:buNone/>
-                      </a:pPr>
-                      <a:r>
-                        <a:rPr lang="en-NZ" sz="1200" kern="100">
-                          <a:effectLst/>
-                        </a:rPr>
-                        <a:t>Member Name</a:t>
-                      </a:r>
-                      <a:endParaRPr lang="en-NZ" sz="1100" kern="100">
-                        <a:effectLst/>
-                        <a:latin typeface="Aptos" panose="020B0004020202020204" pitchFamily="34" charset="0"/>
-                        <a:ea typeface="Yu Mincho" panose="02020400000000000000" pitchFamily="18" charset="-128"/>
-                        <a:cs typeface="Aptos" panose="020B0004020202020204" pitchFamily="34" charset="0"/>
-                      </a:endParaRPr>
-                    </a:p>
-                  </a:txBody>
-                  <a:tcPr marL="68580" marR="68580" marT="0" marB="0"/>
-                </a:tc>
-                <a:tc>
-                  <a:txBody>
-                    <a:bodyPr/>
-                    <a:lstStyle/>
-                    <a:p>
-                      <a:pPr algn="ctr">
-                        <a:buNone/>
-                      </a:pPr>
-                      <a:r>
-                        <a:rPr lang="en-NZ" sz="1200" kern="100">
-                          <a:effectLst/>
-                        </a:rPr>
-                        <a:t>Team Role</a:t>
-                      </a:r>
-                      <a:endParaRPr lang="en-NZ" sz="1100" kern="100">
-                        <a:effectLst/>
-                        <a:latin typeface="Aptos" panose="020B0004020202020204" pitchFamily="34" charset="0"/>
-                        <a:ea typeface="Yu Mincho" panose="02020400000000000000" pitchFamily="18" charset="-128"/>
-                        <a:cs typeface="Aptos" panose="020B0004020202020204" pitchFamily="34" charset="0"/>
-                      </a:endParaRPr>
-                    </a:p>
-                  </a:txBody>
-                  <a:tcPr marL="68580" marR="68580" marT="0" marB="0"/>
-                </a:tc>
-                <a:tc>
-                  <a:txBody>
-                    <a:bodyPr/>
-                    <a:lstStyle/>
-                    <a:p>
-                      <a:pPr algn="ctr">
-                        <a:buNone/>
-                      </a:pPr>
-                      <a:r>
-                        <a:rPr lang="en-NZ" sz="1200" kern="100">
-                          <a:effectLst/>
-                        </a:rPr>
-                        <a:t>Assigned IP Version</a:t>
-                      </a:r>
-                      <a:endParaRPr lang="en-NZ" sz="1100" kern="100">
-                        <a:effectLst/>
-                        <a:latin typeface="Aptos" panose="020B0004020202020204" pitchFamily="34" charset="0"/>
-                        <a:ea typeface="Yu Mincho" panose="02020400000000000000" pitchFamily="18" charset="-128"/>
-                        <a:cs typeface="Aptos" panose="020B0004020202020204" pitchFamily="34" charset="0"/>
-                      </a:endParaRPr>
-                    </a:p>
-                  </a:txBody>
-                  <a:tcPr marL="68580" marR="68580" marT="0" marB="0"/>
-                </a:tc>
-                <a:extLst>
-                  <a:ext uri="{0D108BD9-81ED-4DB2-BD59-A6C34878D82A}">
-                    <a16:rowId xmlns:a16="http://schemas.microsoft.com/office/drawing/2014/main" val="2295137987"/>
-                  </a:ext>
-                </a:extLst>
-              </a:tr>
-              <a:tr h="350884">
-                <a:tc>
-                  <a:txBody>
-                    <a:bodyPr/>
-                    <a:lstStyle/>
-                    <a:p>
-                      <a:pPr algn="ctr">
-                        <a:buNone/>
-                      </a:pPr>
-                      <a:r>
-                        <a:rPr lang="en-NZ" sz="1000" kern="100">
-                          <a:effectLst/>
-                        </a:rPr>
-                        <a:t>Thomas Robinson</a:t>
-                      </a:r>
-                      <a:endParaRPr lang="en-NZ" sz="1100" kern="100">
-                        <a:effectLst/>
-                        <a:latin typeface="Aptos" panose="020B0004020202020204" pitchFamily="34" charset="0"/>
-                        <a:ea typeface="Yu Mincho" panose="02020400000000000000" pitchFamily="18" charset="-128"/>
-                        <a:cs typeface="Aptos" panose="020B0004020202020204" pitchFamily="34" charset="0"/>
-                      </a:endParaRPr>
-                    </a:p>
-                  </a:txBody>
-                  <a:tcPr marL="68580" marR="68580" marT="0" marB="0"/>
-                </a:tc>
-                <a:tc>
-                  <a:txBody>
-                    <a:bodyPr/>
-                    <a:lstStyle/>
-                    <a:p>
-                      <a:pPr algn="ctr">
-                        <a:buNone/>
-                      </a:pPr>
-                      <a:r>
-                        <a:rPr lang="en-NZ" sz="1000" kern="100">
-                          <a:effectLst/>
-                        </a:rPr>
-                        <a:t>Project Manager</a:t>
-                      </a:r>
-                      <a:endParaRPr lang="en-NZ" sz="1100" kern="100">
-                        <a:effectLst/>
-                        <a:latin typeface="Aptos" panose="020B0004020202020204" pitchFamily="34" charset="0"/>
-                        <a:ea typeface="Yu Mincho" panose="02020400000000000000" pitchFamily="18" charset="-128"/>
-                        <a:cs typeface="Aptos" panose="020B0004020202020204" pitchFamily="34" charset="0"/>
-                      </a:endParaRPr>
-                    </a:p>
-                  </a:txBody>
-                  <a:tcPr marL="68580" marR="68580" marT="0" marB="0"/>
-                </a:tc>
-                <a:tc>
-                  <a:txBody>
-                    <a:bodyPr/>
-                    <a:lstStyle/>
-                    <a:p>
-                      <a:pPr algn="ctr">
-                        <a:buNone/>
-                      </a:pPr>
-                      <a:r>
-                        <a:rPr lang="en-NZ" sz="1000" kern="100">
-                          <a:effectLst/>
-                        </a:rPr>
-                        <a:t>IPv4</a:t>
-                      </a:r>
-                      <a:endParaRPr lang="en-NZ" sz="1100" kern="100">
-                        <a:effectLst/>
-                        <a:latin typeface="Aptos" panose="020B0004020202020204" pitchFamily="34" charset="0"/>
-                        <a:ea typeface="Yu Mincho" panose="02020400000000000000" pitchFamily="18" charset="-128"/>
-                        <a:cs typeface="Aptos" panose="020B0004020202020204" pitchFamily="34" charset="0"/>
-                      </a:endParaRPr>
-                    </a:p>
-                  </a:txBody>
-                  <a:tcPr marL="68580" marR="68580" marT="0" marB="0"/>
-                </a:tc>
-                <a:extLst>
-                  <a:ext uri="{0D108BD9-81ED-4DB2-BD59-A6C34878D82A}">
-                    <a16:rowId xmlns:a16="http://schemas.microsoft.com/office/drawing/2014/main" val="166095596"/>
-                  </a:ext>
-                </a:extLst>
-              </a:tr>
-              <a:tr h="350884">
-                <a:tc>
-                  <a:txBody>
-                    <a:bodyPr/>
-                    <a:lstStyle/>
-                    <a:p>
-                      <a:pPr algn="ctr">
-                        <a:buNone/>
-                      </a:pPr>
-                      <a:r>
-                        <a:rPr lang="en-NZ" sz="1000" kern="100">
-                          <a:effectLst/>
-                        </a:rPr>
-                        <a:t>Win Phyo</a:t>
-                      </a:r>
-                      <a:endParaRPr lang="en-NZ" sz="1100" kern="100">
-                        <a:effectLst/>
-                        <a:latin typeface="Aptos" panose="020B0004020202020204" pitchFamily="34" charset="0"/>
-                        <a:ea typeface="Yu Mincho" panose="02020400000000000000" pitchFamily="18" charset="-128"/>
-                        <a:cs typeface="Aptos" panose="020B0004020202020204" pitchFamily="34" charset="0"/>
-                      </a:endParaRPr>
-                    </a:p>
-                  </a:txBody>
-                  <a:tcPr marL="68580" marR="68580" marT="0" marB="0"/>
-                </a:tc>
-                <a:tc>
-                  <a:txBody>
-                    <a:bodyPr/>
-                    <a:lstStyle/>
-                    <a:p>
-                      <a:pPr algn="ctr">
-                        <a:buNone/>
-                      </a:pPr>
-                      <a:r>
-                        <a:rPr lang="en-NZ" sz="1000" kern="100">
-                          <a:effectLst/>
-                        </a:rPr>
-                        <a:t>System Architect</a:t>
-                      </a:r>
-                      <a:endParaRPr lang="en-NZ" sz="1100" kern="100">
-                        <a:effectLst/>
-                        <a:latin typeface="Aptos" panose="020B0004020202020204" pitchFamily="34" charset="0"/>
-                        <a:ea typeface="Yu Mincho" panose="02020400000000000000" pitchFamily="18" charset="-128"/>
-                        <a:cs typeface="Aptos" panose="020B0004020202020204" pitchFamily="34" charset="0"/>
-                      </a:endParaRPr>
-                    </a:p>
-                  </a:txBody>
-                  <a:tcPr marL="68580" marR="68580" marT="0" marB="0"/>
-                </a:tc>
-                <a:tc>
-                  <a:txBody>
-                    <a:bodyPr/>
-                    <a:lstStyle/>
-                    <a:p>
-                      <a:pPr algn="ctr">
-                        <a:buNone/>
-                      </a:pPr>
-                      <a:r>
-                        <a:rPr lang="en-NZ" sz="1000" kern="100">
-                          <a:effectLst/>
-                        </a:rPr>
-                        <a:t>IPv4</a:t>
-                      </a:r>
-                      <a:endParaRPr lang="en-NZ" sz="1100" kern="100">
-                        <a:effectLst/>
-                        <a:latin typeface="Aptos" panose="020B0004020202020204" pitchFamily="34" charset="0"/>
-                        <a:ea typeface="Yu Mincho" panose="02020400000000000000" pitchFamily="18" charset="-128"/>
-                        <a:cs typeface="Aptos" panose="020B0004020202020204" pitchFamily="34" charset="0"/>
-                      </a:endParaRPr>
-                    </a:p>
-                  </a:txBody>
-                  <a:tcPr marL="68580" marR="68580" marT="0" marB="0"/>
-                </a:tc>
-                <a:extLst>
-                  <a:ext uri="{0D108BD9-81ED-4DB2-BD59-A6C34878D82A}">
-                    <a16:rowId xmlns:a16="http://schemas.microsoft.com/office/drawing/2014/main" val="1361649382"/>
-                  </a:ext>
-                </a:extLst>
-              </a:tr>
-              <a:tr h="350884">
-                <a:tc>
-                  <a:txBody>
-                    <a:bodyPr/>
-                    <a:lstStyle/>
-                    <a:p>
-                      <a:pPr algn="ctr">
-                        <a:buNone/>
-                      </a:pPr>
-                      <a:r>
-                        <a:rPr lang="en-NZ" sz="1000" kern="100">
-                          <a:effectLst/>
-                        </a:rPr>
-                        <a:t>Zafar Afrad</a:t>
-                      </a:r>
-                      <a:endParaRPr lang="en-NZ" sz="1100" kern="100">
-                        <a:effectLst/>
-                        <a:latin typeface="Aptos" panose="020B0004020202020204" pitchFamily="34" charset="0"/>
-                        <a:ea typeface="Yu Mincho" panose="02020400000000000000" pitchFamily="18" charset="-128"/>
-                        <a:cs typeface="Aptos" panose="020B0004020202020204" pitchFamily="34" charset="0"/>
-                      </a:endParaRPr>
-                    </a:p>
-                  </a:txBody>
-                  <a:tcPr marL="68580" marR="68580" marT="0" marB="0"/>
-                </a:tc>
-                <a:tc>
-                  <a:txBody>
-                    <a:bodyPr/>
-                    <a:lstStyle/>
-                    <a:p>
-                      <a:pPr algn="ctr">
-                        <a:buNone/>
-                      </a:pPr>
-                      <a:r>
-                        <a:rPr lang="en-NZ" sz="1000" kern="100">
-                          <a:effectLst/>
-                        </a:rPr>
-                        <a:t>Network Engineer</a:t>
-                      </a:r>
-                      <a:endParaRPr lang="en-NZ" sz="1100" kern="100">
-                        <a:effectLst/>
-                        <a:latin typeface="Aptos" panose="020B0004020202020204" pitchFamily="34" charset="0"/>
-                        <a:ea typeface="Yu Mincho" panose="02020400000000000000" pitchFamily="18" charset="-128"/>
-                        <a:cs typeface="Aptos" panose="020B0004020202020204" pitchFamily="34" charset="0"/>
-                      </a:endParaRPr>
-                    </a:p>
-                  </a:txBody>
-                  <a:tcPr marL="68580" marR="68580" marT="0" marB="0"/>
-                </a:tc>
-                <a:tc>
-                  <a:txBody>
-                    <a:bodyPr/>
-                    <a:lstStyle/>
-                    <a:p>
-                      <a:pPr algn="ctr">
-                        <a:buNone/>
-                      </a:pPr>
-                      <a:r>
-                        <a:rPr lang="en-NZ" sz="1000" kern="100">
-                          <a:effectLst/>
-                        </a:rPr>
-                        <a:t>IPv4</a:t>
-                      </a:r>
-                      <a:endParaRPr lang="en-NZ" sz="1100" kern="100">
-                        <a:effectLst/>
-                        <a:latin typeface="Aptos" panose="020B0004020202020204" pitchFamily="34" charset="0"/>
-                        <a:ea typeface="Yu Mincho" panose="02020400000000000000" pitchFamily="18" charset="-128"/>
-                        <a:cs typeface="Aptos" panose="020B0004020202020204" pitchFamily="34" charset="0"/>
-                      </a:endParaRPr>
-                    </a:p>
-                  </a:txBody>
-                  <a:tcPr marL="68580" marR="68580" marT="0" marB="0"/>
-                </a:tc>
-                <a:extLst>
-                  <a:ext uri="{0D108BD9-81ED-4DB2-BD59-A6C34878D82A}">
-                    <a16:rowId xmlns:a16="http://schemas.microsoft.com/office/drawing/2014/main" val="686377592"/>
-                  </a:ext>
-                </a:extLst>
-              </a:tr>
-              <a:tr h="350884">
-                <a:tc>
-                  <a:txBody>
-                    <a:bodyPr/>
-                    <a:lstStyle/>
-                    <a:p>
-                      <a:pPr algn="ctr">
-                        <a:buNone/>
-                      </a:pPr>
-                      <a:r>
-                        <a:rPr lang="en-NZ" sz="1000" kern="100">
-                          <a:effectLst/>
-                        </a:rPr>
-                        <a:t>Kylie Afable</a:t>
-                      </a:r>
-                      <a:endParaRPr lang="en-NZ" sz="1100" kern="100">
-                        <a:effectLst/>
-                        <a:latin typeface="Aptos" panose="020B0004020202020204" pitchFamily="34" charset="0"/>
-                        <a:ea typeface="Yu Mincho" panose="02020400000000000000" pitchFamily="18" charset="-128"/>
-                        <a:cs typeface="Aptos" panose="020B0004020202020204" pitchFamily="34" charset="0"/>
-                      </a:endParaRPr>
-                    </a:p>
-                  </a:txBody>
-                  <a:tcPr marL="68580" marR="68580" marT="0" marB="0"/>
-                </a:tc>
-                <a:tc>
-                  <a:txBody>
-                    <a:bodyPr/>
-                    <a:lstStyle/>
-                    <a:p>
-                      <a:pPr algn="ctr">
-                        <a:buNone/>
-                      </a:pPr>
-                      <a:r>
-                        <a:rPr lang="en-NZ" sz="1000" kern="100">
-                          <a:effectLst/>
-                        </a:rPr>
-                        <a:t>Network Engineer</a:t>
-                      </a:r>
-                      <a:endParaRPr lang="en-NZ" sz="1100" kern="100">
-                        <a:effectLst/>
-                        <a:latin typeface="Aptos" panose="020B0004020202020204" pitchFamily="34" charset="0"/>
-                        <a:ea typeface="Yu Mincho" panose="02020400000000000000" pitchFamily="18" charset="-128"/>
-                        <a:cs typeface="Aptos" panose="020B0004020202020204" pitchFamily="34" charset="0"/>
-                      </a:endParaRPr>
-                    </a:p>
-                  </a:txBody>
-                  <a:tcPr marL="68580" marR="68580" marT="0" marB="0"/>
-                </a:tc>
-                <a:tc>
-                  <a:txBody>
-                    <a:bodyPr/>
-                    <a:lstStyle/>
-                    <a:p>
-                      <a:pPr algn="ctr">
-                        <a:buNone/>
-                      </a:pPr>
-                      <a:r>
-                        <a:rPr lang="en-NZ" sz="1000" kern="100">
-                          <a:effectLst/>
-                        </a:rPr>
-                        <a:t>IPv6</a:t>
-                      </a:r>
-                      <a:endParaRPr lang="en-NZ" sz="1100" kern="100">
-                        <a:effectLst/>
-                        <a:latin typeface="Aptos" panose="020B0004020202020204" pitchFamily="34" charset="0"/>
-                        <a:ea typeface="Yu Mincho" panose="02020400000000000000" pitchFamily="18" charset="-128"/>
-                        <a:cs typeface="Aptos" panose="020B0004020202020204" pitchFamily="34" charset="0"/>
-                      </a:endParaRPr>
-                    </a:p>
-                  </a:txBody>
-                  <a:tcPr marL="68580" marR="68580" marT="0" marB="0"/>
-                </a:tc>
-                <a:extLst>
-                  <a:ext uri="{0D108BD9-81ED-4DB2-BD59-A6C34878D82A}">
-                    <a16:rowId xmlns:a16="http://schemas.microsoft.com/office/drawing/2014/main" val="2704356311"/>
-                  </a:ext>
-                </a:extLst>
-              </a:tr>
-              <a:tr h="350884">
-                <a:tc>
-                  <a:txBody>
-                    <a:bodyPr/>
-                    <a:lstStyle/>
-                    <a:p>
-                      <a:pPr algn="ctr">
-                        <a:buNone/>
-                      </a:pPr>
-                      <a:r>
-                        <a:rPr lang="en-NZ" sz="1000" kern="100">
-                          <a:effectLst/>
-                        </a:rPr>
-                        <a:t>Larissa Goh</a:t>
-                      </a:r>
-                      <a:endParaRPr lang="en-NZ" sz="1100" kern="100">
-                        <a:effectLst/>
-                        <a:latin typeface="Aptos" panose="020B0004020202020204" pitchFamily="34" charset="0"/>
-                        <a:ea typeface="Yu Mincho" panose="02020400000000000000" pitchFamily="18" charset="-128"/>
-                        <a:cs typeface="Aptos" panose="020B0004020202020204" pitchFamily="34" charset="0"/>
-                      </a:endParaRPr>
-                    </a:p>
-                  </a:txBody>
-                  <a:tcPr marL="68580" marR="68580" marT="0" marB="0"/>
-                </a:tc>
-                <a:tc>
-                  <a:txBody>
-                    <a:bodyPr/>
-                    <a:lstStyle/>
-                    <a:p>
-                      <a:pPr algn="ctr">
-                        <a:buNone/>
-                      </a:pPr>
-                      <a:r>
-                        <a:rPr lang="en-NZ" sz="1000" kern="100">
-                          <a:effectLst/>
-                        </a:rPr>
-                        <a:t>Network Engineer</a:t>
-                      </a:r>
-                      <a:endParaRPr lang="en-NZ" sz="1100" kern="100">
-                        <a:effectLst/>
-                        <a:latin typeface="Aptos" panose="020B0004020202020204" pitchFamily="34" charset="0"/>
-                        <a:ea typeface="Yu Mincho" panose="02020400000000000000" pitchFamily="18" charset="-128"/>
-                        <a:cs typeface="Aptos" panose="020B0004020202020204" pitchFamily="34" charset="0"/>
-                      </a:endParaRPr>
-                    </a:p>
-                  </a:txBody>
-                  <a:tcPr marL="68580" marR="68580" marT="0" marB="0"/>
-                </a:tc>
-                <a:tc>
-                  <a:txBody>
-                    <a:bodyPr/>
-                    <a:lstStyle/>
-                    <a:p>
-                      <a:pPr algn="ctr">
-                        <a:buNone/>
-                      </a:pPr>
-                      <a:r>
-                        <a:rPr lang="en-NZ" sz="1000" kern="100">
-                          <a:effectLst/>
-                        </a:rPr>
-                        <a:t>IPv6</a:t>
-                      </a:r>
-                      <a:endParaRPr lang="en-NZ" sz="1100" kern="100">
-                        <a:effectLst/>
-                        <a:latin typeface="Aptos" panose="020B0004020202020204" pitchFamily="34" charset="0"/>
-                        <a:ea typeface="Yu Mincho" panose="02020400000000000000" pitchFamily="18" charset="-128"/>
-                        <a:cs typeface="Aptos" panose="020B0004020202020204" pitchFamily="34" charset="0"/>
-                      </a:endParaRPr>
-                    </a:p>
-                  </a:txBody>
-                  <a:tcPr marL="68580" marR="68580" marT="0" marB="0"/>
-                </a:tc>
-                <a:extLst>
-                  <a:ext uri="{0D108BD9-81ED-4DB2-BD59-A6C34878D82A}">
-                    <a16:rowId xmlns:a16="http://schemas.microsoft.com/office/drawing/2014/main" val="707676516"/>
-                  </a:ext>
-                </a:extLst>
-              </a:tr>
-              <a:tr h="350884">
-                <a:tc>
-                  <a:txBody>
-                    <a:bodyPr/>
-                    <a:lstStyle/>
-                    <a:p>
-                      <a:pPr algn="ctr">
-                        <a:buNone/>
-                      </a:pPr>
-                      <a:r>
-                        <a:rPr lang="en-NZ" sz="1000" kern="100">
-                          <a:effectLst/>
-                        </a:rPr>
-                        <a:t>Nathan Quai Hoi</a:t>
-                      </a:r>
-                      <a:endParaRPr lang="en-NZ" sz="1100" kern="100">
-                        <a:effectLst/>
-                        <a:latin typeface="Aptos" panose="020B0004020202020204" pitchFamily="34" charset="0"/>
-                        <a:ea typeface="Yu Mincho" panose="02020400000000000000" pitchFamily="18" charset="-128"/>
-                        <a:cs typeface="Aptos" panose="020B0004020202020204" pitchFamily="34" charset="0"/>
-                      </a:endParaRPr>
-                    </a:p>
-                  </a:txBody>
-                  <a:tcPr marL="68580" marR="68580" marT="0" marB="0"/>
-                </a:tc>
-                <a:tc>
-                  <a:txBody>
-                    <a:bodyPr/>
-                    <a:lstStyle/>
-                    <a:p>
-                      <a:pPr algn="ctr">
-                        <a:buNone/>
-                      </a:pPr>
-                      <a:r>
-                        <a:rPr lang="en-NZ" sz="1000" kern="100">
-                          <a:effectLst/>
-                        </a:rPr>
-                        <a:t>System Architect</a:t>
-                      </a:r>
-                      <a:endParaRPr lang="en-NZ" sz="1100" kern="100">
-                        <a:effectLst/>
-                        <a:latin typeface="Aptos" panose="020B0004020202020204" pitchFamily="34" charset="0"/>
-                        <a:ea typeface="Yu Mincho" panose="02020400000000000000" pitchFamily="18" charset="-128"/>
-                        <a:cs typeface="Aptos" panose="020B0004020202020204" pitchFamily="34" charset="0"/>
-                      </a:endParaRPr>
-                    </a:p>
-                  </a:txBody>
-                  <a:tcPr marL="68580" marR="68580" marT="0" marB="0"/>
-                </a:tc>
-                <a:tc>
-                  <a:txBody>
-                    <a:bodyPr/>
-                    <a:lstStyle/>
-                    <a:p>
-                      <a:pPr algn="ctr">
-                        <a:buNone/>
-                      </a:pPr>
-                      <a:r>
-                        <a:rPr lang="en-NZ" sz="1000" kern="100">
-                          <a:effectLst/>
-                        </a:rPr>
-                        <a:t>IPv6</a:t>
-                      </a:r>
-                      <a:endParaRPr lang="en-NZ" sz="1100" kern="100">
-                        <a:effectLst/>
-                        <a:latin typeface="Aptos" panose="020B0004020202020204" pitchFamily="34" charset="0"/>
-                        <a:ea typeface="Yu Mincho" panose="02020400000000000000" pitchFamily="18" charset="-128"/>
-                        <a:cs typeface="Aptos" panose="020B0004020202020204" pitchFamily="34" charset="0"/>
-                      </a:endParaRPr>
-                    </a:p>
-                  </a:txBody>
-                  <a:tcPr marL="68580" marR="68580" marT="0" marB="0"/>
-                </a:tc>
-                <a:extLst>
-                  <a:ext uri="{0D108BD9-81ED-4DB2-BD59-A6C34878D82A}">
-                    <a16:rowId xmlns:a16="http://schemas.microsoft.com/office/drawing/2014/main" val="2308697558"/>
-                  </a:ext>
-                </a:extLst>
-              </a:tr>
-              <a:tr h="286137">
-                <a:tc>
-                  <a:txBody>
-                    <a:bodyPr/>
-                    <a:lstStyle/>
-                    <a:p>
-                      <a:pPr algn="ctr">
-                        <a:buNone/>
-                      </a:pPr>
-                      <a:r>
-                        <a:rPr lang="en-NZ" sz="1000" kern="100">
-                          <a:effectLst/>
-                        </a:rPr>
-                        <a:t>Charmi Patel</a:t>
-                      </a:r>
-                      <a:endParaRPr lang="en-NZ" sz="1100" kern="100">
-                        <a:effectLst/>
-                        <a:latin typeface="Aptos" panose="020B0004020202020204" pitchFamily="34" charset="0"/>
-                        <a:ea typeface="Yu Mincho" panose="02020400000000000000" pitchFamily="18" charset="-128"/>
-                        <a:cs typeface="Aptos" panose="020B0004020202020204" pitchFamily="34" charset="0"/>
-                      </a:endParaRPr>
-                    </a:p>
-                  </a:txBody>
-                  <a:tcPr marL="68580" marR="68580" marT="0" marB="0"/>
-                </a:tc>
-                <a:tc>
-                  <a:txBody>
-                    <a:bodyPr/>
-                    <a:lstStyle/>
-                    <a:p>
-                      <a:pPr algn="ctr">
-                        <a:buNone/>
-                      </a:pPr>
-                      <a:r>
-                        <a:rPr lang="en-NZ" sz="1000" kern="100">
-                          <a:effectLst/>
-                        </a:rPr>
-                        <a:t>Network Engineer</a:t>
-                      </a:r>
-                      <a:endParaRPr lang="en-NZ" sz="1100" kern="100">
-                        <a:effectLst/>
-                        <a:latin typeface="Aptos" panose="020B0004020202020204" pitchFamily="34" charset="0"/>
-                        <a:ea typeface="Yu Mincho" panose="02020400000000000000" pitchFamily="18" charset="-128"/>
-                        <a:cs typeface="Aptos" panose="020B0004020202020204" pitchFamily="34" charset="0"/>
-                      </a:endParaRPr>
-                    </a:p>
-                  </a:txBody>
-                  <a:tcPr marL="68580" marR="68580" marT="0" marB="0"/>
-                </a:tc>
-                <a:tc>
-                  <a:txBody>
-                    <a:bodyPr/>
-                    <a:lstStyle/>
-                    <a:p>
-                      <a:pPr algn="ctr">
-                        <a:buNone/>
-                      </a:pPr>
-                      <a:r>
-                        <a:rPr lang="en-NZ" sz="1000" kern="100">
-                          <a:effectLst/>
-                        </a:rPr>
-                        <a:t>IPv6</a:t>
-                      </a:r>
-                      <a:endParaRPr lang="en-NZ" sz="1100" kern="100">
-                        <a:effectLst/>
-                        <a:latin typeface="Aptos" panose="020B0004020202020204" pitchFamily="34" charset="0"/>
-                        <a:ea typeface="Yu Mincho" panose="02020400000000000000" pitchFamily="18" charset="-128"/>
-                        <a:cs typeface="Aptos" panose="020B0004020202020204" pitchFamily="34" charset="0"/>
-                      </a:endParaRPr>
-                    </a:p>
-                  </a:txBody>
-                  <a:tcPr marL="68580" marR="68580" marT="0" marB="0"/>
-                </a:tc>
-                <a:extLst>
-                  <a:ext uri="{0D108BD9-81ED-4DB2-BD59-A6C34878D82A}">
-                    <a16:rowId xmlns:a16="http://schemas.microsoft.com/office/drawing/2014/main" val="3599966362"/>
-                  </a:ext>
-                </a:extLst>
-              </a:tr>
-            </a:tbl>
-          </a:graphicData>
-        </a:graphic>
-      </p:graphicFrame>
+        <p:txBody>
+          <a:bodyPr vert="horz" lIns="91440" tIns="45720" rIns="91440" bIns="45720" rtlCol="0" anchor="t">
+            <a:noAutofit/>
+          </a:bodyPr>
+          <a:lstStyle/>
+          <a:p>
+            <a:pPr>
+              <a:lnSpc>
+                <a:spcPct val="109999"/>
+              </a:lnSpc>
+            </a:pPr>
+            <a:r>
+              <a:rPr lang="en-AU">
+                <a:ea typeface="+mn-lt"/>
+                <a:cs typeface="+mn-lt"/>
+              </a:rPr>
+              <a:t>Team Contract: </a:t>
+            </a:r>
+            <a:br>
+              <a:rPr lang="en-AU">
+                <a:ea typeface="+mn-lt"/>
+                <a:cs typeface="+mn-lt"/>
+              </a:rPr>
+            </a:br>
+            <a:r>
+              <a:rPr lang="en-AU">
+                <a:ea typeface="+mn-lt"/>
+                <a:cs typeface="+mn-lt"/>
+              </a:rPr>
+              <a:t>Team Schedule:</a:t>
+            </a:r>
+            <a:endParaRPr lang="en-AU"/>
+          </a:p>
+          <a:p>
+            <a:pPr>
+              <a:lnSpc>
+                <a:spcPct val="109999"/>
+              </a:lnSpc>
+            </a:pPr>
+            <a:r>
+              <a:rPr lang="en-AU">
+                <a:latin typeface="Tw Cen MT"/>
+              </a:rPr>
+              <a:t>Planning Phase: </a:t>
+            </a:r>
+            <a:endParaRPr lang="en-AU"/>
+          </a:p>
+          <a:p>
+            <a:pPr>
+              <a:lnSpc>
+                <a:spcPct val="109999"/>
+              </a:lnSpc>
+            </a:pPr>
+            <a:r>
+              <a:rPr lang="en-AU">
+                <a:latin typeface="Tw Cen MT"/>
+              </a:rPr>
+              <a:t>Analysis Phase:</a:t>
+            </a:r>
+            <a:endParaRPr lang="en-AU"/>
+          </a:p>
+          <a:p>
+            <a:pPr>
+              <a:lnSpc>
+                <a:spcPct val="109999"/>
+              </a:lnSpc>
+            </a:pPr>
+            <a:r>
+              <a:rPr lang="en-AU">
+                <a:latin typeface="Tw Cen MT"/>
+              </a:rPr>
+              <a:t>Design Phase: </a:t>
+            </a:r>
+            <a:endParaRPr lang="en-AU"/>
+          </a:p>
+          <a:p>
+            <a:r>
+              <a:rPr lang="en-AU">
+                <a:latin typeface="Tw Cen MT"/>
+              </a:rPr>
+              <a:t>Execution Phase: </a:t>
+            </a:r>
+            <a:endParaRPr lang="en-AU"/>
+          </a:p>
+        </p:txBody>
+      </p:sp>
     </p:spTree>
     <p:extLst>
       <p:ext uri="{BB962C8B-B14F-4D97-AF65-F5344CB8AC3E}">
@@ -24334,7 +17417,7 @@
 </p:sld>
 </file>
 
-<file path=ppt/slides/slide9.xml><?xml version="1.0" encoding="utf-8"?>
+<file path=ppt/slides/slide8.xml><?xml version="1.0" encoding="utf-8"?>
 <p:sld xmlns:a="http://schemas.openxmlformats.org/drawingml/2006/main" xmlns:r="http://schemas.openxmlformats.org/officeDocument/2006/relationships" xmlns:p="http://schemas.openxmlformats.org/presentationml/2006/main">
   <p:cSld>
     <p:bg>
@@ -24384,7 +17467,7 @@
           <a:p>
             <a:r>
               <a:rPr lang="en-NZ"/>
-              <a:t>Risks</a:t>
+              <a:t>Risk register</a:t>
             </a:r>
             <a:endParaRPr lang="en-AU"/>
           </a:p>
@@ -24406,336 +17489,61 @@
             <p:ph idx="1"/>
           </p:nvPr>
         </p:nvSpPr>
-        <p:spPr>
-          <a:xfrm>
-            <a:off x="886769" y="1719121"/>
-            <a:ext cx="5039932" cy="4763961"/>
-          </a:xfrm>
-        </p:spPr>
+        <p:spPr/>
         <p:txBody>
           <a:bodyPr vert="horz" lIns="91440" tIns="45720" rIns="91440" bIns="45720" rtlCol="0" anchor="t">
             <a:normAutofit/>
           </a:bodyPr>
           <a:lstStyle/>
           <a:p>
-            <a:pPr marL="0" indent="0">
-              <a:buNone/>
-            </a:pPr>
             <a:r>
-              <a:rPr lang="en-AU" sz="2300">
+              <a:rPr lang="en-AU" sz="2200">
                 <a:ea typeface="+mn-lt"/>
                 <a:cs typeface="+mn-lt"/>
               </a:rPr>
-              <a:t>Our risk management plan suits our STLC methodology. </a:t>
+              <a:t>Identified Risks:</a:t>
             </a:r>
-            <a:endParaRPr lang="en-AU" sz="2300"/>
+            <a:endParaRPr lang="en-AU"/>
           </a:p>
           <a:p>
             <a:r>
-              <a:rPr lang="en-AU" sz="2300">
+              <a:rPr lang="en-AU" sz="2200">
                 <a:ea typeface="+mn-lt"/>
                 <a:cs typeface="+mn-lt"/>
               </a:rPr>
-              <a:t>Risks are identified and during the </a:t>
+              <a:t>Long distances between team members: Possible delays due to travel logistics.</a:t>
             </a:r>
+            <a:endParaRPr lang="en-AU"/>
+          </a:p>
+          <a:p>
             <a:r>
-              <a:rPr lang="en-AU" sz="2300" b="1">
+              <a:rPr lang="en-AU" sz="2200">
                 <a:ea typeface="+mn-lt"/>
                 <a:cs typeface="+mn-lt"/>
               </a:rPr>
-              <a:t>requirements analysis </a:t>
+              <a:t>Unsuitable operating systems: Incorrect OS selection causes incompatibility.</a:t>
             </a:r>
+            <a:endParaRPr lang="en-AU"/>
+          </a:p>
+          <a:p>
             <a:r>
-              <a:rPr lang="en-AU" sz="2300">
+              <a:rPr lang="en-AU" sz="2200">
                 <a:ea typeface="+mn-lt"/>
                 <a:cs typeface="+mn-lt"/>
               </a:rPr>
-              <a:t>phase</a:t>
+              <a:t>Hardware issues: Failures in essential hardware that affect testing.</a:t>
             </a:r>
+            <a:endParaRPr lang="en-AU"/>
           </a:p>
           <a:p>
             <a:r>
-              <a:rPr lang="en-AU" sz="2300"/>
-              <a:t>Logged in the Risk Register</a:t>
+              <a:rPr lang="en-AU" sz="2200">
+                <a:ea typeface="+mn-lt"/>
+                <a:cs typeface="+mn-lt"/>
+              </a:rPr>
+              <a:t>Mitigation strategies include regular backups, early hardware testing, and software compatibility checks.</a:t>
             </a:r>
-          </a:p>
-          <a:p>
-            <a:r>
-              <a:rPr lang="en-AU" sz="2300">
-                <a:latin typeface="Tw Cen MT"/>
-              </a:rPr>
-              <a:t>Reviewed in weekly meetings</a:t>
-            </a:r>
-          </a:p>
-          <a:p>
-            <a:pPr>
-              <a:lnSpc>
-                <a:spcPts val="2475"/>
-              </a:lnSpc>
-              <a:spcBef>
-                <a:spcPts val="0"/>
-              </a:spcBef>
-              <a:buFont typeface="Arial,Sans-Serif" panose="020B0604020202020204" pitchFamily="34" charset="0"/>
-            </a:pPr>
-            <a:r>
-              <a:rPr lang="en-AU" sz="2300">
-                <a:latin typeface="TW Cen MT"/>
-              </a:rPr>
-              <a:t>Ensures the team stays flexible during analysis &amp; development phases</a:t>
-            </a:r>
-          </a:p>
-          <a:p>
-            <a:endParaRPr lang="en-AU" sz="2200">
-              <a:latin typeface="Tw Cen MT" panose="020B0602020104020603"/>
-            </a:endParaRPr>
-          </a:p>
-          <a:p>
-            <a:endParaRPr lang="en-AU" sz="2200">
-              <a:latin typeface="TW Cen MT"/>
-            </a:endParaRPr>
-          </a:p>
-        </p:txBody>
-      </p:sp>
-      <p:sp>
-        <p:nvSpPr>
-          <p:cNvPr id="7" name="TextBox 6">
-            <a:extLst>
-              <a:ext uri="{FF2B5EF4-FFF2-40B4-BE49-F238E27FC236}">
-                <a16:creationId xmlns:a16="http://schemas.microsoft.com/office/drawing/2014/main" id="{068AE963-8B99-1221-DDB0-2ADA1FDC6A36}"/>
-              </a:ext>
-            </a:extLst>
-          </p:cNvPr>
-          <p:cNvSpPr txBox="1"/>
-          <p:nvPr/>
-        </p:nvSpPr>
-        <p:spPr>
-          <a:xfrm>
-            <a:off x="6586333" y="2223664"/>
-            <a:ext cx="5488328" cy="3046988"/>
-          </a:xfrm>
-          <a:prstGeom prst="rect">
-            <a:avLst/>
-          </a:prstGeom>
-          <a:noFill/>
-        </p:spPr>
-        <p:txBody>
-          <a:bodyPr wrap="square">
-            <a:spAutoFit/>
-          </a:bodyPr>
-          <a:lstStyle/>
-          <a:p>
-            <a:pPr marL="0" indent="0">
-              <a:buNone/>
-            </a:pPr>
-            <a:r>
-              <a:rPr lang="en-AU" sz="2400">
-                <a:latin typeface="TW Cen MT"/>
-              </a:rPr>
-              <a:t>Key Project Risks:</a:t>
-            </a:r>
-          </a:p>
-          <a:p>
-            <a:pPr marL="0" indent="0">
-              <a:buNone/>
-            </a:pPr>
-            <a:endParaRPr lang="en-AU" sz="2400">
-              <a:latin typeface="TW Cen MT"/>
-            </a:endParaRPr>
-          </a:p>
-          <a:p>
-            <a:pPr marL="342900" indent="-342900">
-              <a:buAutoNum type="arabicPeriod"/>
-            </a:pPr>
-            <a:r>
-              <a:rPr lang="en-AU" sz="2400">
-                <a:latin typeface="TW Cen MT"/>
-              </a:rPr>
-              <a:t>Tool Compatibility Issues</a:t>
-            </a:r>
-          </a:p>
-          <a:p>
-            <a:r>
-              <a:rPr lang="en-NZ" sz="2400" b="0" i="0" u="none" strike="noStrike">
-                <a:effectLst/>
-              </a:rPr>
-              <a:t> D-ITG may not work on Fedora.</a:t>
-            </a:r>
-          </a:p>
-          <a:p>
-            <a:endParaRPr lang="en-NZ" sz="2400"/>
-          </a:p>
-          <a:p>
-            <a:r>
-              <a:rPr lang="en-NZ" sz="2400"/>
-              <a:t>2. Router Misconfiguration </a:t>
-            </a:r>
-            <a:br>
-              <a:rPr lang="en-NZ" sz="2400" b="1" i="0" u="none" strike="noStrike">
-                <a:solidFill>
-                  <a:srgbClr val="000000"/>
-                </a:solidFill>
-                <a:effectLst/>
-                <a:latin typeface="Arial" panose="020B0604020202020204" pitchFamily="34" charset="0"/>
-              </a:rPr>
-            </a:br>
-            <a:r>
-              <a:rPr lang="en-NZ" sz="2400" b="0" i="0" u="none" strike="noStrike">
-                <a:effectLst/>
-              </a:rPr>
-              <a:t>Incorrect Linux router setup could impact results. </a:t>
-            </a:r>
-            <a:endParaRPr lang="en-AU" sz="2400"/>
-          </a:p>
-        </p:txBody>
-      </p:sp>
-      <p:sp>
-        <p:nvSpPr>
-          <p:cNvPr id="4" name="Rectangle 1">
-            <a:extLst>
-              <a:ext uri="{FF2B5EF4-FFF2-40B4-BE49-F238E27FC236}">
-                <a16:creationId xmlns:a16="http://schemas.microsoft.com/office/drawing/2014/main" id="{34BCEAB7-9559-D0C8-4EE0-A2E53E851675}"/>
-              </a:ext>
-            </a:extLst>
-          </p:cNvPr>
-          <p:cNvSpPr>
-            <a:spLocks noChangeArrowheads="1"/>
-          </p:cNvSpPr>
-          <p:nvPr/>
-        </p:nvSpPr>
-        <p:spPr bwMode="auto">
-          <a:xfrm>
-            <a:off x="0" y="0"/>
-            <a:ext cx="12192000" cy="0"/>
-          </a:xfrm>
-          <a:prstGeom prst="rect">
-            <a:avLst/>
-          </a:prstGeom>
-          <a:noFill/>
-          <a:ln>
-            <a:noFill/>
-          </a:ln>
-          <a:effectLst/>
-          <a:extLst>
-            <a:ext uri="{909E8E84-426E-40DD-AFC4-6F175D3DCCD1}">
-              <a14:hiddenFill xmlns:a14="http://schemas.microsoft.com/office/drawing/2010/main">
-                <a:solidFill>
-                  <a:schemeClr val="accent1"/>
-                </a:solidFill>
-              </a14:hiddenFill>
-            </a:ext>
-            <a:ext uri="{91240B29-F687-4F45-9708-019B960494DF}">
-              <a14:hiddenLine xmlns:a14="http://schemas.microsoft.com/office/drawing/2010/main" w="9525">
-                <a:solidFill>
-                  <a:schemeClr val="tx1"/>
-                </a:solidFill>
-                <a:miter lim="800000"/>
-                <a:headEnd/>
-                <a:tailEnd/>
-              </a14:hiddenLine>
-            </a:ext>
-            <a:ext uri="{AF507438-7753-43E0-B8FC-AC1667EBCBE1}">
-              <a14:hiddenEffects xmlns:a14="http://schemas.microsoft.com/office/drawing/2010/main">
-                <a:effectLst>
-                  <a:outerShdw dist="35921" dir="2700000" algn="ctr" rotWithShape="0">
-                    <a:schemeClr val="bg2"/>
-                  </a:outerShdw>
-                </a:effectLst>
-              </a14:hiddenEffects>
-            </a:ext>
-          </a:extLst>
-        </p:spPr>
-        <p:txBody>
-          <a:bodyPr vert="horz" wrap="none" lIns="91440" tIns="45720" rIns="91440" bIns="45720" numCol="1" anchor="ctr" anchorCtr="0" compatLnSpc="1">
-            <a:prstTxWarp prst="textNoShape">
-              <a:avLst/>
-            </a:prstTxWarp>
-            <a:spAutoFit/>
-          </a:bodyPr>
-          <a:lstStyle/>
-          <a:p>
-            <a:pPr marL="0" marR="0" lvl="0" indent="0" algn="l" defTabSz="914400" rtl="0" eaLnBrk="0" fontAlgn="base" latinLnBrk="0" hangingPunct="0">
-              <a:lnSpc>
-                <a:spcPct val="100000"/>
-              </a:lnSpc>
-              <a:spcBef>
-                <a:spcPct val="0"/>
-              </a:spcBef>
-              <a:spcAft>
-                <a:spcPct val="0"/>
-              </a:spcAft>
-              <a:buClrTx/>
-              <a:buSzTx/>
-              <a:buFontTx/>
-              <a:buChar char="•"/>
-              <a:tabLst/>
-            </a:pPr>
-            <a:r>
-              <a:rPr kumimoji="0" lang="en-US" altLang="en-US" sz="1800" b="0" i="0" u="none" strike="noStrike" cap="none" normalizeH="0" baseline="0">
-                <a:ln>
-                  <a:noFill/>
-                </a:ln>
-                <a:solidFill>
-                  <a:schemeClr val="tx1"/>
-                </a:solidFill>
-                <a:effectLst/>
-                <a:latin typeface="Arial" panose="020B0604020202020204" pitchFamily="34" charset="0"/>
-              </a:rPr>
-              <a:t>Logged in the </a:t>
-            </a:r>
-            <a:r>
-              <a:rPr kumimoji="0" lang="en-US" altLang="en-US" sz="1800" b="1" i="0" u="none" strike="noStrike" cap="none" normalizeH="0" baseline="0">
-                <a:ln>
-                  <a:noFill/>
-                </a:ln>
-                <a:solidFill>
-                  <a:schemeClr val="tx1"/>
-                </a:solidFill>
-                <a:effectLst/>
-                <a:latin typeface="Arial" panose="020B0604020202020204" pitchFamily="34" charset="0"/>
-              </a:rPr>
-              <a:t>Risk Register</a:t>
-            </a:r>
-            <a:r>
-              <a:rPr kumimoji="0" lang="en-US" altLang="en-US" sz="1800" b="0" i="0" u="none" strike="noStrike" cap="none" normalizeH="0" baseline="0">
-                <a:ln>
-                  <a:noFill/>
-                </a:ln>
-                <a:solidFill>
-                  <a:schemeClr val="tx1"/>
-                </a:solidFill>
-                <a:effectLst/>
-                <a:latin typeface="Arial" panose="020B0604020202020204" pitchFamily="34" charset="0"/>
-              </a:rPr>
-              <a:t>, with mitigation and owners assigned</a:t>
-            </a:r>
-          </a:p>
-          <a:p>
-            <a:pPr marL="0" marR="0" lvl="0" indent="0" algn="l" defTabSz="914400" rtl="0" eaLnBrk="0" fontAlgn="base" latinLnBrk="0" hangingPunct="0">
-              <a:lnSpc>
-                <a:spcPct val="100000"/>
-              </a:lnSpc>
-              <a:spcBef>
-                <a:spcPct val="0"/>
-              </a:spcBef>
-              <a:spcAft>
-                <a:spcPct val="0"/>
-              </a:spcAft>
-              <a:buClrTx/>
-              <a:buSzTx/>
-              <a:buFontTx/>
-              <a:buChar char="•"/>
-              <a:tabLst/>
-            </a:pPr>
-            <a:endParaRPr kumimoji="0" lang="en-US" altLang="en-US" sz="1800" b="0" i="0" u="none" strike="noStrike" cap="none" normalizeH="0" baseline="0">
-              <a:ln>
-                <a:noFill/>
-              </a:ln>
-              <a:solidFill>
-                <a:schemeClr val="tx1"/>
-              </a:solidFill>
-              <a:effectLst/>
-              <a:latin typeface="Arial" panose="020B0604020202020204" pitchFamily="34" charset="0"/>
-            </a:endParaRPr>
+            <a:endParaRPr lang="en-AU"/>
           </a:p>
         </p:txBody>
       </p:sp>
@@ -24743,6 +17551,139 @@
     <p:extLst>
       <p:ext uri="{BB962C8B-B14F-4D97-AF65-F5344CB8AC3E}">
         <p14:creationId xmlns:p14="http://schemas.microsoft.com/office/powerpoint/2010/main" val="4156481656"/>
+      </p:ext>
+    </p:extLst>
+  </p:cSld>
+  <p:clrMapOvr>
+    <a:masterClrMapping/>
+  </p:clrMapOvr>
+</p:sld>
+</file>
+
+<file path=ppt/slides/slide9.xml><?xml version="1.0" encoding="utf-8"?>
+<p:sld xmlns:a="http://schemas.openxmlformats.org/drawingml/2006/main" xmlns:r="http://schemas.openxmlformats.org/officeDocument/2006/relationships" xmlns:p="http://schemas.openxmlformats.org/presentationml/2006/main">
+  <p:cSld>
+    <p:spTree>
+      <p:nvGrpSpPr>
+        <p:cNvPr id="1" name=""/>
+        <p:cNvGrpSpPr/>
+        <p:nvPr/>
+      </p:nvGrpSpPr>
+      <p:grpSpPr>
+        <a:xfrm>
+          <a:off x="0" y="0"/>
+          <a:ext cx="0" cy="0"/>
+          <a:chOff x="0" y="0"/>
+          <a:chExt cx="0" cy="0"/>
+        </a:xfrm>
+      </p:grpSpPr>
+      <p:sp>
+        <p:nvSpPr>
+          <p:cNvPr id="2" name="Title 1">
+            <a:extLst>
+              <a:ext uri="{FF2B5EF4-FFF2-40B4-BE49-F238E27FC236}">
+                <a16:creationId xmlns:a16="http://schemas.microsoft.com/office/drawing/2014/main" id="{6C5915AA-9674-2E81-79D0-0705C29E9ACB}"/>
+              </a:ext>
+            </a:extLst>
+          </p:cNvPr>
+          <p:cNvSpPr>
+            <a:spLocks noGrp="1"/>
+          </p:cNvSpPr>
+          <p:nvPr>
+            <p:ph type="title"/>
+          </p:nvPr>
+        </p:nvSpPr>
+        <p:spPr/>
+        <p:txBody>
+          <a:bodyPr/>
+          <a:lstStyle/>
+          <a:p>
+            <a:r>
+              <a:rPr lang="en-NZ"/>
+              <a:t>Issue register</a:t>
+            </a:r>
+            <a:endParaRPr lang="en-AU"/>
+          </a:p>
+        </p:txBody>
+      </p:sp>
+      <p:sp>
+        <p:nvSpPr>
+          <p:cNvPr id="3" name="Content Placeholder 2">
+            <a:extLst>
+              <a:ext uri="{FF2B5EF4-FFF2-40B4-BE49-F238E27FC236}">
+                <a16:creationId xmlns:a16="http://schemas.microsoft.com/office/drawing/2014/main" id="{18FB8679-FCDA-7DBB-4992-932CFFAB141C}"/>
+              </a:ext>
+            </a:extLst>
+          </p:cNvPr>
+          <p:cNvSpPr>
+            <a:spLocks noGrp="1"/>
+          </p:cNvSpPr>
+          <p:nvPr>
+            <p:ph idx="1"/>
+          </p:nvPr>
+        </p:nvSpPr>
+        <p:spPr/>
+        <p:txBody>
+          <a:bodyPr vert="horz" lIns="91440" tIns="45720" rIns="91440" bIns="45720" rtlCol="0" anchor="t">
+            <a:normAutofit/>
+          </a:bodyPr>
+          <a:lstStyle/>
+          <a:p>
+            <a:r>
+              <a:rPr lang="en-AU" sz="2200">
+                <a:ea typeface="+mn-lt"/>
+                <a:cs typeface="+mn-lt"/>
+              </a:rPr>
+              <a:t>Issue Log:</a:t>
+            </a:r>
+            <a:endParaRPr lang="en-AU"/>
+          </a:p>
+          <a:p>
+            <a:r>
+              <a:rPr lang="en-AU" sz="2200">
+                <a:ea typeface="+mn-lt"/>
+                <a:cs typeface="+mn-lt"/>
+              </a:rPr>
+              <a:t>Delay in meeting with customer and mentor resulted in project delays.</a:t>
+            </a:r>
+            <a:endParaRPr lang="en-AU"/>
+          </a:p>
+          <a:p>
+            <a:r>
+              <a:rPr lang="en-AU" sz="2200">
+                <a:ea typeface="+mn-lt"/>
+                <a:cs typeface="+mn-lt"/>
+              </a:rPr>
+              <a:t>D-ITG Compatibility Issues: D-ITG cannot be compiled from source on Fedora.</a:t>
+            </a:r>
+            <a:endParaRPr lang="en-AU"/>
+          </a:p>
+          <a:p>
+            <a:r>
+              <a:rPr lang="en-AU" sz="2200">
+                <a:ea typeface="+mn-lt"/>
+                <a:cs typeface="+mn-lt"/>
+              </a:rPr>
+              <a:t>Cancelled meeting due to transportation concerns, affecting team alignment.</a:t>
+            </a:r>
+            <a:endParaRPr lang="en-AU"/>
+          </a:p>
+          <a:p>
+            <a:r>
+              <a:rPr lang="en-AU" sz="2200">
+                <a:ea typeface="+mn-lt"/>
+                <a:cs typeface="+mn-lt"/>
+              </a:rPr>
+              <a:t>Current Status: Issues are being actively handled by the team and the customer.</a:t>
+            </a:r>
+            <a:endParaRPr lang="en-AU"/>
+          </a:p>
+        </p:txBody>
+      </p:sp>
+    </p:spTree>
+    <p:extLst>
+      <p:ext uri="{BB962C8B-B14F-4D97-AF65-F5344CB8AC3E}">
+        <p14:creationId xmlns:p14="http://schemas.microsoft.com/office/powerpoint/2010/main" val="2117413443"/>
       </p:ext>
     </p:extLst>
   </p:cSld>
